--- a/ppts/CHAPTER 3 RAG Part II_Chatting with Your Data.pptx
+++ b/ppts/CHAPTER 3 RAG Part II_Chatting with Your Data.pptx
@@ -284,7 +284,7 @@
                 <a:latin typeface="맑은 고딕" panose="020B0503020000020004" pitchFamily="50" charset="-127"/>
                 <a:ea typeface="맑은 고딕" panose="020B0503020000020004" pitchFamily="50" charset="-127"/>
               </a:rPr>
-              <a:t>2026-07-20</a:t>
+              <a:t>2026-08-20</a:t>
             </a:fld>
             <a:endParaRPr lang="ko-KR" altLang="en-US">
               <a:latin typeface="맑은 고딕" panose="020B0503020000020004" pitchFamily="50" charset="-127"/>
@@ -470,7 +470,7 @@
           <a:p>
             <a:fld id="{43E1C3DD-4A19-441D-907C-380838DB51C4}" type="datetime1">
               <a:rPr lang="ko-KR" altLang="en-US" noProof="0" smtClean="0"/>
-              <a:t>2026-07-20</a:t>
+              <a:t>2026-08-20</a:t>
             </a:fld>
             <a:endParaRPr lang="ko-KR" altLang="en-US" noProof="0"/>
           </a:p>
@@ -1318,7 +1318,7 @@
           <a:p>
             <a:fld id="{990475B5-67CA-4281-BDCA-DA943C3C8EB3}" type="datetime1">
               <a:rPr lang="ko-KR" altLang="en-US" noProof="0" smtClean="0"/>
-              <a:t>2026-07-20</a:t>
+              <a:t>2026-08-20</a:t>
             </a:fld>
             <a:endParaRPr lang="ko-KR" altLang="en-US" noProof="0"/>
           </a:p>
@@ -1972,7 +1972,7 @@
           <a:p>
             <a:fld id="{48A87A34-81AB-432B-8DAE-1953F412C126}" type="datetimeFigureOut">
               <a:rPr lang="en-US" smtClean="0"/>
-              <a:t>7/20/2026</a:t>
+              <a:t>8/20/2026</a:t>
             </a:fld>
             <a:endParaRPr lang="en-US" dirty="0"/>
           </a:p>
@@ -2268,7 +2268,7 @@
           <a:p>
             <a:fld id="{C655C81E-72E7-4D05-94B5-F45B321A525D}" type="datetime1">
               <a:rPr lang="ko-KR" altLang="en-US" noProof="0" smtClean="0"/>
-              <a:t>2026-07-20</a:t>
+              <a:t>2026-08-20</a:t>
             </a:fld>
             <a:endParaRPr lang="ko-KR" altLang="en-US" noProof="0" dirty="0">
               <a:latin typeface="맑은 고딕" panose="020B0503020000020004" pitchFamily="50" charset="-127"/>
@@ -3086,41 +3086,6 @@
       </p:grpSpPr>
       <p:sp>
         <p:nvSpPr>
-          <p:cNvPr id="4" name="슬라이드 번호 개체 틀 3">
-            <a:extLst>
-              <a:ext uri="{FF2B5EF4-FFF2-40B4-BE49-F238E27FC236}">
-                <a16:creationId xmlns:a16="http://schemas.microsoft.com/office/drawing/2014/main" id="{78188EE8-FE27-FA83-E7F6-84D649D4DECD}"/>
-              </a:ext>
-            </a:extLst>
-          </p:cNvPr>
-          <p:cNvSpPr>
-            <a:spLocks noGrp="1"/>
-          </p:cNvSpPr>
-          <p:nvPr>
-            <p:ph type="sldNum" sz="quarter" idx="12"/>
-          </p:nvPr>
-        </p:nvSpPr>
-        <p:spPr>
-          <a:xfrm>
-            <a:off x="10514011" y="6036261"/>
-            <a:ext cx="753545" cy="365125"/>
-          </a:xfrm>
-        </p:spPr>
-        <p:txBody>
-          <a:bodyPr/>
-          <a:lstStyle/>
-          <a:p>
-            <a:fld id="{D57F1E4F-1CFF-5643-939E-217C01CDF565}" type="slidenum">
-              <a:rPr lang="en-US" smtClean="0"/>
-              <a:pPr/>
-              <a:t>10</a:t>
-            </a:fld>
-            <a:endParaRPr lang="en-US" dirty="0"/>
-          </a:p>
-        </p:txBody>
-      </p:sp>
-      <p:sp>
-        <p:nvSpPr>
           <p:cNvPr id="3" name="제목 1">
             <a:extLst>
               <a:ext uri="{FF2B5EF4-FFF2-40B4-BE49-F238E27FC236}">
@@ -3611,6 +3576,139 @@
               <a:latin typeface="D2Coding" panose="020B0609020101020101" pitchFamily="49" charset="-127"/>
               <a:ea typeface="D2Coding" panose="020B0609020101020101" pitchFamily="49" charset="-127"/>
             </a:endParaRPr>
+          </a:p>
+        </p:txBody>
+      </p:sp>
+      <p:sp>
+        <p:nvSpPr>
+          <p:cNvPr id="2" name="슬라이드 번호 개체 틀 3">
+            <a:extLst>
+              <a:ext uri="{FF2B5EF4-FFF2-40B4-BE49-F238E27FC236}">
+                <a16:creationId xmlns:a16="http://schemas.microsoft.com/office/drawing/2014/main" id="{A1EC5CCE-6718-089C-6D4B-556CD22B4312}"/>
+              </a:ext>
+            </a:extLst>
+          </p:cNvPr>
+          <p:cNvSpPr txBox="1">
+            <a:spLocks/>
+          </p:cNvSpPr>
+          <p:nvPr/>
+        </p:nvSpPr>
+        <p:spPr>
+          <a:xfrm>
+            <a:off x="11162230" y="299420"/>
+            <a:ext cx="753545" cy="365125"/>
+          </a:xfrm>
+          <a:prstGeom prst="rect">
+            <a:avLst/>
+          </a:prstGeom>
+        </p:spPr>
+        <p:txBody>
+          <a:bodyPr vert="horz" lIns="91440" tIns="45720" rIns="91440" bIns="45720" rtlCol="0" anchor="ctr"/>
+          <a:lstStyle>
+            <a:defPPr rtl="0">
+              <a:defRPr lang="ko-KR"/>
+            </a:defPPr>
+            <a:lvl1pPr marL="0" algn="r" defTabSz="914400" rtl="0" eaLnBrk="1" latinLnBrk="0" hangingPunct="1">
+              <a:defRPr sz="1200" kern="1200" baseline="0">
+                <a:solidFill>
+                  <a:schemeClr val="tx1">
+                    <a:lumMod val="65000"/>
+                    <a:lumOff val="35000"/>
+                  </a:schemeClr>
+                </a:solidFill>
+                <a:latin typeface="맑은 고딕" panose="020B0503020000020004" pitchFamily="50" charset="-127"/>
+                <a:ea typeface="맑은 고딕" panose="020B0503020000020004" pitchFamily="50" charset="-127"/>
+                <a:cs typeface="+mn-cs"/>
+              </a:defRPr>
+            </a:lvl1pPr>
+            <a:lvl2pPr marL="457200" algn="l" defTabSz="914400" rtl="0" eaLnBrk="1" latinLnBrk="0" hangingPunct="1">
+              <a:defRPr sz="1800" kern="1200">
+                <a:solidFill>
+                  <a:schemeClr val="tx1"/>
+                </a:solidFill>
+                <a:latin typeface="+mn-lt"/>
+                <a:ea typeface="+mn-ea"/>
+                <a:cs typeface="+mn-cs"/>
+              </a:defRPr>
+            </a:lvl2pPr>
+            <a:lvl3pPr marL="914400" algn="l" defTabSz="914400" rtl="0" eaLnBrk="1" latinLnBrk="0" hangingPunct="1">
+              <a:defRPr sz="1800" kern="1200">
+                <a:solidFill>
+                  <a:schemeClr val="tx1"/>
+                </a:solidFill>
+                <a:latin typeface="+mn-lt"/>
+                <a:ea typeface="+mn-ea"/>
+                <a:cs typeface="+mn-cs"/>
+              </a:defRPr>
+            </a:lvl3pPr>
+            <a:lvl4pPr marL="1371600" algn="l" defTabSz="914400" rtl="0" eaLnBrk="1" latinLnBrk="0" hangingPunct="1">
+              <a:defRPr sz="1800" kern="1200">
+                <a:solidFill>
+                  <a:schemeClr val="tx1"/>
+                </a:solidFill>
+                <a:latin typeface="+mn-lt"/>
+                <a:ea typeface="+mn-ea"/>
+                <a:cs typeface="+mn-cs"/>
+              </a:defRPr>
+            </a:lvl4pPr>
+            <a:lvl5pPr marL="1828800" algn="l" defTabSz="914400" rtl="0" eaLnBrk="1" latinLnBrk="0" hangingPunct="1">
+              <a:defRPr sz="1800" kern="1200">
+                <a:solidFill>
+                  <a:schemeClr val="tx1"/>
+                </a:solidFill>
+                <a:latin typeface="+mn-lt"/>
+                <a:ea typeface="+mn-ea"/>
+                <a:cs typeface="+mn-cs"/>
+              </a:defRPr>
+            </a:lvl5pPr>
+            <a:lvl6pPr marL="2286000" algn="l" defTabSz="914400" rtl="0" eaLnBrk="1" latinLnBrk="0" hangingPunct="1">
+              <a:defRPr sz="1800" kern="1200">
+                <a:solidFill>
+                  <a:schemeClr val="tx1"/>
+                </a:solidFill>
+                <a:latin typeface="+mn-lt"/>
+                <a:ea typeface="+mn-ea"/>
+                <a:cs typeface="+mn-cs"/>
+              </a:defRPr>
+            </a:lvl6pPr>
+            <a:lvl7pPr marL="2743200" algn="l" defTabSz="914400" rtl="0" eaLnBrk="1" latinLnBrk="0" hangingPunct="1">
+              <a:defRPr sz="1800" kern="1200">
+                <a:solidFill>
+                  <a:schemeClr val="tx1"/>
+                </a:solidFill>
+                <a:latin typeface="+mn-lt"/>
+                <a:ea typeface="+mn-ea"/>
+                <a:cs typeface="+mn-cs"/>
+              </a:defRPr>
+            </a:lvl7pPr>
+            <a:lvl8pPr marL="3200400" algn="l" defTabSz="914400" rtl="0" eaLnBrk="1" latinLnBrk="0" hangingPunct="1">
+              <a:defRPr sz="1800" kern="1200">
+                <a:solidFill>
+                  <a:schemeClr val="tx1"/>
+                </a:solidFill>
+                <a:latin typeface="+mn-lt"/>
+                <a:ea typeface="+mn-ea"/>
+                <a:cs typeface="+mn-cs"/>
+              </a:defRPr>
+            </a:lvl8pPr>
+            <a:lvl9pPr marL="3657600" algn="l" defTabSz="914400" rtl="0" eaLnBrk="1" latinLnBrk="0" hangingPunct="1">
+              <a:defRPr sz="1800" kern="1200">
+                <a:solidFill>
+                  <a:schemeClr val="tx1"/>
+                </a:solidFill>
+                <a:latin typeface="+mn-lt"/>
+                <a:ea typeface="+mn-ea"/>
+                <a:cs typeface="+mn-cs"/>
+              </a:defRPr>
+            </a:lvl9pPr>
+          </a:lstStyle>
+          <a:p>
+            <a:fld id="{D57F1E4F-1CFF-5643-939E-217C01CDF565}" type="slidenum">
+              <a:rPr lang="en-US" b="1" smtClean="0"/>
+              <a:pPr/>
+              <a:t>10</a:t>
+            </a:fld>
+            <a:endParaRPr lang="en-US" b="1" dirty="0"/>
           </a:p>
         </p:txBody>
       </p:sp>
@@ -3652,41 +3750,6 @@
       </p:grpSpPr>
       <p:sp>
         <p:nvSpPr>
-          <p:cNvPr id="4" name="슬라이드 번호 개체 틀 3">
-            <a:extLst>
-              <a:ext uri="{FF2B5EF4-FFF2-40B4-BE49-F238E27FC236}">
-                <a16:creationId xmlns:a16="http://schemas.microsoft.com/office/drawing/2014/main" id="{BE06B752-0047-4A9A-D6ED-EE1C0D467FE9}"/>
-              </a:ext>
-            </a:extLst>
-          </p:cNvPr>
-          <p:cNvSpPr>
-            <a:spLocks noGrp="1"/>
-          </p:cNvSpPr>
-          <p:nvPr>
-            <p:ph type="sldNum" sz="quarter" idx="12"/>
-          </p:nvPr>
-        </p:nvSpPr>
-        <p:spPr>
-          <a:xfrm>
-            <a:off x="10514011" y="6036261"/>
-            <a:ext cx="753545" cy="365125"/>
-          </a:xfrm>
-        </p:spPr>
-        <p:txBody>
-          <a:bodyPr/>
-          <a:lstStyle/>
-          <a:p>
-            <a:fld id="{D57F1E4F-1CFF-5643-939E-217C01CDF565}" type="slidenum">
-              <a:rPr lang="en-US" smtClean="0"/>
-              <a:pPr/>
-              <a:t>11</a:t>
-            </a:fld>
-            <a:endParaRPr lang="en-US" dirty="0"/>
-          </a:p>
-        </p:txBody>
-      </p:sp>
-      <p:sp>
-        <p:nvSpPr>
           <p:cNvPr id="3" name="제목 1">
             <a:extLst>
               <a:ext uri="{FF2B5EF4-FFF2-40B4-BE49-F238E27FC236}">
@@ -3790,7 +3853,7 @@
           <a:p>
             <a:pPr algn="r"/>
             <a:r>
-              <a:rPr lang="en-US" altLang="ko-KR" dirty="0">
+              <a:rPr lang="en-US" altLang="ko-KR" b="1" dirty="0">
                 <a:latin typeface="D2Coding" panose="020B0609020101020101" pitchFamily="49" charset="-127"/>
                 <a:ea typeface="D2Coding" panose="020B0609020101020101" pitchFamily="49" charset="-127"/>
               </a:rPr>
@@ -3941,6 +4004,139 @@
           </a:p>
         </p:txBody>
       </p:sp>
+      <p:sp>
+        <p:nvSpPr>
+          <p:cNvPr id="2" name="슬라이드 번호 개체 틀 3">
+            <a:extLst>
+              <a:ext uri="{FF2B5EF4-FFF2-40B4-BE49-F238E27FC236}">
+                <a16:creationId xmlns:a16="http://schemas.microsoft.com/office/drawing/2014/main" id="{0472D1FD-DFBE-9336-E125-D03F9C3993E9}"/>
+              </a:ext>
+            </a:extLst>
+          </p:cNvPr>
+          <p:cNvSpPr txBox="1">
+            <a:spLocks/>
+          </p:cNvSpPr>
+          <p:nvPr/>
+        </p:nvSpPr>
+        <p:spPr>
+          <a:xfrm>
+            <a:off x="11162230" y="299420"/>
+            <a:ext cx="753545" cy="365125"/>
+          </a:xfrm>
+          <a:prstGeom prst="rect">
+            <a:avLst/>
+          </a:prstGeom>
+        </p:spPr>
+        <p:txBody>
+          <a:bodyPr vert="horz" lIns="91440" tIns="45720" rIns="91440" bIns="45720" rtlCol="0" anchor="ctr"/>
+          <a:lstStyle>
+            <a:defPPr rtl="0">
+              <a:defRPr lang="ko-KR"/>
+            </a:defPPr>
+            <a:lvl1pPr marL="0" algn="r" defTabSz="914400" rtl="0" eaLnBrk="1" latinLnBrk="0" hangingPunct="1">
+              <a:defRPr sz="1200" kern="1200" baseline="0">
+                <a:solidFill>
+                  <a:schemeClr val="tx1">
+                    <a:lumMod val="65000"/>
+                    <a:lumOff val="35000"/>
+                  </a:schemeClr>
+                </a:solidFill>
+                <a:latin typeface="맑은 고딕" panose="020B0503020000020004" pitchFamily="50" charset="-127"/>
+                <a:ea typeface="맑은 고딕" panose="020B0503020000020004" pitchFamily="50" charset="-127"/>
+                <a:cs typeface="+mn-cs"/>
+              </a:defRPr>
+            </a:lvl1pPr>
+            <a:lvl2pPr marL="457200" algn="l" defTabSz="914400" rtl="0" eaLnBrk="1" latinLnBrk="0" hangingPunct="1">
+              <a:defRPr sz="1800" kern="1200">
+                <a:solidFill>
+                  <a:schemeClr val="tx1"/>
+                </a:solidFill>
+                <a:latin typeface="+mn-lt"/>
+                <a:ea typeface="+mn-ea"/>
+                <a:cs typeface="+mn-cs"/>
+              </a:defRPr>
+            </a:lvl2pPr>
+            <a:lvl3pPr marL="914400" algn="l" defTabSz="914400" rtl="0" eaLnBrk="1" latinLnBrk="0" hangingPunct="1">
+              <a:defRPr sz="1800" kern="1200">
+                <a:solidFill>
+                  <a:schemeClr val="tx1"/>
+                </a:solidFill>
+                <a:latin typeface="+mn-lt"/>
+                <a:ea typeface="+mn-ea"/>
+                <a:cs typeface="+mn-cs"/>
+              </a:defRPr>
+            </a:lvl3pPr>
+            <a:lvl4pPr marL="1371600" algn="l" defTabSz="914400" rtl="0" eaLnBrk="1" latinLnBrk="0" hangingPunct="1">
+              <a:defRPr sz="1800" kern="1200">
+                <a:solidFill>
+                  <a:schemeClr val="tx1"/>
+                </a:solidFill>
+                <a:latin typeface="+mn-lt"/>
+                <a:ea typeface="+mn-ea"/>
+                <a:cs typeface="+mn-cs"/>
+              </a:defRPr>
+            </a:lvl4pPr>
+            <a:lvl5pPr marL="1828800" algn="l" defTabSz="914400" rtl="0" eaLnBrk="1" latinLnBrk="0" hangingPunct="1">
+              <a:defRPr sz="1800" kern="1200">
+                <a:solidFill>
+                  <a:schemeClr val="tx1"/>
+                </a:solidFill>
+                <a:latin typeface="+mn-lt"/>
+                <a:ea typeface="+mn-ea"/>
+                <a:cs typeface="+mn-cs"/>
+              </a:defRPr>
+            </a:lvl5pPr>
+            <a:lvl6pPr marL="2286000" algn="l" defTabSz="914400" rtl="0" eaLnBrk="1" latinLnBrk="0" hangingPunct="1">
+              <a:defRPr sz="1800" kern="1200">
+                <a:solidFill>
+                  <a:schemeClr val="tx1"/>
+                </a:solidFill>
+                <a:latin typeface="+mn-lt"/>
+                <a:ea typeface="+mn-ea"/>
+                <a:cs typeface="+mn-cs"/>
+              </a:defRPr>
+            </a:lvl6pPr>
+            <a:lvl7pPr marL="2743200" algn="l" defTabSz="914400" rtl="0" eaLnBrk="1" latinLnBrk="0" hangingPunct="1">
+              <a:defRPr sz="1800" kern="1200">
+                <a:solidFill>
+                  <a:schemeClr val="tx1"/>
+                </a:solidFill>
+                <a:latin typeface="+mn-lt"/>
+                <a:ea typeface="+mn-ea"/>
+                <a:cs typeface="+mn-cs"/>
+              </a:defRPr>
+            </a:lvl7pPr>
+            <a:lvl8pPr marL="3200400" algn="l" defTabSz="914400" rtl="0" eaLnBrk="1" latinLnBrk="0" hangingPunct="1">
+              <a:defRPr sz="1800" kern="1200">
+                <a:solidFill>
+                  <a:schemeClr val="tx1"/>
+                </a:solidFill>
+                <a:latin typeface="+mn-lt"/>
+                <a:ea typeface="+mn-ea"/>
+                <a:cs typeface="+mn-cs"/>
+              </a:defRPr>
+            </a:lvl8pPr>
+            <a:lvl9pPr marL="3657600" algn="l" defTabSz="914400" rtl="0" eaLnBrk="1" latinLnBrk="0" hangingPunct="1">
+              <a:defRPr sz="1800" kern="1200">
+                <a:solidFill>
+                  <a:schemeClr val="tx1"/>
+                </a:solidFill>
+                <a:latin typeface="+mn-lt"/>
+                <a:ea typeface="+mn-ea"/>
+                <a:cs typeface="+mn-cs"/>
+              </a:defRPr>
+            </a:lvl9pPr>
+          </a:lstStyle>
+          <a:p>
+            <a:fld id="{D57F1E4F-1CFF-5643-939E-217C01CDF565}" type="slidenum">
+              <a:rPr lang="en-US" b="1" smtClean="0"/>
+              <a:pPr/>
+              <a:t>11</a:t>
+            </a:fld>
+            <a:endParaRPr lang="en-US" b="1" dirty="0"/>
+          </a:p>
+        </p:txBody>
+      </p:sp>
     </p:spTree>
     <p:extLst>
       <p:ext uri="{BB962C8B-B14F-4D97-AF65-F5344CB8AC3E}">
@@ -3979,41 +4175,6 @@
       </p:grpSpPr>
       <p:sp>
         <p:nvSpPr>
-          <p:cNvPr id="4" name="슬라이드 번호 개체 틀 3">
-            <a:extLst>
-              <a:ext uri="{FF2B5EF4-FFF2-40B4-BE49-F238E27FC236}">
-                <a16:creationId xmlns:a16="http://schemas.microsoft.com/office/drawing/2014/main" id="{1FEF8195-F95A-ED5B-2D6B-59CAE325F203}"/>
-              </a:ext>
-            </a:extLst>
-          </p:cNvPr>
-          <p:cNvSpPr>
-            <a:spLocks noGrp="1"/>
-          </p:cNvSpPr>
-          <p:nvPr>
-            <p:ph type="sldNum" sz="quarter" idx="12"/>
-          </p:nvPr>
-        </p:nvSpPr>
-        <p:spPr>
-          <a:xfrm>
-            <a:off x="10514011" y="6036261"/>
-            <a:ext cx="753545" cy="365125"/>
-          </a:xfrm>
-        </p:spPr>
-        <p:txBody>
-          <a:bodyPr/>
-          <a:lstStyle/>
-          <a:p>
-            <a:fld id="{D57F1E4F-1CFF-5643-939E-217C01CDF565}" type="slidenum">
-              <a:rPr lang="en-US" smtClean="0"/>
-              <a:pPr/>
-              <a:t>12</a:t>
-            </a:fld>
-            <a:endParaRPr lang="en-US" dirty="0"/>
-          </a:p>
-        </p:txBody>
-      </p:sp>
-      <p:sp>
-        <p:nvSpPr>
           <p:cNvPr id="3" name="제목 1">
             <a:extLst>
               <a:ext uri="{FF2B5EF4-FFF2-40B4-BE49-F238E27FC236}">
@@ -4117,7 +4278,7 @@
           <a:p>
             <a:pPr algn="r"/>
             <a:r>
-              <a:rPr lang="en-US" altLang="ko-KR" dirty="0">
+              <a:rPr lang="en-US" altLang="ko-KR" b="1" dirty="0">
                 <a:latin typeface="D2Coding" panose="020B0609020101020101" pitchFamily="49" charset="-127"/>
                 <a:ea typeface="D2Coding" panose="020B0609020101020101" pitchFamily="49" charset="-127"/>
               </a:rPr>
@@ -4363,6 +4524,139 @@
           </a:p>
         </p:txBody>
       </p:sp>
+      <p:sp>
+        <p:nvSpPr>
+          <p:cNvPr id="6" name="슬라이드 번호 개체 틀 3">
+            <a:extLst>
+              <a:ext uri="{FF2B5EF4-FFF2-40B4-BE49-F238E27FC236}">
+                <a16:creationId xmlns:a16="http://schemas.microsoft.com/office/drawing/2014/main" id="{D12654F3-7720-D3F3-00BB-A6484039E7E8}"/>
+              </a:ext>
+            </a:extLst>
+          </p:cNvPr>
+          <p:cNvSpPr txBox="1">
+            <a:spLocks/>
+          </p:cNvSpPr>
+          <p:nvPr/>
+        </p:nvSpPr>
+        <p:spPr>
+          <a:xfrm>
+            <a:off x="11162230" y="299420"/>
+            <a:ext cx="753545" cy="365125"/>
+          </a:xfrm>
+          <a:prstGeom prst="rect">
+            <a:avLst/>
+          </a:prstGeom>
+        </p:spPr>
+        <p:txBody>
+          <a:bodyPr vert="horz" lIns="91440" tIns="45720" rIns="91440" bIns="45720" rtlCol="0" anchor="ctr"/>
+          <a:lstStyle>
+            <a:defPPr rtl="0">
+              <a:defRPr lang="ko-KR"/>
+            </a:defPPr>
+            <a:lvl1pPr marL="0" algn="r" defTabSz="914400" rtl="0" eaLnBrk="1" latinLnBrk="0" hangingPunct="1">
+              <a:defRPr sz="1200" kern="1200" baseline="0">
+                <a:solidFill>
+                  <a:schemeClr val="tx1">
+                    <a:lumMod val="65000"/>
+                    <a:lumOff val="35000"/>
+                  </a:schemeClr>
+                </a:solidFill>
+                <a:latin typeface="맑은 고딕" panose="020B0503020000020004" pitchFamily="50" charset="-127"/>
+                <a:ea typeface="맑은 고딕" panose="020B0503020000020004" pitchFamily="50" charset="-127"/>
+                <a:cs typeface="+mn-cs"/>
+              </a:defRPr>
+            </a:lvl1pPr>
+            <a:lvl2pPr marL="457200" algn="l" defTabSz="914400" rtl="0" eaLnBrk="1" latinLnBrk="0" hangingPunct="1">
+              <a:defRPr sz="1800" kern="1200">
+                <a:solidFill>
+                  <a:schemeClr val="tx1"/>
+                </a:solidFill>
+                <a:latin typeface="+mn-lt"/>
+                <a:ea typeface="+mn-ea"/>
+                <a:cs typeface="+mn-cs"/>
+              </a:defRPr>
+            </a:lvl2pPr>
+            <a:lvl3pPr marL="914400" algn="l" defTabSz="914400" rtl="0" eaLnBrk="1" latinLnBrk="0" hangingPunct="1">
+              <a:defRPr sz="1800" kern="1200">
+                <a:solidFill>
+                  <a:schemeClr val="tx1"/>
+                </a:solidFill>
+                <a:latin typeface="+mn-lt"/>
+                <a:ea typeface="+mn-ea"/>
+                <a:cs typeface="+mn-cs"/>
+              </a:defRPr>
+            </a:lvl3pPr>
+            <a:lvl4pPr marL="1371600" algn="l" defTabSz="914400" rtl="0" eaLnBrk="1" latinLnBrk="0" hangingPunct="1">
+              <a:defRPr sz="1800" kern="1200">
+                <a:solidFill>
+                  <a:schemeClr val="tx1"/>
+                </a:solidFill>
+                <a:latin typeface="+mn-lt"/>
+                <a:ea typeface="+mn-ea"/>
+                <a:cs typeface="+mn-cs"/>
+              </a:defRPr>
+            </a:lvl4pPr>
+            <a:lvl5pPr marL="1828800" algn="l" defTabSz="914400" rtl="0" eaLnBrk="1" latinLnBrk="0" hangingPunct="1">
+              <a:defRPr sz="1800" kern="1200">
+                <a:solidFill>
+                  <a:schemeClr val="tx1"/>
+                </a:solidFill>
+                <a:latin typeface="+mn-lt"/>
+                <a:ea typeface="+mn-ea"/>
+                <a:cs typeface="+mn-cs"/>
+              </a:defRPr>
+            </a:lvl5pPr>
+            <a:lvl6pPr marL="2286000" algn="l" defTabSz="914400" rtl="0" eaLnBrk="1" latinLnBrk="0" hangingPunct="1">
+              <a:defRPr sz="1800" kern="1200">
+                <a:solidFill>
+                  <a:schemeClr val="tx1"/>
+                </a:solidFill>
+                <a:latin typeface="+mn-lt"/>
+                <a:ea typeface="+mn-ea"/>
+                <a:cs typeface="+mn-cs"/>
+              </a:defRPr>
+            </a:lvl6pPr>
+            <a:lvl7pPr marL="2743200" algn="l" defTabSz="914400" rtl="0" eaLnBrk="1" latinLnBrk="0" hangingPunct="1">
+              <a:defRPr sz="1800" kern="1200">
+                <a:solidFill>
+                  <a:schemeClr val="tx1"/>
+                </a:solidFill>
+                <a:latin typeface="+mn-lt"/>
+                <a:ea typeface="+mn-ea"/>
+                <a:cs typeface="+mn-cs"/>
+              </a:defRPr>
+            </a:lvl7pPr>
+            <a:lvl8pPr marL="3200400" algn="l" defTabSz="914400" rtl="0" eaLnBrk="1" latinLnBrk="0" hangingPunct="1">
+              <a:defRPr sz="1800" kern="1200">
+                <a:solidFill>
+                  <a:schemeClr val="tx1"/>
+                </a:solidFill>
+                <a:latin typeface="+mn-lt"/>
+                <a:ea typeface="+mn-ea"/>
+                <a:cs typeface="+mn-cs"/>
+              </a:defRPr>
+            </a:lvl8pPr>
+            <a:lvl9pPr marL="3657600" algn="l" defTabSz="914400" rtl="0" eaLnBrk="1" latinLnBrk="0" hangingPunct="1">
+              <a:defRPr sz="1800" kern="1200">
+                <a:solidFill>
+                  <a:schemeClr val="tx1"/>
+                </a:solidFill>
+                <a:latin typeface="+mn-lt"/>
+                <a:ea typeface="+mn-ea"/>
+                <a:cs typeface="+mn-cs"/>
+              </a:defRPr>
+            </a:lvl9pPr>
+          </a:lstStyle>
+          <a:p>
+            <a:fld id="{D57F1E4F-1CFF-5643-939E-217C01CDF565}" type="slidenum">
+              <a:rPr lang="en-US" b="1" smtClean="0"/>
+              <a:pPr/>
+              <a:t>12</a:t>
+            </a:fld>
+            <a:endParaRPr lang="en-US" b="1" dirty="0"/>
+          </a:p>
+        </p:txBody>
+      </p:sp>
     </p:spTree>
     <p:extLst>
       <p:ext uri="{BB962C8B-B14F-4D97-AF65-F5344CB8AC3E}">
@@ -4401,41 +4695,6 @@
       </p:grpSpPr>
       <p:sp>
         <p:nvSpPr>
-          <p:cNvPr id="4" name="슬라이드 번호 개체 틀 3">
-            <a:extLst>
-              <a:ext uri="{FF2B5EF4-FFF2-40B4-BE49-F238E27FC236}">
-                <a16:creationId xmlns:a16="http://schemas.microsoft.com/office/drawing/2014/main" id="{69A78D84-4872-2E1E-7AC5-71F1A9E4658C}"/>
-              </a:ext>
-            </a:extLst>
-          </p:cNvPr>
-          <p:cNvSpPr>
-            <a:spLocks noGrp="1"/>
-          </p:cNvSpPr>
-          <p:nvPr>
-            <p:ph type="sldNum" sz="quarter" idx="12"/>
-          </p:nvPr>
-        </p:nvSpPr>
-        <p:spPr>
-          <a:xfrm>
-            <a:off x="10514011" y="6036261"/>
-            <a:ext cx="753545" cy="365125"/>
-          </a:xfrm>
-        </p:spPr>
-        <p:txBody>
-          <a:bodyPr/>
-          <a:lstStyle/>
-          <a:p>
-            <a:fld id="{D57F1E4F-1CFF-5643-939E-217C01CDF565}" type="slidenum">
-              <a:rPr lang="en-US" smtClean="0"/>
-              <a:pPr/>
-              <a:t>13</a:t>
-            </a:fld>
-            <a:endParaRPr lang="en-US" dirty="0"/>
-          </a:p>
-        </p:txBody>
-      </p:sp>
-      <p:sp>
-        <p:nvSpPr>
           <p:cNvPr id="3" name="제목 1">
             <a:extLst>
               <a:ext uri="{FF2B5EF4-FFF2-40B4-BE49-F238E27FC236}">
@@ -4539,7 +4798,7 @@
           <a:p>
             <a:pPr algn="r"/>
             <a:r>
-              <a:rPr lang="en-US" altLang="ko-KR" dirty="0">
+              <a:rPr lang="en-US" altLang="ko-KR" b="1" dirty="0">
                 <a:latin typeface="D2Coding" panose="020B0609020101020101" pitchFamily="49" charset="-127"/>
                 <a:ea typeface="D2Coding" panose="020B0609020101020101" pitchFamily="49" charset="-127"/>
               </a:rPr>
@@ -4593,7 +4852,7 @@
         <p:spPr>
           <a:xfrm>
             <a:off x="8086553" y="1706452"/>
-            <a:ext cx="3562868" cy="2644635"/>
+            <a:ext cx="3562868" cy="3614131"/>
           </a:xfrm>
           <a:prstGeom prst="rect">
             <a:avLst/>
@@ -4650,41 +4909,10 @@
               <a:buFont typeface="Wingdings" panose="05000000000000000000" pitchFamily="2" charset="2"/>
               <a:buChar char="§"/>
             </a:pPr>
-            <a:r>
-              <a:rPr lang="en-US" altLang="ko-KR" sz="1400" dirty="0">
-                <a:latin typeface="D2Coding" panose="020B0609020101020101" pitchFamily="49" charset="-127"/>
-                <a:ea typeface="D2Coding" panose="020B0609020101020101" pitchFamily="49" charset="-127"/>
-              </a:rPr>
-              <a:t>LLM</a:t>
-            </a:r>
-            <a:r>
-              <a:rPr lang="ko-KR" altLang="en-US" sz="1400" dirty="0">
-                <a:latin typeface="D2Coding" panose="020B0609020101020101" pitchFamily="49" charset="-127"/>
-                <a:ea typeface="D2Coding" panose="020B0609020101020101" pitchFamily="49" charset="-127"/>
-              </a:rPr>
-              <a:t>을 거쳐 만들어진 가짜 답변인 🔴 </a:t>
-            </a:r>
-            <a:r>
-              <a:rPr lang="ko-KR" altLang="en-US" sz="1400" dirty="0" err="1">
-                <a:latin typeface="D2Coding" panose="020B0609020101020101" pitchFamily="49" charset="-127"/>
-                <a:ea typeface="D2Coding" panose="020B0609020101020101" pitchFamily="49" charset="-127"/>
-              </a:rPr>
-              <a:t>연빨간색</a:t>
-            </a:r>
-            <a:r>
-              <a:rPr lang="ko-KR" altLang="en-US" sz="1400" dirty="0">
-                <a:latin typeface="D2Coding" panose="020B0609020101020101" pitchFamily="49" charset="-127"/>
-                <a:ea typeface="D2Coding" panose="020B0609020101020101" pitchFamily="49" charset="-127"/>
-              </a:rPr>
-              <a:t> 원을 사용하면</a:t>
-            </a:r>
-            <a:r>
-              <a:rPr lang="en-US" altLang="ko-KR" sz="1400" dirty="0">
-                <a:latin typeface="D2Coding" panose="020B0609020101020101" pitchFamily="49" charset="-127"/>
-                <a:ea typeface="D2Coding" panose="020B0609020101020101" pitchFamily="49" charset="-127"/>
-              </a:rPr>
-              <a:t>, </a:t>
-            </a:r>
+            <a:endParaRPr lang="en-US" altLang="ko-KR" sz="1400" dirty="0">
+              <a:latin typeface="D2Coding" panose="020B0609020101020101" pitchFamily="49" charset="-127"/>
+              <a:ea typeface="D2Coding" panose="020B0609020101020101" pitchFamily="49" charset="-127"/>
+            </a:endParaRPr>
           </a:p>
           <a:p>
             <a:pPr marL="285750" indent="-285750">
@@ -4695,44 +4923,40 @@
               <a:buChar char="§"/>
             </a:pPr>
             <a:r>
+              <a:rPr lang="en-US" altLang="ko-KR" sz="1400" dirty="0">
+                <a:latin typeface="D2Coding" panose="020B0609020101020101" pitchFamily="49" charset="-127"/>
+                <a:ea typeface="D2Coding" panose="020B0609020101020101" pitchFamily="49" charset="-127"/>
+              </a:rPr>
+              <a:t>LLM</a:t>
+            </a:r>
+            <a:r>
               <a:rPr lang="ko-KR" altLang="en-US" sz="1400" dirty="0">
                 <a:latin typeface="D2Coding" panose="020B0609020101020101" pitchFamily="49" charset="-127"/>
                 <a:ea typeface="D2Coding" panose="020B0609020101020101" pitchFamily="49" charset="-127"/>
               </a:rPr>
-              <a:t>진짜 정답 문서들</a:t>
+              <a:t>을 거쳐 만들어진 가짜 답변인 🔴 </a:t>
+            </a:r>
+            <a:r>
+              <a:rPr lang="ko-KR" altLang="en-US" sz="1400" dirty="0" err="1">
+                <a:latin typeface="D2Coding" panose="020B0609020101020101" pitchFamily="49" charset="-127"/>
+                <a:ea typeface="D2Coding" panose="020B0609020101020101" pitchFamily="49" charset="-127"/>
+              </a:rPr>
+              <a:t>연빨간색</a:t>
+            </a:r>
+            <a:r>
+              <a:rPr lang="ko-KR" altLang="en-US" sz="1400" dirty="0">
+                <a:latin typeface="D2Coding" panose="020B0609020101020101" pitchFamily="49" charset="-127"/>
+                <a:ea typeface="D2Coding" panose="020B0609020101020101" pitchFamily="49" charset="-127"/>
+              </a:rPr>
+              <a:t> 원을 사용하면</a:t>
             </a:r>
             <a:r>
               <a:rPr lang="en-US" altLang="ko-KR" sz="1400" dirty="0">
                 <a:latin typeface="D2Coding" panose="020B0609020101020101" pitchFamily="49" charset="-127"/>
                 <a:ea typeface="D2Coding" panose="020B0609020101020101" pitchFamily="49" charset="-127"/>
               </a:rPr>
-              <a:t>(</a:t>
-            </a:r>
-            <a:r>
-              <a:rPr lang="ko-KR" altLang="en-US" sz="1400" dirty="0">
-                <a:latin typeface="D2Coding" panose="020B0609020101020101" pitchFamily="49" charset="-127"/>
-                <a:ea typeface="D2Coding" panose="020B0609020101020101" pitchFamily="49" charset="-127"/>
-              </a:rPr>
-              <a:t>🟢🟢🟢</a:t>
-            </a:r>
-            <a:r>
-              <a:rPr lang="en-US" altLang="ko-KR" sz="1400" dirty="0">
-                <a:latin typeface="D2Coding" panose="020B0609020101020101" pitchFamily="49" charset="-127"/>
-                <a:ea typeface="D2Coding" panose="020B0609020101020101" pitchFamily="49" charset="-127"/>
-              </a:rPr>
-              <a:t>)</a:t>
-            </a:r>
-            <a:r>
-              <a:rPr lang="ko-KR" altLang="en-US" sz="1400" dirty="0">
-                <a:latin typeface="D2Coding" panose="020B0609020101020101" pitchFamily="49" charset="-127"/>
-                <a:ea typeface="D2Coding" panose="020B0609020101020101" pitchFamily="49" charset="-127"/>
-              </a:rPr>
-              <a:t>이 모여 있는 곳으로 훨씬 더 가깝게 접근할 수 있어 </a:t>
-            </a:r>
-            <a:endParaRPr lang="en-US" altLang="ko-KR" sz="1400" dirty="0">
-              <a:latin typeface="D2Coding" panose="020B0609020101020101" pitchFamily="49" charset="-127"/>
-              <a:ea typeface="D2Coding" panose="020B0609020101020101" pitchFamily="49" charset="-127"/>
-            </a:endParaRPr>
+              <a:t>, </a:t>
+            </a:r>
           </a:p>
           <a:p>
             <a:pPr marL="285750" indent="-285750">
@@ -4742,13 +4966,220 @@
               <a:buFont typeface="Wingdings" panose="05000000000000000000" pitchFamily="2" charset="2"/>
               <a:buChar char="§"/>
             </a:pPr>
+            <a:endParaRPr lang="en-US" altLang="ko-KR" sz="1400" dirty="0">
+              <a:latin typeface="D2Coding" panose="020B0609020101020101" pitchFamily="49" charset="-127"/>
+              <a:ea typeface="D2Coding" panose="020B0609020101020101" pitchFamily="49" charset="-127"/>
+            </a:endParaRPr>
+          </a:p>
+          <a:p>
+            <a:pPr marL="285750" indent="-285750">
+              <a:lnSpc>
+                <a:spcPct val="150000"/>
+              </a:lnSpc>
+              <a:buFont typeface="Wingdings" panose="05000000000000000000" pitchFamily="2" charset="2"/>
+              <a:buChar char="§"/>
+            </a:pPr>
             <a:r>
               <a:rPr lang="ko-KR" altLang="en-US" sz="1400" dirty="0">
                 <a:latin typeface="D2Coding" panose="020B0609020101020101" pitchFamily="49" charset="-127"/>
                 <a:ea typeface="D2Coding" panose="020B0609020101020101" pitchFamily="49" charset="-127"/>
               </a:rPr>
+              <a:t>진짜 정답 문서들</a:t>
+            </a:r>
+            <a:r>
+              <a:rPr lang="en-US" altLang="ko-KR" sz="1400" dirty="0">
+                <a:latin typeface="D2Coding" panose="020B0609020101020101" pitchFamily="49" charset="-127"/>
+                <a:ea typeface="D2Coding" panose="020B0609020101020101" pitchFamily="49" charset="-127"/>
+              </a:rPr>
+              <a:t>(</a:t>
+            </a:r>
+            <a:r>
+              <a:rPr lang="ko-KR" altLang="en-US" sz="1400" dirty="0">
+                <a:latin typeface="D2Coding" panose="020B0609020101020101" pitchFamily="49" charset="-127"/>
+                <a:ea typeface="D2Coding" panose="020B0609020101020101" pitchFamily="49" charset="-127"/>
+              </a:rPr>
+              <a:t>🟢🟢🟢</a:t>
+            </a:r>
+            <a:r>
+              <a:rPr lang="en-US" altLang="ko-KR" sz="1400" dirty="0">
+                <a:latin typeface="D2Coding" panose="020B0609020101020101" pitchFamily="49" charset="-127"/>
+                <a:ea typeface="D2Coding" panose="020B0609020101020101" pitchFamily="49" charset="-127"/>
+              </a:rPr>
+              <a:t>)</a:t>
+            </a:r>
+            <a:r>
+              <a:rPr lang="ko-KR" altLang="en-US" sz="1400" dirty="0">
+                <a:latin typeface="D2Coding" panose="020B0609020101020101" pitchFamily="49" charset="-127"/>
+                <a:ea typeface="D2Coding" panose="020B0609020101020101" pitchFamily="49" charset="-127"/>
+              </a:rPr>
+              <a:t>이 모여 있는 곳으로 훨씬 더 가깝게 접근할 수 있어 </a:t>
+            </a:r>
+            <a:endParaRPr lang="en-US" altLang="ko-KR" sz="1400" dirty="0">
+              <a:latin typeface="D2Coding" panose="020B0609020101020101" pitchFamily="49" charset="-127"/>
+              <a:ea typeface="D2Coding" panose="020B0609020101020101" pitchFamily="49" charset="-127"/>
+            </a:endParaRPr>
+          </a:p>
+          <a:p>
+            <a:pPr marL="285750" indent="-285750">
+              <a:lnSpc>
+                <a:spcPct val="150000"/>
+              </a:lnSpc>
+              <a:buFont typeface="Wingdings" panose="05000000000000000000" pitchFamily="2" charset="2"/>
+              <a:buChar char="§"/>
+            </a:pPr>
+            <a:endParaRPr lang="en-US" altLang="ko-KR" sz="1400" dirty="0">
+              <a:latin typeface="D2Coding" panose="020B0609020101020101" pitchFamily="49" charset="-127"/>
+              <a:ea typeface="D2Coding" panose="020B0609020101020101" pitchFamily="49" charset="-127"/>
+            </a:endParaRPr>
+          </a:p>
+          <a:p>
+            <a:pPr marL="285750" indent="-285750">
+              <a:lnSpc>
+                <a:spcPct val="150000"/>
+              </a:lnSpc>
+              <a:buFont typeface="Wingdings" panose="05000000000000000000" pitchFamily="2" charset="2"/>
+              <a:buChar char="§"/>
+            </a:pPr>
+            <a:r>
+              <a:rPr lang="ko-KR" altLang="en-US" sz="1400" dirty="0">
+                <a:latin typeface="D2Coding" panose="020B0609020101020101" pitchFamily="49" charset="-127"/>
+                <a:ea typeface="D2Coding" panose="020B0609020101020101" pitchFamily="49" charset="-127"/>
+              </a:rPr>
               <a:t>검색 정확도가 높아지는 알고리즘</a:t>
             </a:r>
+          </a:p>
+        </p:txBody>
+      </p:sp>
+      <p:sp>
+        <p:nvSpPr>
+          <p:cNvPr id="2" name="슬라이드 번호 개체 틀 3">
+            <a:extLst>
+              <a:ext uri="{FF2B5EF4-FFF2-40B4-BE49-F238E27FC236}">
+                <a16:creationId xmlns:a16="http://schemas.microsoft.com/office/drawing/2014/main" id="{EE7EE86D-B448-93FB-0022-080F1770DBA2}"/>
+              </a:ext>
+            </a:extLst>
+          </p:cNvPr>
+          <p:cNvSpPr txBox="1">
+            <a:spLocks/>
+          </p:cNvSpPr>
+          <p:nvPr/>
+        </p:nvSpPr>
+        <p:spPr>
+          <a:xfrm>
+            <a:off x="11162230" y="299420"/>
+            <a:ext cx="753545" cy="365125"/>
+          </a:xfrm>
+          <a:prstGeom prst="rect">
+            <a:avLst/>
+          </a:prstGeom>
+        </p:spPr>
+        <p:txBody>
+          <a:bodyPr vert="horz" lIns="91440" tIns="45720" rIns="91440" bIns="45720" rtlCol="0" anchor="ctr"/>
+          <a:lstStyle>
+            <a:defPPr rtl="0">
+              <a:defRPr lang="ko-KR"/>
+            </a:defPPr>
+            <a:lvl1pPr marL="0" algn="r" defTabSz="914400" rtl="0" eaLnBrk="1" latinLnBrk="0" hangingPunct="1">
+              <a:defRPr sz="1200" kern="1200" baseline="0">
+                <a:solidFill>
+                  <a:schemeClr val="tx1">
+                    <a:lumMod val="65000"/>
+                    <a:lumOff val="35000"/>
+                  </a:schemeClr>
+                </a:solidFill>
+                <a:latin typeface="맑은 고딕" panose="020B0503020000020004" pitchFamily="50" charset="-127"/>
+                <a:ea typeface="맑은 고딕" panose="020B0503020000020004" pitchFamily="50" charset="-127"/>
+                <a:cs typeface="+mn-cs"/>
+              </a:defRPr>
+            </a:lvl1pPr>
+            <a:lvl2pPr marL="457200" algn="l" defTabSz="914400" rtl="0" eaLnBrk="1" latinLnBrk="0" hangingPunct="1">
+              <a:defRPr sz="1800" kern="1200">
+                <a:solidFill>
+                  <a:schemeClr val="tx1"/>
+                </a:solidFill>
+                <a:latin typeface="+mn-lt"/>
+                <a:ea typeface="+mn-ea"/>
+                <a:cs typeface="+mn-cs"/>
+              </a:defRPr>
+            </a:lvl2pPr>
+            <a:lvl3pPr marL="914400" algn="l" defTabSz="914400" rtl="0" eaLnBrk="1" latinLnBrk="0" hangingPunct="1">
+              <a:defRPr sz="1800" kern="1200">
+                <a:solidFill>
+                  <a:schemeClr val="tx1"/>
+                </a:solidFill>
+                <a:latin typeface="+mn-lt"/>
+                <a:ea typeface="+mn-ea"/>
+                <a:cs typeface="+mn-cs"/>
+              </a:defRPr>
+            </a:lvl3pPr>
+            <a:lvl4pPr marL="1371600" algn="l" defTabSz="914400" rtl="0" eaLnBrk="1" latinLnBrk="0" hangingPunct="1">
+              <a:defRPr sz="1800" kern="1200">
+                <a:solidFill>
+                  <a:schemeClr val="tx1"/>
+                </a:solidFill>
+                <a:latin typeface="+mn-lt"/>
+                <a:ea typeface="+mn-ea"/>
+                <a:cs typeface="+mn-cs"/>
+              </a:defRPr>
+            </a:lvl4pPr>
+            <a:lvl5pPr marL="1828800" algn="l" defTabSz="914400" rtl="0" eaLnBrk="1" latinLnBrk="0" hangingPunct="1">
+              <a:defRPr sz="1800" kern="1200">
+                <a:solidFill>
+                  <a:schemeClr val="tx1"/>
+                </a:solidFill>
+                <a:latin typeface="+mn-lt"/>
+                <a:ea typeface="+mn-ea"/>
+                <a:cs typeface="+mn-cs"/>
+              </a:defRPr>
+            </a:lvl5pPr>
+            <a:lvl6pPr marL="2286000" algn="l" defTabSz="914400" rtl="0" eaLnBrk="1" latinLnBrk="0" hangingPunct="1">
+              <a:defRPr sz="1800" kern="1200">
+                <a:solidFill>
+                  <a:schemeClr val="tx1"/>
+                </a:solidFill>
+                <a:latin typeface="+mn-lt"/>
+                <a:ea typeface="+mn-ea"/>
+                <a:cs typeface="+mn-cs"/>
+              </a:defRPr>
+            </a:lvl6pPr>
+            <a:lvl7pPr marL="2743200" algn="l" defTabSz="914400" rtl="0" eaLnBrk="1" latinLnBrk="0" hangingPunct="1">
+              <a:defRPr sz="1800" kern="1200">
+                <a:solidFill>
+                  <a:schemeClr val="tx1"/>
+                </a:solidFill>
+                <a:latin typeface="+mn-lt"/>
+                <a:ea typeface="+mn-ea"/>
+                <a:cs typeface="+mn-cs"/>
+              </a:defRPr>
+            </a:lvl7pPr>
+            <a:lvl8pPr marL="3200400" algn="l" defTabSz="914400" rtl="0" eaLnBrk="1" latinLnBrk="0" hangingPunct="1">
+              <a:defRPr sz="1800" kern="1200">
+                <a:solidFill>
+                  <a:schemeClr val="tx1"/>
+                </a:solidFill>
+                <a:latin typeface="+mn-lt"/>
+                <a:ea typeface="+mn-ea"/>
+                <a:cs typeface="+mn-cs"/>
+              </a:defRPr>
+            </a:lvl8pPr>
+            <a:lvl9pPr marL="3657600" algn="l" defTabSz="914400" rtl="0" eaLnBrk="1" latinLnBrk="0" hangingPunct="1">
+              <a:defRPr sz="1800" kern="1200">
+                <a:solidFill>
+                  <a:schemeClr val="tx1"/>
+                </a:solidFill>
+                <a:latin typeface="+mn-lt"/>
+                <a:ea typeface="+mn-ea"/>
+                <a:cs typeface="+mn-cs"/>
+              </a:defRPr>
+            </a:lvl9pPr>
+          </a:lstStyle>
+          <a:p>
+            <a:fld id="{D57F1E4F-1CFF-5643-939E-217C01CDF565}" type="slidenum">
+              <a:rPr lang="en-US" b="1" smtClean="0"/>
+              <a:pPr/>
+              <a:t>13</a:t>
+            </a:fld>
+            <a:endParaRPr lang="en-US" b="1" dirty="0"/>
           </a:p>
         </p:txBody>
       </p:sp>
@@ -4790,41 +5221,6 @@
       </p:grpSpPr>
       <p:sp>
         <p:nvSpPr>
-          <p:cNvPr id="4" name="슬라이드 번호 개체 틀 3">
-            <a:extLst>
-              <a:ext uri="{FF2B5EF4-FFF2-40B4-BE49-F238E27FC236}">
-                <a16:creationId xmlns:a16="http://schemas.microsoft.com/office/drawing/2014/main" id="{9AE73430-8836-961C-5301-71E1947D07D9}"/>
-              </a:ext>
-            </a:extLst>
-          </p:cNvPr>
-          <p:cNvSpPr>
-            <a:spLocks noGrp="1"/>
-          </p:cNvSpPr>
-          <p:nvPr>
-            <p:ph type="sldNum" sz="quarter" idx="12"/>
-          </p:nvPr>
-        </p:nvSpPr>
-        <p:spPr>
-          <a:xfrm>
-            <a:off x="10514011" y="6036261"/>
-            <a:ext cx="753545" cy="365125"/>
-          </a:xfrm>
-        </p:spPr>
-        <p:txBody>
-          <a:bodyPr/>
-          <a:lstStyle/>
-          <a:p>
-            <a:fld id="{D57F1E4F-1CFF-5643-939E-217C01CDF565}" type="slidenum">
-              <a:rPr lang="en-US" smtClean="0"/>
-              <a:pPr/>
-              <a:t>14</a:t>
-            </a:fld>
-            <a:endParaRPr lang="en-US" dirty="0"/>
-          </a:p>
-        </p:txBody>
-      </p:sp>
-      <p:sp>
-        <p:nvSpPr>
           <p:cNvPr id="3" name="제목 1">
             <a:extLst>
               <a:ext uri="{FF2B5EF4-FFF2-40B4-BE49-F238E27FC236}">
@@ -4913,7 +5309,7 @@
         <p:spPr>
           <a:xfrm>
             <a:off x="585787" y="1481168"/>
-            <a:ext cx="11020425" cy="4724370"/>
+            <a:ext cx="11020425" cy="4555093"/>
           </a:xfrm>
           <a:prstGeom prst="rect">
             <a:avLst/>
@@ -4931,14 +5327,14 @@
               <a:buChar char="v"/>
             </a:pPr>
             <a:r>
-              <a:rPr lang="ko-KR" altLang="en-US" dirty="0">
+              <a:rPr lang="ko-KR" altLang="en-US" sz="1600" b="1" dirty="0">
                 <a:latin typeface="D2Coding" panose="020B0609020101020101" pitchFamily="49" charset="-127"/>
                 <a:ea typeface="D2Coding" panose="020B0609020101020101" pitchFamily="49" charset="-127"/>
               </a:rPr>
               <a:t>왜 쿼리를 변형할까</a:t>
             </a:r>
             <a:r>
-              <a:rPr lang="en-US" altLang="ko-KR" dirty="0">
+              <a:rPr lang="en-US" altLang="ko-KR" sz="1600" b="1" dirty="0">
                 <a:latin typeface="D2Coding" panose="020B0609020101020101" pitchFamily="49" charset="-127"/>
                 <a:ea typeface="D2Coding" panose="020B0609020101020101" pitchFamily="49" charset="-127"/>
               </a:rPr>
@@ -4950,6 +5346,93 @@
               <a:buFont typeface="Wingdings" panose="05000000000000000000" pitchFamily="2" charset="2"/>
               <a:buChar char="v"/>
             </a:pPr>
+            <a:endParaRPr lang="en-US" altLang="ko-KR" sz="1400" dirty="0">
+              <a:latin typeface="D2Coding" panose="020B0609020101020101" pitchFamily="49" charset="-127"/>
+              <a:ea typeface="D2Coding" panose="020B0609020101020101" pitchFamily="49" charset="-127"/>
+            </a:endParaRPr>
+          </a:p>
+          <a:p>
+            <a:pPr marL="800100" lvl="1" indent="-342900">
+              <a:buFont typeface="Wingdings" panose="05000000000000000000" pitchFamily="2" charset="2"/>
+              <a:buChar char="v"/>
+            </a:pPr>
+            <a:r>
+              <a:rPr lang="ko-KR" altLang="en-US" sz="1600" dirty="0">
+                <a:latin typeface="D2Coding" panose="020B0609020101020101" pitchFamily="49" charset="-127"/>
+                <a:ea typeface="D2Coding" panose="020B0609020101020101" pitchFamily="49" charset="-127"/>
+              </a:rPr>
+              <a:t>사용자가 던진 날것</a:t>
+            </a:r>
+            <a:r>
+              <a:rPr lang="en-US" altLang="ko-KR" sz="1600" dirty="0">
+                <a:latin typeface="D2Coding" panose="020B0609020101020101" pitchFamily="49" charset="-127"/>
+                <a:ea typeface="D2Coding" panose="020B0609020101020101" pitchFamily="49" charset="-127"/>
+              </a:rPr>
+              <a:t>(Raw) </a:t>
+            </a:r>
+            <a:r>
+              <a:rPr lang="ko-KR" altLang="en-US" sz="1600" dirty="0">
+                <a:latin typeface="D2Coding" panose="020B0609020101020101" pitchFamily="49" charset="-127"/>
+                <a:ea typeface="D2Coding" panose="020B0609020101020101" pitchFamily="49" charset="-127"/>
+              </a:rPr>
+              <a:t>그대로의 질문은 검색 엔진</a:t>
+            </a:r>
+            <a:r>
+              <a:rPr lang="en-US" altLang="ko-KR" sz="1600" dirty="0">
+                <a:latin typeface="D2Coding" panose="020B0609020101020101" pitchFamily="49" charset="-127"/>
+                <a:ea typeface="D2Coding" panose="020B0609020101020101" pitchFamily="49" charset="-127"/>
+              </a:rPr>
+              <a:t>(Vector Store)</a:t>
+            </a:r>
+            <a:r>
+              <a:rPr lang="ko-KR" altLang="en-US" sz="1600" dirty="0">
+                <a:latin typeface="D2Coding" panose="020B0609020101020101" pitchFamily="49" charset="-127"/>
+                <a:ea typeface="D2Coding" panose="020B0609020101020101" pitchFamily="49" charset="-127"/>
+              </a:rPr>
+              <a:t>이 이해하기에 너무 짧거나</a:t>
+            </a:r>
+            <a:r>
+              <a:rPr lang="en-US" altLang="ko-KR" sz="1600" dirty="0">
+                <a:latin typeface="D2Coding" panose="020B0609020101020101" pitchFamily="49" charset="-127"/>
+                <a:ea typeface="D2Coding" panose="020B0609020101020101" pitchFamily="49" charset="-127"/>
+              </a:rPr>
+              <a:t>, </a:t>
+            </a:r>
+            <a:r>
+              <a:rPr lang="ko-KR" altLang="en-US" sz="1600" dirty="0">
+                <a:latin typeface="D2Coding" panose="020B0609020101020101" pitchFamily="49" charset="-127"/>
+                <a:ea typeface="D2Coding" panose="020B0609020101020101" pitchFamily="49" charset="-127"/>
+              </a:rPr>
+              <a:t>군더더기가 많거나</a:t>
+            </a:r>
+            <a:r>
+              <a:rPr lang="en-US" altLang="ko-KR" sz="1600" dirty="0">
+                <a:latin typeface="D2Coding" panose="020B0609020101020101" pitchFamily="49" charset="-127"/>
+                <a:ea typeface="D2Coding" panose="020B0609020101020101" pitchFamily="49" charset="-127"/>
+              </a:rPr>
+              <a:t>, </a:t>
+            </a:r>
+            <a:r>
+              <a:rPr lang="ko-KR" altLang="en-US" sz="1600" dirty="0">
+                <a:latin typeface="D2Coding" panose="020B0609020101020101" pitchFamily="49" charset="-127"/>
+                <a:ea typeface="D2Coding" panose="020B0609020101020101" pitchFamily="49" charset="-127"/>
+              </a:rPr>
+              <a:t>문맥이 빠져 있을 수 있으니</a:t>
+            </a:r>
+            <a:r>
+              <a:rPr lang="en-US" altLang="ko-KR" sz="1600" dirty="0">
+                <a:latin typeface="D2Coding" panose="020B0609020101020101" pitchFamily="49" charset="-127"/>
+                <a:ea typeface="D2Coding" panose="020B0609020101020101" pitchFamily="49" charset="-127"/>
+              </a:rPr>
+              <a:t> LLM</a:t>
+            </a:r>
+            <a:r>
+              <a:rPr lang="ko-KR" altLang="en-US" sz="1600" dirty="0">
+                <a:latin typeface="D2Coding" panose="020B0609020101020101" pitchFamily="49" charset="-127"/>
+                <a:ea typeface="D2Coding" panose="020B0609020101020101" pitchFamily="49" charset="-127"/>
+              </a:rPr>
+              <a:t>을 필터이자 확장기로 사용하여 검색하기 가장 좋은 최적의 상태로 변형하는 것</a:t>
+            </a:r>
             <a:endParaRPr lang="en-US" altLang="ko-KR" sz="1600" dirty="0">
               <a:latin typeface="D2Coding" panose="020B0609020101020101" pitchFamily="49" charset="-127"/>
               <a:ea typeface="D2Coding" panose="020B0609020101020101" pitchFamily="49" charset="-127"/>
@@ -4960,40 +5443,118 @@
               <a:buFont typeface="Wingdings" panose="05000000000000000000" pitchFamily="2" charset="2"/>
               <a:buChar char="v"/>
             </a:pPr>
+            <a:endParaRPr lang="en-US" altLang="ko-KR" sz="1400" dirty="0">
+              <a:latin typeface="D2Coding" panose="020B0609020101020101" pitchFamily="49" charset="-127"/>
+              <a:ea typeface="D2Coding" panose="020B0609020101020101" pitchFamily="49" charset="-127"/>
+            </a:endParaRPr>
+          </a:p>
+          <a:p>
+            <a:pPr marL="800100" lvl="1" indent="-342900">
+              <a:buFont typeface="Wingdings" panose="05000000000000000000" pitchFamily="2" charset="2"/>
+              <a:buChar char="v"/>
+            </a:pPr>
+            <a:endParaRPr lang="en-US" altLang="ko-KR" sz="800" dirty="0">
+              <a:latin typeface="D2Coding" panose="020B0609020101020101" pitchFamily="49" charset="-127"/>
+              <a:ea typeface="D2Coding" panose="020B0609020101020101" pitchFamily="49" charset="-127"/>
+            </a:endParaRPr>
+          </a:p>
+          <a:p>
+            <a:pPr marL="342900" indent="-342900">
+              <a:buFont typeface="Wingdings" panose="05000000000000000000" pitchFamily="2" charset="2"/>
+              <a:buChar char="v"/>
+            </a:pPr>
+            <a:r>
+              <a:rPr lang="ko-KR" altLang="en-US" sz="1600" b="1" dirty="0">
+                <a:latin typeface="D2Coding" panose="020B0609020101020101" pitchFamily="49" charset="-127"/>
+                <a:ea typeface="D2Coding" panose="020B0609020101020101" pitchFamily="49" charset="-127"/>
+              </a:rPr>
+              <a:t>실무 </a:t>
+            </a:r>
+            <a:r>
+              <a:rPr lang="en-US" altLang="ko-KR" sz="1600" b="1" dirty="0">
+                <a:latin typeface="D2Coding" panose="020B0609020101020101" pitchFamily="49" charset="-127"/>
+                <a:ea typeface="D2Coding" panose="020B0609020101020101" pitchFamily="49" charset="-127"/>
+              </a:rPr>
+              <a:t>RAG </a:t>
+            </a:r>
+            <a:r>
+              <a:rPr lang="ko-KR" altLang="en-US" sz="1600" b="1" dirty="0">
+                <a:latin typeface="D2Coding" panose="020B0609020101020101" pitchFamily="49" charset="-127"/>
+                <a:ea typeface="D2Coding" panose="020B0609020101020101" pitchFamily="49" charset="-127"/>
+              </a:rPr>
+              <a:t>시스템 구축 시 가장 자주 쓰이는 패턴 </a:t>
+            </a:r>
+            <a:r>
+              <a:rPr lang="en-US" altLang="ko-KR" sz="1600" b="1" dirty="0">
+                <a:latin typeface="D2Coding" panose="020B0609020101020101" pitchFamily="49" charset="-127"/>
+                <a:ea typeface="D2Coding" panose="020B0609020101020101" pitchFamily="49" charset="-127"/>
+              </a:rPr>
+              <a:t>(Prompt </a:t>
+            </a:r>
+            <a:r>
+              <a:rPr lang="ko-KR" altLang="en-US" sz="1600" b="1" dirty="0">
+                <a:latin typeface="D2Coding" panose="020B0609020101020101" pitchFamily="49" charset="-127"/>
+                <a:ea typeface="D2Coding" panose="020B0609020101020101" pitchFamily="49" charset="-127"/>
+              </a:rPr>
+              <a:t>가이드</a:t>
+            </a:r>
+            <a:r>
+              <a:rPr lang="en-US" altLang="ko-KR" sz="1600" b="1" dirty="0">
+                <a:latin typeface="D2Coding" panose="020B0609020101020101" pitchFamily="49" charset="-127"/>
+                <a:ea typeface="D2Coding" panose="020B0609020101020101" pitchFamily="49" charset="-127"/>
+              </a:rPr>
+              <a:t>)</a:t>
+            </a:r>
+          </a:p>
+          <a:p>
+            <a:pPr marL="342900" indent="-342900">
+              <a:buFont typeface="Wingdings" panose="05000000000000000000" pitchFamily="2" charset="2"/>
+              <a:buChar char="v"/>
+            </a:pPr>
+            <a:endParaRPr lang="en-US" altLang="ko-KR" sz="1400" dirty="0">
+              <a:latin typeface="D2Coding" panose="020B0609020101020101" pitchFamily="49" charset="-127"/>
+              <a:ea typeface="D2Coding" panose="020B0609020101020101" pitchFamily="49" charset="-127"/>
+            </a:endParaRPr>
+          </a:p>
+          <a:p>
+            <a:pPr marL="742950" lvl="1" indent="-285750">
+              <a:buFont typeface="Wingdings" panose="05000000000000000000" pitchFamily="2" charset="2"/>
+              <a:buChar char="v"/>
+            </a:pPr>
             <a:r>
               <a:rPr lang="ko-KR" altLang="en-US" sz="1600" dirty="0">
                 <a:latin typeface="D2Coding" panose="020B0609020101020101" pitchFamily="49" charset="-127"/>
                 <a:ea typeface="D2Coding" panose="020B0609020101020101" pitchFamily="49" charset="-127"/>
               </a:rPr>
-              <a:t>사용자가 던진 날것</a:t>
+              <a:t>노이즈 제거 </a:t>
             </a:r>
             <a:r>
               <a:rPr lang="en-US" altLang="ko-KR" sz="1600" dirty="0">
                 <a:latin typeface="D2Coding" panose="020B0609020101020101" pitchFamily="49" charset="-127"/>
                 <a:ea typeface="D2Coding" panose="020B0609020101020101" pitchFamily="49" charset="-127"/>
               </a:rPr>
-              <a:t>(Raw) </a:t>
+              <a:t>(Removing irrelevant text):</a:t>
             </a:r>
             <a:r>
               <a:rPr lang="ko-KR" altLang="en-US" sz="1600" dirty="0">
                 <a:latin typeface="D2Coding" panose="020B0609020101020101" pitchFamily="49" charset="-127"/>
                 <a:ea typeface="D2Coding" panose="020B0609020101020101" pitchFamily="49" charset="-127"/>
               </a:rPr>
-              <a:t>그대로의 질문은 검색 엔진</a:t>
+              <a:t> </a:t>
             </a:r>
             <a:r>
               <a:rPr lang="en-US" altLang="ko-KR" sz="1600" dirty="0">
                 <a:latin typeface="D2Coding" panose="020B0609020101020101" pitchFamily="49" charset="-127"/>
                 <a:ea typeface="D2Coding" panose="020B0609020101020101" pitchFamily="49" charset="-127"/>
               </a:rPr>
-              <a:t>(Vector Store)</a:t>
+              <a:t>"</a:t>
             </a:r>
             <a:r>
               <a:rPr lang="ko-KR" altLang="en-US" sz="1600" dirty="0">
                 <a:latin typeface="D2Coding" panose="020B0609020101020101" pitchFamily="49" charset="-127"/>
                 <a:ea typeface="D2Coding" panose="020B0609020101020101" pitchFamily="49" charset="-127"/>
               </a:rPr>
-              <a:t>이 이해하기에 너무 짧거나</a:t>
+              <a:t>안녕하세요</a:t>
             </a:r>
             <a:r>
               <a:rPr lang="en-US" altLang="ko-KR" sz="1600" dirty="0">
@@ -5007,43 +5568,272 @@
                 <a:latin typeface="D2Coding" panose="020B0609020101020101" pitchFamily="49" charset="-127"/>
                 <a:ea typeface="D2Coding" panose="020B0609020101020101" pitchFamily="49" charset="-127"/>
               </a:rPr>
-              <a:t>군더더기가 많거나</a:t>
+              <a:t>혹시 다름이 아니라 </a:t>
             </a:r>
             <a:r>
               <a:rPr lang="en-US" altLang="ko-KR" sz="1600" dirty="0">
                 <a:latin typeface="D2Coding" panose="020B0609020101020101" pitchFamily="49" charset="-127"/>
                 <a:ea typeface="D2Coding" panose="020B0609020101020101" pitchFamily="49" charset="-127"/>
               </a:rPr>
-              <a:t>, </a:t>
+              <a:t>2026</a:t>
             </a:r>
             <a:r>
               <a:rPr lang="ko-KR" altLang="en-US" sz="1600" dirty="0">
                 <a:latin typeface="D2Coding" panose="020B0609020101020101" pitchFamily="49" charset="-127"/>
                 <a:ea typeface="D2Coding" panose="020B0609020101020101" pitchFamily="49" charset="-127"/>
               </a:rPr>
-              <a:t>문맥이 빠져 있을 수 있으니</a:t>
+              <a:t>년 연말정산 프로세스에 대해 알고 싶어서 문의 드리는데</a:t>
             </a:r>
             <a:r>
               <a:rPr lang="en-US" altLang="ko-KR" sz="1600" dirty="0">
                 <a:latin typeface="D2Coding" panose="020B0609020101020101" pitchFamily="49" charset="-127"/>
                 <a:ea typeface="D2Coding" panose="020B0609020101020101" pitchFamily="49" charset="-127"/>
               </a:rPr>
-              <a:t> LLM</a:t>
+              <a:t>..."</a:t>
             </a:r>
             <a:r>
               <a:rPr lang="ko-KR" altLang="en-US" sz="1600" dirty="0">
                 <a:latin typeface="D2Coding" panose="020B0609020101020101" pitchFamily="49" charset="-127"/>
                 <a:ea typeface="D2Coding" panose="020B0609020101020101" pitchFamily="49" charset="-127"/>
               </a:rPr>
-              <a:t>을 필터이자 확장기로 사용하여 검색하기 가장 좋은 최적의 상태로 변형하는 것</a:t>
-            </a:r>
+              <a:t>에서 인사말이나 불필요한 수식어를 깎아내고 </a:t>
+            </a:r>
+            <a:r>
+              <a:rPr lang="en-US" altLang="ko-KR" sz="1600" dirty="0">
+                <a:latin typeface="D2Coding" panose="020B0609020101020101" pitchFamily="49" charset="-127"/>
+                <a:ea typeface="D2Coding" panose="020B0609020101020101" pitchFamily="49" charset="-127"/>
+              </a:rPr>
+              <a:t>2026 </a:t>
+            </a:r>
+            <a:r>
+              <a:rPr lang="ko-KR" altLang="en-US" sz="1600" dirty="0">
+                <a:latin typeface="D2Coding" panose="020B0609020101020101" pitchFamily="49" charset="-127"/>
+                <a:ea typeface="D2Coding" panose="020B0609020101020101" pitchFamily="49" charset="-127"/>
+              </a:rPr>
+              <a:t>연말정산 프로세스라는 핵심 키워드만 남겨라</a:t>
+            </a:r>
+            <a:r>
+              <a:rPr lang="en-US" altLang="ko-KR" sz="1600" dirty="0">
+                <a:latin typeface="D2Coding" panose="020B0609020101020101" pitchFamily="49" charset="-127"/>
+                <a:ea typeface="D2Coding" panose="020B0609020101020101" pitchFamily="49" charset="-127"/>
+              </a:rPr>
+              <a:t>!</a:t>
+            </a:r>
+          </a:p>
+          <a:p>
+            <a:pPr marL="742950" lvl="1" indent="-285750">
+              <a:buFont typeface="Wingdings" panose="05000000000000000000" pitchFamily="2" charset="2"/>
+              <a:buChar char="v"/>
+            </a:pPr>
             <a:endParaRPr lang="en-US" altLang="ko-KR" sz="1600" dirty="0">
               <a:latin typeface="D2Coding" panose="020B0609020101020101" pitchFamily="49" charset="-127"/>
               <a:ea typeface="D2Coding" panose="020B0609020101020101" pitchFamily="49" charset="-127"/>
             </a:endParaRPr>
           </a:p>
           <a:p>
-            <a:pPr marL="800100" lvl="1" indent="-342900">
+            <a:pPr marL="742950" lvl="1" indent="-285750">
+              <a:buFont typeface="Wingdings" panose="05000000000000000000" pitchFamily="2" charset="2"/>
+              <a:buChar char="v"/>
+            </a:pPr>
+            <a:r>
+              <a:rPr lang="ko-KR" altLang="en-US" sz="1600" dirty="0">
+                <a:latin typeface="D2Coding" panose="020B0609020101020101" pitchFamily="49" charset="-127"/>
+                <a:ea typeface="D2Coding" panose="020B0609020101020101" pitchFamily="49" charset="-127"/>
+              </a:rPr>
+              <a:t>대화 맥락 반영 </a:t>
+            </a:r>
+            <a:r>
+              <a:rPr lang="en-US" altLang="ko-KR" sz="1600" dirty="0">
+                <a:latin typeface="D2Coding" panose="020B0609020101020101" pitchFamily="49" charset="-127"/>
+                <a:ea typeface="D2Coding" panose="020B0609020101020101" pitchFamily="49" charset="-127"/>
+              </a:rPr>
+              <a:t>(Grounding with past history):</a:t>
+            </a:r>
+            <a:r>
+              <a:rPr lang="ko-KR" altLang="en-US" sz="1600" dirty="0">
+                <a:latin typeface="D2Coding" panose="020B0609020101020101" pitchFamily="49" charset="-127"/>
+                <a:ea typeface="D2Coding" panose="020B0609020101020101" pitchFamily="49" charset="-127"/>
+              </a:rPr>
+              <a:t> 사용자가 이전에 </a:t>
+            </a:r>
+            <a:r>
+              <a:rPr lang="en-US" altLang="ko-KR" sz="1600" dirty="0">
+                <a:latin typeface="D2Coding" panose="020B0609020101020101" pitchFamily="49" charset="-127"/>
+                <a:ea typeface="D2Coding" panose="020B0609020101020101" pitchFamily="49" charset="-127"/>
+              </a:rPr>
+              <a:t>"</a:t>
+            </a:r>
+            <a:r>
+              <a:rPr lang="ko-KR" altLang="en-US" sz="1600" dirty="0">
+                <a:latin typeface="D2Coding" panose="020B0609020101020101" pitchFamily="49" charset="-127"/>
+                <a:ea typeface="D2Coding" panose="020B0609020101020101" pitchFamily="49" charset="-127"/>
+              </a:rPr>
+              <a:t>샌프란시스코</a:t>
+            </a:r>
+            <a:r>
+              <a:rPr lang="en-US" altLang="ko-KR" sz="1600" dirty="0">
+                <a:latin typeface="D2Coding" panose="020B0609020101020101" pitchFamily="49" charset="-127"/>
+                <a:ea typeface="D2Coding" panose="020B0609020101020101" pitchFamily="49" charset="-127"/>
+              </a:rPr>
+              <a:t>(SF) </a:t>
+            </a:r>
+            <a:r>
+              <a:rPr lang="ko-KR" altLang="en-US" sz="1600" dirty="0">
+                <a:latin typeface="D2Coding" panose="020B0609020101020101" pitchFamily="49" charset="-127"/>
+                <a:ea typeface="D2Coding" panose="020B0609020101020101" pitchFamily="49" charset="-127"/>
+              </a:rPr>
+              <a:t>날씨 어때</a:t>
+            </a:r>
+            <a:r>
+              <a:rPr lang="en-US" altLang="ko-KR" sz="1600" dirty="0">
+                <a:latin typeface="D2Coding" panose="020B0609020101020101" pitchFamily="49" charset="-127"/>
+                <a:ea typeface="D2Coding" panose="020B0609020101020101" pitchFamily="49" charset="-127"/>
+              </a:rPr>
+              <a:t>?"</a:t>
+            </a:r>
+            <a:r>
+              <a:rPr lang="ko-KR" altLang="en-US" sz="1600" dirty="0">
+                <a:latin typeface="D2Coding" panose="020B0609020101020101" pitchFamily="49" charset="-127"/>
+                <a:ea typeface="D2Coding" panose="020B0609020101020101" pitchFamily="49" charset="-127"/>
+              </a:rPr>
+              <a:t>라고 묻고</a:t>
+            </a:r>
+            <a:r>
+              <a:rPr lang="en-US" altLang="ko-KR" sz="1600" dirty="0">
+                <a:latin typeface="D2Coding" panose="020B0609020101020101" pitchFamily="49" charset="-127"/>
+                <a:ea typeface="D2Coding" panose="020B0609020101020101" pitchFamily="49" charset="-127"/>
+              </a:rPr>
+              <a:t>, </a:t>
+            </a:r>
+            <a:r>
+              <a:rPr lang="ko-KR" altLang="en-US" sz="1600" dirty="0">
+                <a:latin typeface="D2Coding" panose="020B0609020101020101" pitchFamily="49" charset="-127"/>
+                <a:ea typeface="D2Coding" panose="020B0609020101020101" pitchFamily="49" charset="-127"/>
+              </a:rPr>
+              <a:t>이어서 </a:t>
+            </a:r>
+            <a:r>
+              <a:rPr lang="en-US" altLang="ko-KR" sz="1600" dirty="0">
+                <a:latin typeface="D2Coding" panose="020B0609020101020101" pitchFamily="49" charset="-127"/>
+                <a:ea typeface="D2Coding" panose="020B0609020101020101" pitchFamily="49" charset="-127"/>
+              </a:rPr>
+              <a:t>"</a:t>
+            </a:r>
+            <a:r>
+              <a:rPr lang="ko-KR" altLang="en-US" sz="1600" dirty="0">
+                <a:latin typeface="D2Coding" panose="020B0609020101020101" pitchFamily="49" charset="-127"/>
+                <a:ea typeface="D2Coding" panose="020B0609020101020101" pitchFamily="49" charset="-127"/>
+              </a:rPr>
+              <a:t>그럼 </a:t>
+            </a:r>
+            <a:r>
+              <a:rPr lang="en-US" altLang="ko-KR" sz="1600" dirty="0">
+                <a:latin typeface="D2Coding" panose="020B0609020101020101" pitchFamily="49" charset="-127"/>
+                <a:ea typeface="D2Coding" panose="020B0609020101020101" pitchFamily="49" charset="-127"/>
+              </a:rPr>
+              <a:t>LA</a:t>
+            </a:r>
+            <a:r>
+              <a:rPr lang="ko-KR" altLang="en-US" sz="1600" dirty="0">
+                <a:latin typeface="D2Coding" panose="020B0609020101020101" pitchFamily="49" charset="-127"/>
+                <a:ea typeface="D2Coding" panose="020B0609020101020101" pitchFamily="49" charset="-127"/>
+              </a:rPr>
+              <a:t>는</a:t>
+            </a:r>
+            <a:r>
+              <a:rPr lang="en-US" altLang="ko-KR" sz="1600" dirty="0">
+                <a:latin typeface="D2Coding" panose="020B0609020101020101" pitchFamily="49" charset="-127"/>
+                <a:ea typeface="D2Coding" panose="020B0609020101020101" pitchFamily="49" charset="-127"/>
+              </a:rPr>
+              <a:t>?"</a:t>
+            </a:r>
+            <a:r>
+              <a:rPr lang="ko-KR" altLang="en-US" sz="1600" dirty="0">
+                <a:latin typeface="D2Coding" panose="020B0609020101020101" pitchFamily="49" charset="-127"/>
+                <a:ea typeface="D2Coding" panose="020B0609020101020101" pitchFamily="49" charset="-127"/>
+              </a:rPr>
+              <a:t>이라고 했다면</a:t>
+            </a:r>
+            <a:r>
+              <a:rPr lang="en-US" altLang="ko-KR" sz="1600" dirty="0">
+                <a:latin typeface="D2Coding" panose="020B0609020101020101" pitchFamily="49" charset="-127"/>
+                <a:ea typeface="D2Coding" panose="020B0609020101020101" pitchFamily="49" charset="-127"/>
+              </a:rPr>
+              <a:t>, </a:t>
+            </a:r>
+            <a:r>
+              <a:rPr lang="ko-KR" altLang="en-US" sz="1600" dirty="0">
+                <a:latin typeface="D2Coding" panose="020B0609020101020101" pitchFamily="49" charset="-127"/>
+                <a:ea typeface="D2Coding" panose="020B0609020101020101" pitchFamily="49" charset="-127"/>
+              </a:rPr>
+              <a:t>컴퓨터는 </a:t>
+            </a:r>
+            <a:r>
+              <a:rPr lang="en-US" altLang="ko-KR" sz="1600" dirty="0">
+                <a:latin typeface="D2Coding" panose="020B0609020101020101" pitchFamily="49" charset="-127"/>
+                <a:ea typeface="D2Coding" panose="020B0609020101020101" pitchFamily="49" charset="-127"/>
+              </a:rPr>
+              <a:t>LA</a:t>
+            </a:r>
+            <a:r>
+              <a:rPr lang="ko-KR" altLang="en-US" sz="1600" dirty="0">
+                <a:latin typeface="D2Coding" panose="020B0609020101020101" pitchFamily="49" charset="-127"/>
+                <a:ea typeface="D2Coding" panose="020B0609020101020101" pitchFamily="49" charset="-127"/>
+              </a:rPr>
+              <a:t>의 무엇을 묻는지 알 수 없습니다</a:t>
+            </a:r>
+            <a:r>
+              <a:rPr lang="en-US" altLang="ko-KR" sz="1600" dirty="0">
+                <a:latin typeface="D2Coding" panose="020B0609020101020101" pitchFamily="49" charset="-127"/>
+                <a:ea typeface="D2Coding" panose="020B0609020101020101" pitchFamily="49" charset="-127"/>
+              </a:rPr>
+              <a:t>. </a:t>
+            </a:r>
+            <a:r>
+              <a:rPr lang="ko-KR" altLang="en-US" sz="1600" dirty="0">
+                <a:latin typeface="D2Coding" panose="020B0609020101020101" pitchFamily="49" charset="-127"/>
+                <a:ea typeface="D2Coding" panose="020B0609020101020101" pitchFamily="49" charset="-127"/>
+              </a:rPr>
+              <a:t>이전 대화 맥락을 합쳐 </a:t>
+            </a:r>
+            <a:r>
+              <a:rPr lang="en-US" altLang="ko-KR" sz="1600" dirty="0">
+                <a:latin typeface="D2Coding" panose="020B0609020101020101" pitchFamily="49" charset="-127"/>
+                <a:ea typeface="D2Coding" panose="020B0609020101020101" pitchFamily="49" charset="-127"/>
+              </a:rPr>
+              <a:t>LA </a:t>
+            </a:r>
+            <a:r>
+              <a:rPr lang="ko-KR" altLang="en-US" sz="1600" dirty="0">
+                <a:latin typeface="D2Coding" panose="020B0609020101020101" pitchFamily="49" charset="-127"/>
+                <a:ea typeface="D2Coding" panose="020B0609020101020101" pitchFamily="49" charset="-127"/>
+              </a:rPr>
+              <a:t>날씨라는 온전한 질문으로 복원하라</a:t>
+            </a:r>
+            <a:r>
+              <a:rPr lang="en-US" altLang="ko-KR" sz="1600" dirty="0">
+                <a:latin typeface="D2Coding" panose="020B0609020101020101" pitchFamily="49" charset="-127"/>
+                <a:ea typeface="D2Coding" panose="020B0609020101020101" pitchFamily="49" charset="-127"/>
+              </a:rPr>
+              <a:t>!(</a:t>
+            </a:r>
+            <a:r>
+              <a:rPr lang="en-US" altLang="ko-KR" sz="1600" dirty="0" err="1">
+                <a:latin typeface="D2Coding" panose="020B0609020101020101" pitchFamily="49" charset="-127"/>
+                <a:ea typeface="D2Coding" panose="020B0609020101020101" pitchFamily="49" charset="-127"/>
+              </a:rPr>
+              <a:t>ConversationalRetrievalChain</a:t>
+            </a:r>
+            <a:r>
+              <a:rPr lang="en-US" altLang="ko-KR" sz="1600" dirty="0">
+                <a:latin typeface="D2Coding" panose="020B0609020101020101" pitchFamily="49" charset="-127"/>
+                <a:ea typeface="D2Coding" panose="020B0609020101020101" pitchFamily="49" charset="-127"/>
+              </a:rPr>
+              <a:t>)</a:t>
+            </a:r>
+          </a:p>
+          <a:p>
+            <a:pPr marL="742950" lvl="1" indent="-285750">
               <a:buFont typeface="Wingdings" panose="05000000000000000000" pitchFamily="2" charset="2"/>
               <a:buChar char="v"/>
             </a:pPr>
@@ -5053,91 +5843,30 @@
             </a:endParaRPr>
           </a:p>
           <a:p>
-            <a:pPr marL="800100" lvl="1" indent="-342900">
-              <a:buFont typeface="Wingdings" panose="05000000000000000000" pitchFamily="2" charset="2"/>
-              <a:buChar char="v"/>
-            </a:pPr>
-            <a:endParaRPr lang="en-US" altLang="ko-KR" sz="900" dirty="0">
-              <a:latin typeface="D2Coding" panose="020B0609020101020101" pitchFamily="49" charset="-127"/>
-              <a:ea typeface="D2Coding" panose="020B0609020101020101" pitchFamily="49" charset="-127"/>
-            </a:endParaRPr>
-          </a:p>
-          <a:p>
-            <a:pPr marL="342900" indent="-342900">
-              <a:buFont typeface="Wingdings" panose="05000000000000000000" pitchFamily="2" charset="2"/>
-              <a:buChar char="v"/>
-            </a:pPr>
-            <a:r>
-              <a:rPr lang="ko-KR" altLang="en-US" dirty="0">
-                <a:latin typeface="D2Coding" panose="020B0609020101020101" pitchFamily="49" charset="-127"/>
-                <a:ea typeface="D2Coding" panose="020B0609020101020101" pitchFamily="49" charset="-127"/>
-              </a:rPr>
-              <a:t>실무 </a:t>
-            </a:r>
-            <a:r>
-              <a:rPr lang="en-US" altLang="ko-KR" dirty="0">
-                <a:latin typeface="D2Coding" panose="020B0609020101020101" pitchFamily="49" charset="-127"/>
-                <a:ea typeface="D2Coding" panose="020B0609020101020101" pitchFamily="49" charset="-127"/>
-              </a:rPr>
-              <a:t>RAG </a:t>
-            </a:r>
-            <a:r>
-              <a:rPr lang="ko-KR" altLang="en-US" dirty="0">
-                <a:latin typeface="D2Coding" panose="020B0609020101020101" pitchFamily="49" charset="-127"/>
-                <a:ea typeface="D2Coding" panose="020B0609020101020101" pitchFamily="49" charset="-127"/>
-              </a:rPr>
-              <a:t>시스템 구축 시 가장 자주 쓰이는 패턴 </a:t>
-            </a:r>
-            <a:r>
-              <a:rPr lang="en-US" altLang="ko-KR" dirty="0">
-                <a:latin typeface="D2Coding" panose="020B0609020101020101" pitchFamily="49" charset="-127"/>
-                <a:ea typeface="D2Coding" panose="020B0609020101020101" pitchFamily="49" charset="-127"/>
-              </a:rPr>
-              <a:t>(Prompt </a:t>
-            </a:r>
-            <a:r>
-              <a:rPr lang="ko-KR" altLang="en-US" dirty="0">
-                <a:latin typeface="D2Coding" panose="020B0609020101020101" pitchFamily="49" charset="-127"/>
-                <a:ea typeface="D2Coding" panose="020B0609020101020101" pitchFamily="49" charset="-127"/>
-              </a:rPr>
-              <a:t>가이드</a:t>
-            </a:r>
-            <a:r>
-              <a:rPr lang="en-US" altLang="ko-KR" dirty="0">
-                <a:latin typeface="D2Coding" panose="020B0609020101020101" pitchFamily="49" charset="-127"/>
-                <a:ea typeface="D2Coding" panose="020B0609020101020101" pitchFamily="49" charset="-127"/>
-              </a:rPr>
-              <a:t>)</a:t>
-            </a:r>
-          </a:p>
-          <a:p>
-            <a:pPr marL="342900" indent="-342900">
-              <a:buFont typeface="Wingdings" panose="05000000000000000000" pitchFamily="2" charset="2"/>
-              <a:buChar char="v"/>
-            </a:pPr>
-            <a:endParaRPr lang="en-US" altLang="ko-KR" sz="1600" dirty="0">
-              <a:latin typeface="D2Coding" panose="020B0609020101020101" pitchFamily="49" charset="-127"/>
-              <a:ea typeface="D2Coding" panose="020B0609020101020101" pitchFamily="49" charset="-127"/>
-            </a:endParaRPr>
-          </a:p>
-          <a:p>
             <a:pPr marL="742950" lvl="1" indent="-285750">
               <a:buFont typeface="Wingdings" panose="05000000000000000000" pitchFamily="2" charset="2"/>
               <a:buChar char="v"/>
             </a:pPr>
             <a:r>
+              <a:rPr lang="ko-KR" altLang="en-US" sz="1600" dirty="0" err="1">
+                <a:latin typeface="D2Coding" panose="020B0609020101020101" pitchFamily="49" charset="-127"/>
+                <a:ea typeface="D2Coding" panose="020B0609020101020101" pitchFamily="49" charset="-127"/>
+              </a:rPr>
+              <a:t>검색망</a:t>
+            </a:r>
+            <a:r>
               <a:rPr lang="ko-KR" altLang="en-US" sz="1600" dirty="0">
                 <a:latin typeface="D2Coding" panose="020B0609020101020101" pitchFamily="49" charset="-127"/>
                 <a:ea typeface="D2Coding" panose="020B0609020101020101" pitchFamily="49" charset="-127"/>
               </a:rPr>
-              <a:t>노이즈 제거 </a:t>
+              <a:t> 넓히기 </a:t>
             </a:r>
             <a:r>
               <a:rPr lang="en-US" altLang="ko-KR" sz="1600" dirty="0">
                 <a:latin typeface="D2Coding" panose="020B0609020101020101" pitchFamily="49" charset="-127"/>
                 <a:ea typeface="D2Coding" panose="020B0609020101020101" pitchFamily="49" charset="-127"/>
               </a:rPr>
-              <a:t>(Removing irrelevant text):</a:t>
+              <a:t>(Casting a wider net):</a:t>
             </a:r>
             <a:r>
               <a:rPr lang="ko-KR" altLang="en-US" sz="1600" dirty="0">
@@ -5151,376 +5880,169 @@
                 <a:latin typeface="D2Coding" panose="020B0609020101020101" pitchFamily="49" charset="-127"/>
                 <a:ea typeface="D2Coding" panose="020B0609020101020101" pitchFamily="49" charset="-127"/>
               </a:rPr>
-              <a:t>"</a:t>
+              <a:t>Multi-Query</a:t>
             </a:r>
             <a:r>
               <a:rPr lang="ko-KR" altLang="en-US" sz="1600" dirty="0">
                 <a:latin typeface="D2Coding" panose="020B0609020101020101" pitchFamily="49" charset="-127"/>
                 <a:ea typeface="D2Coding" panose="020B0609020101020101" pitchFamily="49" charset="-127"/>
               </a:rPr>
-              <a:t>안녕하세요</a:t>
+              <a:t>와 </a:t>
             </a:r>
             <a:r>
               <a:rPr lang="en-US" altLang="ko-KR" sz="1600" dirty="0">
                 <a:latin typeface="D2Coding" panose="020B0609020101020101" pitchFamily="49" charset="-127"/>
                 <a:ea typeface="D2Coding" panose="020B0609020101020101" pitchFamily="49" charset="-127"/>
               </a:rPr>
-              <a:t>, </a:t>
+              <a:t>RAG-Fusion</a:t>
             </a:r>
             <a:r>
               <a:rPr lang="ko-KR" altLang="en-US" sz="1600" dirty="0">
                 <a:latin typeface="D2Coding" panose="020B0609020101020101" pitchFamily="49" charset="-127"/>
                 <a:ea typeface="D2Coding" panose="020B0609020101020101" pitchFamily="49" charset="-127"/>
               </a:rPr>
-              <a:t>혹시 다름이 아니라 </a:t>
+              <a:t>의 원리로 유의어나 연관 질문들을 여러 개 생성해 냄으로써 단 한 번의 검색으로는 놓칠 수 있었던 정답 문서들을 촘촘하게 찾아내라</a:t>
             </a:r>
             <a:r>
               <a:rPr lang="en-US" altLang="ko-KR" sz="1600" dirty="0">
                 <a:latin typeface="D2Coding" panose="020B0609020101020101" pitchFamily="49" charset="-127"/>
                 <a:ea typeface="D2Coding" panose="020B0609020101020101" pitchFamily="49" charset="-127"/>
               </a:rPr>
-              <a:t>2026</a:t>
-            </a:r>
-            <a:r>
-              <a:rPr lang="ko-KR" altLang="en-US" sz="1600" dirty="0">
-                <a:latin typeface="D2Coding" panose="020B0609020101020101" pitchFamily="49" charset="-127"/>
-                <a:ea typeface="D2Coding" panose="020B0609020101020101" pitchFamily="49" charset="-127"/>
-              </a:rPr>
-              <a:t>년 연말정산 프로세스에 대해 알고 싶어서 </a:t>
-            </a:r>
-            <a:r>
-              <a:rPr lang="ko-KR" altLang="en-US" sz="1600" dirty="0" err="1">
-                <a:latin typeface="D2Coding" panose="020B0609020101020101" pitchFamily="49" charset="-127"/>
-                <a:ea typeface="D2Coding" panose="020B0609020101020101" pitchFamily="49" charset="-127"/>
-              </a:rPr>
-              <a:t>문의드리는데</a:t>
-            </a:r>
-            <a:r>
-              <a:rPr lang="en-US" altLang="ko-KR" sz="1600" dirty="0">
-                <a:latin typeface="D2Coding" panose="020B0609020101020101" pitchFamily="49" charset="-127"/>
-                <a:ea typeface="D2Coding" panose="020B0609020101020101" pitchFamily="49" charset="-127"/>
-              </a:rPr>
-              <a:t>..."</a:t>
-            </a:r>
-            <a:r>
-              <a:rPr lang="ko-KR" altLang="en-US" sz="1600" dirty="0">
-                <a:latin typeface="D2Coding" panose="020B0609020101020101" pitchFamily="49" charset="-127"/>
-                <a:ea typeface="D2Coding" panose="020B0609020101020101" pitchFamily="49" charset="-127"/>
-              </a:rPr>
-              <a:t>에서 인사말이나 불필요한 수식어를 깎아내고 </a:t>
-            </a:r>
-            <a:r>
-              <a:rPr lang="en-US" altLang="ko-KR" sz="1600" dirty="0">
-                <a:latin typeface="D2Coding" panose="020B0609020101020101" pitchFamily="49" charset="-127"/>
-                <a:ea typeface="D2Coding" panose="020B0609020101020101" pitchFamily="49" charset="-127"/>
-              </a:rPr>
-              <a:t>2026 </a:t>
-            </a:r>
-            <a:r>
-              <a:rPr lang="ko-KR" altLang="en-US" sz="1600" dirty="0">
-                <a:latin typeface="D2Coding" panose="020B0609020101020101" pitchFamily="49" charset="-127"/>
-                <a:ea typeface="D2Coding" panose="020B0609020101020101" pitchFamily="49" charset="-127"/>
-              </a:rPr>
-              <a:t>연말정산 프로세스라는 핵심 키워드만 남겨라</a:t>
-            </a:r>
-            <a:r>
-              <a:rPr lang="en-US" altLang="ko-KR" sz="1600" dirty="0">
-                <a:latin typeface="D2Coding" panose="020B0609020101020101" pitchFamily="49" charset="-127"/>
-                <a:ea typeface="D2Coding" panose="020B0609020101020101" pitchFamily="49" charset="-127"/>
-              </a:rPr>
               <a:t>!</a:t>
             </a:r>
           </a:p>
-          <a:p>
-            <a:pPr marL="742950" lvl="1" indent="-285750">
-              <a:buFont typeface="Wingdings" panose="05000000000000000000" pitchFamily="2" charset="2"/>
-              <a:buChar char="v"/>
-            </a:pPr>
-            <a:endParaRPr lang="en-US" altLang="ko-KR" sz="1600" dirty="0">
-              <a:latin typeface="D2Coding" panose="020B0609020101020101" pitchFamily="49" charset="-127"/>
-              <a:ea typeface="D2Coding" panose="020B0609020101020101" pitchFamily="49" charset="-127"/>
-            </a:endParaRPr>
-          </a:p>
-          <a:p>
-            <a:pPr marL="742950" lvl="1" indent="-285750">
-              <a:buFont typeface="Wingdings" panose="05000000000000000000" pitchFamily="2" charset="2"/>
-              <a:buChar char="v"/>
-            </a:pPr>
-            <a:r>
-              <a:rPr lang="ko-KR" altLang="en-US" sz="1600" dirty="0">
-                <a:latin typeface="D2Coding" panose="020B0609020101020101" pitchFamily="49" charset="-127"/>
-                <a:ea typeface="D2Coding" panose="020B0609020101020101" pitchFamily="49" charset="-127"/>
-              </a:rPr>
-              <a:t>대화 맥락 반영 </a:t>
-            </a:r>
-            <a:r>
-              <a:rPr lang="en-US" altLang="ko-KR" sz="1600" dirty="0">
-                <a:latin typeface="D2Coding" panose="020B0609020101020101" pitchFamily="49" charset="-127"/>
-                <a:ea typeface="D2Coding" panose="020B0609020101020101" pitchFamily="49" charset="-127"/>
-              </a:rPr>
-              <a:t>(Grounding with past history):</a:t>
-            </a:r>
-            <a:r>
-              <a:rPr lang="ko-KR" altLang="en-US" sz="1600" dirty="0">
-                <a:latin typeface="D2Coding" panose="020B0609020101020101" pitchFamily="49" charset="-127"/>
-                <a:ea typeface="D2Coding" panose="020B0609020101020101" pitchFamily="49" charset="-127"/>
-              </a:rPr>
-              <a:t> 사용자가 이전에 </a:t>
-            </a:r>
-            <a:r>
-              <a:rPr lang="en-US" altLang="ko-KR" sz="1600" dirty="0">
-                <a:latin typeface="D2Coding" panose="020B0609020101020101" pitchFamily="49" charset="-127"/>
-                <a:ea typeface="D2Coding" panose="020B0609020101020101" pitchFamily="49" charset="-127"/>
-              </a:rPr>
-              <a:t>"</a:t>
-            </a:r>
-            <a:r>
-              <a:rPr lang="ko-KR" altLang="en-US" sz="1600" dirty="0">
-                <a:latin typeface="D2Coding" panose="020B0609020101020101" pitchFamily="49" charset="-127"/>
-                <a:ea typeface="D2Coding" panose="020B0609020101020101" pitchFamily="49" charset="-127"/>
-              </a:rPr>
-              <a:t>샌프란시스코</a:t>
-            </a:r>
-            <a:r>
-              <a:rPr lang="en-US" altLang="ko-KR" sz="1600" dirty="0">
-                <a:latin typeface="D2Coding" panose="020B0609020101020101" pitchFamily="49" charset="-127"/>
-                <a:ea typeface="D2Coding" panose="020B0609020101020101" pitchFamily="49" charset="-127"/>
-              </a:rPr>
-              <a:t>(SF) </a:t>
-            </a:r>
-            <a:r>
-              <a:rPr lang="ko-KR" altLang="en-US" sz="1600" dirty="0">
-                <a:latin typeface="D2Coding" panose="020B0609020101020101" pitchFamily="49" charset="-127"/>
-                <a:ea typeface="D2Coding" panose="020B0609020101020101" pitchFamily="49" charset="-127"/>
-              </a:rPr>
-              <a:t>날씨 어때</a:t>
-            </a:r>
-            <a:r>
-              <a:rPr lang="en-US" altLang="ko-KR" sz="1600" dirty="0">
-                <a:latin typeface="D2Coding" panose="020B0609020101020101" pitchFamily="49" charset="-127"/>
-                <a:ea typeface="D2Coding" panose="020B0609020101020101" pitchFamily="49" charset="-127"/>
-              </a:rPr>
-              <a:t>?"</a:t>
-            </a:r>
-            <a:r>
-              <a:rPr lang="ko-KR" altLang="en-US" sz="1600" dirty="0">
-                <a:latin typeface="D2Coding" panose="020B0609020101020101" pitchFamily="49" charset="-127"/>
-                <a:ea typeface="D2Coding" panose="020B0609020101020101" pitchFamily="49" charset="-127"/>
-              </a:rPr>
-              <a:t>라고 묻고</a:t>
-            </a:r>
-            <a:r>
-              <a:rPr lang="en-US" altLang="ko-KR" sz="1600" dirty="0">
-                <a:latin typeface="D2Coding" panose="020B0609020101020101" pitchFamily="49" charset="-127"/>
-                <a:ea typeface="D2Coding" panose="020B0609020101020101" pitchFamily="49" charset="-127"/>
-              </a:rPr>
-              <a:t>, </a:t>
-            </a:r>
-            <a:r>
-              <a:rPr lang="ko-KR" altLang="en-US" sz="1600" dirty="0">
-                <a:latin typeface="D2Coding" panose="020B0609020101020101" pitchFamily="49" charset="-127"/>
-                <a:ea typeface="D2Coding" panose="020B0609020101020101" pitchFamily="49" charset="-127"/>
-              </a:rPr>
-              <a:t>이어서 </a:t>
-            </a:r>
-            <a:r>
-              <a:rPr lang="en-US" altLang="ko-KR" sz="1600" dirty="0">
-                <a:latin typeface="D2Coding" panose="020B0609020101020101" pitchFamily="49" charset="-127"/>
-                <a:ea typeface="D2Coding" panose="020B0609020101020101" pitchFamily="49" charset="-127"/>
-              </a:rPr>
-              <a:t>"</a:t>
-            </a:r>
-            <a:r>
-              <a:rPr lang="ko-KR" altLang="en-US" sz="1600" dirty="0">
-                <a:latin typeface="D2Coding" panose="020B0609020101020101" pitchFamily="49" charset="-127"/>
-                <a:ea typeface="D2Coding" panose="020B0609020101020101" pitchFamily="49" charset="-127"/>
-              </a:rPr>
-              <a:t>그럼 </a:t>
-            </a:r>
-            <a:r>
-              <a:rPr lang="en-US" altLang="ko-KR" sz="1600" dirty="0">
-                <a:latin typeface="D2Coding" panose="020B0609020101020101" pitchFamily="49" charset="-127"/>
-                <a:ea typeface="D2Coding" panose="020B0609020101020101" pitchFamily="49" charset="-127"/>
-              </a:rPr>
-              <a:t>LA</a:t>
-            </a:r>
-            <a:r>
-              <a:rPr lang="ko-KR" altLang="en-US" sz="1600" dirty="0">
-                <a:latin typeface="D2Coding" panose="020B0609020101020101" pitchFamily="49" charset="-127"/>
-                <a:ea typeface="D2Coding" panose="020B0609020101020101" pitchFamily="49" charset="-127"/>
-              </a:rPr>
-              <a:t>는</a:t>
-            </a:r>
-            <a:r>
-              <a:rPr lang="en-US" altLang="ko-KR" sz="1600" dirty="0">
-                <a:latin typeface="D2Coding" panose="020B0609020101020101" pitchFamily="49" charset="-127"/>
-                <a:ea typeface="D2Coding" panose="020B0609020101020101" pitchFamily="49" charset="-127"/>
-              </a:rPr>
-              <a:t>?"</a:t>
-            </a:r>
-            <a:r>
-              <a:rPr lang="ko-KR" altLang="en-US" sz="1600" dirty="0">
-                <a:latin typeface="D2Coding" panose="020B0609020101020101" pitchFamily="49" charset="-127"/>
-                <a:ea typeface="D2Coding" panose="020B0609020101020101" pitchFamily="49" charset="-127"/>
-              </a:rPr>
-              <a:t>이라고 했다면</a:t>
-            </a:r>
-            <a:r>
-              <a:rPr lang="en-US" altLang="ko-KR" sz="1600" dirty="0">
-                <a:latin typeface="D2Coding" panose="020B0609020101020101" pitchFamily="49" charset="-127"/>
-                <a:ea typeface="D2Coding" panose="020B0609020101020101" pitchFamily="49" charset="-127"/>
-              </a:rPr>
-              <a:t>, </a:t>
-            </a:r>
-            <a:r>
-              <a:rPr lang="ko-KR" altLang="en-US" sz="1600" dirty="0">
-                <a:latin typeface="D2Coding" panose="020B0609020101020101" pitchFamily="49" charset="-127"/>
-                <a:ea typeface="D2Coding" panose="020B0609020101020101" pitchFamily="49" charset="-127"/>
-              </a:rPr>
-              <a:t>컴퓨터는 </a:t>
-            </a:r>
-            <a:r>
-              <a:rPr lang="en-US" altLang="ko-KR" sz="1600" dirty="0">
-                <a:latin typeface="D2Coding" panose="020B0609020101020101" pitchFamily="49" charset="-127"/>
-                <a:ea typeface="D2Coding" panose="020B0609020101020101" pitchFamily="49" charset="-127"/>
-              </a:rPr>
-              <a:t>LA</a:t>
-            </a:r>
-            <a:r>
-              <a:rPr lang="ko-KR" altLang="en-US" sz="1600" dirty="0">
-                <a:latin typeface="D2Coding" panose="020B0609020101020101" pitchFamily="49" charset="-127"/>
-                <a:ea typeface="D2Coding" panose="020B0609020101020101" pitchFamily="49" charset="-127"/>
-              </a:rPr>
-              <a:t>의 무엇을 묻는지 알 수 없습니다</a:t>
-            </a:r>
-            <a:r>
-              <a:rPr lang="en-US" altLang="ko-KR" sz="1600" dirty="0">
-                <a:latin typeface="D2Coding" panose="020B0609020101020101" pitchFamily="49" charset="-127"/>
-                <a:ea typeface="D2Coding" panose="020B0609020101020101" pitchFamily="49" charset="-127"/>
-              </a:rPr>
-              <a:t>. </a:t>
-            </a:r>
-            <a:r>
-              <a:rPr lang="ko-KR" altLang="en-US" sz="1600" dirty="0">
-                <a:latin typeface="D2Coding" panose="020B0609020101020101" pitchFamily="49" charset="-127"/>
-                <a:ea typeface="D2Coding" panose="020B0609020101020101" pitchFamily="49" charset="-127"/>
-              </a:rPr>
-              <a:t>이전 대화 맥락을 합쳐 </a:t>
-            </a:r>
-            <a:r>
-              <a:rPr lang="en-US" altLang="ko-KR" sz="1600" dirty="0">
-                <a:latin typeface="D2Coding" panose="020B0609020101020101" pitchFamily="49" charset="-127"/>
-                <a:ea typeface="D2Coding" panose="020B0609020101020101" pitchFamily="49" charset="-127"/>
-              </a:rPr>
-              <a:t>LA </a:t>
-            </a:r>
-            <a:r>
-              <a:rPr lang="ko-KR" altLang="en-US" sz="1600" dirty="0">
-                <a:latin typeface="D2Coding" panose="020B0609020101020101" pitchFamily="49" charset="-127"/>
-                <a:ea typeface="D2Coding" panose="020B0609020101020101" pitchFamily="49" charset="-127"/>
-              </a:rPr>
-              <a:t>날씨라는 온전한 질문으로 복원하라</a:t>
-            </a:r>
-            <a:r>
-              <a:rPr lang="en-US" altLang="ko-KR" sz="1600" dirty="0">
-                <a:latin typeface="D2Coding" panose="020B0609020101020101" pitchFamily="49" charset="-127"/>
-                <a:ea typeface="D2Coding" panose="020B0609020101020101" pitchFamily="49" charset="-127"/>
-              </a:rPr>
-              <a:t>!(</a:t>
-            </a:r>
-            <a:r>
-              <a:rPr lang="en-US" altLang="ko-KR" sz="1600" dirty="0" err="1">
-                <a:latin typeface="D2Coding" panose="020B0609020101020101" pitchFamily="49" charset="-127"/>
-                <a:ea typeface="D2Coding" panose="020B0609020101020101" pitchFamily="49" charset="-127"/>
-              </a:rPr>
-              <a:t>ConversationalRetrievalChain</a:t>
-            </a:r>
-            <a:r>
-              <a:rPr lang="en-US" altLang="ko-KR" sz="1600" dirty="0">
-                <a:latin typeface="D2Coding" panose="020B0609020101020101" pitchFamily="49" charset="-127"/>
-                <a:ea typeface="D2Coding" panose="020B0609020101020101" pitchFamily="49" charset="-127"/>
-              </a:rPr>
-              <a:t>)</a:t>
-            </a:r>
-          </a:p>
-          <a:p>
-            <a:pPr marL="742950" lvl="1" indent="-285750">
-              <a:buFont typeface="Wingdings" panose="05000000000000000000" pitchFamily="2" charset="2"/>
-              <a:buChar char="v"/>
-            </a:pPr>
-            <a:endParaRPr lang="en-US" altLang="ko-KR" sz="1600" dirty="0">
-              <a:latin typeface="D2Coding" panose="020B0609020101020101" pitchFamily="49" charset="-127"/>
-              <a:ea typeface="D2Coding" panose="020B0609020101020101" pitchFamily="49" charset="-127"/>
-            </a:endParaRPr>
-          </a:p>
-          <a:p>
-            <a:pPr marL="742950" lvl="1" indent="-285750">
-              <a:buFont typeface="Wingdings" panose="05000000000000000000" pitchFamily="2" charset="2"/>
-              <a:buChar char="v"/>
-            </a:pPr>
-            <a:r>
-              <a:rPr lang="ko-KR" altLang="en-US" sz="1600" dirty="0" err="1">
-                <a:latin typeface="D2Coding" panose="020B0609020101020101" pitchFamily="49" charset="-127"/>
-                <a:ea typeface="D2Coding" panose="020B0609020101020101" pitchFamily="49" charset="-127"/>
-              </a:rPr>
-              <a:t>검색망</a:t>
-            </a:r>
-            <a:r>
-              <a:rPr lang="ko-KR" altLang="en-US" sz="1600" dirty="0">
-                <a:latin typeface="D2Coding" panose="020B0609020101020101" pitchFamily="49" charset="-127"/>
-                <a:ea typeface="D2Coding" panose="020B0609020101020101" pitchFamily="49" charset="-127"/>
-              </a:rPr>
-              <a:t> 넓히기 </a:t>
-            </a:r>
-            <a:r>
-              <a:rPr lang="en-US" altLang="ko-KR" sz="1600" dirty="0">
-                <a:latin typeface="D2Coding" panose="020B0609020101020101" pitchFamily="49" charset="-127"/>
-                <a:ea typeface="D2Coding" panose="020B0609020101020101" pitchFamily="49" charset="-127"/>
-              </a:rPr>
-              <a:t>(Casting a wider net):</a:t>
-            </a:r>
-            <a:r>
-              <a:rPr lang="ko-KR" altLang="en-US" sz="1600" dirty="0">
-                <a:latin typeface="D2Coding" panose="020B0609020101020101" pitchFamily="49" charset="-127"/>
-                <a:ea typeface="D2Coding" panose="020B0609020101020101" pitchFamily="49" charset="-127"/>
-              </a:rPr>
-              <a:t> </a:t>
-            </a:r>
-            <a:r>
-              <a:rPr lang="en-US" altLang="ko-KR" sz="1600" dirty="0">
-                <a:latin typeface="D2Coding" panose="020B0609020101020101" pitchFamily="49" charset="-127"/>
-                <a:ea typeface="D2Coding" panose="020B0609020101020101" pitchFamily="49" charset="-127"/>
-              </a:rPr>
-              <a:t>Multi-Query</a:t>
-            </a:r>
-            <a:r>
-              <a:rPr lang="ko-KR" altLang="en-US" sz="1600" dirty="0">
-                <a:latin typeface="D2Coding" panose="020B0609020101020101" pitchFamily="49" charset="-127"/>
-                <a:ea typeface="D2Coding" panose="020B0609020101020101" pitchFamily="49" charset="-127"/>
-              </a:rPr>
-              <a:t>와 </a:t>
-            </a:r>
-            <a:r>
-              <a:rPr lang="en-US" altLang="ko-KR" sz="1600" dirty="0">
-                <a:latin typeface="D2Coding" panose="020B0609020101020101" pitchFamily="49" charset="-127"/>
-                <a:ea typeface="D2Coding" panose="020B0609020101020101" pitchFamily="49" charset="-127"/>
-              </a:rPr>
-              <a:t>RAG-Fusion</a:t>
-            </a:r>
-            <a:r>
-              <a:rPr lang="ko-KR" altLang="en-US" sz="1600" dirty="0">
-                <a:latin typeface="D2Coding" panose="020B0609020101020101" pitchFamily="49" charset="-127"/>
-                <a:ea typeface="D2Coding" panose="020B0609020101020101" pitchFamily="49" charset="-127"/>
-              </a:rPr>
-              <a:t>의 원리로 유의어나 연관 질문들을 여러 개 생성해 냄으로써 단 한 번의 검색으로는 놓칠 수 있었던 정답 문서들을 촘촘하게 찾아내라</a:t>
-            </a:r>
-            <a:r>
-              <a:rPr lang="en-US" altLang="ko-KR" sz="1600" dirty="0">
-                <a:latin typeface="D2Coding" panose="020B0609020101020101" pitchFamily="49" charset="-127"/>
-                <a:ea typeface="D2Coding" panose="020B0609020101020101" pitchFamily="49" charset="-127"/>
-              </a:rPr>
-              <a:t>!</a:t>
-            </a:r>
+        </p:txBody>
+      </p:sp>
+      <p:sp>
+        <p:nvSpPr>
+          <p:cNvPr id="2" name="슬라이드 번호 개체 틀 3">
+            <a:extLst>
+              <a:ext uri="{FF2B5EF4-FFF2-40B4-BE49-F238E27FC236}">
+                <a16:creationId xmlns:a16="http://schemas.microsoft.com/office/drawing/2014/main" id="{E845047B-6A54-8B91-7F6A-7B7922300450}"/>
+              </a:ext>
+            </a:extLst>
+          </p:cNvPr>
+          <p:cNvSpPr txBox="1">
+            <a:spLocks/>
+          </p:cNvSpPr>
+          <p:nvPr/>
+        </p:nvSpPr>
+        <p:spPr>
+          <a:xfrm>
+            <a:off x="11162230" y="299420"/>
+            <a:ext cx="753545" cy="365125"/>
+          </a:xfrm>
+          <a:prstGeom prst="rect">
+            <a:avLst/>
+          </a:prstGeom>
+        </p:spPr>
+        <p:txBody>
+          <a:bodyPr vert="horz" lIns="91440" tIns="45720" rIns="91440" bIns="45720" rtlCol="0" anchor="ctr"/>
+          <a:lstStyle>
+            <a:defPPr rtl="0">
+              <a:defRPr lang="ko-KR"/>
+            </a:defPPr>
+            <a:lvl1pPr marL="0" algn="r" defTabSz="914400" rtl="0" eaLnBrk="1" latinLnBrk="0" hangingPunct="1">
+              <a:defRPr sz="1200" kern="1200" baseline="0">
+                <a:solidFill>
+                  <a:schemeClr val="tx1">
+                    <a:lumMod val="65000"/>
+                    <a:lumOff val="35000"/>
+                  </a:schemeClr>
+                </a:solidFill>
+                <a:latin typeface="맑은 고딕" panose="020B0503020000020004" pitchFamily="50" charset="-127"/>
+                <a:ea typeface="맑은 고딕" panose="020B0503020000020004" pitchFamily="50" charset="-127"/>
+                <a:cs typeface="+mn-cs"/>
+              </a:defRPr>
+            </a:lvl1pPr>
+            <a:lvl2pPr marL="457200" algn="l" defTabSz="914400" rtl="0" eaLnBrk="1" latinLnBrk="0" hangingPunct="1">
+              <a:defRPr sz="1800" kern="1200">
+                <a:solidFill>
+                  <a:schemeClr val="tx1"/>
+                </a:solidFill>
+                <a:latin typeface="+mn-lt"/>
+                <a:ea typeface="+mn-ea"/>
+                <a:cs typeface="+mn-cs"/>
+              </a:defRPr>
+            </a:lvl2pPr>
+            <a:lvl3pPr marL="914400" algn="l" defTabSz="914400" rtl="0" eaLnBrk="1" latinLnBrk="0" hangingPunct="1">
+              <a:defRPr sz="1800" kern="1200">
+                <a:solidFill>
+                  <a:schemeClr val="tx1"/>
+                </a:solidFill>
+                <a:latin typeface="+mn-lt"/>
+                <a:ea typeface="+mn-ea"/>
+                <a:cs typeface="+mn-cs"/>
+              </a:defRPr>
+            </a:lvl3pPr>
+            <a:lvl4pPr marL="1371600" algn="l" defTabSz="914400" rtl="0" eaLnBrk="1" latinLnBrk="0" hangingPunct="1">
+              <a:defRPr sz="1800" kern="1200">
+                <a:solidFill>
+                  <a:schemeClr val="tx1"/>
+                </a:solidFill>
+                <a:latin typeface="+mn-lt"/>
+                <a:ea typeface="+mn-ea"/>
+                <a:cs typeface="+mn-cs"/>
+              </a:defRPr>
+            </a:lvl4pPr>
+            <a:lvl5pPr marL="1828800" algn="l" defTabSz="914400" rtl="0" eaLnBrk="1" latinLnBrk="0" hangingPunct="1">
+              <a:defRPr sz="1800" kern="1200">
+                <a:solidFill>
+                  <a:schemeClr val="tx1"/>
+                </a:solidFill>
+                <a:latin typeface="+mn-lt"/>
+                <a:ea typeface="+mn-ea"/>
+                <a:cs typeface="+mn-cs"/>
+              </a:defRPr>
+            </a:lvl5pPr>
+            <a:lvl6pPr marL="2286000" algn="l" defTabSz="914400" rtl="0" eaLnBrk="1" latinLnBrk="0" hangingPunct="1">
+              <a:defRPr sz="1800" kern="1200">
+                <a:solidFill>
+                  <a:schemeClr val="tx1"/>
+                </a:solidFill>
+                <a:latin typeface="+mn-lt"/>
+                <a:ea typeface="+mn-ea"/>
+                <a:cs typeface="+mn-cs"/>
+              </a:defRPr>
+            </a:lvl6pPr>
+            <a:lvl7pPr marL="2743200" algn="l" defTabSz="914400" rtl="0" eaLnBrk="1" latinLnBrk="0" hangingPunct="1">
+              <a:defRPr sz="1800" kern="1200">
+                <a:solidFill>
+                  <a:schemeClr val="tx1"/>
+                </a:solidFill>
+                <a:latin typeface="+mn-lt"/>
+                <a:ea typeface="+mn-ea"/>
+                <a:cs typeface="+mn-cs"/>
+              </a:defRPr>
+            </a:lvl7pPr>
+            <a:lvl8pPr marL="3200400" algn="l" defTabSz="914400" rtl="0" eaLnBrk="1" latinLnBrk="0" hangingPunct="1">
+              <a:defRPr sz="1800" kern="1200">
+                <a:solidFill>
+                  <a:schemeClr val="tx1"/>
+                </a:solidFill>
+                <a:latin typeface="+mn-lt"/>
+                <a:ea typeface="+mn-ea"/>
+                <a:cs typeface="+mn-cs"/>
+              </a:defRPr>
+            </a:lvl8pPr>
+            <a:lvl9pPr marL="3657600" algn="l" defTabSz="914400" rtl="0" eaLnBrk="1" latinLnBrk="0" hangingPunct="1">
+              <a:defRPr sz="1800" kern="1200">
+                <a:solidFill>
+                  <a:schemeClr val="tx1"/>
+                </a:solidFill>
+                <a:latin typeface="+mn-lt"/>
+                <a:ea typeface="+mn-ea"/>
+                <a:cs typeface="+mn-cs"/>
+              </a:defRPr>
+            </a:lvl9pPr>
+          </a:lstStyle>
+          <a:p>
+            <a:fld id="{D57F1E4F-1CFF-5643-939E-217C01CDF565}" type="slidenum">
+              <a:rPr lang="en-US" b="1" smtClean="0"/>
+              <a:pPr/>
+              <a:t>14</a:t>
+            </a:fld>
+            <a:endParaRPr lang="en-US" b="1" dirty="0"/>
           </a:p>
         </p:txBody>
       </p:sp>
@@ -5616,41 +6138,6 @@
       </p:sp>
       <p:sp>
         <p:nvSpPr>
-          <p:cNvPr id="4" name="슬라이드 번호 개체 틀 3">
-            <a:extLst>
-              <a:ext uri="{FF2B5EF4-FFF2-40B4-BE49-F238E27FC236}">
-                <a16:creationId xmlns:a16="http://schemas.microsoft.com/office/drawing/2014/main" id="{E596177E-948F-8948-C77F-0B2D47F01D19}"/>
-              </a:ext>
-            </a:extLst>
-          </p:cNvPr>
-          <p:cNvSpPr>
-            <a:spLocks noGrp="1"/>
-          </p:cNvSpPr>
-          <p:nvPr>
-            <p:ph type="sldNum" sz="quarter" idx="12"/>
-          </p:nvPr>
-        </p:nvSpPr>
-        <p:spPr>
-          <a:xfrm>
-            <a:off x="10514011" y="6036261"/>
-            <a:ext cx="753545" cy="365125"/>
-          </a:xfrm>
-        </p:spPr>
-        <p:txBody>
-          <a:bodyPr/>
-          <a:lstStyle/>
-          <a:p>
-            <a:fld id="{D57F1E4F-1CFF-5643-939E-217C01CDF565}" type="slidenum">
-              <a:rPr lang="en-US" smtClean="0"/>
-              <a:pPr/>
-              <a:t>15</a:t>
-            </a:fld>
-            <a:endParaRPr lang="en-US" dirty="0"/>
-          </a:p>
-        </p:txBody>
-      </p:sp>
-      <p:sp>
-        <p:nvSpPr>
           <p:cNvPr id="3" name="제목 1">
             <a:extLst>
               <a:ext uri="{FF2B5EF4-FFF2-40B4-BE49-F238E27FC236}">
@@ -5994,41 +6481,6 @@
           <a:chExt cx="0" cy="0"/>
         </a:xfrm>
       </p:grpSpPr>
-      <p:sp>
-        <p:nvSpPr>
-          <p:cNvPr id="4" name="슬라이드 번호 개체 틀 3">
-            <a:extLst>
-              <a:ext uri="{FF2B5EF4-FFF2-40B4-BE49-F238E27FC236}">
-                <a16:creationId xmlns:a16="http://schemas.microsoft.com/office/drawing/2014/main" id="{EDDEFC5F-326D-26B9-2ACC-A68DB81FA422}"/>
-              </a:ext>
-            </a:extLst>
-          </p:cNvPr>
-          <p:cNvSpPr>
-            <a:spLocks noGrp="1"/>
-          </p:cNvSpPr>
-          <p:nvPr>
-            <p:ph type="sldNum" sz="quarter" idx="12"/>
-          </p:nvPr>
-        </p:nvSpPr>
-        <p:spPr>
-          <a:xfrm>
-            <a:off x="10514011" y="6036261"/>
-            <a:ext cx="753545" cy="365125"/>
-          </a:xfrm>
-        </p:spPr>
-        <p:txBody>
-          <a:bodyPr/>
-          <a:lstStyle/>
-          <a:p>
-            <a:fld id="{D57F1E4F-1CFF-5643-939E-217C01CDF565}" type="slidenum">
-              <a:rPr lang="en-US" smtClean="0"/>
-              <a:pPr/>
-              <a:t>16</a:t>
-            </a:fld>
-            <a:endParaRPr lang="en-US" dirty="0"/>
-          </a:p>
-        </p:txBody>
-      </p:sp>
       <p:sp>
         <p:nvSpPr>
           <p:cNvPr id="3" name="제목 1">
@@ -6318,7 +6770,21 @@
                 <a:latin typeface="D2Coding" panose="020B0609020101020101" pitchFamily="49" charset="-127"/>
                 <a:ea typeface="D2Coding" panose="020B0609020101020101" pitchFamily="49" charset="-127"/>
               </a:rPr>
-              <a:t>, LLM</a:t>
+              <a:t> </a:t>
+            </a:r>
+            <a:r>
+              <a:rPr lang="ko-KR" altLang="en-US" sz="1600" dirty="0">
+                <a:latin typeface="D2Coding" panose="020B0609020101020101" pitchFamily="49" charset="-127"/>
+                <a:ea typeface="D2Coding" panose="020B0609020101020101" pitchFamily="49" charset="-127"/>
+              </a:rPr>
+              <a:t>다시 </a:t>
+            </a:r>
+            <a:r>
+              <a:rPr lang="en-US" altLang="ko-KR" sz="1600" dirty="0">
+                <a:latin typeface="D2Coding" panose="020B0609020101020101" pitchFamily="49" charset="-127"/>
+                <a:ea typeface="D2Coding" panose="020B0609020101020101" pitchFamily="49" charset="-127"/>
+              </a:rPr>
+              <a:t>LLM</a:t>
             </a:r>
             <a:r>
               <a:rPr lang="ko-KR" altLang="en-US" sz="1600" dirty="0">
@@ -6379,13 +6845,19 @@
         </p:nvSpPr>
         <p:spPr>
           <a:xfrm>
-            <a:off x="7830155" y="2753166"/>
-            <a:ext cx="3829050" cy="2644635"/>
+            <a:off x="7709952" y="2801597"/>
+            <a:ext cx="3939122" cy="3366341"/>
           </a:xfrm>
           <a:prstGeom prst="rect">
             <a:avLst/>
           </a:prstGeom>
           <a:noFill/>
+          <a:ln>
+            <a:solidFill>
+              <a:schemeClr val="tx1"/>
+            </a:solidFill>
+            <a:prstDash val="dash"/>
+          </a:ln>
         </p:spPr>
         <p:txBody>
           <a:bodyPr wrap="square">
@@ -6462,55 +6934,6 @@
               <a:buFont typeface="Wingdings" panose="05000000000000000000" pitchFamily="2" charset="2"/>
               <a:buChar char="v"/>
             </a:pPr>
-            <a:r>
-              <a:rPr lang="ko-KR" altLang="en-US" sz="1400" dirty="0">
-                <a:latin typeface="D2Coding" panose="020B0609020101020101" pitchFamily="49" charset="-127"/>
-                <a:ea typeface="D2Coding" panose="020B0609020101020101" pitchFamily="49" charset="-127"/>
-              </a:rPr>
-              <a:t>단점</a:t>
-            </a:r>
-            <a:r>
-              <a:rPr lang="en-US" altLang="ko-KR" sz="1400" dirty="0">
-                <a:latin typeface="D2Coding" panose="020B0609020101020101" pitchFamily="49" charset="-127"/>
-                <a:ea typeface="D2Coding" panose="020B0609020101020101" pitchFamily="49" charset="-127"/>
-              </a:rPr>
-              <a:t>:</a:t>
-            </a:r>
-            <a:r>
-              <a:rPr lang="ko-KR" altLang="en-US" sz="1400" dirty="0">
-                <a:latin typeface="D2Coding" panose="020B0609020101020101" pitchFamily="49" charset="-127"/>
-                <a:ea typeface="D2Coding" panose="020B0609020101020101" pitchFamily="49" charset="-127"/>
-              </a:rPr>
-              <a:t> </a:t>
-            </a:r>
-            <a:r>
-              <a:rPr lang="en-US" altLang="ko-KR" sz="1400" dirty="0">
-                <a:latin typeface="D2Coding" panose="020B0609020101020101" pitchFamily="49" charset="-127"/>
-                <a:ea typeface="D2Coding" panose="020B0609020101020101" pitchFamily="49" charset="-127"/>
-              </a:rPr>
-              <a:t>LLM</a:t>
-            </a:r>
-            <a:r>
-              <a:rPr lang="ko-KR" altLang="en-US" sz="1400" dirty="0">
-                <a:latin typeface="D2Coding" panose="020B0609020101020101" pitchFamily="49" charset="-127"/>
-                <a:ea typeface="D2Coding" panose="020B0609020101020101" pitchFamily="49" charset="-127"/>
-              </a:rPr>
-              <a:t>을 거쳐야 하므로 답변 속도가 상대면으로 느리고</a:t>
-            </a:r>
-            <a:r>
-              <a:rPr lang="en-US" altLang="ko-KR" sz="1400" dirty="0">
-                <a:latin typeface="D2Coding" panose="020B0609020101020101" pitchFamily="49" charset="-127"/>
-                <a:ea typeface="D2Coding" panose="020B0609020101020101" pitchFamily="49" charset="-127"/>
-              </a:rPr>
-              <a:t>, API </a:t>
-            </a:r>
-            <a:r>
-              <a:rPr lang="ko-KR" altLang="en-US" sz="1400" dirty="0">
-                <a:latin typeface="D2Coding" panose="020B0609020101020101" pitchFamily="49" charset="-127"/>
-                <a:ea typeface="D2Coding" panose="020B0609020101020101" pitchFamily="49" charset="-127"/>
-              </a:rPr>
-              <a:t>비용이 발생</a:t>
-            </a:r>
             <a:endParaRPr lang="en-US" altLang="ko-KR" sz="1400" dirty="0">
               <a:latin typeface="D2Coding" panose="020B0609020101020101" pitchFamily="49" charset="-127"/>
               <a:ea typeface="D2Coding" panose="020B0609020101020101" pitchFamily="49" charset="-127"/>
@@ -6529,6 +6952,81 @@
                 <a:latin typeface="D2Coding" panose="020B0609020101020101" pitchFamily="49" charset="-127"/>
                 <a:ea typeface="D2Coding" panose="020B0609020101020101" pitchFamily="49" charset="-127"/>
               </a:rPr>
+              <a:t>단점</a:t>
+            </a:r>
+            <a:r>
+              <a:rPr lang="en-US" altLang="ko-KR" sz="1400" dirty="0">
+                <a:latin typeface="D2Coding" panose="020B0609020101020101" pitchFamily="49" charset="-127"/>
+                <a:ea typeface="D2Coding" panose="020B0609020101020101" pitchFamily="49" charset="-127"/>
+              </a:rPr>
+              <a:t>:</a:t>
+            </a:r>
+            <a:r>
+              <a:rPr lang="ko-KR" altLang="en-US" sz="1400" dirty="0">
+                <a:latin typeface="D2Coding" panose="020B0609020101020101" pitchFamily="49" charset="-127"/>
+                <a:ea typeface="D2Coding" panose="020B0609020101020101" pitchFamily="49" charset="-127"/>
+              </a:rPr>
+              <a:t> </a:t>
+            </a:r>
+            <a:r>
+              <a:rPr lang="en-US" altLang="ko-KR" sz="1400" dirty="0">
+                <a:latin typeface="D2Coding" panose="020B0609020101020101" pitchFamily="49" charset="-127"/>
+                <a:ea typeface="D2Coding" panose="020B0609020101020101" pitchFamily="49" charset="-127"/>
+              </a:rPr>
+              <a:t>LLM</a:t>
+            </a:r>
+            <a:r>
+              <a:rPr lang="ko-KR" altLang="en-US" sz="1400" dirty="0">
+                <a:latin typeface="D2Coding" panose="020B0609020101020101" pitchFamily="49" charset="-127"/>
+                <a:ea typeface="D2Coding" panose="020B0609020101020101" pitchFamily="49" charset="-127"/>
+              </a:rPr>
+              <a:t>을 거쳐야 하므로 답변 속도가 상대면으로 느리고</a:t>
+            </a:r>
+            <a:r>
+              <a:rPr lang="en-US" altLang="ko-KR" sz="1400" dirty="0">
+                <a:latin typeface="D2Coding" panose="020B0609020101020101" pitchFamily="49" charset="-127"/>
+                <a:ea typeface="D2Coding" panose="020B0609020101020101" pitchFamily="49" charset="-127"/>
+              </a:rPr>
+              <a:t>, API </a:t>
+            </a:r>
+            <a:r>
+              <a:rPr lang="ko-KR" altLang="en-US" sz="1400" dirty="0">
+                <a:latin typeface="D2Coding" panose="020B0609020101020101" pitchFamily="49" charset="-127"/>
+                <a:ea typeface="D2Coding" panose="020B0609020101020101" pitchFamily="49" charset="-127"/>
+              </a:rPr>
+              <a:t>비용이 발생</a:t>
+            </a:r>
+            <a:endParaRPr lang="en-US" altLang="ko-KR" sz="1400" dirty="0">
+              <a:latin typeface="D2Coding" panose="020B0609020101020101" pitchFamily="49" charset="-127"/>
+              <a:ea typeface="D2Coding" panose="020B0609020101020101" pitchFamily="49" charset="-127"/>
+            </a:endParaRPr>
+          </a:p>
+          <a:p>
+            <a:pPr marL="285750" indent="-285750">
+              <a:lnSpc>
+                <a:spcPct val="150000"/>
+              </a:lnSpc>
+              <a:buFont typeface="Wingdings" panose="05000000000000000000" pitchFamily="2" charset="2"/>
+              <a:buChar char="v"/>
+            </a:pPr>
+            <a:endParaRPr lang="en-US" altLang="ko-KR" sz="1400" dirty="0">
+              <a:latin typeface="D2Coding" panose="020B0609020101020101" pitchFamily="49" charset="-127"/>
+              <a:ea typeface="D2Coding" panose="020B0609020101020101" pitchFamily="49" charset="-127"/>
+            </a:endParaRPr>
+          </a:p>
+          <a:p>
+            <a:pPr marL="285750" indent="-285750">
+              <a:lnSpc>
+                <a:spcPct val="150000"/>
+              </a:lnSpc>
+              <a:buFont typeface="Wingdings" panose="05000000000000000000" pitchFamily="2" charset="2"/>
+              <a:buChar char="v"/>
+            </a:pPr>
+            <a:r>
+              <a:rPr lang="ko-KR" altLang="en-US" sz="1400" dirty="0">
+                <a:latin typeface="D2Coding" panose="020B0609020101020101" pitchFamily="49" charset="-127"/>
+                <a:ea typeface="D2Coding" panose="020B0609020101020101" pitchFamily="49" charset="-127"/>
+              </a:rPr>
               <a:t>적합한 상황</a:t>
             </a:r>
             <a:r>
@@ -6560,6 +7058,249 @@
               <a:t>단순 단어 비교 이상의 깊은 문맥 판단이 필요한 경우</a:t>
             </a:r>
             <a:endParaRPr lang="en-US" altLang="ko-KR" sz="1400" dirty="0">
+              <a:latin typeface="D2Coding" panose="020B0609020101020101" pitchFamily="49" charset="-127"/>
+              <a:ea typeface="D2Coding" panose="020B0609020101020101" pitchFamily="49" charset="-127"/>
+            </a:endParaRPr>
+          </a:p>
+        </p:txBody>
+      </p:sp>
+      <p:sp>
+        <p:nvSpPr>
+          <p:cNvPr id="2" name="슬라이드 번호 개체 틀 3">
+            <a:extLst>
+              <a:ext uri="{FF2B5EF4-FFF2-40B4-BE49-F238E27FC236}">
+                <a16:creationId xmlns:a16="http://schemas.microsoft.com/office/drawing/2014/main" id="{4462DC7B-BF2F-BD00-85DC-1E8ECA46A357}"/>
+              </a:ext>
+            </a:extLst>
+          </p:cNvPr>
+          <p:cNvSpPr txBox="1">
+            <a:spLocks/>
+          </p:cNvSpPr>
+          <p:nvPr/>
+        </p:nvSpPr>
+        <p:spPr>
+          <a:xfrm>
+            <a:off x="11162230" y="299420"/>
+            <a:ext cx="753545" cy="365125"/>
+          </a:xfrm>
+          <a:prstGeom prst="rect">
+            <a:avLst/>
+          </a:prstGeom>
+        </p:spPr>
+        <p:txBody>
+          <a:bodyPr vert="horz" lIns="91440" tIns="45720" rIns="91440" bIns="45720" rtlCol="0" anchor="ctr"/>
+          <a:lstStyle>
+            <a:defPPr rtl="0">
+              <a:defRPr lang="ko-KR"/>
+            </a:defPPr>
+            <a:lvl1pPr marL="0" algn="r" defTabSz="914400" rtl="0" eaLnBrk="1" latinLnBrk="0" hangingPunct="1">
+              <a:defRPr sz="1200" kern="1200" baseline="0">
+                <a:solidFill>
+                  <a:schemeClr val="tx1">
+                    <a:lumMod val="65000"/>
+                    <a:lumOff val="35000"/>
+                  </a:schemeClr>
+                </a:solidFill>
+                <a:latin typeface="맑은 고딕" panose="020B0503020000020004" pitchFamily="50" charset="-127"/>
+                <a:ea typeface="맑은 고딕" panose="020B0503020000020004" pitchFamily="50" charset="-127"/>
+                <a:cs typeface="+mn-cs"/>
+              </a:defRPr>
+            </a:lvl1pPr>
+            <a:lvl2pPr marL="457200" algn="l" defTabSz="914400" rtl="0" eaLnBrk="1" latinLnBrk="0" hangingPunct="1">
+              <a:defRPr sz="1800" kern="1200">
+                <a:solidFill>
+                  <a:schemeClr val="tx1"/>
+                </a:solidFill>
+                <a:latin typeface="+mn-lt"/>
+                <a:ea typeface="+mn-ea"/>
+                <a:cs typeface="+mn-cs"/>
+              </a:defRPr>
+            </a:lvl2pPr>
+            <a:lvl3pPr marL="914400" algn="l" defTabSz="914400" rtl="0" eaLnBrk="1" latinLnBrk="0" hangingPunct="1">
+              <a:defRPr sz="1800" kern="1200">
+                <a:solidFill>
+                  <a:schemeClr val="tx1"/>
+                </a:solidFill>
+                <a:latin typeface="+mn-lt"/>
+                <a:ea typeface="+mn-ea"/>
+                <a:cs typeface="+mn-cs"/>
+              </a:defRPr>
+            </a:lvl3pPr>
+            <a:lvl4pPr marL="1371600" algn="l" defTabSz="914400" rtl="0" eaLnBrk="1" latinLnBrk="0" hangingPunct="1">
+              <a:defRPr sz="1800" kern="1200">
+                <a:solidFill>
+                  <a:schemeClr val="tx1"/>
+                </a:solidFill>
+                <a:latin typeface="+mn-lt"/>
+                <a:ea typeface="+mn-ea"/>
+                <a:cs typeface="+mn-cs"/>
+              </a:defRPr>
+            </a:lvl4pPr>
+            <a:lvl5pPr marL="1828800" algn="l" defTabSz="914400" rtl="0" eaLnBrk="1" latinLnBrk="0" hangingPunct="1">
+              <a:defRPr sz="1800" kern="1200">
+                <a:solidFill>
+                  <a:schemeClr val="tx1"/>
+                </a:solidFill>
+                <a:latin typeface="+mn-lt"/>
+                <a:ea typeface="+mn-ea"/>
+                <a:cs typeface="+mn-cs"/>
+              </a:defRPr>
+            </a:lvl5pPr>
+            <a:lvl6pPr marL="2286000" algn="l" defTabSz="914400" rtl="0" eaLnBrk="1" latinLnBrk="0" hangingPunct="1">
+              <a:defRPr sz="1800" kern="1200">
+                <a:solidFill>
+                  <a:schemeClr val="tx1"/>
+                </a:solidFill>
+                <a:latin typeface="+mn-lt"/>
+                <a:ea typeface="+mn-ea"/>
+                <a:cs typeface="+mn-cs"/>
+              </a:defRPr>
+            </a:lvl6pPr>
+            <a:lvl7pPr marL="2743200" algn="l" defTabSz="914400" rtl="0" eaLnBrk="1" latinLnBrk="0" hangingPunct="1">
+              <a:defRPr sz="1800" kern="1200">
+                <a:solidFill>
+                  <a:schemeClr val="tx1"/>
+                </a:solidFill>
+                <a:latin typeface="+mn-lt"/>
+                <a:ea typeface="+mn-ea"/>
+                <a:cs typeface="+mn-cs"/>
+              </a:defRPr>
+            </a:lvl7pPr>
+            <a:lvl8pPr marL="3200400" algn="l" defTabSz="914400" rtl="0" eaLnBrk="1" latinLnBrk="0" hangingPunct="1">
+              <a:defRPr sz="1800" kern="1200">
+                <a:solidFill>
+                  <a:schemeClr val="tx1"/>
+                </a:solidFill>
+                <a:latin typeface="+mn-lt"/>
+                <a:ea typeface="+mn-ea"/>
+                <a:cs typeface="+mn-cs"/>
+              </a:defRPr>
+            </a:lvl8pPr>
+            <a:lvl9pPr marL="3657600" algn="l" defTabSz="914400" rtl="0" eaLnBrk="1" latinLnBrk="0" hangingPunct="1">
+              <a:defRPr sz="1800" kern="1200">
+                <a:solidFill>
+                  <a:schemeClr val="tx1"/>
+                </a:solidFill>
+                <a:latin typeface="+mn-lt"/>
+                <a:ea typeface="+mn-ea"/>
+                <a:cs typeface="+mn-cs"/>
+              </a:defRPr>
+            </a:lvl9pPr>
+          </a:lstStyle>
+          <a:p>
+            <a:fld id="{D57F1E4F-1CFF-5643-939E-217C01CDF565}" type="slidenum">
+              <a:rPr lang="en-US" b="1" smtClean="0"/>
+              <a:pPr/>
+              <a:t>16</a:t>
+            </a:fld>
+            <a:endParaRPr lang="en-US" b="1" dirty="0"/>
+          </a:p>
+        </p:txBody>
+      </p:sp>
+      <p:sp>
+        <p:nvSpPr>
+          <p:cNvPr id="7" name="TextBox 6">
+            <a:extLst>
+              <a:ext uri="{FF2B5EF4-FFF2-40B4-BE49-F238E27FC236}">
+                <a16:creationId xmlns:a16="http://schemas.microsoft.com/office/drawing/2014/main" id="{4775F254-05B5-2438-49C1-2C28CEDD3F7D}"/>
+              </a:ext>
+            </a:extLst>
+          </p:cNvPr>
+          <p:cNvSpPr txBox="1"/>
+          <p:nvPr/>
+        </p:nvSpPr>
+        <p:spPr>
+          <a:xfrm>
+            <a:off x="4692074" y="4177961"/>
+            <a:ext cx="2613890" cy="1061829"/>
+          </a:xfrm>
+          <a:prstGeom prst="rect">
+            <a:avLst/>
+          </a:prstGeom>
+          <a:solidFill>
+            <a:schemeClr val="tx1"/>
+          </a:solidFill>
+        </p:spPr>
+        <p:txBody>
+          <a:bodyPr wrap="square">
+            <a:spAutoFit/>
+          </a:bodyPr>
+          <a:lstStyle/>
+          <a:p>
+            <a:r>
+              <a:rPr lang="ko-KR" altLang="ko-KR" sz="1050" dirty="0">
+                <a:solidFill>
+                  <a:schemeClr val="bg1"/>
+                </a:solidFill>
+                <a:latin typeface="D2Coding" panose="020B0609020101020101" pitchFamily="49" charset="-127"/>
+                <a:ea typeface="D2Coding" panose="020B0609020101020101" pitchFamily="49" charset="-127"/>
+              </a:rPr>
+              <a:t>사용자의 질문이 들어오면 </a:t>
+            </a:r>
+            <a:r>
+              <a:rPr lang="ko-KR" altLang="ko-KR" sz="1050" dirty="0" err="1">
+                <a:solidFill>
+                  <a:schemeClr val="bg1"/>
+                </a:solidFill>
+                <a:latin typeface="D2Coding" panose="020B0609020101020101" pitchFamily="49" charset="-127"/>
+                <a:ea typeface="D2Coding" panose="020B0609020101020101" pitchFamily="49" charset="-127"/>
+              </a:rPr>
+              <a:t>LLM이</a:t>
+            </a:r>
+            <a:r>
+              <a:rPr lang="ko-KR" altLang="ko-KR" sz="1050" dirty="0">
+                <a:solidFill>
+                  <a:schemeClr val="bg1"/>
+                </a:solidFill>
+                <a:latin typeface="D2Coding" panose="020B0609020101020101" pitchFamily="49" charset="-127"/>
+                <a:ea typeface="D2Coding" panose="020B0609020101020101" pitchFamily="49" charset="-127"/>
+              </a:rPr>
+              <a:t> 먼저 질문의 의도와 문맥을 분석</a:t>
+            </a:r>
+            <a:r>
+              <a:rPr lang="ko-KR" altLang="en-US" sz="1050" dirty="0">
+                <a:solidFill>
+                  <a:schemeClr val="bg1"/>
+                </a:solidFill>
+                <a:latin typeface="D2Coding" panose="020B0609020101020101" pitchFamily="49" charset="-127"/>
+                <a:ea typeface="D2Coding" panose="020B0609020101020101" pitchFamily="49" charset="-127"/>
+              </a:rPr>
+              <a:t>한 후</a:t>
+            </a:r>
+            <a:r>
+              <a:rPr lang="ko-KR" altLang="ko-KR" sz="1050" dirty="0">
+                <a:solidFill>
+                  <a:schemeClr val="bg1"/>
+                </a:solidFill>
+                <a:latin typeface="D2Coding" panose="020B0609020101020101" pitchFamily="49" charset="-127"/>
+                <a:ea typeface="D2Coding" panose="020B0609020101020101" pitchFamily="49" charset="-127"/>
+              </a:rPr>
+              <a:t> 여러 데이터 소스(관계형 DB, 그래프 DB, 벡터 DB 등) 중 가장 적합한 곳으로 길을 안내(</a:t>
+            </a:r>
+            <a:r>
+              <a:rPr lang="ko-KR" altLang="ko-KR" sz="1050" dirty="0" err="1">
+                <a:solidFill>
+                  <a:schemeClr val="bg1"/>
+                </a:solidFill>
+                <a:latin typeface="D2Coding" panose="020B0609020101020101" pitchFamily="49" charset="-127"/>
+                <a:ea typeface="D2Coding" panose="020B0609020101020101" pitchFamily="49" charset="-127"/>
+              </a:rPr>
+              <a:t>Routing</a:t>
+            </a:r>
+            <a:r>
+              <a:rPr lang="ko-KR" altLang="ko-KR" sz="1050" dirty="0">
+                <a:solidFill>
+                  <a:schemeClr val="bg1"/>
+                </a:solidFill>
+                <a:latin typeface="D2Coding" panose="020B0609020101020101" pitchFamily="49" charset="-127"/>
+                <a:ea typeface="D2Coding" panose="020B0609020101020101" pitchFamily="49" charset="-127"/>
+              </a:rPr>
+              <a:t>)한 뒤에 검색을 수행</a:t>
+            </a:r>
+            <a:endParaRPr lang="ko-KR" altLang="en-US" sz="1050" dirty="0">
+              <a:solidFill>
+                <a:schemeClr val="bg1"/>
+              </a:solidFill>
               <a:latin typeface="D2Coding" panose="020B0609020101020101" pitchFamily="49" charset="-127"/>
               <a:ea typeface="D2Coding" panose="020B0609020101020101" pitchFamily="49" charset="-127"/>
             </a:endParaRPr>
@@ -6604,41 +7345,6 @@
       </p:grpSpPr>
       <p:sp>
         <p:nvSpPr>
-          <p:cNvPr id="4" name="슬라이드 번호 개체 틀 3">
-            <a:extLst>
-              <a:ext uri="{FF2B5EF4-FFF2-40B4-BE49-F238E27FC236}">
-                <a16:creationId xmlns:a16="http://schemas.microsoft.com/office/drawing/2014/main" id="{3EB3646E-1AC7-2F67-01E4-2C6E1243918C}"/>
-              </a:ext>
-            </a:extLst>
-          </p:cNvPr>
-          <p:cNvSpPr>
-            <a:spLocks noGrp="1"/>
-          </p:cNvSpPr>
-          <p:nvPr>
-            <p:ph type="sldNum" sz="quarter" idx="12"/>
-          </p:nvPr>
-        </p:nvSpPr>
-        <p:spPr>
-          <a:xfrm>
-            <a:off x="10514011" y="6036261"/>
-            <a:ext cx="753545" cy="365125"/>
-          </a:xfrm>
-        </p:spPr>
-        <p:txBody>
-          <a:bodyPr/>
-          <a:lstStyle/>
-          <a:p>
-            <a:fld id="{D57F1E4F-1CFF-5643-939E-217C01CDF565}" type="slidenum">
-              <a:rPr lang="en-US" smtClean="0"/>
-              <a:pPr/>
-              <a:t>17</a:t>
-            </a:fld>
-            <a:endParaRPr lang="en-US" dirty="0"/>
-          </a:p>
-        </p:txBody>
-      </p:sp>
-      <p:sp>
-        <p:nvSpPr>
           <p:cNvPr id="3" name="제목 1">
             <a:extLst>
               <a:ext uri="{FF2B5EF4-FFF2-40B4-BE49-F238E27FC236}">
@@ -6774,8 +7480,8 @@
         </p:blipFill>
         <p:spPr>
           <a:xfrm>
-            <a:off x="687402" y="2805191"/>
-            <a:ext cx="6988146" cy="2758679"/>
+            <a:off x="609298" y="2511817"/>
+            <a:ext cx="7250848" cy="2862385"/>
           </a:xfrm>
           <a:prstGeom prst="rect">
             <a:avLst/>
@@ -6944,13 +7650,19 @@
         </p:nvSpPr>
         <p:spPr>
           <a:xfrm>
-            <a:off x="7781407" y="2884762"/>
-            <a:ext cx="4077218" cy="2462213"/>
+            <a:off x="7944455" y="2570049"/>
+            <a:ext cx="3998082" cy="2967800"/>
           </a:xfrm>
           <a:prstGeom prst="rect">
             <a:avLst/>
           </a:prstGeom>
           <a:noFill/>
+          <a:ln>
+            <a:solidFill>
+              <a:schemeClr val="tx1"/>
+            </a:solidFill>
+            <a:prstDash val="dash"/>
+          </a:ln>
         </p:spPr>
         <p:txBody>
           <a:bodyPr wrap="square">
@@ -6959,6 +7671,9 @@
           <a:lstStyle/>
           <a:p>
             <a:pPr marL="285750" indent="-285750">
+              <a:lnSpc>
+                <a:spcPct val="150000"/>
+              </a:lnSpc>
               <a:buFont typeface="Wingdings" panose="05000000000000000000" pitchFamily="2" charset="2"/>
               <a:buChar char="v"/>
             </a:pPr>
@@ -7000,16 +7715,53 @@
           </a:p>
           <a:p>
             <a:pPr marL="285750" indent="-285750">
+              <a:lnSpc>
+                <a:spcPct val="150000"/>
+              </a:lnSpc>
               <a:buFont typeface="Wingdings" panose="05000000000000000000" pitchFamily="2" charset="2"/>
               <a:buChar char="v"/>
             </a:pPr>
-            <a:endParaRPr lang="ko-KR" altLang="en-US" sz="1400" dirty="0">
-              <a:latin typeface="D2Coding" panose="020B0609020101020101" pitchFamily="49" charset="-127"/>
-              <a:ea typeface="D2Coding" panose="020B0609020101020101" pitchFamily="49" charset="-127"/>
-            </a:endParaRPr>
+            <a:r>
+              <a:rPr lang="ko-KR" altLang="en-US" sz="1400" dirty="0">
+                <a:latin typeface="D2Coding" panose="020B0609020101020101" pitchFamily="49" charset="-127"/>
+                <a:ea typeface="D2Coding" panose="020B0609020101020101" pitchFamily="49" charset="-127"/>
+              </a:rPr>
+              <a:t>단점: 정해진 샘플 </a:t>
+            </a:r>
+            <a:r>
+              <a:rPr lang="ko-KR" altLang="en-US" sz="1400" dirty="0" err="1">
+                <a:latin typeface="D2Coding" panose="020B0609020101020101" pitchFamily="49" charset="-127"/>
+                <a:ea typeface="D2Coding" panose="020B0609020101020101" pitchFamily="49" charset="-127"/>
+              </a:rPr>
+              <a:t>문장들과의</a:t>
+            </a:r>
+            <a:r>
+              <a:rPr lang="ko-KR" altLang="en-US" sz="1400" dirty="0">
+                <a:latin typeface="D2Coding" panose="020B0609020101020101" pitchFamily="49" charset="-127"/>
+                <a:ea typeface="D2Coding" panose="020B0609020101020101" pitchFamily="49" charset="-127"/>
+              </a:rPr>
+              <a:t> '</a:t>
+            </a:r>
+            <a:r>
+              <a:rPr lang="ko-KR" altLang="en-US" sz="1400" dirty="0" err="1">
+                <a:latin typeface="D2Coding" panose="020B0609020101020101" pitchFamily="49" charset="-127"/>
+                <a:ea typeface="D2Coding" panose="020B0609020101020101" pitchFamily="49" charset="-127"/>
+              </a:rPr>
+              <a:t>유사성'에만</a:t>
+            </a:r>
+            <a:r>
+              <a:rPr lang="ko-KR" altLang="en-US" sz="1400" dirty="0">
+                <a:latin typeface="D2Coding" panose="020B0609020101020101" pitchFamily="49" charset="-127"/>
+                <a:ea typeface="D2Coding" panose="020B0609020101020101" pitchFamily="49" charset="-127"/>
+              </a:rPr>
+              <a:t> 의존하므로, 복잡하고 정교한 조건부 분기는 어려움</a:t>
+            </a:r>
           </a:p>
           <a:p>
             <a:pPr marL="285750" indent="-285750">
+              <a:lnSpc>
+                <a:spcPct val="150000"/>
+              </a:lnSpc>
               <a:buFont typeface="Wingdings" panose="05000000000000000000" pitchFamily="2" charset="2"/>
               <a:buChar char="v"/>
             </a:pPr>
@@ -7018,73 +7770,155 @@
                 <a:latin typeface="D2Coding" panose="020B0609020101020101" pitchFamily="49" charset="-127"/>
                 <a:ea typeface="D2Coding" panose="020B0609020101020101" pitchFamily="49" charset="-127"/>
               </a:rPr>
-              <a:t>단점: 정해진 샘플 </a:t>
+              <a:t>적합한 상황: 자주 들어오는 질문 패턴이 명확히 </a:t>
             </a:r>
             <a:r>
               <a:rPr lang="ko-KR" altLang="en-US" sz="1400" dirty="0" err="1">
                 <a:latin typeface="D2Coding" panose="020B0609020101020101" pitchFamily="49" charset="-127"/>
                 <a:ea typeface="D2Coding" panose="020B0609020101020101" pitchFamily="49" charset="-127"/>
               </a:rPr>
-              <a:t>문장들과의</a:t>
+              <a:t>갈려있고</a:t>
             </a:r>
             <a:r>
               <a:rPr lang="ko-KR" altLang="en-US" sz="1400" dirty="0">
                 <a:latin typeface="D2Coding" panose="020B0609020101020101" pitchFamily="49" charset="-127"/>
                 <a:ea typeface="D2Coding" panose="020B0609020101020101" pitchFamily="49" charset="-127"/>
               </a:rPr>
-              <a:t> '</a:t>
-            </a:r>
-            <a:r>
-              <a:rPr lang="ko-KR" altLang="en-US" sz="1400" dirty="0" err="1">
-                <a:latin typeface="D2Coding" panose="020B0609020101020101" pitchFamily="49" charset="-127"/>
-                <a:ea typeface="D2Coding" panose="020B0609020101020101" pitchFamily="49" charset="-127"/>
-              </a:rPr>
-              <a:t>유사성'에만</a:t>
-            </a:r>
-            <a:r>
-              <a:rPr lang="ko-KR" altLang="en-US" sz="1400" dirty="0">
-                <a:latin typeface="D2Coding" panose="020B0609020101020101" pitchFamily="49" charset="-127"/>
-                <a:ea typeface="D2Coding" panose="020B0609020101020101" pitchFamily="49" charset="-127"/>
-              </a:rPr>
-              <a:t> 의존하므로, 복잡하고 정교한 조건부 분기는 어려움</a:t>
-            </a:r>
-          </a:p>
-          <a:p>
-            <a:pPr marL="285750" indent="-285750">
-              <a:buFont typeface="Wingdings" panose="05000000000000000000" pitchFamily="2" charset="2"/>
-              <a:buChar char="v"/>
-            </a:pPr>
-            <a:endParaRPr lang="ko-KR" altLang="en-US" sz="1400" dirty="0">
-              <a:latin typeface="D2Coding" panose="020B0609020101020101" pitchFamily="49" charset="-127"/>
-              <a:ea typeface="D2Coding" panose="020B0609020101020101" pitchFamily="49" charset="-127"/>
-            </a:endParaRPr>
-          </a:p>
-          <a:p>
-            <a:pPr marL="285750" indent="-285750">
-              <a:buFont typeface="Wingdings" panose="05000000000000000000" pitchFamily="2" charset="2"/>
-              <a:buChar char="v"/>
-            </a:pPr>
-            <a:r>
-              <a:rPr lang="ko-KR" altLang="en-US" sz="1400" dirty="0">
-                <a:latin typeface="D2Coding" panose="020B0609020101020101" pitchFamily="49" charset="-127"/>
-                <a:ea typeface="D2Coding" panose="020B0609020101020101" pitchFamily="49" charset="-127"/>
-              </a:rPr>
-              <a:t>적합한 상황: 자주 들어오는 질문 패턴이 명확히 </a:t>
-            </a:r>
-            <a:r>
-              <a:rPr lang="ko-KR" altLang="en-US" sz="1400" dirty="0" err="1">
-                <a:latin typeface="D2Coding" panose="020B0609020101020101" pitchFamily="49" charset="-127"/>
-                <a:ea typeface="D2Coding" panose="020B0609020101020101" pitchFamily="49" charset="-127"/>
-              </a:rPr>
-              <a:t>갈려있고</a:t>
-            </a:r>
-            <a:r>
-              <a:rPr lang="ko-KR" altLang="en-US" sz="1400" dirty="0">
-                <a:latin typeface="D2Coding" panose="020B0609020101020101" pitchFamily="49" charset="-127"/>
-                <a:ea typeface="D2Coding" panose="020B0609020101020101" pitchFamily="49" charset="-127"/>
-              </a:rPr>
               <a:t>, 비용 절감과 빠른 응답 속도가 최우선인 경우</a:t>
             </a:r>
+          </a:p>
+        </p:txBody>
+      </p:sp>
+      <p:sp>
+        <p:nvSpPr>
+          <p:cNvPr id="2" name="슬라이드 번호 개체 틀 3">
+            <a:extLst>
+              <a:ext uri="{FF2B5EF4-FFF2-40B4-BE49-F238E27FC236}">
+                <a16:creationId xmlns:a16="http://schemas.microsoft.com/office/drawing/2014/main" id="{F74803A8-CF07-4221-378C-12596342E6F9}"/>
+              </a:ext>
+            </a:extLst>
+          </p:cNvPr>
+          <p:cNvSpPr txBox="1">
+            <a:spLocks/>
+          </p:cNvSpPr>
+          <p:nvPr/>
+        </p:nvSpPr>
+        <p:spPr>
+          <a:xfrm>
+            <a:off x="11162230" y="299420"/>
+            <a:ext cx="753545" cy="365125"/>
+          </a:xfrm>
+          <a:prstGeom prst="rect">
+            <a:avLst/>
+          </a:prstGeom>
+        </p:spPr>
+        <p:txBody>
+          <a:bodyPr vert="horz" lIns="91440" tIns="45720" rIns="91440" bIns="45720" rtlCol="0" anchor="ctr"/>
+          <a:lstStyle>
+            <a:defPPr rtl="0">
+              <a:defRPr lang="ko-KR"/>
+            </a:defPPr>
+            <a:lvl1pPr marL="0" algn="r" defTabSz="914400" rtl="0" eaLnBrk="1" latinLnBrk="0" hangingPunct="1">
+              <a:defRPr sz="1200" kern="1200" baseline="0">
+                <a:solidFill>
+                  <a:schemeClr val="tx1">
+                    <a:lumMod val="65000"/>
+                    <a:lumOff val="35000"/>
+                  </a:schemeClr>
+                </a:solidFill>
+                <a:latin typeface="맑은 고딕" panose="020B0503020000020004" pitchFamily="50" charset="-127"/>
+                <a:ea typeface="맑은 고딕" panose="020B0503020000020004" pitchFamily="50" charset="-127"/>
+                <a:cs typeface="+mn-cs"/>
+              </a:defRPr>
+            </a:lvl1pPr>
+            <a:lvl2pPr marL="457200" algn="l" defTabSz="914400" rtl="0" eaLnBrk="1" latinLnBrk="0" hangingPunct="1">
+              <a:defRPr sz="1800" kern="1200">
+                <a:solidFill>
+                  <a:schemeClr val="tx1"/>
+                </a:solidFill>
+                <a:latin typeface="+mn-lt"/>
+                <a:ea typeface="+mn-ea"/>
+                <a:cs typeface="+mn-cs"/>
+              </a:defRPr>
+            </a:lvl2pPr>
+            <a:lvl3pPr marL="914400" algn="l" defTabSz="914400" rtl="0" eaLnBrk="1" latinLnBrk="0" hangingPunct="1">
+              <a:defRPr sz="1800" kern="1200">
+                <a:solidFill>
+                  <a:schemeClr val="tx1"/>
+                </a:solidFill>
+                <a:latin typeface="+mn-lt"/>
+                <a:ea typeface="+mn-ea"/>
+                <a:cs typeface="+mn-cs"/>
+              </a:defRPr>
+            </a:lvl3pPr>
+            <a:lvl4pPr marL="1371600" algn="l" defTabSz="914400" rtl="0" eaLnBrk="1" latinLnBrk="0" hangingPunct="1">
+              <a:defRPr sz="1800" kern="1200">
+                <a:solidFill>
+                  <a:schemeClr val="tx1"/>
+                </a:solidFill>
+                <a:latin typeface="+mn-lt"/>
+                <a:ea typeface="+mn-ea"/>
+                <a:cs typeface="+mn-cs"/>
+              </a:defRPr>
+            </a:lvl4pPr>
+            <a:lvl5pPr marL="1828800" algn="l" defTabSz="914400" rtl="0" eaLnBrk="1" latinLnBrk="0" hangingPunct="1">
+              <a:defRPr sz="1800" kern="1200">
+                <a:solidFill>
+                  <a:schemeClr val="tx1"/>
+                </a:solidFill>
+                <a:latin typeface="+mn-lt"/>
+                <a:ea typeface="+mn-ea"/>
+                <a:cs typeface="+mn-cs"/>
+              </a:defRPr>
+            </a:lvl5pPr>
+            <a:lvl6pPr marL="2286000" algn="l" defTabSz="914400" rtl="0" eaLnBrk="1" latinLnBrk="0" hangingPunct="1">
+              <a:defRPr sz="1800" kern="1200">
+                <a:solidFill>
+                  <a:schemeClr val="tx1"/>
+                </a:solidFill>
+                <a:latin typeface="+mn-lt"/>
+                <a:ea typeface="+mn-ea"/>
+                <a:cs typeface="+mn-cs"/>
+              </a:defRPr>
+            </a:lvl6pPr>
+            <a:lvl7pPr marL="2743200" algn="l" defTabSz="914400" rtl="0" eaLnBrk="1" latinLnBrk="0" hangingPunct="1">
+              <a:defRPr sz="1800" kern="1200">
+                <a:solidFill>
+                  <a:schemeClr val="tx1"/>
+                </a:solidFill>
+                <a:latin typeface="+mn-lt"/>
+                <a:ea typeface="+mn-ea"/>
+                <a:cs typeface="+mn-cs"/>
+              </a:defRPr>
+            </a:lvl7pPr>
+            <a:lvl8pPr marL="3200400" algn="l" defTabSz="914400" rtl="0" eaLnBrk="1" latinLnBrk="0" hangingPunct="1">
+              <a:defRPr sz="1800" kern="1200">
+                <a:solidFill>
+                  <a:schemeClr val="tx1"/>
+                </a:solidFill>
+                <a:latin typeface="+mn-lt"/>
+                <a:ea typeface="+mn-ea"/>
+                <a:cs typeface="+mn-cs"/>
+              </a:defRPr>
+            </a:lvl8pPr>
+            <a:lvl9pPr marL="3657600" algn="l" defTabSz="914400" rtl="0" eaLnBrk="1" latinLnBrk="0" hangingPunct="1">
+              <a:defRPr sz="1800" kern="1200">
+                <a:solidFill>
+                  <a:schemeClr val="tx1"/>
+                </a:solidFill>
+                <a:latin typeface="+mn-lt"/>
+                <a:ea typeface="+mn-ea"/>
+                <a:cs typeface="+mn-cs"/>
+              </a:defRPr>
+            </a:lvl9pPr>
+          </a:lstStyle>
+          <a:p>
+            <a:fld id="{D57F1E4F-1CFF-5643-939E-217C01CDF565}" type="slidenum">
+              <a:rPr lang="en-US" b="1" smtClean="0"/>
+              <a:pPr/>
+              <a:t>17</a:t>
+            </a:fld>
+            <a:endParaRPr lang="en-US" b="1" dirty="0"/>
           </a:p>
         </p:txBody>
       </p:sp>
@@ -7180,41 +8014,6 @@
       </p:sp>
       <p:sp>
         <p:nvSpPr>
-          <p:cNvPr id="4" name="슬라이드 번호 개체 틀 3">
-            <a:extLst>
-              <a:ext uri="{FF2B5EF4-FFF2-40B4-BE49-F238E27FC236}">
-                <a16:creationId xmlns:a16="http://schemas.microsoft.com/office/drawing/2014/main" id="{D63494DE-760D-008E-0D20-721C21CB6B67}"/>
-              </a:ext>
-            </a:extLst>
-          </p:cNvPr>
-          <p:cNvSpPr>
-            <a:spLocks noGrp="1"/>
-          </p:cNvSpPr>
-          <p:nvPr>
-            <p:ph type="sldNum" sz="quarter" idx="12"/>
-          </p:nvPr>
-        </p:nvSpPr>
-        <p:spPr>
-          <a:xfrm>
-            <a:off x="10514011" y="6036261"/>
-            <a:ext cx="753545" cy="365125"/>
-          </a:xfrm>
-        </p:spPr>
-        <p:txBody>
-          <a:bodyPr/>
-          <a:lstStyle/>
-          <a:p>
-            <a:fld id="{D57F1E4F-1CFF-5643-939E-217C01CDF565}" type="slidenum">
-              <a:rPr lang="en-US" smtClean="0"/>
-              <a:pPr/>
-              <a:t>18</a:t>
-            </a:fld>
-            <a:endParaRPr lang="en-US" dirty="0"/>
-          </a:p>
-        </p:txBody>
-      </p:sp>
-      <p:sp>
-        <p:nvSpPr>
           <p:cNvPr id="3" name="제목 1">
             <a:extLst>
               <a:ext uri="{FF2B5EF4-FFF2-40B4-BE49-F238E27FC236}">
@@ -7519,6 +8318,139 @@
               <a:latin typeface="D2Coding" panose="020B0609020101020101" pitchFamily="49" charset="-127"/>
               <a:ea typeface="D2Coding" panose="020B0609020101020101" pitchFamily="49" charset="-127"/>
             </a:endParaRPr>
+          </a:p>
+        </p:txBody>
+      </p:sp>
+      <p:sp>
+        <p:nvSpPr>
+          <p:cNvPr id="2" name="슬라이드 번호 개체 틀 3">
+            <a:extLst>
+              <a:ext uri="{FF2B5EF4-FFF2-40B4-BE49-F238E27FC236}">
+                <a16:creationId xmlns:a16="http://schemas.microsoft.com/office/drawing/2014/main" id="{75FE464D-663F-C59E-5297-11BB651B158F}"/>
+              </a:ext>
+            </a:extLst>
+          </p:cNvPr>
+          <p:cNvSpPr txBox="1">
+            <a:spLocks/>
+          </p:cNvSpPr>
+          <p:nvPr/>
+        </p:nvSpPr>
+        <p:spPr>
+          <a:xfrm>
+            <a:off x="11162230" y="299420"/>
+            <a:ext cx="753545" cy="365125"/>
+          </a:xfrm>
+          <a:prstGeom prst="rect">
+            <a:avLst/>
+          </a:prstGeom>
+        </p:spPr>
+        <p:txBody>
+          <a:bodyPr vert="horz" lIns="91440" tIns="45720" rIns="91440" bIns="45720" rtlCol="0" anchor="ctr"/>
+          <a:lstStyle>
+            <a:defPPr rtl="0">
+              <a:defRPr lang="ko-KR"/>
+            </a:defPPr>
+            <a:lvl1pPr marL="0" algn="r" defTabSz="914400" rtl="0" eaLnBrk="1" latinLnBrk="0" hangingPunct="1">
+              <a:defRPr sz="1200" kern="1200" baseline="0">
+                <a:solidFill>
+                  <a:schemeClr val="tx1">
+                    <a:lumMod val="65000"/>
+                    <a:lumOff val="35000"/>
+                  </a:schemeClr>
+                </a:solidFill>
+                <a:latin typeface="맑은 고딕" panose="020B0503020000020004" pitchFamily="50" charset="-127"/>
+                <a:ea typeface="맑은 고딕" panose="020B0503020000020004" pitchFamily="50" charset="-127"/>
+                <a:cs typeface="+mn-cs"/>
+              </a:defRPr>
+            </a:lvl1pPr>
+            <a:lvl2pPr marL="457200" algn="l" defTabSz="914400" rtl="0" eaLnBrk="1" latinLnBrk="0" hangingPunct="1">
+              <a:defRPr sz="1800" kern="1200">
+                <a:solidFill>
+                  <a:schemeClr val="tx1"/>
+                </a:solidFill>
+                <a:latin typeface="+mn-lt"/>
+                <a:ea typeface="+mn-ea"/>
+                <a:cs typeface="+mn-cs"/>
+              </a:defRPr>
+            </a:lvl2pPr>
+            <a:lvl3pPr marL="914400" algn="l" defTabSz="914400" rtl="0" eaLnBrk="1" latinLnBrk="0" hangingPunct="1">
+              <a:defRPr sz="1800" kern="1200">
+                <a:solidFill>
+                  <a:schemeClr val="tx1"/>
+                </a:solidFill>
+                <a:latin typeface="+mn-lt"/>
+                <a:ea typeface="+mn-ea"/>
+                <a:cs typeface="+mn-cs"/>
+              </a:defRPr>
+            </a:lvl3pPr>
+            <a:lvl4pPr marL="1371600" algn="l" defTabSz="914400" rtl="0" eaLnBrk="1" latinLnBrk="0" hangingPunct="1">
+              <a:defRPr sz="1800" kern="1200">
+                <a:solidFill>
+                  <a:schemeClr val="tx1"/>
+                </a:solidFill>
+                <a:latin typeface="+mn-lt"/>
+                <a:ea typeface="+mn-ea"/>
+                <a:cs typeface="+mn-cs"/>
+              </a:defRPr>
+            </a:lvl4pPr>
+            <a:lvl5pPr marL="1828800" algn="l" defTabSz="914400" rtl="0" eaLnBrk="1" latinLnBrk="0" hangingPunct="1">
+              <a:defRPr sz="1800" kern="1200">
+                <a:solidFill>
+                  <a:schemeClr val="tx1"/>
+                </a:solidFill>
+                <a:latin typeface="+mn-lt"/>
+                <a:ea typeface="+mn-ea"/>
+                <a:cs typeface="+mn-cs"/>
+              </a:defRPr>
+            </a:lvl5pPr>
+            <a:lvl6pPr marL="2286000" algn="l" defTabSz="914400" rtl="0" eaLnBrk="1" latinLnBrk="0" hangingPunct="1">
+              <a:defRPr sz="1800" kern="1200">
+                <a:solidFill>
+                  <a:schemeClr val="tx1"/>
+                </a:solidFill>
+                <a:latin typeface="+mn-lt"/>
+                <a:ea typeface="+mn-ea"/>
+                <a:cs typeface="+mn-cs"/>
+              </a:defRPr>
+            </a:lvl6pPr>
+            <a:lvl7pPr marL="2743200" algn="l" defTabSz="914400" rtl="0" eaLnBrk="1" latinLnBrk="0" hangingPunct="1">
+              <a:defRPr sz="1800" kern="1200">
+                <a:solidFill>
+                  <a:schemeClr val="tx1"/>
+                </a:solidFill>
+                <a:latin typeface="+mn-lt"/>
+                <a:ea typeface="+mn-ea"/>
+                <a:cs typeface="+mn-cs"/>
+              </a:defRPr>
+            </a:lvl7pPr>
+            <a:lvl8pPr marL="3200400" algn="l" defTabSz="914400" rtl="0" eaLnBrk="1" latinLnBrk="0" hangingPunct="1">
+              <a:defRPr sz="1800" kern="1200">
+                <a:solidFill>
+                  <a:schemeClr val="tx1"/>
+                </a:solidFill>
+                <a:latin typeface="+mn-lt"/>
+                <a:ea typeface="+mn-ea"/>
+                <a:cs typeface="+mn-cs"/>
+              </a:defRPr>
+            </a:lvl8pPr>
+            <a:lvl9pPr marL="3657600" algn="l" defTabSz="914400" rtl="0" eaLnBrk="1" latinLnBrk="0" hangingPunct="1">
+              <a:defRPr sz="1800" kern="1200">
+                <a:solidFill>
+                  <a:schemeClr val="tx1"/>
+                </a:solidFill>
+                <a:latin typeface="+mn-lt"/>
+                <a:ea typeface="+mn-ea"/>
+                <a:cs typeface="+mn-cs"/>
+              </a:defRPr>
+            </a:lvl9pPr>
+          </a:lstStyle>
+          <a:p>
+            <a:fld id="{D57F1E4F-1CFF-5643-939E-217C01CDF565}" type="slidenum">
+              <a:rPr lang="en-US" b="1" smtClean="0"/>
+              <a:pPr/>
+              <a:t>18</a:t>
+            </a:fld>
+            <a:endParaRPr lang="en-US" b="1" dirty="0"/>
           </a:p>
         </p:txBody>
       </p:sp>
@@ -7560,41 +8492,6 @@
       </p:grpSpPr>
       <p:sp>
         <p:nvSpPr>
-          <p:cNvPr id="4" name="슬라이드 번호 개체 틀 3">
-            <a:extLst>
-              <a:ext uri="{FF2B5EF4-FFF2-40B4-BE49-F238E27FC236}">
-                <a16:creationId xmlns:a16="http://schemas.microsoft.com/office/drawing/2014/main" id="{D2871DAF-63F8-8502-F8DC-D5802D63E157}"/>
-              </a:ext>
-            </a:extLst>
-          </p:cNvPr>
-          <p:cNvSpPr>
-            <a:spLocks noGrp="1"/>
-          </p:cNvSpPr>
-          <p:nvPr>
-            <p:ph type="sldNum" sz="quarter" idx="12"/>
-          </p:nvPr>
-        </p:nvSpPr>
-        <p:spPr>
-          <a:xfrm>
-            <a:off x="10514011" y="6036261"/>
-            <a:ext cx="753545" cy="365125"/>
-          </a:xfrm>
-        </p:spPr>
-        <p:txBody>
-          <a:bodyPr/>
-          <a:lstStyle/>
-          <a:p>
-            <a:fld id="{D57F1E4F-1CFF-5643-939E-217C01CDF565}" type="slidenum">
-              <a:rPr lang="en-US" smtClean="0"/>
-              <a:pPr/>
-              <a:t>19</a:t>
-            </a:fld>
-            <a:endParaRPr lang="en-US" dirty="0"/>
-          </a:p>
-        </p:txBody>
-      </p:sp>
-      <p:sp>
-        <p:nvSpPr>
           <p:cNvPr id="3" name="제목 1">
             <a:extLst>
               <a:ext uri="{FF2B5EF4-FFF2-40B4-BE49-F238E27FC236}">
@@ -7719,7 +8616,7 @@
         </p:nvSpPr>
         <p:spPr>
           <a:xfrm>
-            <a:off x="609297" y="1248422"/>
+            <a:off x="609297" y="1229950"/>
             <a:ext cx="10973405" cy="793166"/>
           </a:xfrm>
           <a:prstGeom prst="rect">
@@ -7840,8 +8737,8 @@
         </p:blipFill>
         <p:spPr>
           <a:xfrm>
-            <a:off x="3982205" y="2644711"/>
-            <a:ext cx="7285351" cy="3292125"/>
+            <a:off x="3748132" y="2478457"/>
+            <a:ext cx="7944170" cy="3589834"/>
           </a:xfrm>
           <a:prstGeom prst="rect">
             <a:avLst/>
@@ -7862,13 +8759,19 @@
         </p:nvSpPr>
         <p:spPr>
           <a:xfrm>
-            <a:off x="609297" y="2690335"/>
+            <a:off x="609297" y="2570049"/>
             <a:ext cx="3048000" cy="2319930"/>
           </a:xfrm>
           <a:prstGeom prst="rect">
             <a:avLst/>
           </a:prstGeom>
           <a:noFill/>
+          <a:ln>
+            <a:solidFill>
+              <a:schemeClr val="tx1"/>
+            </a:solidFill>
+            <a:prstDash val="dash"/>
+          </a:ln>
         </p:spPr>
         <p:txBody>
           <a:bodyPr wrap="square">
@@ -7889,6 +8792,139 @@
               <a:t>“What are movies about aliens in the year 1980?” This question contains an unstructured topic that can be retrieved via embeddings (aliens), but it also contains potential structured components (year == 1980).</a:t>
             </a:r>
             <a:endParaRPr lang="ko-KR" altLang="en-US" sz="1400" dirty="0"/>
+          </a:p>
+        </p:txBody>
+      </p:sp>
+      <p:sp>
+        <p:nvSpPr>
+          <p:cNvPr id="2" name="슬라이드 번호 개체 틀 3">
+            <a:extLst>
+              <a:ext uri="{FF2B5EF4-FFF2-40B4-BE49-F238E27FC236}">
+                <a16:creationId xmlns:a16="http://schemas.microsoft.com/office/drawing/2014/main" id="{7E2CBB94-542C-69BB-0F14-08432BBA745E}"/>
+              </a:ext>
+            </a:extLst>
+          </p:cNvPr>
+          <p:cNvSpPr txBox="1">
+            <a:spLocks/>
+          </p:cNvSpPr>
+          <p:nvPr/>
+        </p:nvSpPr>
+        <p:spPr>
+          <a:xfrm>
+            <a:off x="11162230" y="299420"/>
+            <a:ext cx="753545" cy="365125"/>
+          </a:xfrm>
+          <a:prstGeom prst="rect">
+            <a:avLst/>
+          </a:prstGeom>
+        </p:spPr>
+        <p:txBody>
+          <a:bodyPr vert="horz" lIns="91440" tIns="45720" rIns="91440" bIns="45720" rtlCol="0" anchor="ctr"/>
+          <a:lstStyle>
+            <a:defPPr rtl="0">
+              <a:defRPr lang="ko-KR"/>
+            </a:defPPr>
+            <a:lvl1pPr marL="0" algn="r" defTabSz="914400" rtl="0" eaLnBrk="1" latinLnBrk="0" hangingPunct="1">
+              <a:defRPr sz="1200" kern="1200" baseline="0">
+                <a:solidFill>
+                  <a:schemeClr val="tx1">
+                    <a:lumMod val="65000"/>
+                    <a:lumOff val="35000"/>
+                  </a:schemeClr>
+                </a:solidFill>
+                <a:latin typeface="맑은 고딕" panose="020B0503020000020004" pitchFamily="50" charset="-127"/>
+                <a:ea typeface="맑은 고딕" panose="020B0503020000020004" pitchFamily="50" charset="-127"/>
+                <a:cs typeface="+mn-cs"/>
+              </a:defRPr>
+            </a:lvl1pPr>
+            <a:lvl2pPr marL="457200" algn="l" defTabSz="914400" rtl="0" eaLnBrk="1" latinLnBrk="0" hangingPunct="1">
+              <a:defRPr sz="1800" kern="1200">
+                <a:solidFill>
+                  <a:schemeClr val="tx1"/>
+                </a:solidFill>
+                <a:latin typeface="+mn-lt"/>
+                <a:ea typeface="+mn-ea"/>
+                <a:cs typeface="+mn-cs"/>
+              </a:defRPr>
+            </a:lvl2pPr>
+            <a:lvl3pPr marL="914400" algn="l" defTabSz="914400" rtl="0" eaLnBrk="1" latinLnBrk="0" hangingPunct="1">
+              <a:defRPr sz="1800" kern="1200">
+                <a:solidFill>
+                  <a:schemeClr val="tx1"/>
+                </a:solidFill>
+                <a:latin typeface="+mn-lt"/>
+                <a:ea typeface="+mn-ea"/>
+                <a:cs typeface="+mn-cs"/>
+              </a:defRPr>
+            </a:lvl3pPr>
+            <a:lvl4pPr marL="1371600" algn="l" defTabSz="914400" rtl="0" eaLnBrk="1" latinLnBrk="0" hangingPunct="1">
+              <a:defRPr sz="1800" kern="1200">
+                <a:solidFill>
+                  <a:schemeClr val="tx1"/>
+                </a:solidFill>
+                <a:latin typeface="+mn-lt"/>
+                <a:ea typeface="+mn-ea"/>
+                <a:cs typeface="+mn-cs"/>
+              </a:defRPr>
+            </a:lvl4pPr>
+            <a:lvl5pPr marL="1828800" algn="l" defTabSz="914400" rtl="0" eaLnBrk="1" latinLnBrk="0" hangingPunct="1">
+              <a:defRPr sz="1800" kern="1200">
+                <a:solidFill>
+                  <a:schemeClr val="tx1"/>
+                </a:solidFill>
+                <a:latin typeface="+mn-lt"/>
+                <a:ea typeface="+mn-ea"/>
+                <a:cs typeface="+mn-cs"/>
+              </a:defRPr>
+            </a:lvl5pPr>
+            <a:lvl6pPr marL="2286000" algn="l" defTabSz="914400" rtl="0" eaLnBrk="1" latinLnBrk="0" hangingPunct="1">
+              <a:defRPr sz="1800" kern="1200">
+                <a:solidFill>
+                  <a:schemeClr val="tx1"/>
+                </a:solidFill>
+                <a:latin typeface="+mn-lt"/>
+                <a:ea typeface="+mn-ea"/>
+                <a:cs typeface="+mn-cs"/>
+              </a:defRPr>
+            </a:lvl6pPr>
+            <a:lvl7pPr marL="2743200" algn="l" defTabSz="914400" rtl="0" eaLnBrk="1" latinLnBrk="0" hangingPunct="1">
+              <a:defRPr sz="1800" kern="1200">
+                <a:solidFill>
+                  <a:schemeClr val="tx1"/>
+                </a:solidFill>
+                <a:latin typeface="+mn-lt"/>
+                <a:ea typeface="+mn-ea"/>
+                <a:cs typeface="+mn-cs"/>
+              </a:defRPr>
+            </a:lvl7pPr>
+            <a:lvl8pPr marL="3200400" algn="l" defTabSz="914400" rtl="0" eaLnBrk="1" latinLnBrk="0" hangingPunct="1">
+              <a:defRPr sz="1800" kern="1200">
+                <a:solidFill>
+                  <a:schemeClr val="tx1"/>
+                </a:solidFill>
+                <a:latin typeface="+mn-lt"/>
+                <a:ea typeface="+mn-ea"/>
+                <a:cs typeface="+mn-cs"/>
+              </a:defRPr>
+            </a:lvl8pPr>
+            <a:lvl9pPr marL="3657600" algn="l" defTabSz="914400" rtl="0" eaLnBrk="1" latinLnBrk="0" hangingPunct="1">
+              <a:defRPr sz="1800" kern="1200">
+                <a:solidFill>
+                  <a:schemeClr val="tx1"/>
+                </a:solidFill>
+                <a:latin typeface="+mn-lt"/>
+                <a:ea typeface="+mn-ea"/>
+                <a:cs typeface="+mn-cs"/>
+              </a:defRPr>
+            </a:lvl9pPr>
+          </a:lstStyle>
+          <a:p>
+            <a:fld id="{D57F1E4F-1CFF-5643-939E-217C01CDF565}" type="slidenum">
+              <a:rPr lang="en-US" b="1" smtClean="0"/>
+              <a:pPr/>
+              <a:t>19</a:t>
+            </a:fld>
+            <a:endParaRPr lang="en-US" b="1" dirty="0"/>
           </a:p>
         </p:txBody>
       </p:sp>
@@ -8076,41 +9112,6 @@
       </p:grpSpPr>
       <p:sp>
         <p:nvSpPr>
-          <p:cNvPr id="4" name="슬라이드 번호 개체 틀 3">
-            <a:extLst>
-              <a:ext uri="{FF2B5EF4-FFF2-40B4-BE49-F238E27FC236}">
-                <a16:creationId xmlns:a16="http://schemas.microsoft.com/office/drawing/2014/main" id="{48293AD0-01E0-E70E-A8AE-DC3D6ED005DA}"/>
-              </a:ext>
-            </a:extLst>
-          </p:cNvPr>
-          <p:cNvSpPr>
-            <a:spLocks noGrp="1"/>
-          </p:cNvSpPr>
-          <p:nvPr>
-            <p:ph type="sldNum" sz="quarter" idx="12"/>
-          </p:nvPr>
-        </p:nvSpPr>
-        <p:spPr>
-          <a:xfrm>
-            <a:off x="10514011" y="6036261"/>
-            <a:ext cx="753545" cy="365125"/>
-          </a:xfrm>
-        </p:spPr>
-        <p:txBody>
-          <a:bodyPr/>
-          <a:lstStyle/>
-          <a:p>
-            <a:fld id="{D57F1E4F-1CFF-5643-939E-217C01CDF565}" type="slidenum">
-              <a:rPr lang="en-US" smtClean="0"/>
-              <a:pPr/>
-              <a:t>20</a:t>
-            </a:fld>
-            <a:endParaRPr lang="en-US" dirty="0"/>
-          </a:p>
-        </p:txBody>
-      </p:sp>
-      <p:sp>
-        <p:nvSpPr>
           <p:cNvPr id="3" name="제목 1">
             <a:extLst>
               <a:ext uri="{FF2B5EF4-FFF2-40B4-BE49-F238E27FC236}">
@@ -8243,8 +9244,8 @@
         </p:blipFill>
         <p:spPr>
           <a:xfrm>
-            <a:off x="2287592" y="2948806"/>
-            <a:ext cx="7216765" cy="3093988"/>
+            <a:off x="2263986" y="3169471"/>
+            <a:ext cx="7664027" cy="3285739"/>
           </a:xfrm>
           <a:prstGeom prst="rect">
             <a:avLst/>
@@ -8266,7 +9267,7 @@
         <p:spPr>
           <a:xfrm>
             <a:off x="2287592" y="2651289"/>
-            <a:ext cx="6096000" cy="297517"/>
+            <a:ext cx="6505426" cy="300723"/>
           </a:xfrm>
           <a:prstGeom prst="rect">
             <a:avLst/>
@@ -8288,7 +9289,7 @@
               <a:buNone/>
             </a:pPr>
             <a:r>
-              <a:rPr lang="en-US" altLang="ko-KR" sz="1400" b="0" dirty="0">
+              <a:rPr lang="en-US" altLang="ko-KR" sz="1600" b="0" dirty="0">
                 <a:effectLst/>
                 <a:latin typeface="D2Coding" panose="020B0609020101020101" pitchFamily="49" charset="-127"/>
                 <a:ea typeface="D2Coding" panose="020B0609020101020101" pitchFamily="49" charset="-127"/>
@@ -8296,7 +9297,7 @@
               <a:t>from </a:t>
             </a:r>
             <a:r>
-              <a:rPr lang="en-US" altLang="ko-KR" sz="1400" b="0" dirty="0" err="1">
+              <a:rPr lang="en-US" altLang="ko-KR" sz="1600" b="0" dirty="0" err="1">
                 <a:effectLst/>
                 <a:latin typeface="D2Coding" panose="020B0609020101020101" pitchFamily="49" charset="-127"/>
                 <a:ea typeface="D2Coding" panose="020B0609020101020101" pitchFamily="49" charset="-127"/>
@@ -8304,7 +9305,7 @@
               <a:t>langchain_classic.chains</a:t>
             </a:r>
             <a:r>
-              <a:rPr lang="en-US" altLang="ko-KR" sz="1400" b="0" dirty="0">
+              <a:rPr lang="en-US" altLang="ko-KR" sz="1600" b="0" dirty="0">
                 <a:effectLst/>
                 <a:latin typeface="D2Coding" panose="020B0609020101020101" pitchFamily="49" charset="-127"/>
                 <a:ea typeface="D2Coding" panose="020B0609020101020101" pitchFamily="49" charset="-127"/>
@@ -8312,14 +9313,14 @@
               <a:t> import </a:t>
             </a:r>
             <a:r>
-              <a:rPr lang="en-US" altLang="ko-KR" sz="1400" b="0" dirty="0" err="1">
+              <a:rPr lang="en-US" altLang="ko-KR" sz="1600" b="0" dirty="0" err="1">
                 <a:effectLst/>
                 <a:latin typeface="D2Coding" panose="020B0609020101020101" pitchFamily="49" charset="-127"/>
                 <a:ea typeface="D2Coding" panose="020B0609020101020101" pitchFamily="49" charset="-127"/>
               </a:rPr>
               <a:t>create_sql_query_chain</a:t>
             </a:r>
-            <a:endParaRPr lang="en-US" altLang="ko-KR" sz="1400" b="0" dirty="0">
+            <a:endParaRPr lang="en-US" altLang="ko-KR" sz="1600" b="0" dirty="0">
               <a:effectLst/>
               <a:latin typeface="D2Coding" panose="020B0609020101020101" pitchFamily="49" charset="-127"/>
               <a:ea typeface="D2Coding" panose="020B0609020101020101" pitchFamily="49" charset="-127"/>
@@ -8341,7 +9342,7 @@
         </p:nvSpPr>
         <p:spPr>
           <a:xfrm>
-            <a:off x="571500" y="1244478"/>
+            <a:off x="571500" y="1235242"/>
             <a:ext cx="11106150" cy="1162498"/>
           </a:xfrm>
           <a:prstGeom prst="rect">
@@ -8435,7 +9436,7 @@
                 <a:latin typeface="D2Coding" panose="020B0609020101020101" pitchFamily="49" charset="-127"/>
                 <a:ea typeface="D2Coding" panose="020B0609020101020101" pitchFamily="49" charset="-127"/>
               </a:rPr>
-              <a:t>의할 점은</a:t>
+              <a:t>유의할 점은</a:t>
             </a:r>
             <a:r>
               <a:rPr lang="en-US" altLang="ko-KR" sz="1600" dirty="0">
@@ -8493,6 +9494,139 @@
               </a:rPr>
               <a:t>에서 매우 위험</a:t>
             </a:r>
+          </a:p>
+        </p:txBody>
+      </p:sp>
+      <p:sp>
+        <p:nvSpPr>
+          <p:cNvPr id="2" name="슬라이드 번호 개체 틀 3">
+            <a:extLst>
+              <a:ext uri="{FF2B5EF4-FFF2-40B4-BE49-F238E27FC236}">
+                <a16:creationId xmlns:a16="http://schemas.microsoft.com/office/drawing/2014/main" id="{90C1ED1F-0C14-EB47-B530-87E787FFA4F4}"/>
+              </a:ext>
+            </a:extLst>
+          </p:cNvPr>
+          <p:cNvSpPr txBox="1">
+            <a:spLocks/>
+          </p:cNvSpPr>
+          <p:nvPr/>
+        </p:nvSpPr>
+        <p:spPr>
+          <a:xfrm>
+            <a:off x="11162230" y="299420"/>
+            <a:ext cx="753545" cy="365125"/>
+          </a:xfrm>
+          <a:prstGeom prst="rect">
+            <a:avLst/>
+          </a:prstGeom>
+        </p:spPr>
+        <p:txBody>
+          <a:bodyPr vert="horz" lIns="91440" tIns="45720" rIns="91440" bIns="45720" rtlCol="0" anchor="ctr"/>
+          <a:lstStyle>
+            <a:defPPr rtl="0">
+              <a:defRPr lang="ko-KR"/>
+            </a:defPPr>
+            <a:lvl1pPr marL="0" algn="r" defTabSz="914400" rtl="0" eaLnBrk="1" latinLnBrk="0" hangingPunct="1">
+              <a:defRPr sz="1200" kern="1200" baseline="0">
+                <a:solidFill>
+                  <a:schemeClr val="tx1">
+                    <a:lumMod val="65000"/>
+                    <a:lumOff val="35000"/>
+                  </a:schemeClr>
+                </a:solidFill>
+                <a:latin typeface="맑은 고딕" panose="020B0503020000020004" pitchFamily="50" charset="-127"/>
+                <a:ea typeface="맑은 고딕" panose="020B0503020000020004" pitchFamily="50" charset="-127"/>
+                <a:cs typeface="+mn-cs"/>
+              </a:defRPr>
+            </a:lvl1pPr>
+            <a:lvl2pPr marL="457200" algn="l" defTabSz="914400" rtl="0" eaLnBrk="1" latinLnBrk="0" hangingPunct="1">
+              <a:defRPr sz="1800" kern="1200">
+                <a:solidFill>
+                  <a:schemeClr val="tx1"/>
+                </a:solidFill>
+                <a:latin typeface="+mn-lt"/>
+                <a:ea typeface="+mn-ea"/>
+                <a:cs typeface="+mn-cs"/>
+              </a:defRPr>
+            </a:lvl2pPr>
+            <a:lvl3pPr marL="914400" algn="l" defTabSz="914400" rtl="0" eaLnBrk="1" latinLnBrk="0" hangingPunct="1">
+              <a:defRPr sz="1800" kern="1200">
+                <a:solidFill>
+                  <a:schemeClr val="tx1"/>
+                </a:solidFill>
+                <a:latin typeface="+mn-lt"/>
+                <a:ea typeface="+mn-ea"/>
+                <a:cs typeface="+mn-cs"/>
+              </a:defRPr>
+            </a:lvl3pPr>
+            <a:lvl4pPr marL="1371600" algn="l" defTabSz="914400" rtl="0" eaLnBrk="1" latinLnBrk="0" hangingPunct="1">
+              <a:defRPr sz="1800" kern="1200">
+                <a:solidFill>
+                  <a:schemeClr val="tx1"/>
+                </a:solidFill>
+                <a:latin typeface="+mn-lt"/>
+                <a:ea typeface="+mn-ea"/>
+                <a:cs typeface="+mn-cs"/>
+              </a:defRPr>
+            </a:lvl4pPr>
+            <a:lvl5pPr marL="1828800" algn="l" defTabSz="914400" rtl="0" eaLnBrk="1" latinLnBrk="0" hangingPunct="1">
+              <a:defRPr sz="1800" kern="1200">
+                <a:solidFill>
+                  <a:schemeClr val="tx1"/>
+                </a:solidFill>
+                <a:latin typeface="+mn-lt"/>
+                <a:ea typeface="+mn-ea"/>
+                <a:cs typeface="+mn-cs"/>
+              </a:defRPr>
+            </a:lvl5pPr>
+            <a:lvl6pPr marL="2286000" algn="l" defTabSz="914400" rtl="0" eaLnBrk="1" latinLnBrk="0" hangingPunct="1">
+              <a:defRPr sz="1800" kern="1200">
+                <a:solidFill>
+                  <a:schemeClr val="tx1"/>
+                </a:solidFill>
+                <a:latin typeface="+mn-lt"/>
+                <a:ea typeface="+mn-ea"/>
+                <a:cs typeface="+mn-cs"/>
+              </a:defRPr>
+            </a:lvl6pPr>
+            <a:lvl7pPr marL="2743200" algn="l" defTabSz="914400" rtl="0" eaLnBrk="1" latinLnBrk="0" hangingPunct="1">
+              <a:defRPr sz="1800" kern="1200">
+                <a:solidFill>
+                  <a:schemeClr val="tx1"/>
+                </a:solidFill>
+                <a:latin typeface="+mn-lt"/>
+                <a:ea typeface="+mn-ea"/>
+                <a:cs typeface="+mn-cs"/>
+              </a:defRPr>
+            </a:lvl7pPr>
+            <a:lvl8pPr marL="3200400" algn="l" defTabSz="914400" rtl="0" eaLnBrk="1" latinLnBrk="0" hangingPunct="1">
+              <a:defRPr sz="1800" kern="1200">
+                <a:solidFill>
+                  <a:schemeClr val="tx1"/>
+                </a:solidFill>
+                <a:latin typeface="+mn-lt"/>
+                <a:ea typeface="+mn-ea"/>
+                <a:cs typeface="+mn-cs"/>
+              </a:defRPr>
+            </a:lvl8pPr>
+            <a:lvl9pPr marL="3657600" algn="l" defTabSz="914400" rtl="0" eaLnBrk="1" latinLnBrk="0" hangingPunct="1">
+              <a:defRPr sz="1800" kern="1200">
+                <a:solidFill>
+                  <a:schemeClr val="tx1"/>
+                </a:solidFill>
+                <a:latin typeface="+mn-lt"/>
+                <a:ea typeface="+mn-ea"/>
+                <a:cs typeface="+mn-cs"/>
+              </a:defRPr>
+            </a:lvl9pPr>
+          </a:lstStyle>
+          <a:p>
+            <a:fld id="{D57F1E4F-1CFF-5643-939E-217C01CDF565}" type="slidenum">
+              <a:rPr lang="en-US" b="1" smtClean="0"/>
+              <a:pPr/>
+              <a:t>20</a:t>
+            </a:fld>
+            <a:endParaRPr lang="en-US" b="1" dirty="0"/>
           </a:p>
         </p:txBody>
       </p:sp>
@@ -8534,41 +9668,6 @@
       </p:grpSpPr>
       <p:sp>
         <p:nvSpPr>
-          <p:cNvPr id="4" name="슬라이드 번호 개체 틀 3">
-            <a:extLst>
-              <a:ext uri="{FF2B5EF4-FFF2-40B4-BE49-F238E27FC236}">
-                <a16:creationId xmlns:a16="http://schemas.microsoft.com/office/drawing/2014/main" id="{47C86724-FDB2-6094-C7FE-85D331CA42F5}"/>
-              </a:ext>
-            </a:extLst>
-          </p:cNvPr>
-          <p:cNvSpPr>
-            <a:spLocks noGrp="1"/>
-          </p:cNvSpPr>
-          <p:nvPr>
-            <p:ph type="sldNum" sz="quarter" idx="12"/>
-          </p:nvPr>
-        </p:nvSpPr>
-        <p:spPr>
-          <a:xfrm>
-            <a:off x="10514011" y="6036261"/>
-            <a:ext cx="753545" cy="365125"/>
-          </a:xfrm>
-        </p:spPr>
-        <p:txBody>
-          <a:bodyPr/>
-          <a:lstStyle/>
-          <a:p>
-            <a:fld id="{D57F1E4F-1CFF-5643-939E-217C01CDF565}" type="slidenum">
-              <a:rPr lang="en-US" smtClean="0"/>
-              <a:pPr/>
-              <a:t>21</a:t>
-            </a:fld>
-            <a:endParaRPr lang="en-US" dirty="0"/>
-          </a:p>
-        </p:txBody>
-      </p:sp>
-      <p:sp>
-        <p:nvSpPr>
           <p:cNvPr id="3" name="제목 1">
             <a:extLst>
               <a:ext uri="{FF2B5EF4-FFF2-40B4-BE49-F238E27FC236}">
@@ -8656,8 +9755,8 @@
         </p:nvSpPr>
         <p:spPr>
           <a:xfrm>
-            <a:off x="571219" y="1248422"/>
-            <a:ext cx="11049562" cy="4578818"/>
+            <a:off x="571219" y="1569819"/>
+            <a:ext cx="11049562" cy="4145045"/>
           </a:xfrm>
           <a:prstGeom prst="rect">
             <a:avLst/>
@@ -8851,62 +9950,48 @@
               <a:buChar char="v"/>
             </a:pPr>
             <a:r>
-              <a:rPr lang="en-US" altLang="ko-KR" sz="1600" b="1" dirty="0">
+              <a:rPr lang="en-US" altLang="ko-KR" sz="1400" b="1" dirty="0">
                 <a:latin typeface="D2Coding" panose="020B0609020101020101" pitchFamily="49" charset="-127"/>
                 <a:ea typeface="D2Coding" panose="020B0609020101020101" pitchFamily="49" charset="-127"/>
               </a:rPr>
               <a:t>Query Transformation (</a:t>
             </a:r>
             <a:r>
-              <a:rPr lang="ko-KR" altLang="en-US" sz="1600" b="1" dirty="0">
+              <a:rPr lang="ko-KR" altLang="en-US" sz="1400" b="1" dirty="0">
                 <a:latin typeface="D2Coding" panose="020B0609020101020101" pitchFamily="49" charset="-127"/>
                 <a:ea typeface="D2Coding" panose="020B0609020101020101" pitchFamily="49" charset="-127"/>
               </a:rPr>
               <a:t>쿼리 변환</a:t>
             </a:r>
             <a:r>
-              <a:rPr lang="en-US" altLang="ko-KR" sz="1600" b="1" dirty="0">
+              <a:rPr lang="en-US" altLang="ko-KR" sz="1400" b="1" dirty="0">
                 <a:latin typeface="D2Coding" panose="020B0609020101020101" pitchFamily="49" charset="-127"/>
                 <a:ea typeface="D2Coding" panose="020B0609020101020101" pitchFamily="49" charset="-127"/>
               </a:rPr>
               <a:t>):</a:t>
             </a:r>
             <a:r>
-              <a:rPr lang="ko-KR" altLang="en-US" sz="1600" dirty="0">
+              <a:rPr lang="ko-KR" altLang="en-US" sz="1400" dirty="0">
                 <a:latin typeface="D2Coding" panose="020B0609020101020101" pitchFamily="49" charset="-127"/>
                 <a:ea typeface="D2Coding" panose="020B0609020101020101" pitchFamily="49" charset="-127"/>
               </a:rPr>
               <a:t> 사용자가 애매하게 질문했을 때</a:t>
             </a:r>
             <a:r>
-              <a:rPr lang="en-US" altLang="ko-KR" sz="1600" dirty="0">
+              <a:rPr lang="en-US" altLang="ko-KR" sz="1400" dirty="0">
                 <a:latin typeface="D2Coding" panose="020B0609020101020101" pitchFamily="49" charset="-127"/>
                 <a:ea typeface="D2Coding" panose="020B0609020101020101" pitchFamily="49" charset="-127"/>
               </a:rPr>
               <a:t>, LLM</a:t>
             </a:r>
             <a:r>
-              <a:rPr lang="ko-KR" altLang="en-US" sz="1600" dirty="0">
-                <a:latin typeface="D2Coding" panose="020B0609020101020101" pitchFamily="49" charset="-127"/>
-                <a:ea typeface="D2Coding" panose="020B0609020101020101" pitchFamily="49" charset="-127"/>
-              </a:rPr>
-              <a:t>이 검색을 더 잘할 수 있도록 질문을 구체적인 여러 개로 쪼개거나 다른 표현으로 </a:t>
-            </a:r>
-            <a:r>
-              <a:rPr lang="ko-KR" altLang="en-US" sz="1600" dirty="0" err="1">
-                <a:latin typeface="D2Coding" panose="020B0609020101020101" pitchFamily="49" charset="-127"/>
-                <a:ea typeface="D2Coding" panose="020B0609020101020101" pitchFamily="49" charset="-127"/>
-              </a:rPr>
-              <a:t>재작성하는</a:t>
-            </a:r>
-            <a:r>
-              <a:rPr lang="ko-KR" altLang="en-US" sz="1600" dirty="0">
-                <a:latin typeface="D2Coding" panose="020B0609020101020101" pitchFamily="49" charset="-127"/>
-                <a:ea typeface="D2Coding" panose="020B0609020101020101" pitchFamily="49" charset="-127"/>
-              </a:rPr>
-              <a:t> 기술</a:t>
-            </a:r>
-            <a:endParaRPr lang="en-US" altLang="ko-KR" sz="1600" dirty="0">
+              <a:rPr lang="ko-KR" altLang="en-US" sz="1400" dirty="0">
+                <a:latin typeface="D2Coding" panose="020B0609020101020101" pitchFamily="49" charset="-127"/>
+                <a:ea typeface="D2Coding" panose="020B0609020101020101" pitchFamily="49" charset="-127"/>
+              </a:rPr>
+              <a:t>이 검색을 더 잘할 수 있도록 질문을 구체적인 여러 개로 쪼개거나 다른 표현으로 재 작성하는 기술</a:t>
+            </a:r>
+            <a:endParaRPr lang="en-US" altLang="ko-KR" sz="1400" dirty="0">
               <a:latin typeface="D2Coding" panose="020B0609020101020101" pitchFamily="49" charset="-127"/>
               <a:ea typeface="D2Coding" panose="020B0609020101020101" pitchFamily="49" charset="-127"/>
             </a:endParaRPr>
@@ -8919,7 +10004,7 @@
               <a:buFont typeface="Wingdings" panose="05000000000000000000" pitchFamily="2" charset="2"/>
               <a:buChar char="v"/>
             </a:pPr>
-            <a:endParaRPr lang="en-US" altLang="ko-KR" sz="600" dirty="0">
+            <a:endParaRPr lang="en-US" altLang="ko-KR" sz="500" dirty="0">
               <a:latin typeface="D2Coding" panose="020B0609020101020101" pitchFamily="49" charset="-127"/>
               <a:ea typeface="D2Coding" panose="020B0609020101020101" pitchFamily="49" charset="-127"/>
             </a:endParaRPr>
@@ -8933,97 +10018,97 @@
               <a:buChar char="v"/>
             </a:pPr>
             <a:r>
-              <a:rPr lang="en-US" altLang="ko-KR" sz="1600" b="1" dirty="0">
+              <a:rPr lang="en-US" altLang="ko-KR" sz="1400" b="1" dirty="0">
                 <a:latin typeface="D2Coding" panose="020B0609020101020101" pitchFamily="49" charset="-127"/>
                 <a:ea typeface="D2Coding" panose="020B0609020101020101" pitchFamily="49" charset="-127"/>
               </a:rPr>
               <a:t>Query Construction (</a:t>
             </a:r>
             <a:r>
-              <a:rPr lang="ko-KR" altLang="en-US" sz="1600" b="1" dirty="0">
+              <a:rPr lang="ko-KR" altLang="en-US" sz="1400" b="1" dirty="0">
                 <a:latin typeface="D2Coding" panose="020B0609020101020101" pitchFamily="49" charset="-127"/>
                 <a:ea typeface="D2Coding" panose="020B0609020101020101" pitchFamily="49" charset="-127"/>
               </a:rPr>
               <a:t>쿼리 구성</a:t>
             </a:r>
             <a:r>
-              <a:rPr lang="en-US" altLang="ko-KR" sz="1600" b="1" dirty="0">
+              <a:rPr lang="en-US" altLang="ko-KR" sz="1400" b="1" dirty="0">
                 <a:latin typeface="D2Coding" panose="020B0609020101020101" pitchFamily="49" charset="-127"/>
                 <a:ea typeface="D2Coding" panose="020B0609020101020101" pitchFamily="49" charset="-127"/>
               </a:rPr>
               <a:t>):</a:t>
             </a:r>
             <a:r>
-              <a:rPr lang="ko-KR" altLang="en-US" sz="1600" dirty="0">
+              <a:rPr lang="ko-KR" altLang="en-US" sz="1400" dirty="0">
                 <a:latin typeface="D2Coding" panose="020B0609020101020101" pitchFamily="49" charset="-127"/>
                 <a:ea typeface="D2Coding" panose="020B0609020101020101" pitchFamily="49" charset="-127"/>
               </a:rPr>
               <a:t> 질문을 단순 텍스트 검색에만 쓰는 게 아니라</a:t>
             </a:r>
             <a:r>
-              <a:rPr lang="en-US" altLang="ko-KR" sz="1600" dirty="0">
+              <a:rPr lang="en-US" altLang="ko-KR" sz="1400" dirty="0">
                 <a:latin typeface="D2Coding" panose="020B0609020101020101" pitchFamily="49" charset="-127"/>
                 <a:ea typeface="D2Coding" panose="020B0609020101020101" pitchFamily="49" charset="-127"/>
               </a:rPr>
               <a:t>, </a:t>
             </a:r>
             <a:r>
-              <a:rPr lang="en-US" altLang="ko-KR" sz="1600" b="1" dirty="0">
+              <a:rPr lang="en-US" altLang="ko-KR" sz="1400" b="1" dirty="0">
                 <a:latin typeface="D2Coding" panose="020B0609020101020101" pitchFamily="49" charset="-127"/>
                 <a:ea typeface="D2Coding" panose="020B0609020101020101" pitchFamily="49" charset="-127"/>
               </a:rPr>
               <a:t>Text-to-Metadata Filter</a:t>
             </a:r>
             <a:r>
-              <a:rPr lang="ko-KR" altLang="en-US" sz="1600" dirty="0">
+              <a:rPr lang="ko-KR" altLang="en-US" sz="1400" dirty="0">
                 <a:latin typeface="D2Coding" panose="020B0609020101020101" pitchFamily="49" charset="-127"/>
                 <a:ea typeface="D2Coding" panose="020B0609020101020101" pitchFamily="49" charset="-127"/>
               </a:rPr>
               <a:t>나 </a:t>
             </a:r>
             <a:r>
-              <a:rPr lang="en-US" altLang="ko-KR" sz="1600" b="1" dirty="0">
+              <a:rPr lang="en-US" altLang="ko-KR" sz="1400" b="1" dirty="0">
                 <a:latin typeface="D2Coding" panose="020B0609020101020101" pitchFamily="49" charset="-127"/>
                 <a:ea typeface="D2Coding" panose="020B0609020101020101" pitchFamily="49" charset="-127"/>
               </a:rPr>
               <a:t>Text-to-SQL</a:t>
             </a:r>
             <a:r>
-              <a:rPr lang="ko-KR" altLang="en-US" sz="1600" dirty="0">
+              <a:rPr lang="ko-KR" altLang="en-US" sz="1400" dirty="0">
                 <a:latin typeface="D2Coding" panose="020B0609020101020101" pitchFamily="49" charset="-127"/>
                 <a:ea typeface="D2Coding" panose="020B0609020101020101" pitchFamily="49" charset="-127"/>
               </a:rPr>
               <a:t>처럼 데이터베이스가 완벽하게 이해할 수 있는 형태</a:t>
             </a:r>
             <a:r>
-              <a:rPr lang="en-US" altLang="ko-KR" sz="1600" dirty="0">
+              <a:rPr lang="en-US" altLang="ko-KR" sz="1400" dirty="0">
                 <a:latin typeface="D2Coding" panose="020B0609020101020101" pitchFamily="49" charset="-127"/>
                 <a:ea typeface="D2Coding" panose="020B0609020101020101" pitchFamily="49" charset="-127"/>
               </a:rPr>
               <a:t>(</a:t>
             </a:r>
             <a:r>
-              <a:rPr lang="ko-KR" altLang="en-US" sz="1600" dirty="0">
+              <a:rPr lang="ko-KR" altLang="en-US" sz="1400" dirty="0">
                 <a:latin typeface="D2Coding" panose="020B0609020101020101" pitchFamily="49" charset="-127"/>
                 <a:ea typeface="D2Coding" panose="020B0609020101020101" pitchFamily="49" charset="-127"/>
               </a:rPr>
               <a:t>구조화된 쿼리</a:t>
             </a:r>
             <a:r>
-              <a:rPr lang="en-US" altLang="ko-KR" sz="1600" dirty="0">
+              <a:rPr lang="en-US" altLang="ko-KR" sz="1400" dirty="0">
                 <a:latin typeface="D2Coding" panose="020B0609020101020101" pitchFamily="49" charset="-127"/>
                 <a:ea typeface="D2Coding" panose="020B0609020101020101" pitchFamily="49" charset="-127"/>
               </a:rPr>
               <a:t>)</a:t>
             </a:r>
             <a:r>
-              <a:rPr lang="ko-KR" altLang="en-US" sz="1600" dirty="0">
+              <a:rPr lang="ko-KR" altLang="en-US" sz="1400" dirty="0">
                 <a:latin typeface="D2Coding" panose="020B0609020101020101" pitchFamily="49" charset="-127"/>
                 <a:ea typeface="D2Coding" panose="020B0609020101020101" pitchFamily="49" charset="-127"/>
               </a:rPr>
               <a:t>로 빌드하는 기술</a:t>
             </a:r>
-            <a:endParaRPr lang="en-US" altLang="ko-KR" sz="1600" dirty="0">
+            <a:endParaRPr lang="en-US" altLang="ko-KR" sz="1400" dirty="0">
               <a:latin typeface="D2Coding" panose="020B0609020101020101" pitchFamily="49" charset="-127"/>
               <a:ea typeface="D2Coding" panose="020B0609020101020101" pitchFamily="49" charset="-127"/>
             </a:endParaRPr>
@@ -9036,7 +10121,7 @@
               <a:buFont typeface="Wingdings" panose="05000000000000000000" pitchFamily="2" charset="2"/>
               <a:buChar char="v"/>
             </a:pPr>
-            <a:endParaRPr lang="en-US" altLang="ko-KR" sz="600" dirty="0">
+            <a:endParaRPr lang="en-US" altLang="ko-KR" sz="500" dirty="0">
               <a:latin typeface="D2Coding" panose="020B0609020101020101" pitchFamily="49" charset="-127"/>
               <a:ea typeface="D2Coding" panose="020B0609020101020101" pitchFamily="49" charset="-127"/>
             </a:endParaRPr>
@@ -9050,146 +10135,146 @@
               <a:buChar char="v"/>
             </a:pPr>
             <a:r>
-              <a:rPr lang="en-US" altLang="ko-KR" sz="1600" b="1" dirty="0">
+              <a:rPr lang="en-US" altLang="ko-KR" sz="1400" b="1" dirty="0">
                 <a:latin typeface="D2Coding" panose="020B0609020101020101" pitchFamily="49" charset="-127"/>
                 <a:ea typeface="D2Coding" panose="020B0609020101020101" pitchFamily="49" charset="-127"/>
               </a:rPr>
               <a:t>Query Routing (</a:t>
             </a:r>
             <a:r>
-              <a:rPr lang="ko-KR" altLang="en-US" sz="1600" b="1" dirty="0">
+              <a:rPr lang="ko-KR" altLang="en-US" sz="1400" b="1" dirty="0">
                 <a:latin typeface="D2Coding" panose="020B0609020101020101" pitchFamily="49" charset="-127"/>
                 <a:ea typeface="D2Coding" panose="020B0609020101020101" pitchFamily="49" charset="-127"/>
               </a:rPr>
               <a:t>쿼리</a:t>
             </a:r>
             <a:r>
-              <a:rPr lang="en-US" altLang="ko-KR" sz="1600" b="1" dirty="0">
+              <a:rPr lang="en-US" altLang="ko-KR" sz="1400" b="1" dirty="0">
                 <a:latin typeface="D2Coding" panose="020B0609020101020101" pitchFamily="49" charset="-127"/>
                 <a:ea typeface="D2Coding" panose="020B0609020101020101" pitchFamily="49" charset="-127"/>
               </a:rPr>
               <a:t> </a:t>
             </a:r>
             <a:r>
-              <a:rPr lang="ko-KR" altLang="en-US" sz="1600" b="1" dirty="0">
+              <a:rPr lang="ko-KR" altLang="en-US" sz="1400" b="1" dirty="0">
                 <a:latin typeface="D2Coding" panose="020B0609020101020101" pitchFamily="49" charset="-127"/>
                 <a:ea typeface="D2Coding" panose="020B0609020101020101" pitchFamily="49" charset="-127"/>
               </a:rPr>
               <a:t>라우팅</a:t>
             </a:r>
             <a:r>
-              <a:rPr lang="en-US" altLang="ko-KR" sz="1600" b="1" dirty="0">
+              <a:rPr lang="en-US" altLang="ko-KR" sz="1400" b="1" dirty="0">
                 <a:latin typeface="D2Coding" panose="020B0609020101020101" pitchFamily="49" charset="-127"/>
                 <a:ea typeface="D2Coding" panose="020B0609020101020101" pitchFamily="49" charset="-127"/>
               </a:rPr>
               <a:t>):</a:t>
             </a:r>
             <a:r>
-              <a:rPr lang="ko-KR" altLang="en-US" sz="1600" dirty="0">
+              <a:rPr lang="ko-KR" altLang="en-US" sz="1400" dirty="0">
                 <a:latin typeface="D2Coding" panose="020B0609020101020101" pitchFamily="49" charset="-127"/>
                 <a:ea typeface="D2Coding" panose="020B0609020101020101" pitchFamily="49" charset="-127"/>
               </a:rPr>
               <a:t> 질문이 들어왔을 때 </a:t>
             </a:r>
             <a:r>
-              <a:rPr lang="en-US" altLang="ko-KR" sz="1600" dirty="0">
+              <a:rPr lang="en-US" altLang="ko-KR" sz="1400" dirty="0">
                 <a:latin typeface="D2Coding" panose="020B0609020101020101" pitchFamily="49" charset="-127"/>
                 <a:ea typeface="D2Coding" panose="020B0609020101020101" pitchFamily="49" charset="-127"/>
               </a:rPr>
               <a:t>"</a:t>
             </a:r>
             <a:r>
-              <a:rPr lang="ko-KR" altLang="en-US" sz="1600" dirty="0">
+              <a:rPr lang="ko-KR" altLang="en-US" sz="1400" dirty="0">
                 <a:latin typeface="D2Coding" panose="020B0609020101020101" pitchFamily="49" charset="-127"/>
                 <a:ea typeface="D2Coding" panose="020B0609020101020101" pitchFamily="49" charset="-127"/>
               </a:rPr>
               <a:t>이건 </a:t>
             </a:r>
             <a:r>
-              <a:rPr lang="en-US" altLang="ko-KR" sz="1600" dirty="0">
+              <a:rPr lang="en-US" altLang="ko-KR" sz="1400" dirty="0">
                 <a:latin typeface="D2Coding" panose="020B0609020101020101" pitchFamily="49" charset="-127"/>
                 <a:ea typeface="D2Coding" panose="020B0609020101020101" pitchFamily="49" charset="-127"/>
               </a:rPr>
               <a:t>SQL DB</a:t>
             </a:r>
             <a:r>
-              <a:rPr lang="ko-KR" altLang="en-US" sz="1600" dirty="0">
+              <a:rPr lang="ko-KR" altLang="en-US" sz="1400" dirty="0">
                 <a:latin typeface="D2Coding" panose="020B0609020101020101" pitchFamily="49" charset="-127"/>
                 <a:ea typeface="D2Coding" panose="020B0609020101020101" pitchFamily="49" charset="-127"/>
               </a:rPr>
               <a:t>로 보내야 할까</a:t>
             </a:r>
             <a:r>
-              <a:rPr lang="en-US" altLang="ko-KR" sz="1600" dirty="0">
+              <a:rPr lang="en-US" altLang="ko-KR" sz="1400" dirty="0">
                 <a:latin typeface="D2Coding" panose="020B0609020101020101" pitchFamily="49" charset="-127"/>
                 <a:ea typeface="D2Coding" panose="020B0609020101020101" pitchFamily="49" charset="-127"/>
               </a:rPr>
               <a:t>? </a:t>
             </a:r>
             <a:r>
-              <a:rPr lang="ko-KR" altLang="en-US" sz="1600" dirty="0">
+              <a:rPr lang="ko-KR" altLang="en-US" sz="1400" dirty="0">
                 <a:latin typeface="D2Coding" panose="020B0609020101020101" pitchFamily="49" charset="-127"/>
                 <a:ea typeface="D2Coding" panose="020B0609020101020101" pitchFamily="49" charset="-127"/>
               </a:rPr>
               <a:t>아니면 </a:t>
             </a:r>
             <a:r>
-              <a:rPr lang="en-US" altLang="ko-KR" sz="1600" dirty="0">
+              <a:rPr lang="en-US" altLang="ko-KR" sz="1400" dirty="0">
                 <a:latin typeface="D2Coding" panose="020B0609020101020101" pitchFamily="49" charset="-127"/>
                 <a:ea typeface="D2Coding" panose="020B0609020101020101" pitchFamily="49" charset="-127"/>
               </a:rPr>
               <a:t>Vector DB(</a:t>
             </a:r>
             <a:r>
-              <a:rPr lang="ko-KR" altLang="en-US" sz="1600" dirty="0">
+              <a:rPr lang="ko-KR" altLang="en-US" sz="1400" dirty="0">
                 <a:latin typeface="D2Coding" panose="020B0609020101020101" pitchFamily="49" charset="-127"/>
                 <a:ea typeface="D2Coding" panose="020B0609020101020101" pitchFamily="49" charset="-127"/>
               </a:rPr>
               <a:t>문서</a:t>
             </a:r>
             <a:r>
-              <a:rPr lang="en-US" altLang="ko-KR" sz="1600" dirty="0">
+              <a:rPr lang="en-US" altLang="ko-KR" sz="1400" dirty="0">
                 <a:latin typeface="D2Coding" panose="020B0609020101020101" pitchFamily="49" charset="-127"/>
                 <a:ea typeface="D2Coding" panose="020B0609020101020101" pitchFamily="49" charset="-127"/>
               </a:rPr>
               <a:t>)</a:t>
             </a:r>
             <a:r>
-              <a:rPr lang="ko-KR" altLang="en-US" sz="1600" dirty="0">
+              <a:rPr lang="ko-KR" altLang="en-US" sz="1400" dirty="0">
                 <a:latin typeface="D2Coding" panose="020B0609020101020101" pitchFamily="49" charset="-127"/>
                 <a:ea typeface="D2Coding" panose="020B0609020101020101" pitchFamily="49" charset="-127"/>
               </a:rPr>
               <a:t>로 보내야 할까</a:t>
             </a:r>
             <a:r>
-              <a:rPr lang="en-US" altLang="ko-KR" sz="1600" dirty="0">
+              <a:rPr lang="en-US" altLang="ko-KR" sz="1400" dirty="0">
                 <a:latin typeface="D2Coding" panose="020B0609020101020101" pitchFamily="49" charset="-127"/>
                 <a:ea typeface="D2Coding" panose="020B0609020101020101" pitchFamily="49" charset="-127"/>
               </a:rPr>
               <a:t>?"</a:t>
             </a:r>
             <a:r>
-              <a:rPr lang="ko-KR" altLang="en-US" sz="1600" dirty="0">
+              <a:rPr lang="ko-KR" altLang="en-US" sz="1400" dirty="0">
                 <a:latin typeface="D2Coding" panose="020B0609020101020101" pitchFamily="49" charset="-127"/>
                 <a:ea typeface="D2Coding" panose="020B0609020101020101" pitchFamily="49" charset="-127"/>
               </a:rPr>
               <a:t>를 </a:t>
             </a:r>
             <a:r>
-              <a:rPr lang="en-US" altLang="ko-KR" sz="1600" dirty="0">
+              <a:rPr lang="en-US" altLang="ko-KR" sz="1400" dirty="0">
                 <a:latin typeface="D2Coding" panose="020B0609020101020101" pitchFamily="49" charset="-127"/>
                 <a:ea typeface="D2Coding" panose="020B0609020101020101" pitchFamily="49" charset="-127"/>
               </a:rPr>
               <a:t>LLM</a:t>
             </a:r>
             <a:r>
-              <a:rPr lang="ko-KR" altLang="en-US" sz="1600" dirty="0">
+              <a:rPr lang="ko-KR" altLang="en-US" sz="1400" dirty="0">
                 <a:latin typeface="D2Coding" panose="020B0609020101020101" pitchFamily="49" charset="-127"/>
                 <a:ea typeface="D2Coding" panose="020B0609020101020101" pitchFamily="49" charset="-127"/>
               </a:rPr>
               <a:t>이 판단하여 적절한 데이터 소스로 길을 찾아주는 기술</a:t>
             </a:r>
-            <a:endParaRPr lang="en-US" altLang="ko-KR" sz="1600" dirty="0">
+            <a:endParaRPr lang="en-US" altLang="ko-KR" sz="1400" dirty="0">
               <a:latin typeface="D2Coding" panose="020B0609020101020101" pitchFamily="49" charset="-127"/>
               <a:ea typeface="D2Coding" panose="020B0609020101020101" pitchFamily="49" charset="-127"/>
             </a:endParaRPr>
@@ -9202,7 +10287,7 @@
               <a:buFont typeface="Wingdings" panose="05000000000000000000" pitchFamily="2" charset="2"/>
               <a:buChar char="v"/>
             </a:pPr>
-            <a:endParaRPr lang="en-US" altLang="ko-KR" sz="600" dirty="0">
+            <a:endParaRPr lang="en-US" altLang="ko-KR" sz="500" dirty="0">
               <a:latin typeface="D2Coding" panose="020B0609020101020101" pitchFamily="49" charset="-127"/>
               <a:ea typeface="D2Coding" panose="020B0609020101020101" pitchFamily="49" charset="-127"/>
             </a:endParaRPr>
@@ -9216,7 +10301,7 @@
               <a:buChar char="v"/>
             </a:pPr>
             <a:r>
-              <a:rPr lang="en-US" altLang="ko-KR" sz="1600" b="1" dirty="0">
+              <a:rPr lang="en-US" altLang="ko-KR" sz="1400" b="1" dirty="0">
                 <a:solidFill>
                   <a:schemeClr val="bg1">
                     <a:lumMod val="50000"/>
@@ -9228,7 +10313,7 @@
               <a:t>Indexing Optimization (</a:t>
             </a:r>
             <a:r>
-              <a:rPr lang="ko-KR" altLang="en-US" sz="1600" b="1" dirty="0">
+              <a:rPr lang="ko-KR" altLang="en-US" sz="1400" b="1" dirty="0">
                 <a:solidFill>
                   <a:schemeClr val="bg1">
                     <a:lumMod val="50000"/>
@@ -9240,7 +10325,7 @@
               <a:t>인덱싱 최적화</a:t>
             </a:r>
             <a:r>
-              <a:rPr lang="en-US" altLang="ko-KR" sz="1600" b="1" dirty="0">
+              <a:rPr lang="en-US" altLang="ko-KR" sz="1400" b="1" dirty="0">
                 <a:solidFill>
                   <a:schemeClr val="bg1">
                     <a:lumMod val="50000"/>
@@ -9252,7 +10337,7 @@
               <a:t>):</a:t>
             </a:r>
             <a:r>
-              <a:rPr lang="ko-KR" altLang="en-US" sz="1600" dirty="0">
+              <a:rPr lang="ko-KR" altLang="en-US" sz="1400" dirty="0">
                 <a:solidFill>
                   <a:schemeClr val="bg1">
                     <a:lumMod val="50000"/>
@@ -9264,7 +10349,7 @@
               <a:t> 데이터를 저장할 때부터 메타데이터를 잘 정제하고</a:t>
             </a:r>
             <a:r>
-              <a:rPr lang="en-US" altLang="ko-KR" sz="1600" dirty="0">
+              <a:rPr lang="en-US" altLang="ko-KR" sz="1400" dirty="0">
                 <a:solidFill>
                   <a:schemeClr val="bg1">
                     <a:lumMod val="50000"/>
@@ -9276,7 +10361,7 @@
               <a:t>, </a:t>
             </a:r>
             <a:r>
-              <a:rPr lang="ko-KR" altLang="en-US" sz="1600" dirty="0">
+              <a:rPr lang="ko-KR" altLang="en-US" sz="1400" dirty="0">
                 <a:solidFill>
                   <a:schemeClr val="bg1">
                     <a:lumMod val="50000"/>
@@ -9288,7 +10373,7 @@
               <a:t>중복을 제거하며</a:t>
             </a:r>
             <a:r>
-              <a:rPr lang="en-US" altLang="ko-KR" sz="1600" dirty="0">
+              <a:rPr lang="en-US" altLang="ko-KR" sz="1400" dirty="0">
                 <a:solidFill>
                   <a:schemeClr val="bg1">
                     <a:lumMod val="50000"/>
@@ -9300,7 +10385,7 @@
               <a:t>, </a:t>
             </a:r>
             <a:r>
-              <a:rPr lang="ko-KR" altLang="en-US" sz="1600" dirty="0">
+              <a:rPr lang="ko-KR" altLang="en-US" sz="1400" dirty="0">
                 <a:solidFill>
                   <a:schemeClr val="bg1">
                     <a:lumMod val="50000"/>
@@ -9311,6 +10396,139 @@
               </a:rPr>
               <a:t>검색 속도와 정확도를 높일 수 있도록 데이터 구조를 최적화하는 기술</a:t>
             </a:r>
+          </a:p>
+        </p:txBody>
+      </p:sp>
+      <p:sp>
+        <p:nvSpPr>
+          <p:cNvPr id="2" name="슬라이드 번호 개체 틀 3">
+            <a:extLst>
+              <a:ext uri="{FF2B5EF4-FFF2-40B4-BE49-F238E27FC236}">
+                <a16:creationId xmlns:a16="http://schemas.microsoft.com/office/drawing/2014/main" id="{60DEF219-62E7-7523-B6B2-1511C9697162}"/>
+              </a:ext>
+            </a:extLst>
+          </p:cNvPr>
+          <p:cNvSpPr txBox="1">
+            <a:spLocks/>
+          </p:cNvSpPr>
+          <p:nvPr/>
+        </p:nvSpPr>
+        <p:spPr>
+          <a:xfrm>
+            <a:off x="11162230" y="299420"/>
+            <a:ext cx="753545" cy="365125"/>
+          </a:xfrm>
+          <a:prstGeom prst="rect">
+            <a:avLst/>
+          </a:prstGeom>
+        </p:spPr>
+        <p:txBody>
+          <a:bodyPr vert="horz" lIns="91440" tIns="45720" rIns="91440" bIns="45720" rtlCol="0" anchor="ctr"/>
+          <a:lstStyle>
+            <a:defPPr rtl="0">
+              <a:defRPr lang="ko-KR"/>
+            </a:defPPr>
+            <a:lvl1pPr marL="0" algn="r" defTabSz="914400" rtl="0" eaLnBrk="1" latinLnBrk="0" hangingPunct="1">
+              <a:defRPr sz="1200" kern="1200" baseline="0">
+                <a:solidFill>
+                  <a:schemeClr val="tx1">
+                    <a:lumMod val="65000"/>
+                    <a:lumOff val="35000"/>
+                  </a:schemeClr>
+                </a:solidFill>
+                <a:latin typeface="맑은 고딕" panose="020B0503020000020004" pitchFamily="50" charset="-127"/>
+                <a:ea typeface="맑은 고딕" panose="020B0503020000020004" pitchFamily="50" charset="-127"/>
+                <a:cs typeface="+mn-cs"/>
+              </a:defRPr>
+            </a:lvl1pPr>
+            <a:lvl2pPr marL="457200" algn="l" defTabSz="914400" rtl="0" eaLnBrk="1" latinLnBrk="0" hangingPunct="1">
+              <a:defRPr sz="1800" kern="1200">
+                <a:solidFill>
+                  <a:schemeClr val="tx1"/>
+                </a:solidFill>
+                <a:latin typeface="+mn-lt"/>
+                <a:ea typeface="+mn-ea"/>
+                <a:cs typeface="+mn-cs"/>
+              </a:defRPr>
+            </a:lvl2pPr>
+            <a:lvl3pPr marL="914400" algn="l" defTabSz="914400" rtl="0" eaLnBrk="1" latinLnBrk="0" hangingPunct="1">
+              <a:defRPr sz="1800" kern="1200">
+                <a:solidFill>
+                  <a:schemeClr val="tx1"/>
+                </a:solidFill>
+                <a:latin typeface="+mn-lt"/>
+                <a:ea typeface="+mn-ea"/>
+                <a:cs typeface="+mn-cs"/>
+              </a:defRPr>
+            </a:lvl3pPr>
+            <a:lvl4pPr marL="1371600" algn="l" defTabSz="914400" rtl="0" eaLnBrk="1" latinLnBrk="0" hangingPunct="1">
+              <a:defRPr sz="1800" kern="1200">
+                <a:solidFill>
+                  <a:schemeClr val="tx1"/>
+                </a:solidFill>
+                <a:latin typeface="+mn-lt"/>
+                <a:ea typeface="+mn-ea"/>
+                <a:cs typeface="+mn-cs"/>
+              </a:defRPr>
+            </a:lvl4pPr>
+            <a:lvl5pPr marL="1828800" algn="l" defTabSz="914400" rtl="0" eaLnBrk="1" latinLnBrk="0" hangingPunct="1">
+              <a:defRPr sz="1800" kern="1200">
+                <a:solidFill>
+                  <a:schemeClr val="tx1"/>
+                </a:solidFill>
+                <a:latin typeface="+mn-lt"/>
+                <a:ea typeface="+mn-ea"/>
+                <a:cs typeface="+mn-cs"/>
+              </a:defRPr>
+            </a:lvl5pPr>
+            <a:lvl6pPr marL="2286000" algn="l" defTabSz="914400" rtl="0" eaLnBrk="1" latinLnBrk="0" hangingPunct="1">
+              <a:defRPr sz="1800" kern="1200">
+                <a:solidFill>
+                  <a:schemeClr val="tx1"/>
+                </a:solidFill>
+                <a:latin typeface="+mn-lt"/>
+                <a:ea typeface="+mn-ea"/>
+                <a:cs typeface="+mn-cs"/>
+              </a:defRPr>
+            </a:lvl6pPr>
+            <a:lvl7pPr marL="2743200" algn="l" defTabSz="914400" rtl="0" eaLnBrk="1" latinLnBrk="0" hangingPunct="1">
+              <a:defRPr sz="1800" kern="1200">
+                <a:solidFill>
+                  <a:schemeClr val="tx1"/>
+                </a:solidFill>
+                <a:latin typeface="+mn-lt"/>
+                <a:ea typeface="+mn-ea"/>
+                <a:cs typeface="+mn-cs"/>
+              </a:defRPr>
+            </a:lvl7pPr>
+            <a:lvl8pPr marL="3200400" algn="l" defTabSz="914400" rtl="0" eaLnBrk="1" latinLnBrk="0" hangingPunct="1">
+              <a:defRPr sz="1800" kern="1200">
+                <a:solidFill>
+                  <a:schemeClr val="tx1"/>
+                </a:solidFill>
+                <a:latin typeface="+mn-lt"/>
+                <a:ea typeface="+mn-ea"/>
+                <a:cs typeface="+mn-cs"/>
+              </a:defRPr>
+            </a:lvl8pPr>
+            <a:lvl9pPr marL="3657600" algn="l" defTabSz="914400" rtl="0" eaLnBrk="1" latinLnBrk="0" hangingPunct="1">
+              <a:defRPr sz="1800" kern="1200">
+                <a:solidFill>
+                  <a:schemeClr val="tx1"/>
+                </a:solidFill>
+                <a:latin typeface="+mn-lt"/>
+                <a:ea typeface="+mn-ea"/>
+                <a:cs typeface="+mn-cs"/>
+              </a:defRPr>
+            </a:lvl9pPr>
+          </a:lstStyle>
+          <a:p>
+            <a:fld id="{D57F1E4F-1CFF-5643-939E-217C01CDF565}" type="slidenum">
+              <a:rPr lang="en-US" b="1" smtClean="0"/>
+              <a:pPr/>
+              <a:t>21</a:t>
+            </a:fld>
+            <a:endParaRPr lang="en-US" b="1" dirty="0"/>
           </a:p>
         </p:txBody>
       </p:sp>
@@ -9352,41 +10570,6 @@
       </p:grpSpPr>
       <p:sp>
         <p:nvSpPr>
-          <p:cNvPr id="4" name="슬라이드 번호 개체 틀 3">
-            <a:extLst>
-              <a:ext uri="{FF2B5EF4-FFF2-40B4-BE49-F238E27FC236}">
-                <a16:creationId xmlns:a16="http://schemas.microsoft.com/office/drawing/2014/main" id="{A3513C64-8E36-4C85-8182-010E8425C548}"/>
-              </a:ext>
-            </a:extLst>
-          </p:cNvPr>
-          <p:cNvSpPr>
-            <a:spLocks noGrp="1"/>
-          </p:cNvSpPr>
-          <p:nvPr>
-            <p:ph type="sldNum" sz="quarter" idx="12"/>
-          </p:nvPr>
-        </p:nvSpPr>
-        <p:spPr>
-          <a:xfrm>
-            <a:off x="10514011" y="6036261"/>
-            <a:ext cx="753545" cy="365125"/>
-          </a:xfrm>
-        </p:spPr>
-        <p:txBody>
-          <a:bodyPr/>
-          <a:lstStyle/>
-          <a:p>
-            <a:fld id="{D57F1E4F-1CFF-5643-939E-217C01CDF565}" type="slidenum">
-              <a:rPr lang="en-US" smtClean="0"/>
-              <a:pPr/>
-              <a:t>3</a:t>
-            </a:fld>
-            <a:endParaRPr lang="en-US" dirty="0"/>
-          </a:p>
-        </p:txBody>
-      </p:sp>
-      <p:sp>
-        <p:nvSpPr>
           <p:cNvPr id="3" name="제목 1">
             <a:extLst>
               <a:ext uri="{FF2B5EF4-FFF2-40B4-BE49-F238E27FC236}">
@@ -9474,7 +10657,7 @@
         </p:nvSpPr>
         <p:spPr>
           <a:xfrm>
-            <a:off x="609600" y="1248422"/>
+            <a:off x="609600" y="1220714"/>
             <a:ext cx="10972800" cy="793166"/>
           </a:xfrm>
           <a:prstGeom prst="rect">
@@ -9500,9 +10683,16 @@
                 <a:latin typeface="D2Coding" panose="020B0609020101020101" pitchFamily="49" charset="-127"/>
                 <a:ea typeface="D2Coding" panose="020B0609020101020101" pitchFamily="49" charset="-127"/>
               </a:rPr>
-              <a:t>RAG is automated system to fetch relevant information based on a user’s query, append it as context to the prompt, and then execute the generation request to the LLM.</a:t>
-            </a:r>
-            <a:endParaRPr lang="ko-KR" altLang="en-US" sz="1600" dirty="0">
+              <a:t>RAG is </a:t>
+            </a:r>
+            <a:r>
+              <a:rPr lang="en-US" altLang="ko-KR" sz="1600" b="1" dirty="0">
+                <a:latin typeface="D2Coding" panose="020B0609020101020101" pitchFamily="49" charset="-127"/>
+                <a:ea typeface="D2Coding" panose="020B0609020101020101" pitchFamily="49" charset="-127"/>
+              </a:rPr>
+              <a:t>automated system to fetch relevant information based on a user’s query, append it as context to the prompt, and then execute the generation request to the LLM.</a:t>
+            </a:r>
+            <a:endParaRPr lang="ko-KR" altLang="en-US" sz="1600" b="1" dirty="0">
               <a:latin typeface="D2Coding" panose="020B0609020101020101" pitchFamily="49" charset="-127"/>
               <a:ea typeface="D2Coding" panose="020B0609020101020101" pitchFamily="49" charset="-127"/>
             </a:endParaRPr>
@@ -9554,7 +10744,7 @@
         <p:spPr>
           <a:xfrm>
             <a:off x="8772524" y="2381615"/>
-            <a:ext cx="3143251" cy="3600986"/>
+            <a:ext cx="2985367" cy="3662541"/>
           </a:xfrm>
           <a:prstGeom prst="rect">
             <a:avLst/>
@@ -9576,14 +10766,14 @@
               <a:buAutoNum type="arabicPeriod"/>
             </a:pPr>
             <a:r>
-              <a:rPr lang="ko-KR" altLang="en-US" sz="1200" b="1" dirty="0">
+              <a:rPr lang="ko-KR" altLang="en-US" sz="1400" b="1" dirty="0">
                 <a:latin typeface="D2Coding" panose="020B0609020101020101" pitchFamily="49" charset="-127"/>
                 <a:ea typeface="D2Coding" panose="020B0609020101020101" pitchFamily="49" charset="-127"/>
               </a:rPr>
               <a:t>인덱싱 </a:t>
             </a:r>
             <a:r>
-              <a:rPr lang="en-US" altLang="ko-KR" sz="1200" b="1" dirty="0">
+              <a:rPr lang="en-US" altLang="ko-KR" sz="1400" b="1" dirty="0">
                 <a:latin typeface="D2Coding" panose="020B0609020101020101" pitchFamily="49" charset="-127"/>
                 <a:ea typeface="D2Coding" panose="020B0609020101020101" pitchFamily="49" charset="-127"/>
               </a:rPr>
@@ -9661,17 +10851,24 @@
                 <a:latin typeface="D2Coding" panose="020B0609020101020101" pitchFamily="49" charset="-127"/>
                 <a:ea typeface="D2Coding" panose="020B0609020101020101" pitchFamily="49" charset="-127"/>
               </a:rPr>
-              <a:t>2. </a:t>
-            </a:r>
-            <a:r>
-              <a:rPr lang="ko-KR" altLang="en-US" sz="1200" b="1" dirty="0">
+              <a:t>2</a:t>
+            </a:r>
+            <a:r>
+              <a:rPr lang="en-US" altLang="ko-KR" sz="1400" b="1" dirty="0">
+                <a:latin typeface="D2Coding" panose="020B0609020101020101" pitchFamily="49" charset="-127"/>
+                <a:ea typeface="D2Coding" panose="020B0609020101020101" pitchFamily="49" charset="-127"/>
+              </a:rPr>
+              <a:t>. </a:t>
+            </a:r>
+            <a:r>
+              <a:rPr lang="ko-KR" altLang="en-US" sz="1400" b="1" dirty="0">
                 <a:latin typeface="D2Coding" panose="020B0609020101020101" pitchFamily="49" charset="-127"/>
                 <a:ea typeface="D2Coding" panose="020B0609020101020101" pitchFamily="49" charset="-127"/>
               </a:rPr>
               <a:t>검색 </a:t>
             </a:r>
             <a:r>
-              <a:rPr lang="en-US" altLang="ko-KR" sz="1200" b="1" dirty="0">
+              <a:rPr lang="en-US" altLang="ko-KR" sz="1400" b="1" dirty="0">
                 <a:latin typeface="D2Coding" panose="020B0609020101020101" pitchFamily="49" charset="-127"/>
                 <a:ea typeface="D2Coding" panose="020B0609020101020101" pitchFamily="49" charset="-127"/>
               </a:rPr>
@@ -9784,14 +10981,14 @@
               <a:t>3. </a:t>
             </a:r>
             <a:r>
-              <a:rPr lang="ko-KR" altLang="en-US" sz="1200" b="1" dirty="0">
+              <a:rPr lang="ko-KR" altLang="en-US" sz="1400" b="1" dirty="0">
                 <a:latin typeface="D2Coding" panose="020B0609020101020101" pitchFamily="49" charset="-127"/>
                 <a:ea typeface="D2Coding" panose="020B0609020101020101" pitchFamily="49" charset="-127"/>
               </a:rPr>
               <a:t>생성 </a:t>
             </a:r>
             <a:r>
-              <a:rPr lang="en-US" altLang="ko-KR" sz="1200" b="1" dirty="0">
+              <a:rPr lang="en-US" altLang="ko-KR" sz="1400" b="1" dirty="0">
                 <a:latin typeface="D2Coding" panose="020B0609020101020101" pitchFamily="49" charset="-127"/>
                 <a:ea typeface="D2Coding" panose="020B0609020101020101" pitchFamily="49" charset="-127"/>
               </a:rPr>
@@ -9884,6 +11081,41 @@
               <a:latin typeface="D2Coding" panose="020B0609020101020101" pitchFamily="49" charset="-127"/>
               <a:ea typeface="D2Coding" panose="020B0609020101020101" pitchFamily="49" charset="-127"/>
             </a:endParaRPr>
+          </a:p>
+        </p:txBody>
+      </p:sp>
+      <p:sp>
+        <p:nvSpPr>
+          <p:cNvPr id="2" name="슬라이드 번호 개체 틀 3">
+            <a:extLst>
+              <a:ext uri="{FF2B5EF4-FFF2-40B4-BE49-F238E27FC236}">
+                <a16:creationId xmlns:a16="http://schemas.microsoft.com/office/drawing/2014/main" id="{A3513C64-8E36-4C85-8182-010E8425C548}"/>
+              </a:ext>
+            </a:extLst>
+          </p:cNvPr>
+          <p:cNvSpPr>
+            <a:spLocks noGrp="1"/>
+          </p:cNvSpPr>
+          <p:nvPr>
+            <p:ph type="sldNum" sz="quarter" idx="12"/>
+          </p:nvPr>
+        </p:nvSpPr>
+        <p:spPr>
+          <a:xfrm>
+            <a:off x="11162230" y="299420"/>
+            <a:ext cx="753545" cy="365125"/>
+          </a:xfrm>
+        </p:spPr>
+        <p:txBody>
+          <a:bodyPr/>
+          <a:lstStyle/>
+          <a:p>
+            <a:fld id="{D57F1E4F-1CFF-5643-939E-217C01CDF565}" type="slidenum">
+              <a:rPr lang="en-US" b="1" smtClean="0"/>
+              <a:pPr/>
+              <a:t>3</a:t>
+            </a:fld>
+            <a:endParaRPr lang="en-US" b="1" dirty="0"/>
           </a:p>
         </p:txBody>
       </p:sp>
@@ -9925,41 +11157,6 @@
       </p:grpSpPr>
       <p:sp>
         <p:nvSpPr>
-          <p:cNvPr id="4" name="슬라이드 번호 개체 틀 3">
-            <a:extLst>
-              <a:ext uri="{FF2B5EF4-FFF2-40B4-BE49-F238E27FC236}">
-                <a16:creationId xmlns:a16="http://schemas.microsoft.com/office/drawing/2014/main" id="{F7BF2D68-AA20-60CC-0560-7ADC31CC5146}"/>
-              </a:ext>
-            </a:extLst>
-          </p:cNvPr>
-          <p:cNvSpPr>
-            <a:spLocks noGrp="1"/>
-          </p:cNvSpPr>
-          <p:nvPr>
-            <p:ph type="sldNum" sz="quarter" idx="12"/>
-          </p:nvPr>
-        </p:nvSpPr>
-        <p:spPr>
-          <a:xfrm>
-            <a:off x="10514011" y="6036261"/>
-            <a:ext cx="753545" cy="365125"/>
-          </a:xfrm>
-        </p:spPr>
-        <p:txBody>
-          <a:bodyPr/>
-          <a:lstStyle/>
-          <a:p>
-            <a:fld id="{D57F1E4F-1CFF-5643-939E-217C01CDF565}" type="slidenum">
-              <a:rPr lang="en-US" smtClean="0"/>
-              <a:pPr/>
-              <a:t>4</a:t>
-            </a:fld>
-            <a:endParaRPr lang="en-US" dirty="0"/>
-          </a:p>
-        </p:txBody>
-      </p:sp>
-      <p:sp>
-        <p:nvSpPr>
           <p:cNvPr id="3" name="제목 1">
             <a:extLst>
               <a:ext uri="{FF2B5EF4-FFF2-40B4-BE49-F238E27FC236}">
@@ -10055,8 +11252,8 @@
         </p:blipFill>
         <p:spPr>
           <a:xfrm>
-            <a:off x="790577" y="1641609"/>
-            <a:ext cx="4133848" cy="4818746"/>
+            <a:off x="628652" y="1355281"/>
+            <a:ext cx="4331276" cy="5048884"/>
           </a:xfrm>
           <a:prstGeom prst="rect">
             <a:avLst/>
@@ -10077,8 +11274,8 @@
         </p:nvSpPr>
         <p:spPr>
           <a:xfrm>
-            <a:off x="5391757" y="1641609"/>
-            <a:ext cx="6171591" cy="1901161"/>
+            <a:off x="5253215" y="1355284"/>
+            <a:ext cx="6234542" cy="1531830"/>
           </a:xfrm>
           <a:prstGeom prst="rect">
             <a:avLst/>
@@ -10088,6 +11285,7 @@
             <a:solidFill>
               <a:schemeClr val="tx1"/>
             </a:solidFill>
+            <a:prstDash val="dash"/>
           </a:ln>
         </p:spPr>
         <p:txBody>
@@ -10132,7 +11330,7 @@
             <p:spPr>
               <a:xfrm>
                 <a:off x="5391757" y="3935958"/>
-                <a:ext cx="6096000" cy="1437830"/>
+                <a:ext cx="6096000" cy="981166"/>
               </a:xfrm>
               <a:prstGeom prst="rect">
                 <a:avLst/>
@@ -10159,129 +11357,115 @@
                     <a:spcPct val="150000"/>
                   </a:lnSpc>
                   <a:buFont typeface="Wingdings" panose="05000000000000000000" pitchFamily="2" charset="2"/>
-                  <a:buChar char="v"/>
+                  <a:buChar char="§"/>
                 </a:pPr>
                 <a:r>
-                  <a:rPr lang="en-US" altLang="ko-KR" sz="1600" dirty="0">
+                  <a:rPr lang="en-US" altLang="ko-KR" sz="1400" dirty="0">
                     <a:latin typeface="D2Coding" panose="020B0609020101020101" pitchFamily="49" charset="-127"/>
                     <a:ea typeface="D2Coding" panose="020B0609020101020101" pitchFamily="49" charset="-127"/>
                   </a:rPr>
                   <a:t>RDBMS</a:t>
                 </a:r>
                 <a:r>
-                  <a:rPr lang="ko-KR" altLang="en-US" sz="1600" dirty="0">
+                  <a:rPr lang="ko-KR" altLang="en-US" sz="1400" dirty="0">
                     <a:latin typeface="D2Coding" panose="020B0609020101020101" pitchFamily="49" charset="-127"/>
                     <a:ea typeface="D2Coding" panose="020B0609020101020101" pitchFamily="49" charset="-127"/>
                   </a:rPr>
                   <a:t>의 </a:t>
                 </a:r>
                 <a:r>
-                  <a:rPr lang="en-US" altLang="ko-KR" sz="1600" dirty="0" err="1">
+                  <a:rPr lang="en-US" altLang="ko-KR" sz="1400" dirty="0" err="1">
                     <a:latin typeface="D2Coding" panose="020B0609020101020101" pitchFamily="49" charset="-127"/>
                     <a:ea typeface="D2Coding" panose="020B0609020101020101" pitchFamily="49" charset="-127"/>
                   </a:rPr>
                   <a:t>B+Tree</a:t>
                 </a:r>
                 <a:r>
-                  <a:rPr lang="en-US" altLang="ko-KR" sz="1600" dirty="0">
+                  <a:rPr lang="en-US" altLang="ko-KR" sz="1400" dirty="0">
                     <a:latin typeface="D2Coding" panose="020B0609020101020101" pitchFamily="49" charset="-127"/>
                     <a:ea typeface="D2Coding" panose="020B0609020101020101" pitchFamily="49" charset="-127"/>
                   </a:rPr>
                   <a:t> </a:t>
                 </a:r>
                 <a:r>
-                  <a:rPr lang="ko-KR" altLang="en-US" sz="1600" dirty="0">
+                  <a:rPr lang="ko-KR" altLang="en-US" sz="1400" dirty="0">
                     <a:latin typeface="D2Coding" panose="020B0609020101020101" pitchFamily="49" charset="-127"/>
                     <a:ea typeface="D2Coding" panose="020B0609020101020101" pitchFamily="49" charset="-127"/>
                   </a:rPr>
                   <a:t>알고리즘과 유사</a:t>
                 </a:r>
                 <a:r>
-                  <a:rPr lang="en-US" altLang="ko-KR" sz="1600" dirty="0">
+                  <a:rPr lang="en-US" altLang="ko-KR" sz="1400" dirty="0">
                     <a:latin typeface="D2Coding" panose="020B0609020101020101" pitchFamily="49" charset="-127"/>
                     <a:ea typeface="D2Coding" panose="020B0609020101020101" pitchFamily="49" charset="-127"/>
                   </a:rPr>
                   <a:t> : </a:t>
                 </a:r>
                 <a:r>
-                  <a:rPr lang="ko-KR" altLang="en-US" sz="1600" dirty="0">
+                  <a:rPr lang="ko-KR" altLang="en-US" sz="1400" dirty="0">
                     <a:latin typeface="D2Coding" panose="020B0609020101020101" pitchFamily="49" charset="-127"/>
                     <a:ea typeface="D2Coding" panose="020B0609020101020101" pitchFamily="49" charset="-127"/>
                   </a:rPr>
                   <a:t>새로운 </a:t>
                 </a:r>
                 <a:r>
-                  <a:rPr lang="en-US" altLang="ko-KR" sz="1600" dirty="0">
+                  <a:rPr lang="en-US" altLang="ko-KR" sz="1400" dirty="0">
                     <a:latin typeface="D2Coding" panose="020B0609020101020101" pitchFamily="49" charset="-127"/>
                     <a:ea typeface="D2Coding" panose="020B0609020101020101" pitchFamily="49" charset="-127"/>
                   </a:rPr>
                   <a:t>query</a:t>
                 </a:r>
                 <a:r>
-                  <a:rPr lang="ko-KR" altLang="en-US" sz="1600" dirty="0">
+                  <a:rPr lang="ko-KR" altLang="en-US" sz="1400" dirty="0">
                     <a:latin typeface="D2Coding" panose="020B0609020101020101" pitchFamily="49" charset="-127"/>
                     <a:ea typeface="D2Coding" panose="020B0609020101020101" pitchFamily="49" charset="-127"/>
                   </a:rPr>
                   <a:t>에 대해 </a:t>
                 </a:r>
                 <a:r>
-                  <a:rPr lang="en-US" altLang="ko-KR" sz="1600" dirty="0">
+                  <a:rPr lang="en-US" altLang="ko-KR" sz="1400" dirty="0">
                     <a:latin typeface="D2Coding" panose="020B0609020101020101" pitchFamily="49" charset="-127"/>
                     <a:ea typeface="D2Coding" panose="020B0609020101020101" pitchFamily="49" charset="-127"/>
                   </a:rPr>
                   <a:t>N</a:t>
                 </a:r>
                 <a:r>
-                  <a:rPr lang="ko-KR" altLang="en-US" sz="1600" dirty="0">
+                  <a:rPr lang="ko-KR" altLang="en-US" sz="1400" dirty="0">
                     <a:latin typeface="D2Coding" panose="020B0609020101020101" pitchFamily="49" charset="-127"/>
                     <a:ea typeface="D2Coding" panose="020B0609020101020101" pitchFamily="49" charset="-127"/>
                   </a:rPr>
                   <a:t>개의 </a:t>
                 </a:r>
                 <a:r>
-                  <a:rPr lang="en-US" altLang="ko-KR" sz="1600" dirty="0">
+                  <a:rPr lang="en-US" altLang="ko-KR" sz="1400" dirty="0">
                     <a:latin typeface="D2Coding" panose="020B0609020101020101" pitchFamily="49" charset="-127"/>
                     <a:ea typeface="D2Coding" panose="020B0609020101020101" pitchFamily="49" charset="-127"/>
                   </a:rPr>
                   <a:t>vectors</a:t>
                 </a:r>
                 <a:r>
-                  <a:rPr lang="ko-KR" altLang="en-US" sz="1600" dirty="0">
+                  <a:rPr lang="ko-KR" altLang="en-US" sz="1400" dirty="0">
                     <a:latin typeface="D2Coding" panose="020B0609020101020101" pitchFamily="49" charset="-127"/>
                     <a:ea typeface="D2Coding" panose="020B0609020101020101" pitchFamily="49" charset="-127"/>
                   </a:rPr>
-                  <a:t>를 대상으로 </a:t>
+                  <a:t>를 대상으로 검색　시 </a:t>
                 </a:r>
                 <a:r>
-                  <a:rPr lang="ko-KR" altLang="en-US" sz="1600" dirty="0" err="1">
-                    <a:latin typeface="D2Coding" panose="020B0609020101020101" pitchFamily="49" charset="-127"/>
-                    <a:ea typeface="D2Coding" panose="020B0609020101020101" pitchFamily="49" charset="-127"/>
-                  </a:rPr>
-                  <a:t>검색시</a:t>
-                </a:r>
-                <a:r>
-                  <a:rPr lang="ko-KR" altLang="en-US" sz="1600" dirty="0">
+                  <a:rPr lang="en-US" altLang="ko-KR" sz="1400" dirty="0">
                     <a:latin typeface="D2Coding" panose="020B0609020101020101" pitchFamily="49" charset="-127"/>
                     <a:ea typeface="D2Coding" panose="020B0609020101020101" pitchFamily="49" charset="-127"/>
                   </a:rPr>
                   <a:t> </a:t>
                 </a:r>
                 <a:r>
-                  <a:rPr lang="en-US" altLang="ko-KR" sz="1600" dirty="0">
-                    <a:latin typeface="D2Coding" panose="020B0609020101020101" pitchFamily="49" charset="-127"/>
-                    <a:ea typeface="D2Coding" panose="020B0609020101020101" pitchFamily="49" charset="-127"/>
-                  </a:rPr>
-                  <a:t> </a:t>
-                </a:r>
-                <a:r>
-                  <a:rPr lang="ko-KR" altLang="en-US" sz="1600" dirty="0">
+                  <a:rPr lang="ko-KR" altLang="en-US" sz="1400" dirty="0">
                     <a:latin typeface="D2Coding" panose="020B0609020101020101" pitchFamily="49" charset="-127"/>
                     <a:ea typeface="D2Coding" panose="020B0609020101020101" pitchFamily="49" charset="-127"/>
                   </a:rPr>
                   <a:t>연산 효율이 증가 </a:t>
                 </a:r>
                 <a:r>
-                  <a:rPr lang="en-US" altLang="ko-KR" sz="1600" dirty="0">
+                  <a:rPr lang="en-US" altLang="ko-KR" sz="1400" dirty="0">
                     <a:latin typeface="D2Coding" panose="020B0609020101020101" pitchFamily="49" charset="-127"/>
                     <a:ea typeface="D2Coding" panose="020B0609020101020101" pitchFamily="49" charset="-127"/>
                   </a:rPr>
@@ -10290,7 +11474,7 @@
                 <a14:m>
                   <m:oMath xmlns:m="http://schemas.openxmlformats.org/officeDocument/2006/math">
                     <m:r>
-                      <a:rPr lang="en-US" altLang="ko-KR" sz="1600" i="1">
+                      <a:rPr lang="en-US" altLang="ko-KR" sz="1400" i="1">
                         <a:latin typeface="Cambria Math" panose="02040503050406030204" pitchFamily="18" charset="0"/>
                       </a:rPr>
                       <m:t>𝑁</m:t>
@@ -10298,14 +11482,14 @@
                   </m:oMath>
                 </a14:m>
                 <a:r>
-                  <a:rPr lang="en-US" altLang="ko-KR" sz="1600" dirty="0">
+                  <a:rPr lang="en-US" altLang="ko-KR" sz="1400" dirty="0">
                     <a:latin typeface="D2Coding" panose="020B0609020101020101" pitchFamily="49" charset="-127"/>
                     <a:ea typeface="D2Coding" panose="020B0609020101020101" pitchFamily="49" charset="-127"/>
                   </a:rPr>
                   <a:t> </a:t>
                 </a:r>
                 <a:r>
-                  <a:rPr lang="en-US" altLang="ko-KR" sz="1600" dirty="0">
+                  <a:rPr lang="en-US" altLang="ko-KR" sz="1400" dirty="0">
                     <a:latin typeface="D2Coding" panose="020B0609020101020101" pitchFamily="49" charset="-127"/>
                     <a:ea typeface="D2Coding" panose="020B0609020101020101" pitchFamily="49" charset="-127"/>
                     <a:sym typeface="Wingdings" panose="05000000000000000000" pitchFamily="2" charset="2"/>
@@ -10317,7 +11501,7 @@
                     <m:func>
                       <m:funcPr>
                         <m:ctrlPr>
-                          <a:rPr lang="en-US" altLang="ko-KR" sz="1600" i="1">
+                          <a:rPr lang="en-US" altLang="ko-KR" sz="1400" i="1">
                             <a:latin typeface="Cambria Math" panose="02040503050406030204" pitchFamily="18" charset="0"/>
                           </a:rPr>
                         </m:ctrlPr>
@@ -10326,7 +11510,7 @@
                         <m:sSub>
                           <m:sSubPr>
                             <m:ctrlPr>
-                              <a:rPr lang="en-US" altLang="ko-KR" sz="1600" i="1">
+                              <a:rPr lang="en-US" altLang="ko-KR" sz="1400">
                                 <a:latin typeface="Cambria Math" panose="02040503050406030204" pitchFamily="18" charset="0"/>
                               </a:rPr>
                             </m:ctrlPr>
@@ -10336,7 +11520,7 @@
                               <m:rPr>
                                 <m:sty m:val="p"/>
                               </m:rPr>
-                              <a:rPr lang="en-US" altLang="ko-KR" sz="1600">
+                              <a:rPr lang="en-US" altLang="ko-KR" sz="1400">
                                 <a:latin typeface="Cambria Math" panose="02040503050406030204" pitchFamily="18" charset="0"/>
                               </a:rPr>
                               <m:t>log</m:t>
@@ -10344,7 +11528,7 @@
                           </m:e>
                           <m:sub>
                             <m:r>
-                              <a:rPr lang="en-US" altLang="ko-KR" sz="1600">
+                              <a:rPr lang="en-US" altLang="ko-KR" sz="1400">
                                 <a:latin typeface="Cambria Math" panose="02040503050406030204" pitchFamily="18" charset="0"/>
                               </a:rPr>
                               <m:t>2</m:t>
@@ -10354,7 +11538,7 @@
                       </m:fName>
                       <m:e>
                         <m:r>
-                          <a:rPr lang="en-US" altLang="ko-KR" sz="1600" i="1">
+                          <a:rPr lang="en-US" altLang="ko-KR" sz="1400" i="1">
                             <a:latin typeface="Cambria Math" panose="02040503050406030204" pitchFamily="18" charset="0"/>
                           </a:rPr>
                           <m:t>𝑁</m:t>
@@ -10364,13 +11548,13 @@
                   </m:oMath>
                 </a14:m>
                 <a:r>
-                  <a:rPr lang="en-US" altLang="ko-KR" sz="1600" dirty="0">
+                  <a:rPr lang="en-US" altLang="ko-KR" sz="1400" dirty="0">
                     <a:latin typeface="D2Coding" panose="020B0609020101020101" pitchFamily="49" charset="-127"/>
                     <a:ea typeface="D2Coding" panose="020B0609020101020101" pitchFamily="49" charset="-127"/>
                   </a:rPr>
                   <a:t>)</a:t>
                 </a:r>
-                <a:endParaRPr lang="ko-KR" altLang="en-US" sz="1600" dirty="0">
+                <a:endParaRPr lang="ko-KR" altLang="en-US" sz="1400" dirty="0">
                   <a:latin typeface="D2Coding" panose="020B0609020101020101" pitchFamily="49" charset="-127"/>
                   <a:ea typeface="D2Coding" panose="020B0609020101020101" pitchFamily="49" charset="-127"/>
                 </a:endParaRPr>
@@ -10396,7 +11580,7 @@
             <p:spPr>
               <a:xfrm>
                 <a:off x="5391757" y="3935958"/>
-                <a:ext cx="6096000" cy="1437830"/>
+                <a:ext cx="6096000" cy="981166"/>
               </a:xfrm>
               <a:prstGeom prst="rect">
                 <a:avLst/>
@@ -10404,7 +11588,7 @@
               <a:blipFill>
                 <a:blip r:embed="rId3"/>
                 <a:stretch>
-                  <a:fillRect l="-800" t="-2542" b="-4237"/>
+                  <a:fillRect l="-800" t="-3727" b="-4969"/>
                 </a:stretch>
               </a:blipFill>
             </p:spPr>
@@ -10423,6 +11607,139 @@
           </p:sp>
         </mc:Fallback>
       </mc:AlternateContent>
+      <p:sp>
+        <p:nvSpPr>
+          <p:cNvPr id="2" name="슬라이드 번호 개체 틀 3">
+            <a:extLst>
+              <a:ext uri="{FF2B5EF4-FFF2-40B4-BE49-F238E27FC236}">
+                <a16:creationId xmlns:a16="http://schemas.microsoft.com/office/drawing/2014/main" id="{2182948B-6D90-FF71-6DFB-D937760CF354}"/>
+              </a:ext>
+            </a:extLst>
+          </p:cNvPr>
+          <p:cNvSpPr txBox="1">
+            <a:spLocks/>
+          </p:cNvSpPr>
+          <p:nvPr/>
+        </p:nvSpPr>
+        <p:spPr>
+          <a:xfrm>
+            <a:off x="11162230" y="299420"/>
+            <a:ext cx="753545" cy="365125"/>
+          </a:xfrm>
+          <a:prstGeom prst="rect">
+            <a:avLst/>
+          </a:prstGeom>
+        </p:spPr>
+        <p:txBody>
+          <a:bodyPr vert="horz" lIns="91440" tIns="45720" rIns="91440" bIns="45720" rtlCol="0" anchor="ctr"/>
+          <a:lstStyle>
+            <a:defPPr rtl="0">
+              <a:defRPr lang="ko-KR"/>
+            </a:defPPr>
+            <a:lvl1pPr marL="0" algn="r" defTabSz="914400" rtl="0" eaLnBrk="1" latinLnBrk="0" hangingPunct="1">
+              <a:defRPr sz="1200" kern="1200" baseline="0">
+                <a:solidFill>
+                  <a:schemeClr val="tx1">
+                    <a:lumMod val="65000"/>
+                    <a:lumOff val="35000"/>
+                  </a:schemeClr>
+                </a:solidFill>
+                <a:latin typeface="맑은 고딕" panose="020B0503020000020004" pitchFamily="50" charset="-127"/>
+                <a:ea typeface="맑은 고딕" panose="020B0503020000020004" pitchFamily="50" charset="-127"/>
+                <a:cs typeface="+mn-cs"/>
+              </a:defRPr>
+            </a:lvl1pPr>
+            <a:lvl2pPr marL="457200" algn="l" defTabSz="914400" rtl="0" eaLnBrk="1" latinLnBrk="0" hangingPunct="1">
+              <a:defRPr sz="1800" kern="1200">
+                <a:solidFill>
+                  <a:schemeClr val="tx1"/>
+                </a:solidFill>
+                <a:latin typeface="+mn-lt"/>
+                <a:ea typeface="+mn-ea"/>
+                <a:cs typeface="+mn-cs"/>
+              </a:defRPr>
+            </a:lvl2pPr>
+            <a:lvl3pPr marL="914400" algn="l" defTabSz="914400" rtl="0" eaLnBrk="1" latinLnBrk="0" hangingPunct="1">
+              <a:defRPr sz="1800" kern="1200">
+                <a:solidFill>
+                  <a:schemeClr val="tx1"/>
+                </a:solidFill>
+                <a:latin typeface="+mn-lt"/>
+                <a:ea typeface="+mn-ea"/>
+                <a:cs typeface="+mn-cs"/>
+              </a:defRPr>
+            </a:lvl3pPr>
+            <a:lvl4pPr marL="1371600" algn="l" defTabSz="914400" rtl="0" eaLnBrk="1" latinLnBrk="0" hangingPunct="1">
+              <a:defRPr sz="1800" kern="1200">
+                <a:solidFill>
+                  <a:schemeClr val="tx1"/>
+                </a:solidFill>
+                <a:latin typeface="+mn-lt"/>
+                <a:ea typeface="+mn-ea"/>
+                <a:cs typeface="+mn-cs"/>
+              </a:defRPr>
+            </a:lvl4pPr>
+            <a:lvl5pPr marL="1828800" algn="l" defTabSz="914400" rtl="0" eaLnBrk="1" latinLnBrk="0" hangingPunct="1">
+              <a:defRPr sz="1800" kern="1200">
+                <a:solidFill>
+                  <a:schemeClr val="tx1"/>
+                </a:solidFill>
+                <a:latin typeface="+mn-lt"/>
+                <a:ea typeface="+mn-ea"/>
+                <a:cs typeface="+mn-cs"/>
+              </a:defRPr>
+            </a:lvl5pPr>
+            <a:lvl6pPr marL="2286000" algn="l" defTabSz="914400" rtl="0" eaLnBrk="1" latinLnBrk="0" hangingPunct="1">
+              <a:defRPr sz="1800" kern="1200">
+                <a:solidFill>
+                  <a:schemeClr val="tx1"/>
+                </a:solidFill>
+                <a:latin typeface="+mn-lt"/>
+                <a:ea typeface="+mn-ea"/>
+                <a:cs typeface="+mn-cs"/>
+              </a:defRPr>
+            </a:lvl6pPr>
+            <a:lvl7pPr marL="2743200" algn="l" defTabSz="914400" rtl="0" eaLnBrk="1" latinLnBrk="0" hangingPunct="1">
+              <a:defRPr sz="1800" kern="1200">
+                <a:solidFill>
+                  <a:schemeClr val="tx1"/>
+                </a:solidFill>
+                <a:latin typeface="+mn-lt"/>
+                <a:ea typeface="+mn-ea"/>
+                <a:cs typeface="+mn-cs"/>
+              </a:defRPr>
+            </a:lvl7pPr>
+            <a:lvl8pPr marL="3200400" algn="l" defTabSz="914400" rtl="0" eaLnBrk="1" latinLnBrk="0" hangingPunct="1">
+              <a:defRPr sz="1800" kern="1200">
+                <a:solidFill>
+                  <a:schemeClr val="tx1"/>
+                </a:solidFill>
+                <a:latin typeface="+mn-lt"/>
+                <a:ea typeface="+mn-ea"/>
+                <a:cs typeface="+mn-cs"/>
+              </a:defRPr>
+            </a:lvl8pPr>
+            <a:lvl9pPr marL="3657600" algn="l" defTabSz="914400" rtl="0" eaLnBrk="1" latinLnBrk="0" hangingPunct="1">
+              <a:defRPr sz="1800" kern="1200">
+                <a:solidFill>
+                  <a:schemeClr val="tx1"/>
+                </a:solidFill>
+                <a:latin typeface="+mn-lt"/>
+                <a:ea typeface="+mn-ea"/>
+                <a:cs typeface="+mn-cs"/>
+              </a:defRPr>
+            </a:lvl9pPr>
+          </a:lstStyle>
+          <a:p>
+            <a:fld id="{D57F1E4F-1CFF-5643-939E-217C01CDF565}" type="slidenum">
+              <a:rPr lang="en-US" b="1" smtClean="0"/>
+              <a:pPr/>
+              <a:t>4</a:t>
+            </a:fld>
+            <a:endParaRPr lang="en-US" b="1" dirty="0"/>
+          </a:p>
+        </p:txBody>
+      </p:sp>
     </p:spTree>
     <p:extLst>
       <p:ext uri="{BB962C8B-B14F-4D97-AF65-F5344CB8AC3E}">
@@ -10461,41 +11778,6 @@
       </p:grpSpPr>
       <p:sp>
         <p:nvSpPr>
-          <p:cNvPr id="4" name="슬라이드 번호 개체 틀 3">
-            <a:extLst>
-              <a:ext uri="{FF2B5EF4-FFF2-40B4-BE49-F238E27FC236}">
-                <a16:creationId xmlns:a16="http://schemas.microsoft.com/office/drawing/2014/main" id="{985F14AE-F576-6569-5A5C-1C2911C8D7BE}"/>
-              </a:ext>
-            </a:extLst>
-          </p:cNvPr>
-          <p:cNvSpPr>
-            <a:spLocks noGrp="1"/>
-          </p:cNvSpPr>
-          <p:nvPr>
-            <p:ph type="sldNum" sz="quarter" idx="12"/>
-          </p:nvPr>
-        </p:nvSpPr>
-        <p:spPr>
-          <a:xfrm>
-            <a:off x="10514011" y="6036261"/>
-            <a:ext cx="753545" cy="365125"/>
-          </a:xfrm>
-        </p:spPr>
-        <p:txBody>
-          <a:bodyPr/>
-          <a:lstStyle/>
-          <a:p>
-            <a:fld id="{D57F1E4F-1CFF-5643-939E-217C01CDF565}" type="slidenum">
-              <a:rPr lang="en-US" smtClean="0"/>
-              <a:pPr/>
-              <a:t>5</a:t>
-            </a:fld>
-            <a:endParaRPr lang="en-US" dirty="0"/>
-          </a:p>
-        </p:txBody>
-      </p:sp>
-      <p:sp>
-        <p:nvSpPr>
           <p:cNvPr id="3" name="제목 1">
             <a:extLst>
               <a:ext uri="{FF2B5EF4-FFF2-40B4-BE49-F238E27FC236}">
@@ -10584,7 +11866,7 @@
         <p:spPr>
           <a:xfrm>
             <a:off x="589164" y="1348800"/>
-            <a:ext cx="6507480" cy="2123658"/>
+            <a:ext cx="6507480" cy="2308324"/>
           </a:xfrm>
           <a:prstGeom prst="rect">
             <a:avLst/>
@@ -10592,6 +11874,12 @@
           <a:solidFill>
             <a:srgbClr val="76E3FF"/>
           </a:solidFill>
+          <a:ln>
+            <a:solidFill>
+              <a:schemeClr val="tx1"/>
+            </a:solidFill>
+            <a:prstDash val="dash"/>
+          </a:ln>
         </p:spPr>
         <p:txBody>
           <a:bodyPr wrap="square">
@@ -10603,14 +11891,14 @@
               <a:buNone/>
             </a:pPr>
             <a:r>
-              <a:rPr lang="en-US" altLang="ko-KR" sz="1100" b="0" dirty="0">
+              <a:rPr lang="en-US" altLang="ko-KR" sz="1200" b="0" dirty="0">
                 <a:effectLst/>
                 <a:latin typeface="D2Coding" panose="020B0609020101020101" pitchFamily="49" charset="-127"/>
                 <a:ea typeface="D2Coding" panose="020B0609020101020101" pitchFamily="49" charset="-127"/>
               </a:rPr>
               <a:t># ==========================================</a:t>
             </a:r>
-            <a:endParaRPr lang="ko-KR" altLang="en-US" sz="1100" b="0" dirty="0">
+            <a:endParaRPr lang="ko-KR" altLang="en-US" sz="1200" b="0" dirty="0">
               <a:effectLst/>
               <a:latin typeface="D2Coding" panose="020B0609020101020101" pitchFamily="49" charset="-127"/>
               <a:ea typeface="D2Coding" panose="020B0609020101020101" pitchFamily="49" charset="-127"/>
@@ -10621,7 +11909,7 @@
               <a:buNone/>
             </a:pPr>
             <a:r>
-              <a:rPr lang="en-US" altLang="ko-KR" sz="1100" b="0" dirty="0">
+              <a:rPr lang="en-US" altLang="ko-KR" sz="1200" b="0" dirty="0">
                 <a:effectLst/>
                 <a:latin typeface="D2Coding" panose="020B0609020101020101" pitchFamily="49" charset="-127"/>
                 <a:ea typeface="D2Coding" panose="020B0609020101020101" pitchFamily="49" charset="-127"/>
@@ -10629,7 +11917,7 @@
               <a:t># 1</a:t>
             </a:r>
             <a:r>
-              <a:rPr lang="ko-KR" altLang="en-US" sz="1100" b="0" dirty="0">
+              <a:rPr lang="ko-KR" altLang="en-US" sz="1200" b="0" dirty="0">
                 <a:effectLst/>
                 <a:latin typeface="D2Coding" panose="020B0609020101020101" pitchFamily="49" charset="-127"/>
                 <a:ea typeface="D2Coding" panose="020B0609020101020101" pitchFamily="49" charset="-127"/>
@@ -10637,7 +11925,7 @@
               <a:t>단계</a:t>
             </a:r>
             <a:r>
-              <a:rPr lang="en-US" altLang="ko-KR" sz="1100" b="0" dirty="0">
+              <a:rPr lang="en-US" altLang="ko-KR" sz="1200" b="0" dirty="0">
                 <a:effectLst/>
                 <a:latin typeface="D2Coding" panose="020B0609020101020101" pitchFamily="49" charset="-127"/>
                 <a:ea typeface="D2Coding" panose="020B0609020101020101" pitchFamily="49" charset="-127"/>
@@ -10645,7 +11933,7 @@
               <a:t>: </a:t>
             </a:r>
             <a:r>
-              <a:rPr lang="ko-KR" altLang="en-US" sz="1100" b="0" dirty="0">
+              <a:rPr lang="ko-KR" altLang="en-US" sz="1200" b="0" dirty="0">
                 <a:effectLst/>
                 <a:latin typeface="D2Coding" panose="020B0609020101020101" pitchFamily="49" charset="-127"/>
                 <a:ea typeface="D2Coding" panose="020B0609020101020101" pitchFamily="49" charset="-127"/>
@@ -10658,14 +11946,14 @@
               <a:buNone/>
             </a:pPr>
             <a:r>
-              <a:rPr lang="en-US" altLang="ko-KR" sz="1100" b="0" dirty="0">
+              <a:rPr lang="en-US" altLang="ko-KR" sz="1200" b="0" dirty="0">
                 <a:effectLst/>
                 <a:latin typeface="D2Coding" panose="020B0609020101020101" pitchFamily="49" charset="-127"/>
                 <a:ea typeface="D2Coding" panose="020B0609020101020101" pitchFamily="49" charset="-127"/>
               </a:rPr>
               <a:t># ==========================================</a:t>
             </a:r>
-            <a:endParaRPr lang="ko-KR" altLang="en-US" sz="1100" b="0" dirty="0">
+            <a:endParaRPr lang="ko-KR" altLang="en-US" sz="1200" b="0" dirty="0">
               <a:effectLst/>
               <a:latin typeface="D2Coding" panose="020B0609020101020101" pitchFamily="49" charset="-127"/>
               <a:ea typeface="D2Coding" panose="020B0609020101020101" pitchFamily="49" charset="-127"/>
@@ -10676,7 +11964,7 @@
               <a:buNone/>
             </a:pPr>
             <a:r>
-              <a:rPr lang="en-US" altLang="ko-KR" sz="1100" b="0" dirty="0">
+              <a:rPr lang="en-US" altLang="ko-KR" sz="1200" b="0" dirty="0">
                 <a:effectLst/>
                 <a:latin typeface="D2Coding" panose="020B0609020101020101" pitchFamily="49" charset="-127"/>
                 <a:ea typeface="D2Coding" panose="020B0609020101020101" pitchFamily="49" charset="-127"/>
@@ -10684,7 +11972,7 @@
               <a:t># 1) </a:t>
             </a:r>
             <a:r>
-              <a:rPr lang="en-US" altLang="ko-KR" sz="1100" b="0" dirty="0" err="1">
+              <a:rPr lang="en-US" altLang="ko-KR" sz="1200" b="0" dirty="0" err="1">
                 <a:effectLst/>
                 <a:latin typeface="D2Coding" panose="020B0609020101020101" pitchFamily="49" charset="-127"/>
                 <a:ea typeface="D2Coding" panose="020B0609020101020101" pitchFamily="49" charset="-127"/>
@@ -10692,7 +11980,7 @@
               <a:t>Supabase</a:t>
             </a:r>
             <a:r>
-              <a:rPr lang="en-US" altLang="ko-KR" sz="1100" b="0" dirty="0">
+              <a:rPr lang="en-US" altLang="ko-KR" sz="1200" b="0" dirty="0">
                 <a:effectLst/>
                 <a:latin typeface="D2Coding" panose="020B0609020101020101" pitchFamily="49" charset="-127"/>
                 <a:ea typeface="D2Coding" panose="020B0609020101020101" pitchFamily="49" charset="-127"/>
@@ -10700,7 +11988,7 @@
               <a:t> </a:t>
             </a:r>
             <a:r>
-              <a:rPr lang="ko-KR" altLang="en-US" sz="1100" b="0" dirty="0">
+              <a:rPr lang="ko-KR" altLang="en-US" sz="1200" b="0" dirty="0">
                 <a:effectLst/>
                 <a:latin typeface="D2Coding" panose="020B0609020101020101" pitchFamily="49" charset="-127"/>
                 <a:ea typeface="D2Coding" panose="020B0609020101020101" pitchFamily="49" charset="-127"/>
@@ -10708,7 +11996,7 @@
               <a:t>접속 정보 </a:t>
             </a:r>
             <a:r>
-              <a:rPr lang="en-US" altLang="ko-KR" sz="1100" b="0" dirty="0">
+              <a:rPr lang="en-US" altLang="ko-KR" sz="1200" b="0" dirty="0">
                 <a:effectLst/>
                 <a:latin typeface="D2Coding" panose="020B0609020101020101" pitchFamily="49" charset="-127"/>
                 <a:ea typeface="D2Coding" panose="020B0609020101020101" pitchFamily="49" charset="-127"/>
@@ -10716,7 +12004,7 @@
               <a:t>(</a:t>
             </a:r>
             <a:r>
-              <a:rPr lang="ko-KR" altLang="en-US" sz="1100" b="0" dirty="0">
+              <a:rPr lang="ko-KR" altLang="en-US" sz="1200" b="0" dirty="0">
                 <a:effectLst/>
                 <a:latin typeface="D2Coding" panose="020B0609020101020101" pitchFamily="49" charset="-127"/>
                 <a:ea typeface="D2Coding" panose="020B0609020101020101" pitchFamily="49" charset="-127"/>
@@ -10724,7 +12012,7 @@
               <a:t>앞서 확인한 </a:t>
             </a:r>
             <a:r>
-              <a:rPr lang="en-US" altLang="ko-KR" sz="1100" b="0" dirty="0">
+              <a:rPr lang="en-US" altLang="ko-KR" sz="1200" b="0" dirty="0">
                 <a:effectLst/>
                 <a:latin typeface="D2Coding" panose="020B0609020101020101" pitchFamily="49" charset="-127"/>
                 <a:ea typeface="D2Coding" panose="020B0609020101020101" pitchFamily="49" charset="-127"/>
@@ -10732,7 +12020,7 @@
               <a:t>API </a:t>
             </a:r>
             <a:r>
-              <a:rPr lang="ko-KR" altLang="en-US" sz="1100" b="0" dirty="0">
+              <a:rPr lang="ko-KR" altLang="en-US" sz="1200" b="0" dirty="0">
                 <a:effectLst/>
                 <a:latin typeface="D2Coding" panose="020B0609020101020101" pitchFamily="49" charset="-127"/>
                 <a:ea typeface="D2Coding" panose="020B0609020101020101" pitchFamily="49" charset="-127"/>
@@ -10740,7 +12028,7 @@
               <a:t>주소와 </a:t>
             </a:r>
             <a:r>
-              <a:rPr lang="en-US" altLang="ko-KR" sz="1100" b="0" dirty="0">
+              <a:rPr lang="en-US" altLang="ko-KR" sz="1200" b="0" dirty="0">
                 <a:effectLst/>
                 <a:latin typeface="D2Coding" panose="020B0609020101020101" pitchFamily="49" charset="-127"/>
                 <a:ea typeface="D2Coding" panose="020B0609020101020101" pitchFamily="49" charset="-127"/>
@@ -10748,7 +12036,7 @@
               <a:t>anon </a:t>
             </a:r>
             <a:r>
-              <a:rPr lang="ko-KR" altLang="en-US" sz="1100" b="0" dirty="0">
+              <a:rPr lang="ko-KR" altLang="en-US" sz="1200" b="0" dirty="0">
                 <a:effectLst/>
                 <a:latin typeface="D2Coding" panose="020B0609020101020101" pitchFamily="49" charset="-127"/>
                 <a:ea typeface="D2Coding" panose="020B0609020101020101" pitchFamily="49" charset="-127"/>
@@ -10756,14 +12044,14 @@
               <a:t>키</a:t>
             </a:r>
             <a:r>
-              <a:rPr lang="en-US" altLang="ko-KR" sz="1100" b="0" dirty="0">
+              <a:rPr lang="en-US" altLang="ko-KR" sz="1200" b="0" dirty="0">
                 <a:effectLst/>
                 <a:latin typeface="D2Coding" panose="020B0609020101020101" pitchFamily="49" charset="-127"/>
                 <a:ea typeface="D2Coding" panose="020B0609020101020101" pitchFamily="49" charset="-127"/>
               </a:rPr>
               <a:t>)</a:t>
             </a:r>
-            <a:endParaRPr lang="ko-KR" altLang="en-US" sz="1100" b="0" dirty="0">
+            <a:endParaRPr lang="ko-KR" altLang="en-US" sz="1200" b="0" dirty="0">
               <a:effectLst/>
               <a:latin typeface="D2Coding" panose="020B0609020101020101" pitchFamily="49" charset="-127"/>
               <a:ea typeface="D2Coding" panose="020B0609020101020101" pitchFamily="49" charset="-127"/>
@@ -10774,7 +12062,7 @@
               <a:buNone/>
             </a:pPr>
             <a:r>
-              <a:rPr lang="en-US" altLang="ko-KR" sz="1100" b="0" dirty="0">
+              <a:rPr lang="en-US" altLang="ko-KR" sz="1200" b="0" dirty="0">
                 <a:effectLst/>
                 <a:latin typeface="D2Coding" panose="020B0609020101020101" pitchFamily="49" charset="-127"/>
                 <a:ea typeface="D2Coding" panose="020B0609020101020101" pitchFamily="49" charset="-127"/>
@@ -10787,7 +12075,7 @@
               <a:buNone/>
             </a:pPr>
             <a:r>
-              <a:rPr lang="en-US" altLang="ko-KR" sz="1100" b="0" dirty="0">
+              <a:rPr lang="en-US" altLang="ko-KR" sz="1200" b="0" dirty="0">
                 <a:effectLst/>
                 <a:latin typeface="D2Coding" panose="020B0609020101020101" pitchFamily="49" charset="-127"/>
                 <a:ea typeface="D2Coding" panose="020B0609020101020101" pitchFamily="49" charset="-127"/>
@@ -10795,7 +12083,7 @@
               <a:t>SUPABASE_KEY = </a:t>
             </a:r>
             <a:r>
-              <a:rPr lang="en-US" altLang="ko-KR" sz="1100" b="0" dirty="0" err="1">
+              <a:rPr lang="en-US" altLang="ko-KR" sz="1200" b="0" dirty="0" err="1">
                 <a:effectLst/>
                 <a:latin typeface="D2Coding" panose="020B0609020101020101" pitchFamily="49" charset="-127"/>
                 <a:ea typeface="D2Coding" panose="020B0609020101020101" pitchFamily="49" charset="-127"/>
@@ -10803,7 +12091,7 @@
               <a:t>userdata.get</a:t>
             </a:r>
             <a:r>
-              <a:rPr lang="en-US" altLang="ko-KR" sz="1100" b="0" dirty="0">
+              <a:rPr lang="en-US" altLang="ko-KR" sz="1200" b="0" dirty="0">
                 <a:effectLst/>
                 <a:latin typeface="D2Coding" panose="020B0609020101020101" pitchFamily="49" charset="-127"/>
                 <a:ea typeface="D2Coding" panose="020B0609020101020101" pitchFamily="49" charset="-127"/>
@@ -10811,7 +12099,7 @@
               <a:t>('</a:t>
             </a:r>
             <a:r>
-              <a:rPr lang="en-US" altLang="ko-KR" sz="1100" b="0" dirty="0" err="1">
+              <a:rPr lang="en-US" altLang="ko-KR" sz="1200" b="0" dirty="0" err="1">
                 <a:effectLst/>
                 <a:latin typeface="D2Coding" panose="020B0609020101020101" pitchFamily="49" charset="-127"/>
                 <a:ea typeface="D2Coding" panose="020B0609020101020101" pitchFamily="49" charset="-127"/>
@@ -10819,7 +12107,7 @@
               <a:t>supabase</a:t>
             </a:r>
             <a:r>
-              <a:rPr lang="en-US" altLang="ko-KR" sz="1100" b="0" dirty="0">
+              <a:rPr lang="en-US" altLang="ko-KR" sz="1200" b="0" dirty="0">
                 <a:effectLst/>
                 <a:latin typeface="D2Coding" panose="020B0609020101020101" pitchFamily="49" charset="-127"/>
                 <a:ea typeface="D2Coding" panose="020B0609020101020101" pitchFamily="49" charset="-127"/>
@@ -10831,7 +12119,7 @@
             <a:pPr>
               <a:buNone/>
             </a:pPr>
-            <a:endParaRPr lang="en-US" altLang="ko-KR" sz="1100" b="0" dirty="0">
+            <a:endParaRPr lang="en-US" altLang="ko-KR" sz="1200" b="0" dirty="0">
               <a:effectLst/>
               <a:latin typeface="D2Coding" panose="020B0609020101020101" pitchFamily="49" charset="-127"/>
               <a:ea typeface="D2Coding" panose="020B0609020101020101" pitchFamily="49" charset="-127"/>
@@ -10842,7 +12130,7 @@
               <a:buNone/>
             </a:pPr>
             <a:r>
-              <a:rPr lang="en-US" altLang="ko-KR" sz="1100" b="0" dirty="0" err="1">
+              <a:rPr lang="en-US" altLang="ko-KR" sz="1200" b="0" dirty="0" err="1">
                 <a:effectLst/>
                 <a:latin typeface="D2Coding" panose="020B0609020101020101" pitchFamily="49" charset="-127"/>
                 <a:ea typeface="D2Coding" panose="020B0609020101020101" pitchFamily="49" charset="-127"/>
@@ -10850,7 +12138,7 @@
               <a:t>supabase_client</a:t>
             </a:r>
             <a:r>
-              <a:rPr lang="en-US" altLang="ko-KR" sz="1100" b="0" dirty="0">
+              <a:rPr lang="en-US" altLang="ko-KR" sz="1200" b="0" dirty="0">
                 <a:effectLst/>
                 <a:latin typeface="D2Coding" panose="020B0609020101020101" pitchFamily="49" charset="-127"/>
                 <a:ea typeface="D2Coding" panose="020B0609020101020101" pitchFamily="49" charset="-127"/>
@@ -10858,7 +12146,7 @@
               <a:t>: Client = </a:t>
             </a:r>
             <a:r>
-              <a:rPr lang="en-US" altLang="ko-KR" sz="1100" b="0" dirty="0" err="1">
+              <a:rPr lang="en-US" altLang="ko-KR" sz="1200" b="0" dirty="0" err="1">
                 <a:effectLst/>
                 <a:latin typeface="D2Coding" panose="020B0609020101020101" pitchFamily="49" charset="-127"/>
                 <a:ea typeface="D2Coding" panose="020B0609020101020101" pitchFamily="49" charset="-127"/>
@@ -10866,7 +12154,7 @@
               <a:t>create_client</a:t>
             </a:r>
             <a:r>
-              <a:rPr lang="en-US" altLang="ko-KR" sz="1100" b="0" dirty="0">
+              <a:rPr lang="en-US" altLang="ko-KR" sz="1200" b="0" dirty="0">
                 <a:effectLst/>
                 <a:latin typeface="D2Coding" panose="020B0609020101020101" pitchFamily="49" charset="-127"/>
                 <a:ea typeface="D2Coding" panose="020B0609020101020101" pitchFamily="49" charset="-127"/>
@@ -10879,14 +12167,14 @@
               <a:buNone/>
             </a:pPr>
             <a:br>
-              <a:rPr lang="en-US" altLang="ko-KR" sz="1100" b="0" dirty="0">
+              <a:rPr lang="en-US" altLang="ko-KR" sz="1200" b="0" dirty="0">
                 <a:effectLst/>
                 <a:latin typeface="D2Coding" panose="020B0609020101020101" pitchFamily="49" charset="-127"/>
                 <a:ea typeface="D2Coding" panose="020B0609020101020101" pitchFamily="49" charset="-127"/>
               </a:rPr>
             </a:br>
             <a:r>
-              <a:rPr lang="en-US" altLang="ko-KR" sz="1100" b="0" dirty="0">
+              <a:rPr lang="en-US" altLang="ko-KR" sz="1200" b="0" dirty="0">
                 <a:effectLst/>
                 <a:latin typeface="D2Coding" panose="020B0609020101020101" pitchFamily="49" charset="-127"/>
                 <a:ea typeface="D2Coding" panose="020B0609020101020101" pitchFamily="49" charset="-127"/>
@@ -10894,7 +12182,7 @@
               <a:t># 2) </a:t>
             </a:r>
             <a:r>
-              <a:rPr lang="en-US" altLang="ko-KR" sz="1100" b="0" dirty="0" err="1">
+              <a:rPr lang="en-US" altLang="ko-KR" sz="1200" b="0" dirty="0" err="1">
                 <a:effectLst/>
                 <a:latin typeface="D2Coding" panose="020B0609020101020101" pitchFamily="49" charset="-127"/>
                 <a:ea typeface="D2Coding" panose="020B0609020101020101" pitchFamily="49" charset="-127"/>
@@ -10902,7 +12190,7 @@
               <a:t>Groq</a:t>
             </a:r>
             <a:r>
-              <a:rPr lang="en-US" altLang="ko-KR" sz="1100" b="0" dirty="0">
+              <a:rPr lang="en-US" altLang="ko-KR" sz="1200" b="0" dirty="0">
                 <a:effectLst/>
                 <a:latin typeface="D2Coding" panose="020B0609020101020101" pitchFamily="49" charset="-127"/>
                 <a:ea typeface="D2Coding" panose="020B0609020101020101" pitchFamily="49" charset="-127"/>
@@ -10910,7 +12198,7 @@
               <a:t> API </a:t>
             </a:r>
             <a:r>
-              <a:rPr lang="ko-KR" altLang="en-US" sz="1100" b="0" dirty="0">
+              <a:rPr lang="ko-KR" altLang="en-US" sz="1200" b="0" dirty="0">
                 <a:effectLst/>
                 <a:latin typeface="D2Coding" panose="020B0609020101020101" pitchFamily="49" charset="-127"/>
                 <a:ea typeface="D2Coding" panose="020B0609020101020101" pitchFamily="49" charset="-127"/>
@@ -10923,7 +12211,7 @@
               <a:buNone/>
             </a:pPr>
             <a:r>
-              <a:rPr lang="en-US" altLang="ko-KR" sz="1100" b="0" dirty="0">
+              <a:rPr lang="en-US" altLang="ko-KR" sz="1200" b="0" dirty="0">
                 <a:effectLst/>
                 <a:latin typeface="D2Coding" panose="020B0609020101020101" pitchFamily="49" charset="-127"/>
                 <a:ea typeface="D2Coding" panose="020B0609020101020101" pitchFamily="49" charset="-127"/>
@@ -10931,7 +12219,7 @@
               <a:t>YOUR_API_KEY = </a:t>
             </a:r>
             <a:r>
-              <a:rPr lang="en-US" altLang="ko-KR" sz="1100" b="0" dirty="0" err="1">
+              <a:rPr lang="en-US" altLang="ko-KR" sz="1200" b="0" dirty="0" err="1">
                 <a:effectLst/>
                 <a:latin typeface="D2Coding" panose="020B0609020101020101" pitchFamily="49" charset="-127"/>
                 <a:ea typeface="D2Coding" panose="020B0609020101020101" pitchFamily="49" charset="-127"/>
@@ -10939,7 +12227,7 @@
               <a:t>userdata.get</a:t>
             </a:r>
             <a:r>
-              <a:rPr lang="en-US" altLang="ko-KR" sz="1100" b="0" dirty="0">
+              <a:rPr lang="en-US" altLang="ko-KR" sz="1200" b="0" dirty="0">
                 <a:effectLst/>
                 <a:latin typeface="D2Coding" panose="020B0609020101020101" pitchFamily="49" charset="-127"/>
                 <a:ea typeface="D2Coding" panose="020B0609020101020101" pitchFamily="49" charset="-127"/>
@@ -10947,7 +12235,7 @@
               <a:t>('</a:t>
             </a:r>
             <a:r>
-              <a:rPr lang="en-US" altLang="ko-KR" sz="1100" b="0" dirty="0" err="1">
+              <a:rPr lang="en-US" altLang="ko-KR" sz="1200" b="0" dirty="0" err="1">
                 <a:effectLst/>
                 <a:latin typeface="D2Coding" panose="020B0609020101020101" pitchFamily="49" charset="-127"/>
                 <a:ea typeface="D2Coding" panose="020B0609020101020101" pitchFamily="49" charset="-127"/>
@@ -10955,7 +12243,7 @@
               <a:t>groq</a:t>
             </a:r>
             <a:r>
-              <a:rPr lang="en-US" altLang="ko-KR" sz="1100" b="0" dirty="0">
+              <a:rPr lang="en-US" altLang="ko-KR" sz="1200" b="0" dirty="0">
                 <a:effectLst/>
                 <a:latin typeface="D2Coding" panose="020B0609020101020101" pitchFamily="49" charset="-127"/>
                 <a:ea typeface="D2Coding" panose="020B0609020101020101" pitchFamily="49" charset="-127"/>
@@ -10968,7 +12256,7 @@
               <a:buNone/>
             </a:pPr>
             <a:r>
-              <a:rPr lang="en-US" altLang="ko-KR" sz="1100" b="0" dirty="0" err="1">
+              <a:rPr lang="en-US" altLang="ko-KR" sz="1200" b="0" dirty="0" err="1">
                 <a:effectLst/>
                 <a:latin typeface="D2Coding" panose="020B0609020101020101" pitchFamily="49" charset="-127"/>
                 <a:ea typeface="D2Coding" panose="020B0609020101020101" pitchFamily="49" charset="-127"/>
@@ -10976,7 +12264,7 @@
               <a:t>os.environ</a:t>
             </a:r>
             <a:r>
-              <a:rPr lang="en-US" altLang="ko-KR" sz="1100" b="0" dirty="0">
+              <a:rPr lang="en-US" altLang="ko-KR" sz="1200" b="0" dirty="0">
                 <a:effectLst/>
                 <a:latin typeface="D2Coding" panose="020B0609020101020101" pitchFamily="49" charset="-127"/>
                 <a:ea typeface="D2Coding" panose="020B0609020101020101" pitchFamily="49" charset="-127"/>
@@ -11000,8 +12288,8 @@
         </p:nvSpPr>
         <p:spPr>
           <a:xfrm>
-            <a:off x="4199139" y="3092788"/>
-            <a:ext cx="6507480" cy="3308598"/>
+            <a:off x="4052223" y="2957594"/>
+            <a:ext cx="7863552" cy="3600986"/>
           </a:xfrm>
           <a:prstGeom prst="rect">
             <a:avLst/>
@@ -11009,6 +12297,12 @@
           <a:solidFill>
             <a:srgbClr val="76E3FF"/>
           </a:solidFill>
+          <a:ln>
+            <a:solidFill>
+              <a:schemeClr val="tx1"/>
+            </a:solidFill>
+            <a:prstDash val="dash"/>
+          </a:ln>
         </p:spPr>
         <p:txBody>
           <a:bodyPr wrap="square">
@@ -11020,7 +12314,7 @@
               <a:buNone/>
             </a:pPr>
             <a:r>
-              <a:rPr lang="en-US" altLang="ko-KR" sz="1100" b="0" dirty="0">
+              <a:rPr lang="en-US" altLang="ko-KR" sz="1200" b="0" dirty="0">
                 <a:effectLst/>
                 <a:latin typeface="D2Coding" panose="020B0609020101020101" pitchFamily="49" charset="-127"/>
                 <a:ea typeface="D2Coding" panose="020B0609020101020101" pitchFamily="49" charset="-127"/>
@@ -11033,7 +12327,7 @@
               <a:buNone/>
             </a:pPr>
             <a:r>
-              <a:rPr lang="en-US" altLang="ko-KR" sz="1100" b="0" dirty="0">
+              <a:rPr lang="en-US" altLang="ko-KR" sz="1200" b="0" dirty="0">
                 <a:effectLst/>
                 <a:latin typeface="D2Coding" panose="020B0609020101020101" pitchFamily="49" charset="-127"/>
                 <a:ea typeface="D2Coding" panose="020B0609020101020101" pitchFamily="49" charset="-127"/>
@@ -11041,7 +12335,7 @@
               <a:t># 2</a:t>
             </a:r>
             <a:r>
-              <a:rPr lang="ko-KR" altLang="en-US" sz="1100" b="0" dirty="0">
+              <a:rPr lang="ko-KR" altLang="en-US" sz="1200" b="0" dirty="0">
                 <a:effectLst/>
                 <a:latin typeface="D2Coding" panose="020B0609020101020101" pitchFamily="49" charset="-127"/>
                 <a:ea typeface="D2Coding" panose="020B0609020101020101" pitchFamily="49" charset="-127"/>
@@ -11049,7 +12343,7 @@
               <a:t>단계</a:t>
             </a:r>
             <a:r>
-              <a:rPr lang="en-US" altLang="ko-KR" sz="1100" b="0" dirty="0">
+              <a:rPr lang="en-US" altLang="ko-KR" sz="1200" b="0" dirty="0">
                 <a:effectLst/>
                 <a:latin typeface="D2Coding" panose="020B0609020101020101" pitchFamily="49" charset="-127"/>
                 <a:ea typeface="D2Coding" panose="020B0609020101020101" pitchFamily="49" charset="-127"/>
@@ -11057,7 +12351,7 @@
               <a:t>: </a:t>
             </a:r>
             <a:r>
-              <a:rPr lang="ko-KR" altLang="en-US" sz="1100" b="0" dirty="0">
+              <a:rPr lang="ko-KR" altLang="en-US" sz="1200" b="0" dirty="0">
                 <a:effectLst/>
                 <a:latin typeface="D2Coding" panose="020B0609020101020101" pitchFamily="49" charset="-127"/>
                 <a:ea typeface="D2Coding" panose="020B0609020101020101" pitchFamily="49" charset="-127"/>
@@ -11065,7 +12359,7 @@
               <a:t>데이터 로드</a:t>
             </a:r>
             <a:r>
-              <a:rPr lang="en-US" altLang="ko-KR" sz="1100" b="0" dirty="0">
+              <a:rPr lang="en-US" altLang="ko-KR" sz="1200" b="0" dirty="0">
                 <a:effectLst/>
                 <a:latin typeface="D2Coding" panose="020B0609020101020101" pitchFamily="49" charset="-127"/>
                 <a:ea typeface="D2Coding" panose="020B0609020101020101" pitchFamily="49" charset="-127"/>
@@ -11073,7 +12367,7 @@
               <a:t>, </a:t>
             </a:r>
             <a:r>
-              <a:rPr lang="ko-KR" altLang="en-US" sz="1100" b="0" dirty="0">
+              <a:rPr lang="ko-KR" altLang="en-US" sz="1200" b="0" dirty="0">
                 <a:effectLst/>
                 <a:latin typeface="D2Coding" panose="020B0609020101020101" pitchFamily="49" charset="-127"/>
                 <a:ea typeface="D2Coding" panose="020B0609020101020101" pitchFamily="49" charset="-127"/>
@@ -11081,7 +12375,7 @@
               <a:t>분할 및 </a:t>
             </a:r>
             <a:r>
-              <a:rPr lang="ko-KR" altLang="en-US" sz="1100" b="0" dirty="0" err="1">
+              <a:rPr lang="ko-KR" altLang="en-US" sz="1200" b="0" dirty="0" err="1">
                 <a:effectLst/>
                 <a:latin typeface="D2Coding" panose="020B0609020101020101" pitchFamily="49" charset="-127"/>
                 <a:ea typeface="D2Coding" panose="020B0609020101020101" pitchFamily="49" charset="-127"/>
@@ -11089,7 +12383,7 @@
               <a:t>임베딩</a:t>
             </a:r>
             <a:r>
-              <a:rPr lang="ko-KR" altLang="en-US" sz="1100" b="0" dirty="0">
+              <a:rPr lang="ko-KR" altLang="en-US" sz="1200" b="0" dirty="0">
                 <a:effectLst/>
                 <a:latin typeface="D2Coding" panose="020B0609020101020101" pitchFamily="49" charset="-127"/>
                 <a:ea typeface="D2Coding" panose="020B0609020101020101" pitchFamily="49" charset="-127"/>
@@ -11097,7 +12391,7 @@
               <a:t> </a:t>
             </a:r>
             <a:r>
-              <a:rPr lang="en-US" altLang="ko-KR" sz="1100" b="0" dirty="0">
+              <a:rPr lang="en-US" altLang="ko-KR" sz="1200" b="0" dirty="0">
                 <a:effectLst/>
                 <a:latin typeface="D2Coding" panose="020B0609020101020101" pitchFamily="49" charset="-127"/>
                 <a:ea typeface="D2Coding" panose="020B0609020101020101" pitchFamily="49" charset="-127"/>
@@ -11110,7 +12404,7 @@
               <a:buNone/>
             </a:pPr>
             <a:r>
-              <a:rPr lang="en-US" altLang="ko-KR" sz="1100" b="0" dirty="0">
+              <a:rPr lang="en-US" altLang="ko-KR" sz="1200" b="0" dirty="0">
                 <a:effectLst/>
                 <a:latin typeface="D2Coding" panose="020B0609020101020101" pitchFamily="49" charset="-127"/>
                 <a:ea typeface="D2Coding" panose="020B0609020101020101" pitchFamily="49" charset="-127"/>
@@ -11123,7 +12417,7 @@
               <a:buNone/>
             </a:pPr>
             <a:r>
-              <a:rPr lang="en-US" altLang="ko-KR" sz="1100" b="0" dirty="0">
+              <a:rPr lang="en-US" altLang="ko-KR" sz="1200" b="0" dirty="0">
                 <a:effectLst/>
                 <a:latin typeface="D2Coding" panose="020B0609020101020101" pitchFamily="49" charset="-127"/>
                 <a:ea typeface="D2Coding" panose="020B0609020101020101" pitchFamily="49" charset="-127"/>
@@ -11131,7 +12425,7 @@
               <a:t># </a:t>
             </a:r>
             <a:r>
-              <a:rPr lang="ko-KR" altLang="en-US" sz="1100" b="0" dirty="0">
+              <a:rPr lang="ko-KR" altLang="en-US" sz="1200" b="0" dirty="0">
                 <a:effectLst/>
                 <a:latin typeface="D2Coding" panose="020B0609020101020101" pitchFamily="49" charset="-127"/>
                 <a:ea typeface="D2Coding" panose="020B0609020101020101" pitchFamily="49" charset="-127"/>
@@ -11144,7 +12438,7 @@
               <a:buNone/>
             </a:pPr>
             <a:r>
-              <a:rPr lang="en-US" altLang="ko-KR" sz="1100" b="0" dirty="0" err="1">
+              <a:rPr lang="en-US" altLang="ko-KR" sz="1200" b="0" dirty="0" err="1">
                 <a:effectLst/>
                 <a:latin typeface="D2Coding" panose="020B0609020101020101" pitchFamily="49" charset="-127"/>
                 <a:ea typeface="D2Coding" panose="020B0609020101020101" pitchFamily="49" charset="-127"/>
@@ -11152,7 +12446,7 @@
               <a:t>raw_documents</a:t>
             </a:r>
             <a:r>
-              <a:rPr lang="en-US" altLang="ko-KR" sz="1100" b="0" dirty="0">
+              <a:rPr lang="en-US" altLang="ko-KR" sz="1200" b="0" dirty="0">
                 <a:effectLst/>
                 <a:latin typeface="D2Coding" panose="020B0609020101020101" pitchFamily="49" charset="-127"/>
                 <a:ea typeface="D2Coding" panose="020B0609020101020101" pitchFamily="49" charset="-127"/>
@@ -11160,7 +12454,7 @@
               <a:t> = </a:t>
             </a:r>
             <a:r>
-              <a:rPr lang="en-US" altLang="ko-KR" sz="1100" b="0" dirty="0" err="1">
+              <a:rPr lang="en-US" altLang="ko-KR" sz="1200" b="0" dirty="0" err="1">
                 <a:effectLst/>
                 <a:latin typeface="D2Coding" panose="020B0609020101020101" pitchFamily="49" charset="-127"/>
                 <a:ea typeface="D2Coding" panose="020B0609020101020101" pitchFamily="49" charset="-127"/>
@@ -11168,7 +12462,7 @@
               <a:t>TextLoader</a:t>
             </a:r>
             <a:r>
-              <a:rPr lang="en-US" altLang="ko-KR" sz="1100" b="0" dirty="0">
+              <a:rPr lang="en-US" altLang="ko-KR" sz="1200" b="0" dirty="0">
                 <a:effectLst/>
                 <a:latin typeface="D2Coding" panose="020B0609020101020101" pitchFamily="49" charset="-127"/>
                 <a:ea typeface="D2Coding" panose="020B0609020101020101" pitchFamily="49" charset="-127"/>
@@ -11181,7 +12475,7 @@
               <a:buNone/>
             </a:pPr>
             <a:r>
-              <a:rPr lang="en-US" altLang="ko-KR" sz="1100" b="0" dirty="0" err="1">
+              <a:rPr lang="en-US" altLang="ko-KR" sz="1200" b="0" dirty="0" err="1">
                 <a:effectLst/>
                 <a:latin typeface="D2Coding" panose="020B0609020101020101" pitchFamily="49" charset="-127"/>
                 <a:ea typeface="D2Coding" panose="020B0609020101020101" pitchFamily="49" charset="-127"/>
@@ -11189,7 +12483,7 @@
               <a:t>text_splitter</a:t>
             </a:r>
             <a:r>
-              <a:rPr lang="en-US" altLang="ko-KR" sz="1100" b="0" dirty="0">
+              <a:rPr lang="en-US" altLang="ko-KR" sz="1200" b="0" dirty="0">
                 <a:effectLst/>
                 <a:latin typeface="D2Coding" panose="020B0609020101020101" pitchFamily="49" charset="-127"/>
                 <a:ea typeface="D2Coding" panose="020B0609020101020101" pitchFamily="49" charset="-127"/>
@@ -11197,7 +12491,7 @@
               <a:t> = </a:t>
             </a:r>
             <a:r>
-              <a:rPr lang="en-US" altLang="ko-KR" sz="1100" b="0" dirty="0" err="1">
+              <a:rPr lang="en-US" altLang="ko-KR" sz="1200" b="0" dirty="0" err="1">
                 <a:effectLst/>
                 <a:latin typeface="D2Coding" panose="020B0609020101020101" pitchFamily="49" charset="-127"/>
                 <a:ea typeface="D2Coding" panose="020B0609020101020101" pitchFamily="49" charset="-127"/>
@@ -11205,7 +12499,7 @@
               <a:t>RecursiveCharacterTextSplitter</a:t>
             </a:r>
             <a:r>
-              <a:rPr lang="en-US" altLang="ko-KR" sz="1100" b="0" dirty="0">
+              <a:rPr lang="en-US" altLang="ko-KR" sz="1200" b="0" dirty="0">
                 <a:effectLst/>
                 <a:latin typeface="D2Coding" panose="020B0609020101020101" pitchFamily="49" charset="-127"/>
                 <a:ea typeface="D2Coding" panose="020B0609020101020101" pitchFamily="49" charset="-127"/>
@@ -11213,7 +12507,7 @@
               <a:t>(</a:t>
             </a:r>
             <a:r>
-              <a:rPr lang="en-US" altLang="ko-KR" sz="1100" b="0" dirty="0" err="1">
+              <a:rPr lang="en-US" altLang="ko-KR" sz="1200" b="0" dirty="0" err="1">
                 <a:effectLst/>
                 <a:latin typeface="D2Coding" panose="020B0609020101020101" pitchFamily="49" charset="-127"/>
                 <a:ea typeface="D2Coding" panose="020B0609020101020101" pitchFamily="49" charset="-127"/>
@@ -11221,7 +12515,7 @@
               <a:t>chunk_size</a:t>
             </a:r>
             <a:r>
-              <a:rPr lang="en-US" altLang="ko-KR" sz="1100" b="0" dirty="0">
+              <a:rPr lang="en-US" altLang="ko-KR" sz="1200" b="0" dirty="0">
                 <a:effectLst/>
                 <a:latin typeface="D2Coding" panose="020B0609020101020101" pitchFamily="49" charset="-127"/>
                 <a:ea typeface="D2Coding" panose="020B0609020101020101" pitchFamily="49" charset="-127"/>
@@ -11229,7 +12523,7 @@
               <a:t>=1000, </a:t>
             </a:r>
             <a:r>
-              <a:rPr lang="en-US" altLang="ko-KR" sz="1100" b="0" dirty="0" err="1">
+              <a:rPr lang="en-US" altLang="ko-KR" sz="1200" b="0" dirty="0" err="1">
                 <a:effectLst/>
                 <a:latin typeface="D2Coding" panose="020B0609020101020101" pitchFamily="49" charset="-127"/>
                 <a:ea typeface="D2Coding" panose="020B0609020101020101" pitchFamily="49" charset="-127"/>
@@ -11237,7 +12531,7 @@
               <a:t>chunk_overlap</a:t>
             </a:r>
             <a:r>
-              <a:rPr lang="en-US" altLang="ko-KR" sz="1100" b="0" dirty="0">
+              <a:rPr lang="en-US" altLang="ko-KR" sz="1200" b="0" dirty="0">
                 <a:effectLst/>
                 <a:latin typeface="D2Coding" panose="020B0609020101020101" pitchFamily="49" charset="-127"/>
                 <a:ea typeface="D2Coding" panose="020B0609020101020101" pitchFamily="49" charset="-127"/>
@@ -11250,7 +12544,7 @@
               <a:buNone/>
             </a:pPr>
             <a:r>
-              <a:rPr lang="en-US" altLang="ko-KR" sz="1100" b="0" dirty="0">
+              <a:rPr lang="en-US" altLang="ko-KR" sz="1200" b="0" dirty="0">
                 <a:effectLst/>
                 <a:latin typeface="D2Coding" panose="020B0609020101020101" pitchFamily="49" charset="-127"/>
                 <a:ea typeface="D2Coding" panose="020B0609020101020101" pitchFamily="49" charset="-127"/>
@@ -11258,7 +12552,7 @@
               <a:t>documents = </a:t>
             </a:r>
             <a:r>
-              <a:rPr lang="en-US" altLang="ko-KR" sz="1100" b="0" dirty="0" err="1">
+              <a:rPr lang="en-US" altLang="ko-KR" sz="1200" b="0" dirty="0" err="1">
                 <a:effectLst/>
                 <a:latin typeface="D2Coding" panose="020B0609020101020101" pitchFamily="49" charset="-127"/>
                 <a:ea typeface="D2Coding" panose="020B0609020101020101" pitchFamily="49" charset="-127"/>
@@ -11266,7 +12560,7 @@
               <a:t>text_splitter.split_documents</a:t>
             </a:r>
             <a:r>
-              <a:rPr lang="en-US" altLang="ko-KR" sz="1100" b="0" dirty="0">
+              <a:rPr lang="en-US" altLang="ko-KR" sz="1200" b="0" dirty="0">
                 <a:effectLst/>
                 <a:latin typeface="D2Coding" panose="020B0609020101020101" pitchFamily="49" charset="-127"/>
                 <a:ea typeface="D2Coding" panose="020B0609020101020101" pitchFamily="49" charset="-127"/>
@@ -11274,7 +12568,7 @@
               <a:t>(</a:t>
             </a:r>
             <a:r>
-              <a:rPr lang="en-US" altLang="ko-KR" sz="1100" b="0" dirty="0" err="1">
+              <a:rPr lang="en-US" altLang="ko-KR" sz="1200" b="0" dirty="0" err="1">
                 <a:effectLst/>
                 <a:latin typeface="D2Coding" panose="020B0609020101020101" pitchFamily="49" charset="-127"/>
                 <a:ea typeface="D2Coding" panose="020B0609020101020101" pitchFamily="49" charset="-127"/>
@@ -11282,7 +12576,7 @@
               <a:t>raw_documents</a:t>
             </a:r>
             <a:r>
-              <a:rPr lang="en-US" altLang="ko-KR" sz="1100" b="0" dirty="0">
+              <a:rPr lang="en-US" altLang="ko-KR" sz="1200" b="0" dirty="0">
                 <a:effectLst/>
                 <a:latin typeface="D2Coding" panose="020B0609020101020101" pitchFamily="49" charset="-127"/>
                 <a:ea typeface="D2Coding" panose="020B0609020101020101" pitchFamily="49" charset="-127"/>
@@ -11294,7 +12588,7 @@
             <a:pPr>
               <a:buNone/>
             </a:pPr>
-            <a:endParaRPr lang="en-US" altLang="ko-KR" sz="1100" b="0" dirty="0">
+            <a:endParaRPr lang="en-US" altLang="ko-KR" sz="1200" b="0" dirty="0">
               <a:effectLst/>
               <a:latin typeface="D2Coding" panose="020B0609020101020101" pitchFamily="49" charset="-127"/>
               <a:ea typeface="D2Coding" panose="020B0609020101020101" pitchFamily="49" charset="-127"/>
@@ -11305,7 +12599,7 @@
               <a:buNone/>
             </a:pPr>
             <a:r>
-              <a:rPr lang="en-US" altLang="ko-KR" sz="1100" b="0" dirty="0">
+              <a:rPr lang="en-US" altLang="ko-KR" sz="1200" b="0" dirty="0">
                 <a:effectLst/>
                 <a:latin typeface="D2Coding" panose="020B0609020101020101" pitchFamily="49" charset="-127"/>
                 <a:ea typeface="D2Coding" panose="020B0609020101020101" pitchFamily="49" charset="-127"/>
@@ -11313,7 +12607,7 @@
               <a:t># </a:t>
             </a:r>
             <a:r>
-              <a:rPr lang="ko-KR" altLang="en-US" sz="1100" b="0" dirty="0">
+              <a:rPr lang="ko-KR" altLang="en-US" sz="1200" b="0" dirty="0">
                 <a:effectLst/>
                 <a:latin typeface="D2Coding" panose="020B0609020101020101" pitchFamily="49" charset="-127"/>
                 <a:ea typeface="D2Coding" panose="020B0609020101020101" pitchFamily="49" charset="-127"/>
@@ -11321,7 +12615,7 @@
               <a:t>수파베이스와 연동할 </a:t>
             </a:r>
             <a:r>
-              <a:rPr lang="en-US" altLang="ko-KR" sz="1100" b="0" dirty="0" err="1">
+              <a:rPr lang="en-US" altLang="ko-KR" sz="1200" b="0" dirty="0" err="1">
                 <a:effectLst/>
                 <a:latin typeface="D2Coding" panose="020B0609020101020101" pitchFamily="49" charset="-127"/>
                 <a:ea typeface="D2Coding" panose="020B0609020101020101" pitchFamily="49" charset="-127"/>
@@ -11329,7 +12623,7 @@
               <a:t>HuggingFace</a:t>
             </a:r>
             <a:r>
-              <a:rPr lang="en-US" altLang="ko-KR" sz="1100" b="0" dirty="0">
+              <a:rPr lang="en-US" altLang="ko-KR" sz="1200" b="0" dirty="0">
                 <a:effectLst/>
                 <a:latin typeface="D2Coding" panose="020B0609020101020101" pitchFamily="49" charset="-127"/>
                 <a:ea typeface="D2Coding" panose="020B0609020101020101" pitchFamily="49" charset="-127"/>
@@ -11337,7 +12631,7 @@
               <a:t> 384</a:t>
             </a:r>
             <a:r>
-              <a:rPr lang="ko-KR" altLang="en-US" sz="1100" b="0" dirty="0">
+              <a:rPr lang="ko-KR" altLang="en-US" sz="1200" b="0" dirty="0">
                 <a:effectLst/>
                 <a:latin typeface="D2Coding" panose="020B0609020101020101" pitchFamily="49" charset="-127"/>
                 <a:ea typeface="D2Coding" panose="020B0609020101020101" pitchFamily="49" charset="-127"/>
@@ -11345,7 +12639,7 @@
               <a:t>차원 </a:t>
             </a:r>
             <a:r>
-              <a:rPr lang="ko-KR" altLang="en-US" sz="1100" b="0" dirty="0" err="1">
+              <a:rPr lang="ko-KR" altLang="en-US" sz="1200" b="0" dirty="0" err="1">
                 <a:effectLst/>
                 <a:latin typeface="D2Coding" panose="020B0609020101020101" pitchFamily="49" charset="-127"/>
                 <a:ea typeface="D2Coding" panose="020B0609020101020101" pitchFamily="49" charset="-127"/>
@@ -11353,7 +12647,7 @@
               <a:t>임베딩</a:t>
             </a:r>
             <a:r>
-              <a:rPr lang="ko-KR" altLang="en-US" sz="1100" b="0" dirty="0">
+              <a:rPr lang="ko-KR" altLang="en-US" sz="1200" b="0" dirty="0">
                 <a:effectLst/>
                 <a:latin typeface="D2Coding" panose="020B0609020101020101" pitchFamily="49" charset="-127"/>
                 <a:ea typeface="D2Coding" panose="020B0609020101020101" pitchFamily="49" charset="-127"/>
@@ -11366,7 +12660,7 @@
               <a:buNone/>
             </a:pPr>
             <a:r>
-              <a:rPr lang="en-US" altLang="ko-KR" sz="1100" b="0" dirty="0" err="1">
+              <a:rPr lang="en-US" altLang="ko-KR" sz="1200" b="0" dirty="0" err="1">
                 <a:effectLst/>
                 <a:latin typeface="D2Coding" panose="020B0609020101020101" pitchFamily="49" charset="-127"/>
                 <a:ea typeface="D2Coding" panose="020B0609020101020101" pitchFamily="49" charset="-127"/>
@@ -11374,7 +12668,7 @@
               <a:t>embeddings_model</a:t>
             </a:r>
             <a:r>
-              <a:rPr lang="en-US" altLang="ko-KR" sz="1100" b="0" dirty="0">
+              <a:rPr lang="en-US" altLang="ko-KR" sz="1200" b="0" dirty="0">
                 <a:effectLst/>
                 <a:latin typeface="D2Coding" panose="020B0609020101020101" pitchFamily="49" charset="-127"/>
                 <a:ea typeface="D2Coding" panose="020B0609020101020101" pitchFamily="49" charset="-127"/>
@@ -11382,7 +12676,7 @@
               <a:t> = </a:t>
             </a:r>
             <a:r>
-              <a:rPr lang="en-US" altLang="ko-KR" sz="1100" b="0" dirty="0" err="1">
+              <a:rPr lang="en-US" altLang="ko-KR" sz="1200" b="0" dirty="0" err="1">
                 <a:effectLst/>
                 <a:latin typeface="D2Coding" panose="020B0609020101020101" pitchFamily="49" charset="-127"/>
                 <a:ea typeface="D2Coding" panose="020B0609020101020101" pitchFamily="49" charset="-127"/>
@@ -11390,7 +12684,7 @@
               <a:t>HuggingFaceEmbeddings</a:t>
             </a:r>
             <a:r>
-              <a:rPr lang="en-US" altLang="ko-KR" sz="1100" b="0" dirty="0">
+              <a:rPr lang="en-US" altLang="ko-KR" sz="1200" b="0" dirty="0">
                 <a:effectLst/>
                 <a:latin typeface="D2Coding" panose="020B0609020101020101" pitchFamily="49" charset="-127"/>
                 <a:ea typeface="D2Coding" panose="020B0609020101020101" pitchFamily="49" charset="-127"/>
@@ -11398,7 +12692,7 @@
               <a:t>(</a:t>
             </a:r>
             <a:r>
-              <a:rPr lang="en-US" altLang="ko-KR" sz="1100" b="0" dirty="0" err="1">
+              <a:rPr lang="en-US" altLang="ko-KR" sz="1200" b="0" dirty="0" err="1">
                 <a:effectLst/>
                 <a:latin typeface="D2Coding" panose="020B0609020101020101" pitchFamily="49" charset="-127"/>
                 <a:ea typeface="D2Coding" panose="020B0609020101020101" pitchFamily="49" charset="-127"/>
@@ -11406,7 +12700,7 @@
               <a:t>model_name</a:t>
             </a:r>
             <a:r>
-              <a:rPr lang="en-US" altLang="ko-KR" sz="1100" b="0" dirty="0">
+              <a:rPr lang="en-US" altLang="ko-KR" sz="1200" b="0" dirty="0">
                 <a:effectLst/>
                 <a:latin typeface="D2Coding" panose="020B0609020101020101" pitchFamily="49" charset="-127"/>
                 <a:ea typeface="D2Coding" panose="020B0609020101020101" pitchFamily="49" charset="-127"/>
@@ -11418,7 +12712,7 @@
             <a:pPr>
               <a:buNone/>
             </a:pPr>
-            <a:endParaRPr lang="en-US" altLang="ko-KR" sz="1100" b="0" dirty="0">
+            <a:endParaRPr lang="en-US" altLang="ko-KR" sz="1200" b="0" dirty="0">
               <a:effectLst/>
               <a:latin typeface="D2Coding" panose="020B0609020101020101" pitchFamily="49" charset="-127"/>
               <a:ea typeface="D2Coding" panose="020B0609020101020101" pitchFamily="49" charset="-127"/>
@@ -11429,7 +12723,7 @@
               <a:buNone/>
             </a:pPr>
             <a:r>
-              <a:rPr lang="en-US" altLang="ko-KR" sz="1100" b="0" dirty="0">
+              <a:rPr lang="en-US" altLang="ko-KR" sz="1200" b="0" dirty="0">
                 <a:effectLst/>
                 <a:latin typeface="D2Coding" panose="020B0609020101020101" pitchFamily="49" charset="-127"/>
                 <a:ea typeface="D2Coding" panose="020B0609020101020101" pitchFamily="49" charset="-127"/>
@@ -11437,7 +12731,7 @@
               <a:t># </a:t>
             </a:r>
             <a:r>
-              <a:rPr lang="en-US" altLang="ko-KR" sz="1100" b="0" dirty="0" err="1">
+              <a:rPr lang="en-US" altLang="ko-KR" sz="1200" b="0" dirty="0" err="1">
                 <a:effectLst/>
                 <a:latin typeface="D2Coding" panose="020B0609020101020101" pitchFamily="49" charset="-127"/>
                 <a:ea typeface="D2Coding" panose="020B0609020101020101" pitchFamily="49" charset="-127"/>
@@ -11445,7 +12739,7 @@
               <a:t>Supabase</a:t>
             </a:r>
             <a:r>
-              <a:rPr lang="en-US" altLang="ko-KR" sz="1100" b="0" dirty="0">
+              <a:rPr lang="en-US" altLang="ko-KR" sz="1200" b="0" dirty="0">
                 <a:effectLst/>
                 <a:latin typeface="D2Coding" panose="020B0609020101020101" pitchFamily="49" charset="-127"/>
                 <a:ea typeface="D2Coding" panose="020B0609020101020101" pitchFamily="49" charset="-127"/>
@@ -11453,7 +12747,7 @@
               <a:t> </a:t>
             </a:r>
             <a:r>
-              <a:rPr lang="en-US" altLang="ko-KR" sz="1100" b="0" dirty="0" err="1">
+              <a:rPr lang="en-US" altLang="ko-KR" sz="1200" b="0" dirty="0" err="1">
                 <a:effectLst/>
                 <a:latin typeface="D2Coding" panose="020B0609020101020101" pitchFamily="49" charset="-127"/>
                 <a:ea typeface="D2Coding" panose="020B0609020101020101" pitchFamily="49" charset="-127"/>
@@ -11461,7 +12755,7 @@
               <a:t>VectorStore</a:t>
             </a:r>
             <a:r>
-              <a:rPr lang="ko-KR" altLang="en-US" sz="1100" b="0" dirty="0">
+              <a:rPr lang="ko-KR" altLang="en-US" sz="1200" b="0" dirty="0">
                 <a:effectLst/>
                 <a:latin typeface="D2Coding" panose="020B0609020101020101" pitchFamily="49" charset="-127"/>
                 <a:ea typeface="D2Coding" panose="020B0609020101020101" pitchFamily="49" charset="-127"/>
@@ -11469,7 +12763,7 @@
               <a:t>에 데이터 </a:t>
             </a:r>
             <a:r>
-              <a:rPr lang="en-US" altLang="ko-KR" sz="1100" b="0" dirty="0">
+              <a:rPr lang="en-US" altLang="ko-KR" sz="1200" b="0" dirty="0">
                 <a:effectLst/>
                 <a:latin typeface="D2Coding" panose="020B0609020101020101" pitchFamily="49" charset="-127"/>
                 <a:ea typeface="D2Coding" panose="020B0609020101020101" pitchFamily="49" charset="-127"/>
@@ -11477,7 +12771,7 @@
               <a:t>Store (</a:t>
             </a:r>
             <a:r>
-              <a:rPr lang="ko-KR" altLang="en-US" sz="1100" b="0" dirty="0">
+              <a:rPr lang="ko-KR" altLang="en-US" sz="1200" b="0" dirty="0">
                 <a:effectLst/>
                 <a:latin typeface="D2Coding" panose="020B0609020101020101" pitchFamily="49" charset="-127"/>
                 <a:ea typeface="D2Coding" panose="020B0609020101020101" pitchFamily="49" charset="-127"/>
@@ -11485,14 +12779,14 @@
               <a:t>인덱싱 및 저장</a:t>
             </a:r>
             <a:r>
-              <a:rPr lang="en-US" altLang="ko-KR" sz="1100" b="0" dirty="0">
+              <a:rPr lang="en-US" altLang="ko-KR" sz="1200" b="0" dirty="0">
                 <a:effectLst/>
                 <a:latin typeface="D2Coding" panose="020B0609020101020101" pitchFamily="49" charset="-127"/>
                 <a:ea typeface="D2Coding" panose="020B0609020101020101" pitchFamily="49" charset="-127"/>
               </a:rPr>
               <a:t>)</a:t>
             </a:r>
-            <a:endParaRPr lang="ko-KR" altLang="en-US" sz="1100" b="0" dirty="0">
+            <a:endParaRPr lang="ko-KR" altLang="en-US" sz="1200" b="0" dirty="0">
               <a:effectLst/>
               <a:latin typeface="D2Coding" panose="020B0609020101020101" pitchFamily="49" charset="-127"/>
               <a:ea typeface="D2Coding" panose="020B0609020101020101" pitchFamily="49" charset="-127"/>
@@ -11503,7 +12797,7 @@
               <a:buNone/>
             </a:pPr>
             <a:r>
-              <a:rPr lang="en-US" altLang="ko-KR" sz="1100" b="0" dirty="0" err="1">
+              <a:rPr lang="en-US" altLang="ko-KR" sz="1200" b="0" dirty="0" err="1">
                 <a:effectLst/>
                 <a:latin typeface="D2Coding" panose="020B0609020101020101" pitchFamily="49" charset="-127"/>
                 <a:ea typeface="D2Coding" panose="020B0609020101020101" pitchFamily="49" charset="-127"/>
@@ -11511,7 +12805,7 @@
               <a:t>db</a:t>
             </a:r>
             <a:r>
-              <a:rPr lang="en-US" altLang="ko-KR" sz="1100" b="0" dirty="0">
+              <a:rPr lang="en-US" altLang="ko-KR" sz="1200" b="0" dirty="0">
                 <a:effectLst/>
                 <a:latin typeface="D2Coding" panose="020B0609020101020101" pitchFamily="49" charset="-127"/>
                 <a:ea typeface="D2Coding" panose="020B0609020101020101" pitchFamily="49" charset="-127"/>
@@ -11519,7 +12813,7 @@
               <a:t> = </a:t>
             </a:r>
             <a:r>
-              <a:rPr lang="en-US" altLang="ko-KR" sz="1100" b="0" dirty="0" err="1">
+              <a:rPr lang="en-US" altLang="ko-KR" sz="1200" b="0" dirty="0" err="1">
                 <a:effectLst/>
                 <a:latin typeface="D2Coding" panose="020B0609020101020101" pitchFamily="49" charset="-127"/>
                 <a:ea typeface="D2Coding" panose="020B0609020101020101" pitchFamily="49" charset="-127"/>
@@ -11527,7 +12821,7 @@
               <a:t>SupabaseVectorStore.from_documents</a:t>
             </a:r>
             <a:r>
-              <a:rPr lang="en-US" altLang="ko-KR" sz="1100" b="0" dirty="0">
+              <a:rPr lang="en-US" altLang="ko-KR" sz="1200" b="0" dirty="0">
                 <a:effectLst/>
                 <a:latin typeface="D2Coding" panose="020B0609020101020101" pitchFamily="49" charset="-127"/>
                 <a:ea typeface="D2Coding" panose="020B0609020101020101" pitchFamily="49" charset="-127"/>
@@ -11540,7 +12834,7 @@
               <a:buNone/>
             </a:pPr>
             <a:r>
-              <a:rPr lang="en-US" altLang="ko-KR" sz="1100" b="0" dirty="0">
+              <a:rPr lang="en-US" altLang="ko-KR" sz="1200" b="0" dirty="0">
                 <a:effectLst/>
                 <a:latin typeface="D2Coding" panose="020B0609020101020101" pitchFamily="49" charset="-127"/>
                 <a:ea typeface="D2Coding" panose="020B0609020101020101" pitchFamily="49" charset="-127"/>
@@ -11553,7 +12847,7 @@
               <a:buNone/>
             </a:pPr>
             <a:r>
-              <a:rPr lang="en-US" altLang="ko-KR" sz="1100" b="0" dirty="0">
+              <a:rPr lang="en-US" altLang="ko-KR" sz="1200" b="0" dirty="0">
                 <a:effectLst/>
                 <a:latin typeface="D2Coding" panose="020B0609020101020101" pitchFamily="49" charset="-127"/>
                 <a:ea typeface="D2Coding" panose="020B0609020101020101" pitchFamily="49" charset="-127"/>
@@ -11561,7 +12855,7 @@
               <a:t>    embedding=</a:t>
             </a:r>
             <a:r>
-              <a:rPr lang="en-US" altLang="ko-KR" sz="1100" b="0" dirty="0" err="1">
+              <a:rPr lang="en-US" altLang="ko-KR" sz="1200" b="0" dirty="0" err="1">
                 <a:effectLst/>
                 <a:latin typeface="D2Coding" panose="020B0609020101020101" pitchFamily="49" charset="-127"/>
                 <a:ea typeface="D2Coding" panose="020B0609020101020101" pitchFamily="49" charset="-127"/>
@@ -11569,7 +12863,7 @@
               <a:t>embeddings_model</a:t>
             </a:r>
             <a:r>
-              <a:rPr lang="en-US" altLang="ko-KR" sz="1100" b="0" dirty="0">
+              <a:rPr lang="en-US" altLang="ko-KR" sz="1200" b="0" dirty="0">
                 <a:effectLst/>
                 <a:latin typeface="D2Coding" panose="020B0609020101020101" pitchFamily="49" charset="-127"/>
                 <a:ea typeface="D2Coding" panose="020B0609020101020101" pitchFamily="49" charset="-127"/>
@@ -11582,7 +12876,7 @@
               <a:buNone/>
             </a:pPr>
             <a:r>
-              <a:rPr lang="en-US" altLang="ko-KR" sz="1100" b="0" dirty="0">
+              <a:rPr lang="en-US" altLang="ko-KR" sz="1200" b="0" dirty="0">
                 <a:effectLst/>
                 <a:latin typeface="D2Coding" panose="020B0609020101020101" pitchFamily="49" charset="-127"/>
                 <a:ea typeface="D2Coding" panose="020B0609020101020101" pitchFamily="49" charset="-127"/>
@@ -11590,7 +12884,7 @@
               <a:t>    client=</a:t>
             </a:r>
             <a:r>
-              <a:rPr lang="en-US" altLang="ko-KR" sz="1100" b="0" dirty="0" err="1">
+              <a:rPr lang="en-US" altLang="ko-KR" sz="1200" b="0" dirty="0" err="1">
                 <a:effectLst/>
                 <a:latin typeface="D2Coding" panose="020B0609020101020101" pitchFamily="49" charset="-127"/>
                 <a:ea typeface="D2Coding" panose="020B0609020101020101" pitchFamily="49" charset="-127"/>
@@ -11598,7 +12892,7 @@
               <a:t>supabase_client</a:t>
             </a:r>
             <a:r>
-              <a:rPr lang="en-US" altLang="ko-KR" sz="1100" b="0" dirty="0">
+              <a:rPr lang="en-US" altLang="ko-KR" sz="1200" b="0" dirty="0">
                 <a:effectLst/>
                 <a:latin typeface="D2Coding" panose="020B0609020101020101" pitchFamily="49" charset="-127"/>
                 <a:ea typeface="D2Coding" panose="020B0609020101020101" pitchFamily="49" charset="-127"/>
@@ -11611,7 +12905,7 @@
               <a:buNone/>
             </a:pPr>
             <a:r>
-              <a:rPr lang="en-US" altLang="ko-KR" sz="1100" b="0" dirty="0">
+              <a:rPr lang="en-US" altLang="ko-KR" sz="1200" b="0" dirty="0">
                 <a:effectLst/>
                 <a:latin typeface="D2Coding" panose="020B0609020101020101" pitchFamily="49" charset="-127"/>
                 <a:ea typeface="D2Coding" panose="020B0609020101020101" pitchFamily="49" charset="-127"/>
@@ -11619,7 +12913,7 @@
               <a:t>    </a:t>
             </a:r>
             <a:r>
-              <a:rPr lang="en-US" altLang="ko-KR" sz="1100" b="0" dirty="0" err="1">
+              <a:rPr lang="en-US" altLang="ko-KR" sz="1200" b="0" dirty="0" err="1">
                 <a:effectLst/>
                 <a:latin typeface="D2Coding" panose="020B0609020101020101" pitchFamily="49" charset="-127"/>
                 <a:ea typeface="D2Coding" panose="020B0609020101020101" pitchFamily="49" charset="-127"/>
@@ -11627,7 +12921,7 @@
               <a:t>table_name</a:t>
             </a:r>
             <a:r>
-              <a:rPr lang="en-US" altLang="ko-KR" sz="1100" b="0" dirty="0">
+              <a:rPr lang="en-US" altLang="ko-KR" sz="1200" b="0" dirty="0">
                 <a:effectLst/>
                 <a:latin typeface="D2Coding" panose="020B0609020101020101" pitchFamily="49" charset="-127"/>
                 <a:ea typeface="D2Coding" panose="020B0609020101020101" pitchFamily="49" charset="-127"/>
@@ -11640,7 +12934,7 @@
               <a:buNone/>
             </a:pPr>
             <a:r>
-              <a:rPr lang="en-US" altLang="ko-KR" sz="1100" b="0" dirty="0">
+              <a:rPr lang="en-US" altLang="ko-KR" sz="1200" b="0" dirty="0">
                 <a:effectLst/>
                 <a:latin typeface="D2Coding" panose="020B0609020101020101" pitchFamily="49" charset="-127"/>
                 <a:ea typeface="D2Coding" panose="020B0609020101020101" pitchFamily="49" charset="-127"/>
@@ -11648,7 +12942,7 @@
               <a:t>    </a:t>
             </a:r>
             <a:r>
-              <a:rPr lang="en-US" altLang="ko-KR" sz="1100" b="0" dirty="0" err="1">
+              <a:rPr lang="en-US" altLang="ko-KR" sz="1200" b="0" dirty="0" err="1">
                 <a:effectLst/>
                 <a:latin typeface="D2Coding" panose="020B0609020101020101" pitchFamily="49" charset="-127"/>
                 <a:ea typeface="D2Coding" panose="020B0609020101020101" pitchFamily="49" charset="-127"/>
@@ -11656,7 +12950,7 @@
               <a:t>query_name</a:t>
             </a:r>
             <a:r>
-              <a:rPr lang="en-US" altLang="ko-KR" sz="1100" b="0" dirty="0">
+              <a:rPr lang="en-US" altLang="ko-KR" sz="1200" b="0" dirty="0">
                 <a:effectLst/>
                 <a:latin typeface="D2Coding" panose="020B0609020101020101" pitchFamily="49" charset="-127"/>
                 <a:ea typeface="D2Coding" panose="020B0609020101020101" pitchFamily="49" charset="-127"/>
@@ -11664,7 +12958,7 @@
               <a:t>="</a:t>
             </a:r>
             <a:r>
-              <a:rPr lang="en-US" altLang="ko-KR" sz="1100" b="0" dirty="0" err="1">
+              <a:rPr lang="en-US" altLang="ko-KR" sz="1200" b="0" dirty="0" err="1">
                 <a:effectLst/>
                 <a:latin typeface="D2Coding" panose="020B0609020101020101" pitchFamily="49" charset="-127"/>
                 <a:ea typeface="D2Coding" panose="020B0609020101020101" pitchFamily="49" charset="-127"/>
@@ -11672,7 +12966,7 @@
               <a:t>match_documents</a:t>
             </a:r>
             <a:r>
-              <a:rPr lang="en-US" altLang="ko-KR" sz="1100" b="0" dirty="0">
+              <a:rPr lang="en-US" altLang="ko-KR" sz="1200" b="0" dirty="0">
                 <a:effectLst/>
                 <a:latin typeface="D2Coding" panose="020B0609020101020101" pitchFamily="49" charset="-127"/>
                 <a:ea typeface="D2Coding" panose="020B0609020101020101" pitchFamily="49" charset="-127"/>
@@ -11680,7 +12974,7 @@
               <a:t>"  # SQL Editor</a:t>
             </a:r>
             <a:r>
-              <a:rPr lang="ko-KR" altLang="en-US" sz="1100" b="0" dirty="0">
+              <a:rPr lang="ko-KR" altLang="en-US" sz="1200" b="0" dirty="0">
                 <a:effectLst/>
                 <a:latin typeface="D2Coding" panose="020B0609020101020101" pitchFamily="49" charset="-127"/>
                 <a:ea typeface="D2Coding" panose="020B0609020101020101" pitchFamily="49" charset="-127"/>
@@ -11693,18 +12987,151 @@
               <a:buNone/>
             </a:pPr>
             <a:r>
-              <a:rPr lang="en-US" altLang="ko-KR" sz="1100" b="0" dirty="0">
+              <a:rPr lang="en-US" altLang="ko-KR" sz="1200" b="0" dirty="0">
                 <a:effectLst/>
                 <a:latin typeface="D2Coding" panose="020B0609020101020101" pitchFamily="49" charset="-127"/>
                 <a:ea typeface="D2Coding" panose="020B0609020101020101" pitchFamily="49" charset="-127"/>
               </a:rPr>
               <a:t>)</a:t>
             </a:r>
-            <a:endParaRPr lang="ko-KR" altLang="en-US" sz="1100" b="0" dirty="0">
+            <a:endParaRPr lang="ko-KR" altLang="en-US" sz="1200" b="0" dirty="0">
               <a:effectLst/>
               <a:latin typeface="D2Coding" panose="020B0609020101020101" pitchFamily="49" charset="-127"/>
               <a:ea typeface="D2Coding" panose="020B0609020101020101" pitchFamily="49" charset="-127"/>
             </a:endParaRPr>
+          </a:p>
+        </p:txBody>
+      </p:sp>
+      <p:sp>
+        <p:nvSpPr>
+          <p:cNvPr id="5" name="슬라이드 번호 개체 틀 3">
+            <a:extLst>
+              <a:ext uri="{FF2B5EF4-FFF2-40B4-BE49-F238E27FC236}">
+                <a16:creationId xmlns:a16="http://schemas.microsoft.com/office/drawing/2014/main" id="{F6BF6CAC-AF26-DF9E-B5CC-1A5C070AE83B}"/>
+              </a:ext>
+            </a:extLst>
+          </p:cNvPr>
+          <p:cNvSpPr txBox="1">
+            <a:spLocks/>
+          </p:cNvSpPr>
+          <p:nvPr/>
+        </p:nvSpPr>
+        <p:spPr>
+          <a:xfrm>
+            <a:off x="11162230" y="299420"/>
+            <a:ext cx="753545" cy="365125"/>
+          </a:xfrm>
+          <a:prstGeom prst="rect">
+            <a:avLst/>
+          </a:prstGeom>
+        </p:spPr>
+        <p:txBody>
+          <a:bodyPr vert="horz" lIns="91440" tIns="45720" rIns="91440" bIns="45720" rtlCol="0" anchor="ctr"/>
+          <a:lstStyle>
+            <a:defPPr rtl="0">
+              <a:defRPr lang="ko-KR"/>
+            </a:defPPr>
+            <a:lvl1pPr marL="0" algn="r" defTabSz="914400" rtl="0" eaLnBrk="1" latinLnBrk="0" hangingPunct="1">
+              <a:defRPr sz="1200" kern="1200" baseline="0">
+                <a:solidFill>
+                  <a:schemeClr val="tx1">
+                    <a:lumMod val="65000"/>
+                    <a:lumOff val="35000"/>
+                  </a:schemeClr>
+                </a:solidFill>
+                <a:latin typeface="맑은 고딕" panose="020B0503020000020004" pitchFamily="50" charset="-127"/>
+                <a:ea typeface="맑은 고딕" panose="020B0503020000020004" pitchFamily="50" charset="-127"/>
+                <a:cs typeface="+mn-cs"/>
+              </a:defRPr>
+            </a:lvl1pPr>
+            <a:lvl2pPr marL="457200" algn="l" defTabSz="914400" rtl="0" eaLnBrk="1" latinLnBrk="0" hangingPunct="1">
+              <a:defRPr sz="1800" kern="1200">
+                <a:solidFill>
+                  <a:schemeClr val="tx1"/>
+                </a:solidFill>
+                <a:latin typeface="+mn-lt"/>
+                <a:ea typeface="+mn-ea"/>
+                <a:cs typeface="+mn-cs"/>
+              </a:defRPr>
+            </a:lvl2pPr>
+            <a:lvl3pPr marL="914400" algn="l" defTabSz="914400" rtl="0" eaLnBrk="1" latinLnBrk="0" hangingPunct="1">
+              <a:defRPr sz="1800" kern="1200">
+                <a:solidFill>
+                  <a:schemeClr val="tx1"/>
+                </a:solidFill>
+                <a:latin typeface="+mn-lt"/>
+                <a:ea typeface="+mn-ea"/>
+                <a:cs typeface="+mn-cs"/>
+              </a:defRPr>
+            </a:lvl3pPr>
+            <a:lvl4pPr marL="1371600" algn="l" defTabSz="914400" rtl="0" eaLnBrk="1" latinLnBrk="0" hangingPunct="1">
+              <a:defRPr sz="1800" kern="1200">
+                <a:solidFill>
+                  <a:schemeClr val="tx1"/>
+                </a:solidFill>
+                <a:latin typeface="+mn-lt"/>
+                <a:ea typeface="+mn-ea"/>
+                <a:cs typeface="+mn-cs"/>
+              </a:defRPr>
+            </a:lvl4pPr>
+            <a:lvl5pPr marL="1828800" algn="l" defTabSz="914400" rtl="0" eaLnBrk="1" latinLnBrk="0" hangingPunct="1">
+              <a:defRPr sz="1800" kern="1200">
+                <a:solidFill>
+                  <a:schemeClr val="tx1"/>
+                </a:solidFill>
+                <a:latin typeface="+mn-lt"/>
+                <a:ea typeface="+mn-ea"/>
+                <a:cs typeface="+mn-cs"/>
+              </a:defRPr>
+            </a:lvl5pPr>
+            <a:lvl6pPr marL="2286000" algn="l" defTabSz="914400" rtl="0" eaLnBrk="1" latinLnBrk="0" hangingPunct="1">
+              <a:defRPr sz="1800" kern="1200">
+                <a:solidFill>
+                  <a:schemeClr val="tx1"/>
+                </a:solidFill>
+                <a:latin typeface="+mn-lt"/>
+                <a:ea typeface="+mn-ea"/>
+                <a:cs typeface="+mn-cs"/>
+              </a:defRPr>
+            </a:lvl6pPr>
+            <a:lvl7pPr marL="2743200" algn="l" defTabSz="914400" rtl="0" eaLnBrk="1" latinLnBrk="0" hangingPunct="1">
+              <a:defRPr sz="1800" kern="1200">
+                <a:solidFill>
+                  <a:schemeClr val="tx1"/>
+                </a:solidFill>
+                <a:latin typeface="+mn-lt"/>
+                <a:ea typeface="+mn-ea"/>
+                <a:cs typeface="+mn-cs"/>
+              </a:defRPr>
+            </a:lvl7pPr>
+            <a:lvl8pPr marL="3200400" algn="l" defTabSz="914400" rtl="0" eaLnBrk="1" latinLnBrk="0" hangingPunct="1">
+              <a:defRPr sz="1800" kern="1200">
+                <a:solidFill>
+                  <a:schemeClr val="tx1"/>
+                </a:solidFill>
+                <a:latin typeface="+mn-lt"/>
+                <a:ea typeface="+mn-ea"/>
+                <a:cs typeface="+mn-cs"/>
+              </a:defRPr>
+            </a:lvl8pPr>
+            <a:lvl9pPr marL="3657600" algn="l" defTabSz="914400" rtl="0" eaLnBrk="1" latinLnBrk="0" hangingPunct="1">
+              <a:defRPr sz="1800" kern="1200">
+                <a:solidFill>
+                  <a:schemeClr val="tx1"/>
+                </a:solidFill>
+                <a:latin typeface="+mn-lt"/>
+                <a:ea typeface="+mn-ea"/>
+                <a:cs typeface="+mn-cs"/>
+              </a:defRPr>
+            </a:lvl9pPr>
+          </a:lstStyle>
+          <a:p>
+            <a:fld id="{D57F1E4F-1CFF-5643-939E-217C01CDF565}" type="slidenum">
+              <a:rPr lang="en-US" b="1" smtClean="0"/>
+              <a:pPr/>
+              <a:t>5</a:t>
+            </a:fld>
+            <a:endParaRPr lang="en-US" b="1" dirty="0"/>
           </a:p>
         </p:txBody>
       </p:sp>
@@ -11746,41 +13173,6 @@
       </p:grpSpPr>
       <p:sp>
         <p:nvSpPr>
-          <p:cNvPr id="4" name="슬라이드 번호 개체 틀 3">
-            <a:extLst>
-              <a:ext uri="{FF2B5EF4-FFF2-40B4-BE49-F238E27FC236}">
-                <a16:creationId xmlns:a16="http://schemas.microsoft.com/office/drawing/2014/main" id="{97F1093B-1C5C-EA61-2A57-7D96D8A5F316}"/>
-              </a:ext>
-            </a:extLst>
-          </p:cNvPr>
-          <p:cNvSpPr>
-            <a:spLocks noGrp="1"/>
-          </p:cNvSpPr>
-          <p:nvPr>
-            <p:ph type="sldNum" sz="quarter" idx="12"/>
-          </p:nvPr>
-        </p:nvSpPr>
-        <p:spPr>
-          <a:xfrm>
-            <a:off x="10514011" y="6036261"/>
-            <a:ext cx="753545" cy="365125"/>
-          </a:xfrm>
-        </p:spPr>
-        <p:txBody>
-          <a:bodyPr/>
-          <a:lstStyle/>
-          <a:p>
-            <a:fld id="{D57F1E4F-1CFF-5643-939E-217C01CDF565}" type="slidenum">
-              <a:rPr lang="en-US" smtClean="0"/>
-              <a:pPr/>
-              <a:t>6</a:t>
-            </a:fld>
-            <a:endParaRPr lang="en-US" dirty="0"/>
-          </a:p>
-        </p:txBody>
-      </p:sp>
-      <p:sp>
-        <p:nvSpPr>
           <p:cNvPr id="3" name="제목 1">
             <a:extLst>
               <a:ext uri="{FF2B5EF4-FFF2-40B4-BE49-F238E27FC236}">
@@ -11868,8 +13260,8 @@
         </p:nvSpPr>
         <p:spPr>
           <a:xfrm>
-            <a:off x="630693" y="1313988"/>
-            <a:ext cx="6507480" cy="2970044"/>
+            <a:off x="344366" y="1313988"/>
+            <a:ext cx="6507480" cy="3231654"/>
           </a:xfrm>
           <a:prstGeom prst="rect">
             <a:avLst/>
@@ -11877,6 +13269,12 @@
           <a:solidFill>
             <a:srgbClr val="76E3FF"/>
           </a:solidFill>
+          <a:ln>
+            <a:solidFill>
+              <a:schemeClr val="tx1"/>
+            </a:solidFill>
+            <a:prstDash val="dash"/>
+          </a:ln>
         </p:spPr>
         <p:txBody>
           <a:bodyPr wrap="square">
@@ -11888,14 +13286,14 @@
               <a:buNone/>
             </a:pPr>
             <a:r>
-              <a:rPr lang="en-US" altLang="ko-KR" sz="1100" b="0" dirty="0">
+              <a:rPr lang="en-US" altLang="ko-KR" sz="1200" b="0" dirty="0">
                 <a:effectLst/>
                 <a:latin typeface="D2Coding" panose="020B0609020101020101" pitchFamily="49" charset="-127"/>
                 <a:ea typeface="D2Coding" panose="020B0609020101020101" pitchFamily="49" charset="-127"/>
               </a:rPr>
               <a:t># ==========================================</a:t>
             </a:r>
-            <a:endParaRPr lang="ko-KR" altLang="en-US" sz="1100" b="0" dirty="0">
+            <a:endParaRPr lang="ko-KR" altLang="en-US" sz="1200" b="0" dirty="0">
               <a:effectLst/>
               <a:latin typeface="D2Coding" panose="020B0609020101020101" pitchFamily="49" charset="-127"/>
               <a:ea typeface="D2Coding" panose="020B0609020101020101" pitchFamily="49" charset="-127"/>
@@ -11906,7 +13304,7 @@
               <a:buNone/>
             </a:pPr>
             <a:r>
-              <a:rPr lang="en-US" altLang="ko-KR" sz="1100" b="0" dirty="0">
+              <a:rPr lang="en-US" altLang="ko-KR" sz="1200" b="0" dirty="0">
                 <a:effectLst/>
                 <a:latin typeface="D2Coding" panose="020B0609020101020101" pitchFamily="49" charset="-127"/>
                 <a:ea typeface="D2Coding" panose="020B0609020101020101" pitchFamily="49" charset="-127"/>
@@ -11914,7 +13312,7 @@
               <a:t># 3</a:t>
             </a:r>
             <a:r>
-              <a:rPr lang="ko-KR" altLang="en-US" sz="1100" b="0" dirty="0">
+              <a:rPr lang="ko-KR" altLang="en-US" sz="1200" b="0" dirty="0">
                 <a:effectLst/>
                 <a:latin typeface="D2Coding" panose="020B0609020101020101" pitchFamily="49" charset="-127"/>
                 <a:ea typeface="D2Coding" panose="020B0609020101020101" pitchFamily="49" charset="-127"/>
@@ -11922,7 +13320,7 @@
               <a:t>단계</a:t>
             </a:r>
             <a:r>
-              <a:rPr lang="en-US" altLang="ko-KR" sz="1100" b="0" dirty="0">
+              <a:rPr lang="en-US" altLang="ko-KR" sz="1200" b="0" dirty="0">
                 <a:effectLst/>
                 <a:latin typeface="D2Coding" panose="020B0609020101020101" pitchFamily="49" charset="-127"/>
                 <a:ea typeface="D2Coding" panose="020B0609020101020101" pitchFamily="49" charset="-127"/>
@@ -11930,7 +13328,7 @@
               <a:t>: </a:t>
             </a:r>
             <a:r>
-              <a:rPr lang="ko-KR" altLang="en-US" sz="1100" b="0" dirty="0">
+              <a:rPr lang="ko-KR" altLang="en-US" sz="1200" b="0" dirty="0">
                 <a:effectLst/>
                 <a:latin typeface="D2Coding" panose="020B0609020101020101" pitchFamily="49" charset="-127"/>
                 <a:ea typeface="D2Coding" panose="020B0609020101020101" pitchFamily="49" charset="-127"/>
@@ -11938,7 +13336,7 @@
               <a:t>검색기</a:t>
             </a:r>
             <a:r>
-              <a:rPr lang="en-US" altLang="ko-KR" sz="1100" b="0" dirty="0">
+              <a:rPr lang="en-US" altLang="ko-KR" sz="1200" b="0" dirty="0">
                 <a:effectLst/>
                 <a:latin typeface="D2Coding" panose="020B0609020101020101" pitchFamily="49" charset="-127"/>
                 <a:ea typeface="D2Coding" panose="020B0609020101020101" pitchFamily="49" charset="-127"/>
@@ -11946,7 +13344,7 @@
               <a:t>(Retriever) </a:t>
             </a:r>
             <a:r>
-              <a:rPr lang="ko-KR" altLang="en-US" sz="1100" b="0" dirty="0">
+              <a:rPr lang="ko-KR" altLang="en-US" sz="1200" b="0" dirty="0">
                 <a:effectLst/>
                 <a:latin typeface="D2Coding" panose="020B0609020101020101" pitchFamily="49" charset="-127"/>
                 <a:ea typeface="D2Coding" panose="020B0609020101020101" pitchFamily="49" charset="-127"/>
@@ -11954,7 +13352,7 @@
               <a:t>및 프롬프트</a:t>
             </a:r>
             <a:r>
-              <a:rPr lang="en-US" altLang="ko-KR" sz="1100" b="0" dirty="0">
+              <a:rPr lang="en-US" altLang="ko-KR" sz="1200" b="0" dirty="0">
                 <a:effectLst/>
                 <a:latin typeface="D2Coding" panose="020B0609020101020101" pitchFamily="49" charset="-127"/>
                 <a:ea typeface="D2Coding" panose="020B0609020101020101" pitchFamily="49" charset="-127"/>
@@ -11962,7 +13360,7 @@
               <a:t>, </a:t>
             </a:r>
             <a:r>
-              <a:rPr lang="en-US" altLang="ko-KR" sz="1100" b="0" dirty="0" err="1">
+              <a:rPr lang="en-US" altLang="ko-KR" sz="1200" b="0" dirty="0" err="1">
                 <a:effectLst/>
                 <a:latin typeface="D2Coding" panose="020B0609020101020101" pitchFamily="49" charset="-127"/>
                 <a:ea typeface="D2Coding" panose="020B0609020101020101" pitchFamily="49" charset="-127"/>
@@ -11970,7 +13368,7 @@
               <a:t>Groq</a:t>
             </a:r>
             <a:r>
-              <a:rPr lang="en-US" altLang="ko-KR" sz="1100" b="0" dirty="0">
+              <a:rPr lang="en-US" altLang="ko-KR" sz="1200" b="0" dirty="0">
                 <a:effectLst/>
                 <a:latin typeface="D2Coding" panose="020B0609020101020101" pitchFamily="49" charset="-127"/>
                 <a:ea typeface="D2Coding" panose="020B0609020101020101" pitchFamily="49" charset="-127"/>
@@ -11978,7 +13376,7 @@
               <a:t> LLM </a:t>
             </a:r>
             <a:r>
-              <a:rPr lang="ko-KR" altLang="en-US" sz="1100" b="0" dirty="0">
+              <a:rPr lang="ko-KR" altLang="en-US" sz="1200" b="0" dirty="0">
                 <a:effectLst/>
                 <a:latin typeface="D2Coding" panose="020B0609020101020101" pitchFamily="49" charset="-127"/>
                 <a:ea typeface="D2Coding" panose="020B0609020101020101" pitchFamily="49" charset="-127"/>
@@ -11991,14 +13389,14 @@
               <a:buNone/>
             </a:pPr>
             <a:r>
-              <a:rPr lang="en-US" altLang="ko-KR" sz="1100" b="0" dirty="0">
+              <a:rPr lang="en-US" altLang="ko-KR" sz="1200" b="0" dirty="0">
                 <a:effectLst/>
                 <a:latin typeface="D2Coding" panose="020B0609020101020101" pitchFamily="49" charset="-127"/>
                 <a:ea typeface="D2Coding" panose="020B0609020101020101" pitchFamily="49" charset="-127"/>
               </a:rPr>
               <a:t># ==========================================</a:t>
             </a:r>
-            <a:endParaRPr lang="ko-KR" altLang="en-US" sz="1100" b="0" dirty="0">
+            <a:endParaRPr lang="ko-KR" altLang="en-US" sz="1200" b="0" dirty="0">
               <a:effectLst/>
               <a:latin typeface="D2Coding" panose="020B0609020101020101" pitchFamily="49" charset="-127"/>
               <a:ea typeface="D2Coding" panose="020B0609020101020101" pitchFamily="49" charset="-127"/>
@@ -12009,7 +13407,7 @@
               <a:buNone/>
             </a:pPr>
             <a:r>
-              <a:rPr lang="en-US" altLang="ko-KR" sz="1100" b="0" dirty="0">
+              <a:rPr lang="en-US" altLang="ko-KR" sz="1200" b="0" dirty="0">
                 <a:effectLst/>
                 <a:latin typeface="D2Coding" panose="020B0609020101020101" pitchFamily="49" charset="-127"/>
                 <a:ea typeface="D2Coding" panose="020B0609020101020101" pitchFamily="49" charset="-127"/>
@@ -12017,7 +13415,7 @@
               <a:t># </a:t>
             </a:r>
             <a:r>
-              <a:rPr lang="ko-KR" altLang="en-US" sz="1100" b="0" dirty="0">
+              <a:rPr lang="ko-KR" altLang="en-US" sz="1200" b="0" dirty="0">
                 <a:effectLst/>
                 <a:latin typeface="D2Coding" panose="020B0609020101020101" pitchFamily="49" charset="-127"/>
                 <a:ea typeface="D2Coding" panose="020B0609020101020101" pitchFamily="49" charset="-127"/>
@@ -12025,7 +13423,7 @@
               <a:t>유사한</a:t>
             </a:r>
             <a:r>
-              <a:rPr lang="en-US" altLang="ko-KR" sz="1100" b="0" dirty="0">
+              <a:rPr lang="en-US" altLang="ko-KR" sz="1200" b="0" dirty="0">
                 <a:effectLst/>
                 <a:latin typeface="D2Coding" panose="020B0609020101020101" pitchFamily="49" charset="-127"/>
                 <a:ea typeface="D2Coding" panose="020B0609020101020101" pitchFamily="49" charset="-127"/>
@@ -12033,7 +13431,7 @@
               <a:t>(cosine similarity) </a:t>
             </a:r>
             <a:r>
-              <a:rPr lang="ko-KR" altLang="en-US" sz="1100" b="0" dirty="0">
+              <a:rPr lang="ko-KR" altLang="en-US" sz="1200" b="0" dirty="0">
                 <a:effectLst/>
                 <a:latin typeface="D2Coding" panose="020B0609020101020101" pitchFamily="49" charset="-127"/>
                 <a:ea typeface="D2Coding" panose="020B0609020101020101" pitchFamily="49" charset="-127"/>
@@ -12041,7 +13439,7 @@
               <a:t>문서 </a:t>
             </a:r>
             <a:r>
-              <a:rPr lang="en-US" altLang="ko-KR" sz="1100" b="0" dirty="0">
+              <a:rPr lang="en-US" altLang="ko-KR" sz="1200" b="0" dirty="0">
                 <a:effectLst/>
                 <a:latin typeface="D2Coding" panose="020B0609020101020101" pitchFamily="49" charset="-127"/>
                 <a:ea typeface="D2Coding" panose="020B0609020101020101" pitchFamily="49" charset="-127"/>
@@ -12049,7 +13447,7 @@
               <a:t>2</a:t>
             </a:r>
             <a:r>
-              <a:rPr lang="ko-KR" altLang="en-US" sz="1100" b="0" dirty="0">
+              <a:rPr lang="ko-KR" altLang="en-US" sz="1200" b="0" dirty="0">
                 <a:effectLst/>
                 <a:latin typeface="D2Coding" panose="020B0609020101020101" pitchFamily="49" charset="-127"/>
                 <a:ea typeface="D2Coding" panose="020B0609020101020101" pitchFamily="49" charset="-127"/>
@@ -12057,7 +13455,7 @@
               <a:t>개를 뽑아오는 </a:t>
             </a:r>
             <a:r>
-              <a:rPr lang="ko-KR" altLang="en-US" sz="1100" b="0" dirty="0" err="1">
+              <a:rPr lang="ko-KR" altLang="en-US" sz="1200" b="0" dirty="0" err="1">
                 <a:effectLst/>
                 <a:latin typeface="D2Coding" panose="020B0609020101020101" pitchFamily="49" charset="-127"/>
                 <a:ea typeface="D2Coding" panose="020B0609020101020101" pitchFamily="49" charset="-127"/>
@@ -12065,7 +13463,7 @@
               <a:t>리트리버</a:t>
             </a:r>
             <a:r>
-              <a:rPr lang="ko-KR" altLang="en-US" sz="1100" b="0" dirty="0">
+              <a:rPr lang="ko-KR" altLang="en-US" sz="1200" b="0" dirty="0">
                 <a:effectLst/>
                 <a:latin typeface="D2Coding" panose="020B0609020101020101" pitchFamily="49" charset="-127"/>
                 <a:ea typeface="D2Coding" panose="020B0609020101020101" pitchFamily="49" charset="-127"/>
@@ -12078,7 +13476,7 @@
               <a:buNone/>
             </a:pPr>
             <a:r>
-              <a:rPr lang="en-US" altLang="ko-KR" sz="1100" b="0" dirty="0">
+              <a:rPr lang="en-US" altLang="ko-KR" sz="1200" b="0" dirty="0">
                 <a:effectLst/>
                 <a:latin typeface="D2Coding" panose="020B0609020101020101" pitchFamily="49" charset="-127"/>
                 <a:ea typeface="D2Coding" panose="020B0609020101020101" pitchFamily="49" charset="-127"/>
@@ -12086,7 +13484,7 @@
               <a:t>retriever = </a:t>
             </a:r>
             <a:r>
-              <a:rPr lang="en-US" altLang="ko-KR" sz="1100" b="0" dirty="0" err="1">
+              <a:rPr lang="en-US" altLang="ko-KR" sz="1200" b="0" dirty="0" err="1">
                 <a:effectLst/>
                 <a:latin typeface="D2Coding" panose="020B0609020101020101" pitchFamily="49" charset="-127"/>
                 <a:ea typeface="D2Coding" panose="020B0609020101020101" pitchFamily="49" charset="-127"/>
@@ -12094,7 +13492,7 @@
               <a:t>db.as_retriever</a:t>
             </a:r>
             <a:r>
-              <a:rPr lang="en-US" altLang="ko-KR" sz="1100" b="0" dirty="0">
+              <a:rPr lang="en-US" altLang="ko-KR" sz="1200" b="0" dirty="0">
                 <a:effectLst/>
                 <a:latin typeface="D2Coding" panose="020B0609020101020101" pitchFamily="49" charset="-127"/>
                 <a:ea typeface="D2Coding" panose="020B0609020101020101" pitchFamily="49" charset="-127"/>
@@ -12102,7 +13500,7 @@
               <a:t>(</a:t>
             </a:r>
             <a:r>
-              <a:rPr lang="en-US" altLang="ko-KR" sz="1100" b="0" dirty="0" err="1">
+              <a:rPr lang="en-US" altLang="ko-KR" sz="1200" b="0" dirty="0" err="1">
                 <a:effectLst/>
                 <a:latin typeface="D2Coding" panose="020B0609020101020101" pitchFamily="49" charset="-127"/>
                 <a:ea typeface="D2Coding" panose="020B0609020101020101" pitchFamily="49" charset="-127"/>
@@ -12110,7 +13508,7 @@
               <a:t>search_kwargs</a:t>
             </a:r>
             <a:r>
-              <a:rPr lang="en-US" altLang="ko-KR" sz="1100" b="0" dirty="0">
+              <a:rPr lang="en-US" altLang="ko-KR" sz="1200" b="0" dirty="0">
                 <a:effectLst/>
                 <a:latin typeface="D2Coding" panose="020B0609020101020101" pitchFamily="49" charset="-127"/>
                 <a:ea typeface="D2Coding" panose="020B0609020101020101" pitchFamily="49" charset="-127"/>
@@ -12123,14 +13521,14 @@
               <a:buNone/>
             </a:pPr>
             <a:br>
-              <a:rPr lang="en-US" altLang="ko-KR" sz="1100" b="0" dirty="0">
+              <a:rPr lang="en-US" altLang="ko-KR" sz="1200" b="0" dirty="0">
                 <a:effectLst/>
                 <a:latin typeface="D2Coding" panose="020B0609020101020101" pitchFamily="49" charset="-127"/>
                 <a:ea typeface="D2Coding" panose="020B0609020101020101" pitchFamily="49" charset="-127"/>
               </a:rPr>
             </a:br>
             <a:r>
-              <a:rPr lang="en-US" altLang="ko-KR" sz="1100" b="0" dirty="0">
+              <a:rPr lang="en-US" altLang="ko-KR" sz="1200" b="0" dirty="0">
                 <a:effectLst/>
                 <a:latin typeface="D2Coding" panose="020B0609020101020101" pitchFamily="49" charset="-127"/>
                 <a:ea typeface="D2Coding" panose="020B0609020101020101" pitchFamily="49" charset="-127"/>
@@ -12138,7 +13536,7 @@
               <a:t>query = 'Who are the key figures in the ancient </a:t>
             </a:r>
             <a:r>
-              <a:rPr lang="en-US" altLang="ko-KR" sz="1100" b="0" dirty="0" err="1">
+              <a:rPr lang="en-US" altLang="ko-KR" sz="1200" b="0" dirty="0" err="1">
                 <a:effectLst/>
                 <a:latin typeface="D2Coding" panose="020B0609020101020101" pitchFamily="49" charset="-127"/>
                 <a:ea typeface="D2Coding" panose="020B0609020101020101" pitchFamily="49" charset="-127"/>
@@ -12146,7 +13544,7 @@
               <a:t>greek</a:t>
             </a:r>
             <a:r>
-              <a:rPr lang="en-US" altLang="ko-KR" sz="1100" b="0" dirty="0">
+              <a:rPr lang="en-US" altLang="ko-KR" sz="1200" b="0" dirty="0">
                 <a:effectLst/>
                 <a:latin typeface="D2Coding" panose="020B0609020101020101" pitchFamily="49" charset="-127"/>
                 <a:ea typeface="D2Coding" panose="020B0609020101020101" pitchFamily="49" charset="-127"/>
@@ -12159,14 +13557,14 @@
               <a:buNone/>
             </a:pPr>
             <a:br>
-              <a:rPr lang="en-US" altLang="ko-KR" sz="1100" b="0" dirty="0">
+              <a:rPr lang="en-US" altLang="ko-KR" sz="1200" b="0" dirty="0">
                 <a:effectLst/>
                 <a:latin typeface="D2Coding" panose="020B0609020101020101" pitchFamily="49" charset="-127"/>
                 <a:ea typeface="D2Coding" panose="020B0609020101020101" pitchFamily="49" charset="-127"/>
               </a:rPr>
             </a:br>
             <a:r>
-              <a:rPr lang="en-US" altLang="ko-KR" sz="1100" b="0" dirty="0">
+              <a:rPr lang="en-US" altLang="ko-KR" sz="1200" b="0" dirty="0">
                 <a:effectLst/>
                 <a:latin typeface="D2Coding" panose="020B0609020101020101" pitchFamily="49" charset="-127"/>
                 <a:ea typeface="D2Coding" panose="020B0609020101020101" pitchFamily="49" charset="-127"/>
@@ -12174,7 +13572,7 @@
               <a:t># </a:t>
             </a:r>
             <a:r>
-              <a:rPr lang="ko-KR" altLang="en-US" sz="1100" b="0" dirty="0">
+              <a:rPr lang="ko-KR" altLang="en-US" sz="1200" b="0" dirty="0">
                 <a:effectLst/>
                 <a:latin typeface="D2Coding" panose="020B0609020101020101" pitchFamily="49" charset="-127"/>
                 <a:ea typeface="D2Coding" panose="020B0609020101020101" pitchFamily="49" charset="-127"/>
@@ -12187,7 +13585,7 @@
               <a:buNone/>
             </a:pPr>
             <a:r>
-              <a:rPr lang="en-US" altLang="ko-KR" sz="1100" b="0" dirty="0">
+              <a:rPr lang="en-US" altLang="ko-KR" sz="1200" b="0" dirty="0">
                 <a:effectLst/>
                 <a:latin typeface="D2Coding" panose="020B0609020101020101" pitchFamily="49" charset="-127"/>
                 <a:ea typeface="D2Coding" panose="020B0609020101020101" pitchFamily="49" charset="-127"/>
@@ -12195,7 +13593,7 @@
               <a:t>prompt = </a:t>
             </a:r>
             <a:r>
-              <a:rPr lang="en-US" altLang="ko-KR" sz="1100" b="0" dirty="0" err="1">
+              <a:rPr lang="en-US" altLang="ko-KR" sz="1200" b="0" dirty="0" err="1">
                 <a:effectLst/>
                 <a:latin typeface="D2Coding" panose="020B0609020101020101" pitchFamily="49" charset="-127"/>
                 <a:ea typeface="D2Coding" panose="020B0609020101020101" pitchFamily="49" charset="-127"/>
@@ -12203,7 +13601,7 @@
               <a:t>ChatPromptTemplate.from_template</a:t>
             </a:r>
             <a:r>
-              <a:rPr lang="en-US" altLang="ko-KR" sz="1100" b="0" dirty="0">
+              <a:rPr lang="en-US" altLang="ko-KR" sz="1200" b="0" dirty="0">
                 <a:effectLst/>
                 <a:latin typeface="D2Coding" panose="020B0609020101020101" pitchFamily="49" charset="-127"/>
                 <a:ea typeface="D2Coding" panose="020B0609020101020101" pitchFamily="49" charset="-127"/>
@@ -12216,7 +13614,7 @@
               <a:buNone/>
             </a:pPr>
             <a:r>
-              <a:rPr lang="en-US" altLang="ko-KR" sz="1100" b="0" dirty="0">
+              <a:rPr lang="en-US" altLang="ko-KR" sz="1200" b="0" dirty="0">
                 <a:effectLst/>
                 <a:latin typeface="D2Coding" panose="020B0609020101020101" pitchFamily="49" charset="-127"/>
                 <a:ea typeface="D2Coding" panose="020B0609020101020101" pitchFamily="49" charset="-127"/>
@@ -12229,7 +13627,7 @@
               <a:buNone/>
             </a:pPr>
             <a:r>
-              <a:rPr lang="en-US" altLang="ko-KR" sz="1100" b="0" dirty="0">
+              <a:rPr lang="en-US" altLang="ko-KR" sz="1200" b="0" dirty="0">
                 <a:effectLst/>
                 <a:latin typeface="D2Coding" panose="020B0609020101020101" pitchFamily="49" charset="-127"/>
                 <a:ea typeface="D2Coding" panose="020B0609020101020101" pitchFamily="49" charset="-127"/>
@@ -12242,7 +13640,7 @@
               <a:buNone/>
             </a:pPr>
             <a:r>
-              <a:rPr lang="en-US" altLang="ko-KR" sz="1100" b="0" dirty="0">
+              <a:rPr lang="en-US" altLang="ko-KR" sz="1200" b="0" dirty="0">
                 <a:effectLst/>
                 <a:latin typeface="D2Coding" panose="020B0609020101020101" pitchFamily="49" charset="-127"/>
                 <a:ea typeface="D2Coding" panose="020B0609020101020101" pitchFamily="49" charset="-127"/>
@@ -12255,7 +13653,7 @@
               <a:buNone/>
             </a:pPr>
             <a:r>
-              <a:rPr lang="en-US" altLang="ko-KR" sz="1100" b="0" dirty="0">
+              <a:rPr lang="en-US" altLang="ko-KR" sz="1200" b="0" dirty="0">
                 <a:effectLst/>
                 <a:latin typeface="D2Coding" panose="020B0609020101020101" pitchFamily="49" charset="-127"/>
                 <a:ea typeface="D2Coding" panose="020B0609020101020101" pitchFamily="49" charset="-127"/>
@@ -12268,14 +13666,14 @@
               <a:buNone/>
             </a:pPr>
             <a:br>
-              <a:rPr lang="en-US" altLang="ko-KR" sz="1100" b="0" dirty="0">
+              <a:rPr lang="en-US" altLang="ko-KR" sz="1200" b="0" dirty="0">
                 <a:effectLst/>
                 <a:latin typeface="D2Coding" panose="020B0609020101020101" pitchFamily="49" charset="-127"/>
                 <a:ea typeface="D2Coding" panose="020B0609020101020101" pitchFamily="49" charset="-127"/>
               </a:rPr>
             </a:br>
             <a:r>
-              <a:rPr lang="en-US" altLang="ko-KR" sz="1100" b="0" dirty="0">
+              <a:rPr lang="en-US" altLang="ko-KR" sz="1200" b="0" dirty="0">
                 <a:effectLst/>
                 <a:latin typeface="D2Coding" panose="020B0609020101020101" pitchFamily="49" charset="-127"/>
                 <a:ea typeface="D2Coding" panose="020B0609020101020101" pitchFamily="49" charset="-127"/>
@@ -12283,7 +13681,7 @@
               <a:t># </a:t>
             </a:r>
             <a:r>
-              <a:rPr lang="ko-KR" altLang="en-US" sz="1100" b="0" dirty="0">
+              <a:rPr lang="ko-KR" altLang="en-US" sz="1200" b="0" dirty="0">
                 <a:effectLst/>
                 <a:latin typeface="D2Coding" panose="020B0609020101020101" pitchFamily="49" charset="-127"/>
                 <a:ea typeface="D2Coding" panose="020B0609020101020101" pitchFamily="49" charset="-127"/>
@@ -12291,7 +13689,7 @@
               <a:t>초고속 가성비 모델인 </a:t>
             </a:r>
             <a:r>
-              <a:rPr lang="en-US" altLang="ko-KR" sz="1100" b="0" dirty="0" err="1">
+              <a:rPr lang="en-US" altLang="ko-KR" sz="1200" b="0" dirty="0" err="1">
                 <a:effectLst/>
                 <a:latin typeface="D2Coding" panose="020B0609020101020101" pitchFamily="49" charset="-127"/>
                 <a:ea typeface="D2Coding" panose="020B0609020101020101" pitchFamily="49" charset="-127"/>
@@ -12299,7 +13697,7 @@
               <a:t>Groq</a:t>
             </a:r>
             <a:r>
-              <a:rPr lang="en-US" altLang="ko-KR" sz="1100" b="0" dirty="0">
+              <a:rPr lang="en-US" altLang="ko-KR" sz="1200" b="0" dirty="0">
                 <a:effectLst/>
                 <a:latin typeface="D2Coding" panose="020B0609020101020101" pitchFamily="49" charset="-127"/>
                 <a:ea typeface="D2Coding" panose="020B0609020101020101" pitchFamily="49" charset="-127"/>
@@ -12307,7 +13705,7 @@
               <a:t>(Llama 3) </a:t>
             </a:r>
             <a:r>
-              <a:rPr lang="ko-KR" altLang="en-US" sz="1100" b="0" dirty="0">
+              <a:rPr lang="ko-KR" altLang="en-US" sz="1200" b="0" dirty="0">
                 <a:effectLst/>
                 <a:latin typeface="D2Coding" panose="020B0609020101020101" pitchFamily="49" charset="-127"/>
                 <a:ea typeface="D2Coding" panose="020B0609020101020101" pitchFamily="49" charset="-127"/>
@@ -12320,7 +13718,7 @@
               <a:buNone/>
             </a:pPr>
             <a:r>
-              <a:rPr lang="en-US" altLang="ko-KR" sz="1100" b="0" dirty="0" err="1">
+              <a:rPr lang="en-US" altLang="ko-KR" sz="1200" b="0" dirty="0" err="1">
                 <a:effectLst/>
                 <a:latin typeface="D2Coding" panose="020B0609020101020101" pitchFamily="49" charset="-127"/>
                 <a:ea typeface="D2Coding" panose="020B0609020101020101" pitchFamily="49" charset="-127"/>
@@ -12328,7 +13726,7 @@
               <a:t>llm</a:t>
             </a:r>
             <a:r>
-              <a:rPr lang="en-US" altLang="ko-KR" sz="1100" b="0" dirty="0">
+              <a:rPr lang="en-US" altLang="ko-KR" sz="1200" b="0" dirty="0">
                 <a:effectLst/>
                 <a:latin typeface="D2Coding" panose="020B0609020101020101" pitchFamily="49" charset="-127"/>
                 <a:ea typeface="D2Coding" panose="020B0609020101020101" pitchFamily="49" charset="-127"/>
@@ -12336,7 +13734,7 @@
               <a:t> = </a:t>
             </a:r>
             <a:r>
-              <a:rPr lang="en-US" altLang="ko-KR" sz="1100" b="0" dirty="0" err="1">
+              <a:rPr lang="en-US" altLang="ko-KR" sz="1200" b="0" dirty="0" err="1">
                 <a:effectLst/>
                 <a:latin typeface="D2Coding" panose="020B0609020101020101" pitchFamily="49" charset="-127"/>
                 <a:ea typeface="D2Coding" panose="020B0609020101020101" pitchFamily="49" charset="-127"/>
@@ -12344,7 +13742,7 @@
               <a:t>ChatGroq</a:t>
             </a:r>
             <a:r>
-              <a:rPr lang="en-US" altLang="ko-KR" sz="1100" b="0" dirty="0">
+              <a:rPr lang="en-US" altLang="ko-KR" sz="1200" b="0" dirty="0">
                 <a:effectLst/>
                 <a:latin typeface="D2Coding" panose="020B0609020101020101" pitchFamily="49" charset="-127"/>
                 <a:ea typeface="D2Coding" panose="020B0609020101020101" pitchFamily="49" charset="-127"/>
@@ -12352,7 +13750,7 @@
               <a:t>(</a:t>
             </a:r>
             <a:r>
-              <a:rPr lang="en-US" altLang="ko-KR" sz="1100" b="0" dirty="0" err="1">
+              <a:rPr lang="en-US" altLang="ko-KR" sz="1200" b="0" dirty="0" err="1">
                 <a:effectLst/>
                 <a:latin typeface="D2Coding" panose="020B0609020101020101" pitchFamily="49" charset="-127"/>
                 <a:ea typeface="D2Coding" panose="020B0609020101020101" pitchFamily="49" charset="-127"/>
@@ -12360,7 +13758,7 @@
               <a:t>model_name</a:t>
             </a:r>
             <a:r>
-              <a:rPr lang="en-US" altLang="ko-KR" sz="1100" b="0" dirty="0">
+              <a:rPr lang="en-US" altLang="ko-KR" sz="1200" b="0" dirty="0">
                 <a:effectLst/>
                 <a:latin typeface="D2Coding" panose="020B0609020101020101" pitchFamily="49" charset="-127"/>
                 <a:ea typeface="D2Coding" panose="020B0609020101020101" pitchFamily="49" charset="-127"/>
@@ -12384,8 +13782,8 @@
         </p:nvSpPr>
         <p:spPr>
           <a:xfrm>
-            <a:off x="6096000" y="2394890"/>
-            <a:ext cx="5832729" cy="3647152"/>
+            <a:off x="5408295" y="2797961"/>
+            <a:ext cx="6507480" cy="3970318"/>
           </a:xfrm>
           <a:prstGeom prst="rect">
             <a:avLst/>
@@ -12393,6 +13791,12 @@
           <a:solidFill>
             <a:srgbClr val="76E3FF"/>
           </a:solidFill>
+          <a:ln>
+            <a:solidFill>
+              <a:schemeClr val="tx1"/>
+            </a:solidFill>
+            <a:prstDash val="dash"/>
+          </a:ln>
         </p:spPr>
         <p:txBody>
           <a:bodyPr wrap="square">
@@ -12404,7 +13808,7 @@
               <a:buNone/>
             </a:pPr>
             <a:r>
-              <a:rPr lang="en-US" altLang="ko-KR" sz="1100" b="0" dirty="0">
+              <a:rPr lang="en-US" altLang="ko-KR" sz="1200" b="0" dirty="0">
                 <a:effectLst/>
                 <a:latin typeface="D2Coding" panose="020B0609020101020101" pitchFamily="49" charset="-127"/>
                 <a:ea typeface="D2Coding" panose="020B0609020101020101" pitchFamily="49" charset="-127"/>
@@ -12417,7 +13821,7 @@
               <a:buNone/>
             </a:pPr>
             <a:r>
-              <a:rPr lang="en-US" altLang="ko-KR" sz="1100" b="0" dirty="0">
+              <a:rPr lang="en-US" altLang="ko-KR" sz="1200" b="0" dirty="0">
                 <a:effectLst/>
                 <a:latin typeface="D2Coding" panose="020B0609020101020101" pitchFamily="49" charset="-127"/>
                 <a:ea typeface="D2Coding" panose="020B0609020101020101" pitchFamily="49" charset="-127"/>
@@ -12425,7 +13829,7 @@
               <a:t># 4</a:t>
             </a:r>
             <a:r>
-              <a:rPr lang="ko-KR" altLang="en-US" sz="1100" b="0" dirty="0">
+              <a:rPr lang="ko-KR" altLang="en-US" sz="1200" b="0" dirty="0">
                 <a:effectLst/>
                 <a:latin typeface="D2Coding" panose="020B0609020101020101" pitchFamily="49" charset="-127"/>
                 <a:ea typeface="D2Coding" panose="020B0609020101020101" pitchFamily="49" charset="-127"/>
@@ -12433,7 +13837,7 @@
               <a:t>단계</a:t>
             </a:r>
             <a:r>
-              <a:rPr lang="en-US" altLang="ko-KR" sz="1100" b="0" dirty="0">
+              <a:rPr lang="en-US" altLang="ko-KR" sz="1200" b="0" dirty="0">
                 <a:effectLst/>
                 <a:latin typeface="D2Coding" panose="020B0609020101020101" pitchFamily="49" charset="-127"/>
                 <a:ea typeface="D2Coding" panose="020B0609020101020101" pitchFamily="49" charset="-127"/>
@@ -12441,7 +13845,7 @@
               <a:t>: LCEL @chain </a:t>
             </a:r>
             <a:r>
-              <a:rPr lang="ko-KR" altLang="en-US" sz="1100" b="0" dirty="0" err="1">
+              <a:rPr lang="ko-KR" altLang="en-US" sz="1200" b="0" dirty="0" err="1">
                 <a:effectLst/>
                 <a:latin typeface="D2Coding" panose="020B0609020101020101" pitchFamily="49" charset="-127"/>
                 <a:ea typeface="D2Coding" panose="020B0609020101020101" pitchFamily="49" charset="-127"/>
@@ -12449,7 +13853,7 @@
               <a:t>데코레이터를</a:t>
             </a:r>
             <a:r>
-              <a:rPr lang="ko-KR" altLang="en-US" sz="1100" b="0" dirty="0">
+              <a:rPr lang="ko-KR" altLang="en-US" sz="1200" b="0" dirty="0">
                 <a:effectLst/>
                 <a:latin typeface="D2Coding" panose="020B0609020101020101" pitchFamily="49" charset="-127"/>
                 <a:ea typeface="D2Coding" panose="020B0609020101020101" pitchFamily="49" charset="-127"/>
@@ -12457,7 +13861,7 @@
               <a:t> 활용한 효율적인 파이썬 함수 캡슐화 </a:t>
             </a:r>
             <a:r>
-              <a:rPr lang="en-US" altLang="ko-KR" sz="1100" b="0" dirty="0">
+              <a:rPr lang="en-US" altLang="ko-KR" sz="1200" b="0" dirty="0">
                 <a:effectLst/>
                 <a:latin typeface="D2Coding" panose="020B0609020101020101" pitchFamily="49" charset="-127"/>
                 <a:ea typeface="D2Coding" panose="020B0609020101020101" pitchFamily="49" charset="-127"/>
@@ -12470,7 +13874,7 @@
               <a:buNone/>
             </a:pPr>
             <a:r>
-              <a:rPr lang="en-US" altLang="ko-KR" sz="1100" b="0" dirty="0">
+              <a:rPr lang="en-US" altLang="ko-KR" sz="1200" b="0" dirty="0">
                 <a:effectLst/>
                 <a:latin typeface="D2Coding" panose="020B0609020101020101" pitchFamily="49" charset="-127"/>
                 <a:ea typeface="D2Coding" panose="020B0609020101020101" pitchFamily="49" charset="-127"/>
@@ -12483,7 +13887,7 @@
               <a:buNone/>
             </a:pPr>
             <a:r>
-              <a:rPr lang="en-US" altLang="ko-KR" sz="1100" b="0" dirty="0">
+              <a:rPr lang="en-US" altLang="ko-KR" sz="1200" b="0" dirty="0">
                 <a:effectLst/>
                 <a:latin typeface="D2Coding" panose="020B0609020101020101" pitchFamily="49" charset="-127"/>
                 <a:ea typeface="D2Coding" panose="020B0609020101020101" pitchFamily="49" charset="-127"/>
@@ -12491,7 +13895,7 @@
               <a:t>print("Running RAG system using </a:t>
             </a:r>
             <a:r>
-              <a:rPr lang="en-US" altLang="ko-KR" sz="1100" b="0" dirty="0" err="1">
+              <a:rPr lang="en-US" altLang="ko-KR" sz="1200" b="0" dirty="0" err="1">
                 <a:effectLst/>
                 <a:latin typeface="D2Coding" panose="020B0609020101020101" pitchFamily="49" charset="-127"/>
                 <a:ea typeface="D2Coding" panose="020B0609020101020101" pitchFamily="49" charset="-127"/>
@@ -12499,7 +13903,7 @@
               <a:t>Groq</a:t>
             </a:r>
             <a:r>
-              <a:rPr lang="en-US" altLang="ko-KR" sz="1100" b="0" dirty="0">
+              <a:rPr lang="en-US" altLang="ko-KR" sz="1200" b="0" dirty="0">
                 <a:effectLst/>
                 <a:latin typeface="D2Coding" panose="020B0609020101020101" pitchFamily="49" charset="-127"/>
                 <a:ea typeface="D2Coding" panose="020B0609020101020101" pitchFamily="49" charset="-127"/>
@@ -12507,7 +13911,7 @@
               <a:t> and </a:t>
             </a:r>
             <a:r>
-              <a:rPr lang="en-US" altLang="ko-KR" sz="1100" b="0" dirty="0" err="1">
+              <a:rPr lang="en-US" altLang="ko-KR" sz="1200" b="0" dirty="0" err="1">
                 <a:effectLst/>
                 <a:latin typeface="D2Coding" panose="020B0609020101020101" pitchFamily="49" charset="-127"/>
                 <a:ea typeface="D2Coding" panose="020B0609020101020101" pitchFamily="49" charset="-127"/>
@@ -12515,7 +13919,7 @@
               <a:t>Supabase</a:t>
             </a:r>
             <a:r>
-              <a:rPr lang="en-US" altLang="ko-KR" sz="1100" b="0" dirty="0">
+              <a:rPr lang="en-US" altLang="ko-KR" sz="1200" b="0" dirty="0">
                 <a:effectLst/>
                 <a:latin typeface="D2Coding" panose="020B0609020101020101" pitchFamily="49" charset="-127"/>
                 <a:ea typeface="D2Coding" panose="020B0609020101020101" pitchFamily="49" charset="-127"/>
@@ -12527,7 +13931,7 @@
             <a:pPr>
               <a:buNone/>
             </a:pPr>
-            <a:endParaRPr lang="en-US" altLang="ko-KR" sz="1100" b="0" dirty="0">
+            <a:endParaRPr lang="en-US" altLang="ko-KR" sz="1200" b="0" dirty="0">
               <a:effectLst/>
               <a:latin typeface="D2Coding" panose="020B0609020101020101" pitchFamily="49" charset="-127"/>
               <a:ea typeface="D2Coding" panose="020B0609020101020101" pitchFamily="49" charset="-127"/>
@@ -12538,7 +13942,7 @@
               <a:buNone/>
             </a:pPr>
             <a:r>
-              <a:rPr lang="en-US" altLang="ko-KR" sz="1100" b="0" dirty="0">
+              <a:rPr lang="en-US" altLang="ko-KR" sz="1200" b="0" dirty="0">
                 <a:effectLst/>
                 <a:latin typeface="D2Coding" panose="020B0609020101020101" pitchFamily="49" charset="-127"/>
                 <a:ea typeface="D2Coding" panose="020B0609020101020101" pitchFamily="49" charset="-127"/>
@@ -12551,7 +13955,7 @@
               <a:buNone/>
             </a:pPr>
             <a:r>
-              <a:rPr lang="en-US" altLang="ko-KR" sz="1100" b="0" dirty="0">
+              <a:rPr lang="en-US" altLang="ko-KR" sz="1200" b="0" dirty="0">
                 <a:effectLst/>
                 <a:latin typeface="D2Coding" panose="020B0609020101020101" pitchFamily="49" charset="-127"/>
                 <a:ea typeface="D2Coding" panose="020B0609020101020101" pitchFamily="49" charset="-127"/>
@@ -12559,7 +13963,7 @@
               <a:t>def </a:t>
             </a:r>
             <a:r>
-              <a:rPr lang="en-US" altLang="ko-KR" sz="1100" b="0" dirty="0" err="1">
+              <a:rPr lang="en-US" altLang="ko-KR" sz="1200" b="0" dirty="0" err="1">
                 <a:effectLst/>
                 <a:latin typeface="D2Coding" panose="020B0609020101020101" pitchFamily="49" charset="-127"/>
                 <a:ea typeface="D2Coding" panose="020B0609020101020101" pitchFamily="49" charset="-127"/>
@@ -12567,7 +13971,7 @@
               <a:t>qa_chain</a:t>
             </a:r>
             <a:r>
-              <a:rPr lang="en-US" altLang="ko-KR" sz="1100" b="0" dirty="0">
+              <a:rPr lang="en-US" altLang="ko-KR" sz="1200" b="0" dirty="0">
                 <a:effectLst/>
                 <a:latin typeface="D2Coding" panose="020B0609020101020101" pitchFamily="49" charset="-127"/>
                 <a:ea typeface="D2Coding" panose="020B0609020101020101" pitchFamily="49" charset="-127"/>
@@ -12575,7 +13979,7 @@
               <a:t>(</a:t>
             </a:r>
             <a:r>
-              <a:rPr lang="en-US" altLang="ko-KR" sz="1100" b="0" dirty="0" err="1">
+              <a:rPr lang="en-US" altLang="ko-KR" sz="1200" b="0" dirty="0" err="1">
                 <a:effectLst/>
                 <a:latin typeface="D2Coding" panose="020B0609020101020101" pitchFamily="49" charset="-127"/>
                 <a:ea typeface="D2Coding" panose="020B0609020101020101" pitchFamily="49" charset="-127"/>
@@ -12583,7 +13987,7 @@
               <a:t>input_query</a:t>
             </a:r>
             <a:r>
-              <a:rPr lang="en-US" altLang="ko-KR" sz="1100" b="0" dirty="0">
+              <a:rPr lang="en-US" altLang="ko-KR" sz="1200" b="0" dirty="0">
                 <a:effectLst/>
                 <a:latin typeface="D2Coding" panose="020B0609020101020101" pitchFamily="49" charset="-127"/>
                 <a:ea typeface="D2Coding" panose="020B0609020101020101" pitchFamily="49" charset="-127"/>
@@ -12596,7 +14000,7 @@
               <a:buNone/>
             </a:pPr>
             <a:r>
-              <a:rPr lang="en-US" altLang="ko-KR" sz="1100" b="0" dirty="0">
+              <a:rPr lang="en-US" altLang="ko-KR" sz="1200" b="0" dirty="0">
                 <a:effectLst/>
                 <a:latin typeface="D2Coding" panose="020B0609020101020101" pitchFamily="49" charset="-127"/>
                 <a:ea typeface="D2Coding" panose="020B0609020101020101" pitchFamily="49" charset="-127"/>
@@ -12604,7 +14008,7 @@
               <a:t>    # 1. Retrieval: </a:t>
             </a:r>
             <a:r>
-              <a:rPr lang="ko-KR" altLang="en-US" sz="1100" b="0" dirty="0">
+              <a:rPr lang="ko-KR" altLang="en-US" sz="1200" b="0" dirty="0">
                 <a:effectLst/>
                 <a:latin typeface="D2Coding" panose="020B0609020101020101" pitchFamily="49" charset="-127"/>
                 <a:ea typeface="D2Coding" panose="020B0609020101020101" pitchFamily="49" charset="-127"/>
@@ -12617,7 +14021,7 @@
               <a:buNone/>
             </a:pPr>
             <a:r>
-              <a:rPr lang="ko-KR" altLang="en-US" sz="1100" b="0" dirty="0">
+              <a:rPr lang="ko-KR" altLang="en-US" sz="1200" b="0" dirty="0">
                 <a:effectLst/>
                 <a:latin typeface="D2Coding" panose="020B0609020101020101" pitchFamily="49" charset="-127"/>
                 <a:ea typeface="D2Coding" panose="020B0609020101020101" pitchFamily="49" charset="-127"/>
@@ -12625,7 +14029,7 @@
               <a:t>    </a:t>
             </a:r>
             <a:r>
-              <a:rPr lang="en-US" altLang="ko-KR" sz="1100" b="0" dirty="0">
+              <a:rPr lang="en-US" altLang="ko-KR" sz="1200" b="0" dirty="0">
                 <a:effectLst/>
                 <a:latin typeface="D2Coding" panose="020B0609020101020101" pitchFamily="49" charset="-127"/>
                 <a:ea typeface="D2Coding" panose="020B0609020101020101" pitchFamily="49" charset="-127"/>
@@ -12633,7 +14037,7 @@
               <a:t>docs = </a:t>
             </a:r>
             <a:r>
-              <a:rPr lang="en-US" altLang="ko-KR" sz="1100" b="0" dirty="0" err="1">
+              <a:rPr lang="en-US" altLang="ko-KR" sz="1200" b="0" dirty="0" err="1">
                 <a:effectLst/>
                 <a:latin typeface="D2Coding" panose="020B0609020101020101" pitchFamily="49" charset="-127"/>
                 <a:ea typeface="D2Coding" panose="020B0609020101020101" pitchFamily="49" charset="-127"/>
@@ -12641,7 +14045,7 @@
               <a:t>retriever.invoke</a:t>
             </a:r>
             <a:r>
-              <a:rPr lang="en-US" altLang="ko-KR" sz="1100" b="0" dirty="0">
+              <a:rPr lang="en-US" altLang="ko-KR" sz="1200" b="0" dirty="0">
                 <a:effectLst/>
                 <a:latin typeface="D2Coding" panose="020B0609020101020101" pitchFamily="49" charset="-127"/>
                 <a:ea typeface="D2Coding" panose="020B0609020101020101" pitchFamily="49" charset="-127"/>
@@ -12649,7 +14053,7 @@
               <a:t>(</a:t>
             </a:r>
             <a:r>
-              <a:rPr lang="en-US" altLang="ko-KR" sz="1100" b="0" dirty="0" err="1">
+              <a:rPr lang="en-US" altLang="ko-KR" sz="1200" b="0" dirty="0" err="1">
                 <a:effectLst/>
                 <a:latin typeface="D2Coding" panose="020B0609020101020101" pitchFamily="49" charset="-127"/>
                 <a:ea typeface="D2Coding" panose="020B0609020101020101" pitchFamily="49" charset="-127"/>
@@ -12657,7 +14061,7 @@
               <a:t>input_query</a:t>
             </a:r>
             <a:r>
-              <a:rPr lang="en-US" altLang="ko-KR" sz="1100" b="0" dirty="0">
+              <a:rPr lang="en-US" altLang="ko-KR" sz="1200" b="0" dirty="0">
                 <a:effectLst/>
                 <a:latin typeface="D2Coding" panose="020B0609020101020101" pitchFamily="49" charset="-127"/>
                 <a:ea typeface="D2Coding" panose="020B0609020101020101" pitchFamily="49" charset="-127"/>
@@ -12670,7 +14074,7 @@
               <a:buNone/>
             </a:pPr>
             <a:r>
-              <a:rPr lang="en-US" altLang="ko-KR" sz="1100" b="0" dirty="0">
+              <a:rPr lang="en-US" altLang="ko-KR" sz="1200" b="0" dirty="0">
                 <a:effectLst/>
                 <a:latin typeface="D2Coding" panose="020B0609020101020101" pitchFamily="49" charset="-127"/>
                 <a:ea typeface="D2Coding" panose="020B0609020101020101" pitchFamily="49" charset="-127"/>
@@ -12683,7 +14087,7 @@
               <a:buNone/>
             </a:pPr>
             <a:r>
-              <a:rPr lang="en-US" altLang="ko-KR" sz="1100" b="0" dirty="0">
+              <a:rPr lang="en-US" altLang="ko-KR" sz="1200" b="0" dirty="0">
                 <a:effectLst/>
                 <a:latin typeface="D2Coding" panose="020B0609020101020101" pitchFamily="49" charset="-127"/>
                 <a:ea typeface="D2Coding" panose="020B0609020101020101" pitchFamily="49" charset="-127"/>
@@ -12691,7 +14095,7 @@
               <a:t>    # 2. Prompt </a:t>
             </a:r>
             <a:r>
-              <a:rPr lang="ko-KR" altLang="en-US" sz="1100" b="0" dirty="0">
+              <a:rPr lang="ko-KR" altLang="en-US" sz="1200" b="0" dirty="0">
                 <a:effectLst/>
                 <a:latin typeface="D2Coding" panose="020B0609020101020101" pitchFamily="49" charset="-127"/>
                 <a:ea typeface="D2Coding" panose="020B0609020101020101" pitchFamily="49" charset="-127"/>
@@ -12699,7 +14103,7 @@
               <a:t>조립</a:t>
             </a:r>
             <a:r>
-              <a:rPr lang="en-US" altLang="ko-KR" sz="1100" b="0" dirty="0">
+              <a:rPr lang="en-US" altLang="ko-KR" sz="1200" b="0" dirty="0">
                 <a:effectLst/>
                 <a:latin typeface="D2Coding" panose="020B0609020101020101" pitchFamily="49" charset="-127"/>
                 <a:ea typeface="D2Coding" panose="020B0609020101020101" pitchFamily="49" charset="-127"/>
@@ -12707,7 +14111,7 @@
               <a:t>: </a:t>
             </a:r>
             <a:r>
-              <a:rPr lang="ko-KR" altLang="en-US" sz="1100" b="0" dirty="0">
+              <a:rPr lang="ko-KR" altLang="en-US" sz="1200" b="0" dirty="0">
                 <a:effectLst/>
                 <a:latin typeface="D2Coding" panose="020B0609020101020101" pitchFamily="49" charset="-127"/>
                 <a:ea typeface="D2Coding" panose="020B0609020101020101" pitchFamily="49" charset="-127"/>
@@ -12720,7 +14124,7 @@
               <a:buNone/>
             </a:pPr>
             <a:r>
-              <a:rPr lang="ko-KR" altLang="en-US" sz="1100" b="0" dirty="0">
+              <a:rPr lang="ko-KR" altLang="en-US" sz="1200" b="0" dirty="0">
                 <a:effectLst/>
                 <a:latin typeface="D2Coding" panose="020B0609020101020101" pitchFamily="49" charset="-127"/>
                 <a:ea typeface="D2Coding" panose="020B0609020101020101" pitchFamily="49" charset="-127"/>
@@ -12728,7 +14132,7 @@
               <a:t>    </a:t>
             </a:r>
             <a:r>
-              <a:rPr lang="en-US" altLang="ko-KR" sz="1100" b="0" dirty="0">
+              <a:rPr lang="en-US" altLang="ko-KR" sz="1200" b="0" dirty="0">
                 <a:effectLst/>
                 <a:latin typeface="D2Coding" panose="020B0609020101020101" pitchFamily="49" charset="-127"/>
                 <a:ea typeface="D2Coding" panose="020B0609020101020101" pitchFamily="49" charset="-127"/>
@@ -12736,7 +14140,7 @@
               <a:t>formatted = </a:t>
             </a:r>
             <a:r>
-              <a:rPr lang="en-US" altLang="ko-KR" sz="1100" b="0" dirty="0" err="1">
+              <a:rPr lang="en-US" altLang="ko-KR" sz="1200" b="0" dirty="0" err="1">
                 <a:effectLst/>
                 <a:latin typeface="D2Coding" panose="020B0609020101020101" pitchFamily="49" charset="-127"/>
                 <a:ea typeface="D2Coding" panose="020B0609020101020101" pitchFamily="49" charset="-127"/>
@@ -12744,7 +14148,7 @@
               <a:t>prompt.invoke</a:t>
             </a:r>
             <a:r>
-              <a:rPr lang="en-US" altLang="ko-KR" sz="1100" b="0" dirty="0">
+              <a:rPr lang="en-US" altLang="ko-KR" sz="1200" b="0" dirty="0">
                 <a:effectLst/>
                 <a:latin typeface="D2Coding" panose="020B0609020101020101" pitchFamily="49" charset="-127"/>
                 <a:ea typeface="D2Coding" panose="020B0609020101020101" pitchFamily="49" charset="-127"/>
@@ -12752,7 +14156,7 @@
               <a:t>({"context": docs, "question": </a:t>
             </a:r>
             <a:r>
-              <a:rPr lang="en-US" altLang="ko-KR" sz="1100" b="0" dirty="0" err="1">
+              <a:rPr lang="en-US" altLang="ko-KR" sz="1200" b="0" dirty="0" err="1">
                 <a:effectLst/>
                 <a:latin typeface="D2Coding" panose="020B0609020101020101" pitchFamily="49" charset="-127"/>
                 <a:ea typeface="D2Coding" panose="020B0609020101020101" pitchFamily="49" charset="-127"/>
@@ -12760,7 +14164,7 @@
               <a:t>input_query</a:t>
             </a:r>
             <a:r>
-              <a:rPr lang="en-US" altLang="ko-KR" sz="1100" b="0" dirty="0">
+              <a:rPr lang="en-US" altLang="ko-KR" sz="1200" b="0" dirty="0">
                 <a:effectLst/>
                 <a:latin typeface="D2Coding" panose="020B0609020101020101" pitchFamily="49" charset="-127"/>
                 <a:ea typeface="D2Coding" panose="020B0609020101020101" pitchFamily="49" charset="-127"/>
@@ -12773,7 +14177,7 @@
               <a:buNone/>
             </a:pPr>
             <a:r>
-              <a:rPr lang="en-US" altLang="ko-KR" sz="1100" b="0" dirty="0">
+              <a:rPr lang="en-US" altLang="ko-KR" sz="1200" b="0" dirty="0">
                 <a:effectLst/>
                 <a:latin typeface="D2Coding" panose="020B0609020101020101" pitchFamily="49" charset="-127"/>
                 <a:ea typeface="D2Coding" panose="020B0609020101020101" pitchFamily="49" charset="-127"/>
@@ -12786,7 +14190,7 @@
               <a:buNone/>
             </a:pPr>
             <a:r>
-              <a:rPr lang="en-US" altLang="ko-KR" sz="1100" b="0" dirty="0">
+              <a:rPr lang="en-US" altLang="ko-KR" sz="1200" b="0" dirty="0">
                 <a:effectLst/>
                 <a:latin typeface="D2Coding" panose="020B0609020101020101" pitchFamily="49" charset="-127"/>
                 <a:ea typeface="D2Coding" panose="020B0609020101020101" pitchFamily="49" charset="-127"/>
@@ -12794,7 +14198,7 @@
               <a:t>    # 3. Generation: </a:t>
             </a:r>
             <a:r>
-              <a:rPr lang="en-US" altLang="ko-KR" sz="1100" b="0" dirty="0" err="1">
+              <a:rPr lang="en-US" altLang="ko-KR" sz="1200" b="0" dirty="0" err="1">
                 <a:effectLst/>
                 <a:latin typeface="D2Coding" panose="020B0609020101020101" pitchFamily="49" charset="-127"/>
                 <a:ea typeface="D2Coding" panose="020B0609020101020101" pitchFamily="49" charset="-127"/>
@@ -12802,7 +14206,7 @@
               <a:t>Groq</a:t>
             </a:r>
             <a:r>
-              <a:rPr lang="en-US" altLang="ko-KR" sz="1100" b="0" dirty="0">
+              <a:rPr lang="en-US" altLang="ko-KR" sz="1200" b="0" dirty="0">
                 <a:effectLst/>
                 <a:latin typeface="D2Coding" panose="020B0609020101020101" pitchFamily="49" charset="-127"/>
                 <a:ea typeface="D2Coding" panose="020B0609020101020101" pitchFamily="49" charset="-127"/>
@@ -12810,7 +14214,7 @@
               <a:t> LLM</a:t>
             </a:r>
             <a:r>
-              <a:rPr lang="ko-KR" altLang="en-US" sz="1100" b="0" dirty="0">
+              <a:rPr lang="ko-KR" altLang="en-US" sz="1200" b="0" dirty="0">
                 <a:effectLst/>
                 <a:latin typeface="D2Coding" panose="020B0609020101020101" pitchFamily="49" charset="-127"/>
                 <a:ea typeface="D2Coding" panose="020B0609020101020101" pitchFamily="49" charset="-127"/>
@@ -12823,7 +14227,7 @@
               <a:buNone/>
             </a:pPr>
             <a:r>
-              <a:rPr lang="ko-KR" altLang="en-US" sz="1100" b="0" dirty="0">
+              <a:rPr lang="ko-KR" altLang="en-US" sz="1200" b="0" dirty="0">
                 <a:effectLst/>
                 <a:latin typeface="D2Coding" panose="020B0609020101020101" pitchFamily="49" charset="-127"/>
                 <a:ea typeface="D2Coding" panose="020B0609020101020101" pitchFamily="49" charset="-127"/>
@@ -12831,7 +14235,7 @@
               <a:t>    </a:t>
             </a:r>
             <a:r>
-              <a:rPr lang="en-US" altLang="ko-KR" sz="1100" b="0" dirty="0">
+              <a:rPr lang="en-US" altLang="ko-KR" sz="1200" b="0" dirty="0">
                 <a:effectLst/>
                 <a:latin typeface="D2Coding" panose="020B0609020101020101" pitchFamily="49" charset="-127"/>
                 <a:ea typeface="D2Coding" panose="020B0609020101020101" pitchFamily="49" charset="-127"/>
@@ -12839,7 +14243,7 @@
               <a:t>answer = </a:t>
             </a:r>
             <a:r>
-              <a:rPr lang="en-US" altLang="ko-KR" sz="1100" b="0" dirty="0" err="1">
+              <a:rPr lang="en-US" altLang="ko-KR" sz="1200" b="0" dirty="0" err="1">
                 <a:effectLst/>
                 <a:latin typeface="D2Coding" panose="020B0609020101020101" pitchFamily="49" charset="-127"/>
                 <a:ea typeface="D2Coding" panose="020B0609020101020101" pitchFamily="49" charset="-127"/>
@@ -12847,7 +14251,7 @@
               <a:t>llm.invoke</a:t>
             </a:r>
             <a:r>
-              <a:rPr lang="en-US" altLang="ko-KR" sz="1100" b="0" dirty="0">
+              <a:rPr lang="en-US" altLang="ko-KR" sz="1200" b="0" dirty="0">
                 <a:effectLst/>
                 <a:latin typeface="D2Coding" panose="020B0609020101020101" pitchFamily="49" charset="-127"/>
                 <a:ea typeface="D2Coding" panose="020B0609020101020101" pitchFamily="49" charset="-127"/>
@@ -12860,7 +14264,7 @@
               <a:buNone/>
             </a:pPr>
             <a:r>
-              <a:rPr lang="en-US" altLang="ko-KR" sz="1100" b="0" dirty="0">
+              <a:rPr lang="en-US" altLang="ko-KR" sz="1200" b="0" dirty="0">
                 <a:effectLst/>
                 <a:latin typeface="D2Coding" panose="020B0609020101020101" pitchFamily="49" charset="-127"/>
                 <a:ea typeface="D2Coding" panose="020B0609020101020101" pitchFamily="49" charset="-127"/>
@@ -12872,7 +14276,7 @@
             <a:pPr>
               <a:buNone/>
             </a:pPr>
-            <a:endParaRPr lang="en-US" altLang="ko-KR" sz="1100" b="0" dirty="0">
+            <a:endParaRPr lang="en-US" altLang="ko-KR" sz="1200" b="0" dirty="0">
               <a:effectLst/>
               <a:latin typeface="D2Coding" panose="020B0609020101020101" pitchFamily="49" charset="-127"/>
               <a:ea typeface="D2Coding" panose="020B0609020101020101" pitchFamily="49" charset="-127"/>
@@ -12883,7 +14287,7 @@
               <a:buNone/>
             </a:pPr>
             <a:r>
-              <a:rPr lang="en-US" altLang="ko-KR" sz="1100" b="0" dirty="0">
+              <a:rPr lang="en-US" altLang="ko-KR" sz="1200" b="0" dirty="0">
                 <a:effectLst/>
                 <a:latin typeface="D2Coding" panose="020B0609020101020101" pitchFamily="49" charset="-127"/>
                 <a:ea typeface="D2Coding" panose="020B0609020101020101" pitchFamily="49" charset="-127"/>
@@ -12891,7 +14295,7 @@
               <a:t># RAG </a:t>
             </a:r>
             <a:r>
-              <a:rPr lang="ko-KR" altLang="en-US" sz="1100" b="0" dirty="0">
+              <a:rPr lang="ko-KR" altLang="en-US" sz="1200" b="0" dirty="0">
                 <a:effectLst/>
                 <a:latin typeface="D2Coding" panose="020B0609020101020101" pitchFamily="49" charset="-127"/>
                 <a:ea typeface="D2Coding" panose="020B0609020101020101" pitchFamily="49" charset="-127"/>
@@ -12904,7 +14308,7 @@
               <a:buNone/>
             </a:pPr>
             <a:r>
-              <a:rPr lang="en-US" altLang="ko-KR" sz="1100" b="0" dirty="0">
+              <a:rPr lang="en-US" altLang="ko-KR" sz="1200" b="0" dirty="0">
                 <a:effectLst/>
                 <a:latin typeface="D2Coding" panose="020B0609020101020101" pitchFamily="49" charset="-127"/>
                 <a:ea typeface="D2Coding" panose="020B0609020101020101" pitchFamily="49" charset="-127"/>
@@ -12912,7 +14316,7 @@
               <a:t>result = </a:t>
             </a:r>
             <a:r>
-              <a:rPr lang="en-US" altLang="ko-KR" sz="1100" b="0" dirty="0" err="1">
+              <a:rPr lang="en-US" altLang="ko-KR" sz="1200" b="0" dirty="0" err="1">
                 <a:effectLst/>
                 <a:latin typeface="D2Coding" panose="020B0609020101020101" pitchFamily="49" charset="-127"/>
                 <a:ea typeface="D2Coding" panose="020B0609020101020101" pitchFamily="49" charset="-127"/>
@@ -12920,7 +14324,7 @@
               <a:t>qa_chain.invoke</a:t>
             </a:r>
             <a:r>
-              <a:rPr lang="en-US" altLang="ko-KR" sz="1100" b="0" dirty="0">
+              <a:rPr lang="en-US" altLang="ko-KR" sz="1200" b="0" dirty="0">
                 <a:effectLst/>
                 <a:latin typeface="D2Coding" panose="020B0609020101020101" pitchFamily="49" charset="-127"/>
                 <a:ea typeface="D2Coding" panose="020B0609020101020101" pitchFamily="49" charset="-127"/>
@@ -12933,7 +14337,7 @@
               <a:buNone/>
             </a:pPr>
             <a:r>
-              <a:rPr lang="en-US" altLang="ko-KR" sz="1100" b="0" dirty="0">
+              <a:rPr lang="en-US" altLang="ko-KR" sz="1200" b="0" dirty="0">
                 <a:effectLst/>
                 <a:latin typeface="D2Coding" panose="020B0609020101020101" pitchFamily="49" charset="-127"/>
                 <a:ea typeface="D2Coding" panose="020B0609020101020101" pitchFamily="49" charset="-127"/>
@@ -12941,7 +14345,7 @@
               <a:t>print("[</a:t>
             </a:r>
             <a:r>
-              <a:rPr lang="ko-KR" altLang="en-US" sz="1100" b="0" dirty="0">
+              <a:rPr lang="ko-KR" altLang="en-US" sz="1200" b="0" dirty="0">
                 <a:effectLst/>
                 <a:latin typeface="D2Coding" panose="020B0609020101020101" pitchFamily="49" charset="-127"/>
                 <a:ea typeface="D2Coding" panose="020B0609020101020101" pitchFamily="49" charset="-127"/>
@@ -12949,14 +14353,14 @@
               <a:t>최종 답변 결과</a:t>
             </a:r>
             <a:r>
-              <a:rPr lang="en-US" altLang="ko-KR" sz="1100" b="0" dirty="0">
+              <a:rPr lang="en-US" altLang="ko-KR" sz="1200" b="0" dirty="0">
                 <a:effectLst/>
                 <a:latin typeface="D2Coding" panose="020B0609020101020101" pitchFamily="49" charset="-127"/>
                 <a:ea typeface="D2Coding" panose="020B0609020101020101" pitchFamily="49" charset="-127"/>
               </a:rPr>
               <a:t>]")</a:t>
             </a:r>
-            <a:endParaRPr lang="ko-KR" altLang="en-US" sz="1100" b="0" dirty="0">
+            <a:endParaRPr lang="ko-KR" altLang="en-US" sz="1200" b="0" dirty="0">
               <a:effectLst/>
               <a:latin typeface="D2Coding" panose="020B0609020101020101" pitchFamily="49" charset="-127"/>
               <a:ea typeface="D2Coding" panose="020B0609020101020101" pitchFamily="49" charset="-127"/>
@@ -12967,7 +14371,7 @@
               <a:buNone/>
             </a:pPr>
             <a:r>
-              <a:rPr lang="en-US" altLang="ko-KR" sz="1100" b="0" dirty="0">
+              <a:rPr lang="en-US" altLang="ko-KR" sz="1200" b="0" dirty="0">
                 <a:effectLst/>
                 <a:latin typeface="D2Coding" panose="020B0609020101020101" pitchFamily="49" charset="-127"/>
                 <a:ea typeface="D2Coding" panose="020B0609020101020101" pitchFamily="49" charset="-127"/>
@@ -12975,7 +14379,7 @@
               <a:t>print(</a:t>
             </a:r>
             <a:r>
-              <a:rPr lang="en-US" altLang="ko-KR" sz="1100" b="0" dirty="0" err="1">
+              <a:rPr lang="en-US" altLang="ko-KR" sz="1200" b="0" dirty="0" err="1">
                 <a:effectLst/>
                 <a:latin typeface="D2Coding" panose="020B0609020101020101" pitchFamily="49" charset="-127"/>
                 <a:ea typeface="D2Coding" panose="020B0609020101020101" pitchFamily="49" charset="-127"/>
@@ -12983,7 +14387,7 @@
               <a:t>result.content</a:t>
             </a:r>
             <a:r>
-              <a:rPr lang="en-US" altLang="ko-KR" sz="1100" b="0" dirty="0">
+              <a:rPr lang="en-US" altLang="ko-KR" sz="1200" b="0" dirty="0">
                 <a:effectLst/>
                 <a:latin typeface="D2Coding" panose="020B0609020101020101" pitchFamily="49" charset="-127"/>
                 <a:ea typeface="D2Coding" panose="020B0609020101020101" pitchFamily="49" charset="-127"/>
@@ -13007,8 +14411,8 @@
         </p:nvSpPr>
         <p:spPr>
           <a:xfrm>
-            <a:off x="630693" y="5020598"/>
-            <a:ext cx="5124450" cy="1015663"/>
+            <a:off x="344366" y="4783120"/>
+            <a:ext cx="4754107" cy="1015663"/>
           </a:xfrm>
           <a:prstGeom prst="rect">
             <a:avLst/>
@@ -13072,6 +14476,139 @@
               <a:latin typeface="D2Coding" panose="020B0609020101020101" pitchFamily="49" charset="-127"/>
               <a:ea typeface="D2Coding" panose="020B0609020101020101" pitchFamily="49" charset="-127"/>
             </a:endParaRPr>
+          </a:p>
+        </p:txBody>
+      </p:sp>
+      <p:sp>
+        <p:nvSpPr>
+          <p:cNvPr id="5" name="슬라이드 번호 개체 틀 3">
+            <a:extLst>
+              <a:ext uri="{FF2B5EF4-FFF2-40B4-BE49-F238E27FC236}">
+                <a16:creationId xmlns:a16="http://schemas.microsoft.com/office/drawing/2014/main" id="{3F5C567E-897D-B18B-8602-B7B69378A81E}"/>
+              </a:ext>
+            </a:extLst>
+          </p:cNvPr>
+          <p:cNvSpPr txBox="1">
+            <a:spLocks/>
+          </p:cNvSpPr>
+          <p:nvPr/>
+        </p:nvSpPr>
+        <p:spPr>
+          <a:xfrm>
+            <a:off x="11162230" y="299420"/>
+            <a:ext cx="753545" cy="365125"/>
+          </a:xfrm>
+          <a:prstGeom prst="rect">
+            <a:avLst/>
+          </a:prstGeom>
+        </p:spPr>
+        <p:txBody>
+          <a:bodyPr vert="horz" lIns="91440" tIns="45720" rIns="91440" bIns="45720" rtlCol="0" anchor="ctr"/>
+          <a:lstStyle>
+            <a:defPPr rtl="0">
+              <a:defRPr lang="ko-KR"/>
+            </a:defPPr>
+            <a:lvl1pPr marL="0" algn="r" defTabSz="914400" rtl="0" eaLnBrk="1" latinLnBrk="0" hangingPunct="1">
+              <a:defRPr sz="1200" kern="1200" baseline="0">
+                <a:solidFill>
+                  <a:schemeClr val="tx1">
+                    <a:lumMod val="65000"/>
+                    <a:lumOff val="35000"/>
+                  </a:schemeClr>
+                </a:solidFill>
+                <a:latin typeface="맑은 고딕" panose="020B0503020000020004" pitchFamily="50" charset="-127"/>
+                <a:ea typeface="맑은 고딕" panose="020B0503020000020004" pitchFamily="50" charset="-127"/>
+                <a:cs typeface="+mn-cs"/>
+              </a:defRPr>
+            </a:lvl1pPr>
+            <a:lvl2pPr marL="457200" algn="l" defTabSz="914400" rtl="0" eaLnBrk="1" latinLnBrk="0" hangingPunct="1">
+              <a:defRPr sz="1800" kern="1200">
+                <a:solidFill>
+                  <a:schemeClr val="tx1"/>
+                </a:solidFill>
+                <a:latin typeface="+mn-lt"/>
+                <a:ea typeface="+mn-ea"/>
+                <a:cs typeface="+mn-cs"/>
+              </a:defRPr>
+            </a:lvl2pPr>
+            <a:lvl3pPr marL="914400" algn="l" defTabSz="914400" rtl="0" eaLnBrk="1" latinLnBrk="0" hangingPunct="1">
+              <a:defRPr sz="1800" kern="1200">
+                <a:solidFill>
+                  <a:schemeClr val="tx1"/>
+                </a:solidFill>
+                <a:latin typeface="+mn-lt"/>
+                <a:ea typeface="+mn-ea"/>
+                <a:cs typeface="+mn-cs"/>
+              </a:defRPr>
+            </a:lvl3pPr>
+            <a:lvl4pPr marL="1371600" algn="l" defTabSz="914400" rtl="0" eaLnBrk="1" latinLnBrk="0" hangingPunct="1">
+              <a:defRPr sz="1800" kern="1200">
+                <a:solidFill>
+                  <a:schemeClr val="tx1"/>
+                </a:solidFill>
+                <a:latin typeface="+mn-lt"/>
+                <a:ea typeface="+mn-ea"/>
+                <a:cs typeface="+mn-cs"/>
+              </a:defRPr>
+            </a:lvl4pPr>
+            <a:lvl5pPr marL="1828800" algn="l" defTabSz="914400" rtl="0" eaLnBrk="1" latinLnBrk="0" hangingPunct="1">
+              <a:defRPr sz="1800" kern="1200">
+                <a:solidFill>
+                  <a:schemeClr val="tx1"/>
+                </a:solidFill>
+                <a:latin typeface="+mn-lt"/>
+                <a:ea typeface="+mn-ea"/>
+                <a:cs typeface="+mn-cs"/>
+              </a:defRPr>
+            </a:lvl5pPr>
+            <a:lvl6pPr marL="2286000" algn="l" defTabSz="914400" rtl="0" eaLnBrk="1" latinLnBrk="0" hangingPunct="1">
+              <a:defRPr sz="1800" kern="1200">
+                <a:solidFill>
+                  <a:schemeClr val="tx1"/>
+                </a:solidFill>
+                <a:latin typeface="+mn-lt"/>
+                <a:ea typeface="+mn-ea"/>
+                <a:cs typeface="+mn-cs"/>
+              </a:defRPr>
+            </a:lvl6pPr>
+            <a:lvl7pPr marL="2743200" algn="l" defTabSz="914400" rtl="0" eaLnBrk="1" latinLnBrk="0" hangingPunct="1">
+              <a:defRPr sz="1800" kern="1200">
+                <a:solidFill>
+                  <a:schemeClr val="tx1"/>
+                </a:solidFill>
+                <a:latin typeface="+mn-lt"/>
+                <a:ea typeface="+mn-ea"/>
+                <a:cs typeface="+mn-cs"/>
+              </a:defRPr>
+            </a:lvl7pPr>
+            <a:lvl8pPr marL="3200400" algn="l" defTabSz="914400" rtl="0" eaLnBrk="1" latinLnBrk="0" hangingPunct="1">
+              <a:defRPr sz="1800" kern="1200">
+                <a:solidFill>
+                  <a:schemeClr val="tx1"/>
+                </a:solidFill>
+                <a:latin typeface="+mn-lt"/>
+                <a:ea typeface="+mn-ea"/>
+                <a:cs typeface="+mn-cs"/>
+              </a:defRPr>
+            </a:lvl8pPr>
+            <a:lvl9pPr marL="3657600" algn="l" defTabSz="914400" rtl="0" eaLnBrk="1" latinLnBrk="0" hangingPunct="1">
+              <a:defRPr sz="1800" kern="1200">
+                <a:solidFill>
+                  <a:schemeClr val="tx1"/>
+                </a:solidFill>
+                <a:latin typeface="+mn-lt"/>
+                <a:ea typeface="+mn-ea"/>
+                <a:cs typeface="+mn-cs"/>
+              </a:defRPr>
+            </a:lvl9pPr>
+          </a:lstStyle>
+          <a:p>
+            <a:fld id="{D57F1E4F-1CFF-5643-939E-217C01CDF565}" type="slidenum">
+              <a:rPr lang="en-US" b="1" smtClean="0"/>
+              <a:pPr/>
+              <a:t>6</a:t>
+            </a:fld>
+            <a:endParaRPr lang="en-US" b="1" dirty="0"/>
           </a:p>
         </p:txBody>
       </p:sp>
@@ -13111,41 +14648,6 @@
           <a:chExt cx="0" cy="0"/>
         </a:xfrm>
       </p:grpSpPr>
-      <p:sp>
-        <p:nvSpPr>
-          <p:cNvPr id="4" name="슬라이드 번호 개체 틀 3">
-            <a:extLst>
-              <a:ext uri="{FF2B5EF4-FFF2-40B4-BE49-F238E27FC236}">
-                <a16:creationId xmlns:a16="http://schemas.microsoft.com/office/drawing/2014/main" id="{95F298C9-2596-E2C9-F069-99D435BFE42E}"/>
-              </a:ext>
-            </a:extLst>
-          </p:cNvPr>
-          <p:cNvSpPr>
-            <a:spLocks noGrp="1"/>
-          </p:cNvSpPr>
-          <p:nvPr>
-            <p:ph type="sldNum" sz="quarter" idx="12"/>
-          </p:nvPr>
-        </p:nvSpPr>
-        <p:spPr>
-          <a:xfrm>
-            <a:off x="10514011" y="6036261"/>
-            <a:ext cx="753545" cy="365125"/>
-          </a:xfrm>
-        </p:spPr>
-        <p:txBody>
-          <a:bodyPr/>
-          <a:lstStyle/>
-          <a:p>
-            <a:fld id="{D57F1E4F-1CFF-5643-939E-217C01CDF565}" type="slidenum">
-              <a:rPr lang="en-US" smtClean="0"/>
-              <a:pPr/>
-              <a:t>7</a:t>
-            </a:fld>
-            <a:endParaRPr lang="en-US" dirty="0"/>
-          </a:p>
-        </p:txBody>
-      </p:sp>
       <p:sp>
         <p:nvSpPr>
           <p:cNvPr id="3" name="제목 1">
@@ -13266,12 +14768,16 @@
         <p:spPr>
           <a:xfrm>
             <a:off x="6638925" y="1690133"/>
-            <a:ext cx="5114925" cy="4247317"/>
+            <a:ext cx="5183620" cy="4339650"/>
           </a:xfrm>
           <a:prstGeom prst="rect">
             <a:avLst/>
           </a:prstGeom>
           <a:noFill/>
+          <a:ln>
+            <a:noFill/>
+            <a:prstDash val="dash"/>
+          </a:ln>
         </p:spPr>
         <p:txBody>
           <a:bodyPr wrap="square">
@@ -13284,21 +14790,28 @@
               <a:buAutoNum type="arabicPeriod"/>
             </a:pPr>
             <a:r>
-              <a:rPr lang="ko-KR" altLang="en-US" sz="1500" dirty="0">
-                <a:latin typeface="D2Coding" panose="020B0609020101020101" pitchFamily="49" charset="-127"/>
-                <a:ea typeface="D2Coding" panose="020B0609020101020101" pitchFamily="49" charset="-127"/>
-              </a:rPr>
-              <a:t>사용자 입력의 가변성 관리: 사용자마다 다르게 입력하는 질문의 품질(모호함, 오타 등)</a:t>
-            </a:r>
-            <a:r>
-              <a:rPr lang="ko-KR" altLang="en-US" sz="1500" dirty="0" err="1">
+              <a:rPr lang="ko-KR" altLang="en-US" sz="1400" b="1" dirty="0">
+                <a:latin typeface="D2Coding" panose="020B0609020101020101" pitchFamily="49" charset="-127"/>
+                <a:ea typeface="D2Coding" panose="020B0609020101020101" pitchFamily="49" charset="-127"/>
+              </a:rPr>
+              <a:t>사용자 입력의 가변성 관리: </a:t>
+            </a:r>
+            <a:r>
+              <a:rPr lang="ko-KR" altLang="en-US" sz="1400" dirty="0">
+                <a:latin typeface="D2Coding" panose="020B0609020101020101" pitchFamily="49" charset="-127"/>
+                <a:ea typeface="D2Coding" panose="020B0609020101020101" pitchFamily="49" charset="-127"/>
+              </a:rPr>
+              <a:t>사용자마다 다르게 입력하는 질문의 품질(모호함, 오타 등)</a:t>
+            </a:r>
+            <a:r>
+              <a:rPr lang="ko-KR" altLang="en-US" sz="1400" dirty="0" err="1">
                 <a:latin typeface="D2Coding" panose="020B0609020101020101" pitchFamily="49" charset="-127"/>
                 <a:ea typeface="D2Coding" panose="020B0609020101020101" pitchFamily="49" charset="-127"/>
               </a:rPr>
               <a:t>에</a:t>
             </a:r>
             <a:r>
-              <a:rPr lang="ko-KR" altLang="en-US" sz="1500" dirty="0">
+              <a:rPr lang="ko-KR" altLang="en-US" sz="1400" dirty="0">
                 <a:latin typeface="D2Coding" panose="020B0609020101020101" pitchFamily="49" charset="-127"/>
                 <a:ea typeface="D2Coding" panose="020B0609020101020101" pitchFamily="49" charset="-127"/>
               </a:rPr>
@@ -13310,7 +14823,7 @@
               <a:buFont typeface="+mj-lt"/>
               <a:buAutoNum type="arabicPeriod"/>
             </a:pPr>
-            <a:endParaRPr lang="ko-KR" altLang="en-US" sz="1500" dirty="0">
+            <a:endParaRPr lang="ko-KR" altLang="en-US" sz="1400" dirty="0">
               <a:latin typeface="D2Coding" panose="020B0609020101020101" pitchFamily="49" charset="-127"/>
               <a:ea typeface="D2Coding" panose="020B0609020101020101" pitchFamily="49" charset="-127"/>
             </a:endParaRPr>
@@ -13321,25 +14834,32 @@
               <a:buAutoNum type="arabicPeriod"/>
             </a:pPr>
             <a:r>
-              <a:rPr lang="ko-KR" altLang="en-US" sz="1500" dirty="0">
+              <a:rPr lang="ko-KR" altLang="en-US" sz="1400" b="1" dirty="0">
                 <a:latin typeface="D2Coding" panose="020B0609020101020101" pitchFamily="49" charset="-127"/>
                 <a:ea typeface="D2Coding" panose="020B0609020101020101" pitchFamily="49" charset="-127"/>
               </a:rPr>
               <a:t>쿼리 라우팅(</a:t>
             </a:r>
             <a:r>
-              <a:rPr lang="ko-KR" altLang="en-US" sz="1500" dirty="0" err="1">
+              <a:rPr lang="ko-KR" altLang="en-US" sz="1400" b="1" dirty="0" err="1">
                 <a:latin typeface="D2Coding" panose="020B0609020101020101" pitchFamily="49" charset="-127"/>
                 <a:ea typeface="D2Coding" panose="020B0609020101020101" pitchFamily="49" charset="-127"/>
               </a:rPr>
               <a:t>Routing</a:t>
             </a:r>
             <a:r>
-              <a:rPr lang="ko-KR" altLang="en-US" sz="1500" dirty="0">
-                <a:latin typeface="D2Coding" panose="020B0609020101020101" pitchFamily="49" charset="-127"/>
-                <a:ea typeface="D2Coding" panose="020B0609020101020101" pitchFamily="49" charset="-127"/>
-              </a:rPr>
-              <a:t>): 다양한 데이터 소스 중 질문에 맞는 적절한 데이터 소스로 쿼리를 어떻게 분류하고 보낼 것인가?</a:t>
+              <a:rPr lang="ko-KR" altLang="en-US" sz="1400" b="1" dirty="0">
+                <a:latin typeface="D2Coding" panose="020B0609020101020101" pitchFamily="49" charset="-127"/>
+                <a:ea typeface="D2Coding" panose="020B0609020101020101" pitchFamily="49" charset="-127"/>
+              </a:rPr>
+              <a:t>): </a:t>
+            </a:r>
+            <a:r>
+              <a:rPr lang="ko-KR" altLang="en-US" sz="1400" dirty="0">
+                <a:latin typeface="D2Coding" panose="020B0609020101020101" pitchFamily="49" charset="-127"/>
+                <a:ea typeface="D2Coding" panose="020B0609020101020101" pitchFamily="49" charset="-127"/>
+              </a:rPr>
+              <a:t>다양한 데이터 소스 중 질문에 맞는 적절한 데이터 소스로 쿼리를 어떻게 분류하고 보낼 것인가?</a:t>
             </a:r>
           </a:p>
           <a:p>
@@ -13347,7 +14867,7 @@
               <a:buFont typeface="+mj-lt"/>
               <a:buAutoNum type="arabicPeriod"/>
             </a:pPr>
-            <a:endParaRPr lang="ko-KR" altLang="en-US" sz="1500" dirty="0">
+            <a:endParaRPr lang="ko-KR" altLang="en-US" sz="1400" dirty="0">
               <a:latin typeface="D2Coding" panose="020B0609020101020101" pitchFamily="49" charset="-127"/>
               <a:ea typeface="D2Coding" panose="020B0609020101020101" pitchFamily="49" charset="-127"/>
             </a:endParaRPr>
@@ -13358,21 +14878,28 @@
               <a:buAutoNum type="arabicPeriod"/>
             </a:pPr>
             <a:r>
-              <a:rPr lang="ko-KR" altLang="en-US" sz="1500" dirty="0">
-                <a:latin typeface="D2Coding" panose="020B0609020101020101" pitchFamily="49" charset="-127"/>
-                <a:ea typeface="D2Coding" panose="020B0609020101020101" pitchFamily="49" charset="-127"/>
-              </a:rPr>
-              <a:t>쿼리 언어 변환: 사용자의 자연어 질문을 대상 데이터 소스가 이해할 수 있는 쿼리 언어(예: SQL, </a:t>
-            </a:r>
-            <a:r>
-              <a:rPr lang="ko-KR" altLang="en-US" sz="1500" dirty="0" err="1">
+              <a:rPr lang="ko-KR" altLang="en-US" sz="1400" b="1" dirty="0">
+                <a:latin typeface="D2Coding" panose="020B0609020101020101" pitchFamily="49" charset="-127"/>
+                <a:ea typeface="D2Coding" panose="020B0609020101020101" pitchFamily="49" charset="-127"/>
+              </a:rPr>
+              <a:t>쿼리 언어 변환: </a:t>
+            </a:r>
+            <a:r>
+              <a:rPr lang="ko-KR" altLang="en-US" sz="1400" dirty="0">
+                <a:latin typeface="D2Coding" panose="020B0609020101020101" pitchFamily="49" charset="-127"/>
+                <a:ea typeface="D2Coding" panose="020B0609020101020101" pitchFamily="49" charset="-127"/>
+              </a:rPr>
+              <a:t>사용자의 자연어 질문을 대상 데이터 소스가 이해할 수 있는 쿼리 언어(예: SQL, </a:t>
+            </a:r>
+            <a:r>
+              <a:rPr lang="ko-KR" altLang="en-US" sz="1400" dirty="0" err="1">
                 <a:latin typeface="D2Coding" panose="020B0609020101020101" pitchFamily="49" charset="-127"/>
                 <a:ea typeface="D2Coding" panose="020B0609020101020101" pitchFamily="49" charset="-127"/>
               </a:rPr>
               <a:t>NoSQL</a:t>
             </a:r>
             <a:r>
-              <a:rPr lang="ko-KR" altLang="en-US" sz="1500" dirty="0">
+              <a:rPr lang="ko-KR" altLang="en-US" sz="1400" dirty="0">
                 <a:latin typeface="D2Coding" panose="020B0609020101020101" pitchFamily="49" charset="-127"/>
                 <a:ea typeface="D2Coding" panose="020B0609020101020101" pitchFamily="49" charset="-127"/>
               </a:rPr>
@@ -13384,7 +14911,7 @@
               <a:buFont typeface="+mj-lt"/>
               <a:buAutoNum type="arabicPeriod"/>
             </a:pPr>
-            <a:endParaRPr lang="ko-KR" altLang="en-US" sz="1500" dirty="0">
+            <a:endParaRPr lang="ko-KR" altLang="en-US" sz="1400" dirty="0">
               <a:latin typeface="D2Coding" panose="020B0609020101020101" pitchFamily="49" charset="-127"/>
               <a:ea typeface="D2Coding" panose="020B0609020101020101" pitchFamily="49" charset="-127"/>
             </a:endParaRPr>
@@ -13395,69 +14922,76 @@
               <a:buAutoNum type="arabicPeriod"/>
             </a:pPr>
             <a:r>
-              <a:rPr lang="ko-KR" altLang="en-US" sz="1500" dirty="0">
-                <a:latin typeface="D2Coding" panose="020B0609020101020101" pitchFamily="49" charset="-127"/>
-                <a:ea typeface="D2Coding" panose="020B0609020101020101" pitchFamily="49" charset="-127"/>
-              </a:rPr>
-              <a:t>인덱싱 프로세스 최적화: 텍스트 분할(</a:t>
-            </a:r>
-            <a:r>
-              <a:rPr lang="ko-KR" altLang="en-US" sz="1500" dirty="0" err="1">
+              <a:rPr lang="ko-KR" altLang="en-US" sz="1400" b="1" dirty="0">
+                <a:latin typeface="D2Coding" panose="020B0609020101020101" pitchFamily="49" charset="-127"/>
+                <a:ea typeface="D2Coding" panose="020B0609020101020101" pitchFamily="49" charset="-127"/>
+              </a:rPr>
+              <a:t>인덱싱 프로세스 최적화: </a:t>
+            </a:r>
+            <a:r>
+              <a:rPr lang="ko-KR" altLang="en-US" sz="1400" dirty="0">
+                <a:latin typeface="D2Coding" panose="020B0609020101020101" pitchFamily="49" charset="-127"/>
+                <a:ea typeface="D2Coding" panose="020B0609020101020101" pitchFamily="49" charset="-127"/>
+              </a:rPr>
+              <a:t>텍스트 분할(</a:t>
+            </a:r>
+            <a:r>
+              <a:rPr lang="ko-KR" altLang="en-US" sz="1400" dirty="0" err="1">
                 <a:latin typeface="D2Coding" panose="020B0609020101020101" pitchFamily="49" charset="-127"/>
                 <a:ea typeface="D2Coding" panose="020B0609020101020101" pitchFamily="49" charset="-127"/>
               </a:rPr>
               <a:t>Text</a:t>
             </a:r>
             <a:r>
-              <a:rPr lang="ko-KR" altLang="en-US" sz="1500" dirty="0">
+              <a:rPr lang="ko-KR" altLang="en-US" sz="1400" dirty="0">
                 <a:latin typeface="D2Coding" panose="020B0609020101020101" pitchFamily="49" charset="-127"/>
                 <a:ea typeface="D2Coding" panose="020B0609020101020101" pitchFamily="49" charset="-127"/>
               </a:rPr>
               <a:t> </a:t>
             </a:r>
             <a:r>
-              <a:rPr lang="ko-KR" altLang="en-US" sz="1500" dirty="0" err="1">
+              <a:rPr lang="ko-KR" altLang="en-US" sz="1400" dirty="0" err="1">
                 <a:latin typeface="D2Coding" panose="020B0609020101020101" pitchFamily="49" charset="-127"/>
                 <a:ea typeface="D2Coding" panose="020B0609020101020101" pitchFamily="49" charset="-127"/>
               </a:rPr>
               <a:t>Splitting</a:t>
             </a:r>
             <a:r>
-              <a:rPr lang="ko-KR" altLang="en-US" sz="1500" dirty="0">
+              <a:rPr lang="ko-KR" altLang="en-US" sz="1400" dirty="0">
                 <a:latin typeface="D2Coding" panose="020B0609020101020101" pitchFamily="49" charset="-127"/>
                 <a:ea typeface="D2Coding" panose="020B0609020101020101" pitchFamily="49" charset="-127"/>
               </a:rPr>
               <a:t>) 및 </a:t>
             </a:r>
             <a:r>
-              <a:rPr lang="ko-KR" altLang="en-US" sz="1500" dirty="0" err="1">
+              <a:rPr lang="ko-KR" altLang="en-US" sz="1400" dirty="0" err="1">
                 <a:latin typeface="D2Coding" panose="020B0609020101020101" pitchFamily="49" charset="-127"/>
                 <a:ea typeface="D2Coding" panose="020B0609020101020101" pitchFamily="49" charset="-127"/>
               </a:rPr>
               <a:t>임베딩</a:t>
             </a:r>
             <a:r>
-              <a:rPr lang="ko-KR" altLang="en-US" sz="1500" dirty="0">
+              <a:rPr lang="ko-KR" altLang="en-US" sz="1400" dirty="0">
                 <a:latin typeface="D2Coding" panose="020B0609020101020101" pitchFamily="49" charset="-127"/>
                 <a:ea typeface="D2Coding" panose="020B0609020101020101" pitchFamily="49" charset="-127"/>
               </a:rPr>
               <a:t>(</a:t>
             </a:r>
             <a:r>
-              <a:rPr lang="ko-KR" altLang="en-US" sz="1500" dirty="0" err="1">
+              <a:rPr lang="ko-KR" altLang="en-US" sz="1400" dirty="0" err="1">
                 <a:latin typeface="D2Coding" panose="020B0609020101020101" pitchFamily="49" charset="-127"/>
                 <a:ea typeface="D2Coding" panose="020B0609020101020101" pitchFamily="49" charset="-127"/>
               </a:rPr>
               <a:t>Embedding</a:t>
             </a:r>
             <a:r>
-              <a:rPr lang="ko-KR" altLang="en-US" sz="1500" dirty="0">
+              <a:rPr lang="ko-KR" altLang="en-US" sz="1400" dirty="0">
                 <a:latin typeface="D2Coding" panose="020B0609020101020101" pitchFamily="49" charset="-127"/>
                 <a:ea typeface="D2Coding" panose="020B0609020101020101" pitchFamily="49" charset="-127"/>
               </a:rPr>
               <a:t>) 과정을 어떻게 최적화할 것인가?</a:t>
             </a:r>
-            <a:endParaRPr lang="en-US" altLang="ko-KR" sz="1500" dirty="0">
+            <a:endParaRPr lang="en-US" altLang="ko-KR" sz="1400" dirty="0">
               <a:latin typeface="D2Coding" panose="020B0609020101020101" pitchFamily="49" charset="-127"/>
               <a:ea typeface="D2Coding" panose="020B0609020101020101" pitchFamily="49" charset="-127"/>
             </a:endParaRPr>
@@ -13467,7 +15001,7 @@
               <a:buFont typeface="+mj-lt"/>
               <a:buAutoNum type="arabicPeriod"/>
             </a:pPr>
-            <a:endParaRPr lang="en-US" altLang="ko-KR" sz="1500" dirty="0">
+            <a:endParaRPr lang="en-US" altLang="ko-KR" sz="1400" dirty="0">
               <a:latin typeface="D2Coding" panose="020B0609020101020101" pitchFamily="49" charset="-127"/>
               <a:ea typeface="D2Coding" panose="020B0609020101020101" pitchFamily="49" charset="-127"/>
             </a:endParaRPr>
@@ -13478,26 +15012,378 @@
               <a:buAutoNum type="arabicPeriod"/>
             </a:pPr>
             <a:r>
-              <a:rPr lang="ko-KR" altLang="en-US" sz="1500" dirty="0">
+              <a:rPr lang="ko-KR" altLang="en-US" sz="1400" b="1" dirty="0">
+                <a:latin typeface="D2Coding" panose="020B0609020101020101" pitchFamily="49" charset="-127"/>
+                <a:ea typeface="D2Coding" panose="020B0609020101020101" pitchFamily="49" charset="-127"/>
+              </a:rPr>
+              <a:t>후처리　알고리즘：　</a:t>
+            </a:r>
+            <a:r>
+              <a:rPr lang="ko-KR" altLang="en-US" sz="1400" dirty="0">
                 <a:latin typeface="D2Coding" panose="020B0609020101020101" pitchFamily="49" charset="-127"/>
                 <a:ea typeface="D2Coding" panose="020B0609020101020101" pitchFamily="49" charset="-127"/>
               </a:rPr>
               <a:t>검색 결과 이후에 후처리 알고리즘을 최적화 단계를 통해 어떻게 답변을 정확히 할 것인가</a:t>
             </a:r>
             <a:r>
-              <a:rPr lang="en-US" altLang="ko-KR" sz="1500" dirty="0">
+              <a:rPr lang="en-US" altLang="ko-KR" sz="1400" dirty="0">
                 <a:latin typeface="D2Coding" panose="020B0609020101020101" pitchFamily="49" charset="-127"/>
                 <a:ea typeface="D2Coding" panose="020B0609020101020101" pitchFamily="49" charset="-127"/>
               </a:rPr>
               <a:t>?</a:t>
             </a:r>
-            <a:endParaRPr lang="ko-KR" altLang="en-US" sz="1500" dirty="0">
+            <a:r>
+              <a:rPr lang="ko-KR" altLang="ko-KR" sz="1200" dirty="0"/>
+              <a:t>AI 모델에게 '가장 정확하고, 연관성이 높으며, 깔끔하게 정리된 핵심 </a:t>
+            </a:r>
+            <a:r>
+              <a:rPr lang="ko-KR" altLang="ko-KR" sz="1200" dirty="0" err="1"/>
+              <a:t>정보'만을</a:t>
+            </a:r>
+            <a:r>
+              <a:rPr lang="ko-KR" altLang="ko-KR" sz="1200" dirty="0"/>
+              <a:t> </a:t>
+            </a:r>
+            <a:r>
+              <a:rPr lang="ko-KR" altLang="en-US" sz="1200" dirty="0"/>
+              <a:t>주고</a:t>
+            </a:r>
+            <a:r>
+              <a:rPr lang="ko-KR" altLang="ko-KR" sz="1200" dirty="0"/>
+              <a:t>, 결과적으로 </a:t>
+            </a:r>
+            <a:r>
+              <a:rPr lang="ko-KR" altLang="ko-KR" sz="1200" dirty="0" err="1"/>
+              <a:t>AI가</a:t>
+            </a:r>
+            <a:r>
+              <a:rPr lang="ko-KR" altLang="ko-KR" sz="1200" dirty="0"/>
+              <a:t> 사용자에게 매우 정확한 최종 답변을 생성하도록 유도</a:t>
+            </a:r>
+            <a:r>
+              <a:rPr lang="ko-KR" altLang="en-US" sz="1200" dirty="0"/>
+              <a:t>）</a:t>
+            </a:r>
+            <a:endParaRPr lang="ko-KR" altLang="en-US" sz="1400" dirty="0">
               <a:latin typeface="D2Coding" panose="020B0609020101020101" pitchFamily="49" charset="-127"/>
               <a:ea typeface="D2Coding" panose="020B0609020101020101" pitchFamily="49" charset="-127"/>
             </a:endParaRPr>
           </a:p>
         </p:txBody>
       </p:sp>
+      <p:sp>
+        <p:nvSpPr>
+          <p:cNvPr id="2" name="슬라이드 번호 개체 틀 3">
+            <a:extLst>
+              <a:ext uri="{FF2B5EF4-FFF2-40B4-BE49-F238E27FC236}">
+                <a16:creationId xmlns:a16="http://schemas.microsoft.com/office/drawing/2014/main" id="{95EA3C06-A55D-1689-D119-26EBAA3AA04C}"/>
+              </a:ext>
+            </a:extLst>
+          </p:cNvPr>
+          <p:cNvSpPr txBox="1">
+            <a:spLocks/>
+          </p:cNvSpPr>
+          <p:nvPr/>
+        </p:nvSpPr>
+        <p:spPr>
+          <a:xfrm>
+            <a:off x="11162230" y="299420"/>
+            <a:ext cx="753545" cy="365125"/>
+          </a:xfrm>
+          <a:prstGeom prst="rect">
+            <a:avLst/>
+          </a:prstGeom>
+        </p:spPr>
+        <p:txBody>
+          <a:bodyPr vert="horz" lIns="91440" tIns="45720" rIns="91440" bIns="45720" rtlCol="0" anchor="ctr"/>
+          <a:lstStyle>
+            <a:defPPr rtl="0">
+              <a:defRPr lang="ko-KR"/>
+            </a:defPPr>
+            <a:lvl1pPr marL="0" algn="r" defTabSz="914400" rtl="0" eaLnBrk="1" latinLnBrk="0" hangingPunct="1">
+              <a:defRPr sz="1200" kern="1200" baseline="0">
+                <a:solidFill>
+                  <a:schemeClr val="tx1">
+                    <a:lumMod val="65000"/>
+                    <a:lumOff val="35000"/>
+                  </a:schemeClr>
+                </a:solidFill>
+                <a:latin typeface="맑은 고딕" panose="020B0503020000020004" pitchFamily="50" charset="-127"/>
+                <a:ea typeface="맑은 고딕" panose="020B0503020000020004" pitchFamily="50" charset="-127"/>
+                <a:cs typeface="+mn-cs"/>
+              </a:defRPr>
+            </a:lvl1pPr>
+            <a:lvl2pPr marL="457200" algn="l" defTabSz="914400" rtl="0" eaLnBrk="1" latinLnBrk="0" hangingPunct="1">
+              <a:defRPr sz="1800" kern="1200">
+                <a:solidFill>
+                  <a:schemeClr val="tx1"/>
+                </a:solidFill>
+                <a:latin typeface="+mn-lt"/>
+                <a:ea typeface="+mn-ea"/>
+                <a:cs typeface="+mn-cs"/>
+              </a:defRPr>
+            </a:lvl2pPr>
+            <a:lvl3pPr marL="914400" algn="l" defTabSz="914400" rtl="0" eaLnBrk="1" latinLnBrk="0" hangingPunct="1">
+              <a:defRPr sz="1800" kern="1200">
+                <a:solidFill>
+                  <a:schemeClr val="tx1"/>
+                </a:solidFill>
+                <a:latin typeface="+mn-lt"/>
+                <a:ea typeface="+mn-ea"/>
+                <a:cs typeface="+mn-cs"/>
+              </a:defRPr>
+            </a:lvl3pPr>
+            <a:lvl4pPr marL="1371600" algn="l" defTabSz="914400" rtl="0" eaLnBrk="1" latinLnBrk="0" hangingPunct="1">
+              <a:defRPr sz="1800" kern="1200">
+                <a:solidFill>
+                  <a:schemeClr val="tx1"/>
+                </a:solidFill>
+                <a:latin typeface="+mn-lt"/>
+                <a:ea typeface="+mn-ea"/>
+                <a:cs typeface="+mn-cs"/>
+              </a:defRPr>
+            </a:lvl4pPr>
+            <a:lvl5pPr marL="1828800" algn="l" defTabSz="914400" rtl="0" eaLnBrk="1" latinLnBrk="0" hangingPunct="1">
+              <a:defRPr sz="1800" kern="1200">
+                <a:solidFill>
+                  <a:schemeClr val="tx1"/>
+                </a:solidFill>
+                <a:latin typeface="+mn-lt"/>
+                <a:ea typeface="+mn-ea"/>
+                <a:cs typeface="+mn-cs"/>
+              </a:defRPr>
+            </a:lvl5pPr>
+            <a:lvl6pPr marL="2286000" algn="l" defTabSz="914400" rtl="0" eaLnBrk="1" latinLnBrk="0" hangingPunct="1">
+              <a:defRPr sz="1800" kern="1200">
+                <a:solidFill>
+                  <a:schemeClr val="tx1"/>
+                </a:solidFill>
+                <a:latin typeface="+mn-lt"/>
+                <a:ea typeface="+mn-ea"/>
+                <a:cs typeface="+mn-cs"/>
+              </a:defRPr>
+            </a:lvl6pPr>
+            <a:lvl7pPr marL="2743200" algn="l" defTabSz="914400" rtl="0" eaLnBrk="1" latinLnBrk="0" hangingPunct="1">
+              <a:defRPr sz="1800" kern="1200">
+                <a:solidFill>
+                  <a:schemeClr val="tx1"/>
+                </a:solidFill>
+                <a:latin typeface="+mn-lt"/>
+                <a:ea typeface="+mn-ea"/>
+                <a:cs typeface="+mn-cs"/>
+              </a:defRPr>
+            </a:lvl7pPr>
+            <a:lvl8pPr marL="3200400" algn="l" defTabSz="914400" rtl="0" eaLnBrk="1" latinLnBrk="0" hangingPunct="1">
+              <a:defRPr sz="1800" kern="1200">
+                <a:solidFill>
+                  <a:schemeClr val="tx1"/>
+                </a:solidFill>
+                <a:latin typeface="+mn-lt"/>
+                <a:ea typeface="+mn-ea"/>
+                <a:cs typeface="+mn-cs"/>
+              </a:defRPr>
+            </a:lvl8pPr>
+            <a:lvl9pPr marL="3657600" algn="l" defTabSz="914400" rtl="0" eaLnBrk="1" latinLnBrk="0" hangingPunct="1">
+              <a:defRPr sz="1800" kern="1200">
+                <a:solidFill>
+                  <a:schemeClr val="tx1"/>
+                </a:solidFill>
+                <a:latin typeface="+mn-lt"/>
+                <a:ea typeface="+mn-ea"/>
+                <a:cs typeface="+mn-cs"/>
+              </a:defRPr>
+            </a:lvl9pPr>
+          </a:lstStyle>
+          <a:p>
+            <a:fld id="{D57F1E4F-1CFF-5643-939E-217C01CDF565}" type="slidenum">
+              <a:rPr lang="en-US" b="1" smtClean="0"/>
+              <a:pPr/>
+              <a:t>7</a:t>
+            </a:fld>
+            <a:endParaRPr lang="en-US" b="1" dirty="0"/>
+          </a:p>
+        </p:txBody>
+      </p:sp>
+      <p:pic>
+        <p:nvPicPr>
+          <p:cNvPr id="6" name="그래픽 5" descr="배지 1 단색으로 채워진">
+            <a:extLst>
+              <a:ext uri="{FF2B5EF4-FFF2-40B4-BE49-F238E27FC236}">
+                <a16:creationId xmlns:a16="http://schemas.microsoft.com/office/drawing/2014/main" id="{42CA4610-C833-E6F0-74B2-3BB27EFA5BC2}"/>
+              </a:ext>
+            </a:extLst>
+          </p:cNvPr>
+          <p:cNvPicPr>
+            <a:picLocks noChangeAspect="1"/>
+          </p:cNvPicPr>
+          <p:nvPr/>
+        </p:nvPicPr>
+        <p:blipFill>
+          <a:blip>
+            <a:extLst>
+              <a:ext uri="{96DAC541-7B7A-43D3-8B79-37D633B846F1}">
+                <asvg:svgBlip xmlns:asvg="http://schemas.microsoft.com/office/drawing/2016/SVG/main" r:embed="rId3"/>
+              </a:ext>
+            </a:extLst>
+          </a:blip>
+          <a:stretch>
+            <a:fillRect/>
+          </a:stretch>
+        </p:blipFill>
+        <p:spPr>
+          <a:xfrm>
+            <a:off x="6533601" y="1683205"/>
+            <a:ext cx="330978" cy="330978"/>
+          </a:xfrm>
+          <a:prstGeom prst="rect">
+            <a:avLst/>
+          </a:prstGeom>
+        </p:spPr>
+      </p:pic>
+      <p:pic>
+        <p:nvPicPr>
+          <p:cNvPr id="8" name="그래픽 7" descr="배지 단색으로 채워진">
+            <a:extLst>
+              <a:ext uri="{FF2B5EF4-FFF2-40B4-BE49-F238E27FC236}">
+                <a16:creationId xmlns:a16="http://schemas.microsoft.com/office/drawing/2014/main" id="{63A70F36-023E-0956-1FBD-7AAB567CD79C}"/>
+              </a:ext>
+            </a:extLst>
+          </p:cNvPr>
+          <p:cNvPicPr>
+            <a:picLocks noChangeAspect="1"/>
+          </p:cNvPicPr>
+          <p:nvPr/>
+        </p:nvPicPr>
+        <p:blipFill>
+          <a:blip>
+            <a:extLst>
+              <a:ext uri="{96DAC541-7B7A-43D3-8B79-37D633B846F1}">
+                <asvg:svgBlip xmlns:asvg="http://schemas.microsoft.com/office/drawing/2016/SVG/main" r:embed="rId4"/>
+              </a:ext>
+            </a:extLst>
+          </a:blip>
+          <a:stretch>
+            <a:fillRect/>
+          </a:stretch>
+        </p:blipFill>
+        <p:spPr>
+          <a:xfrm>
+            <a:off x="6533601" y="2523496"/>
+            <a:ext cx="330978" cy="330978"/>
+          </a:xfrm>
+          <a:prstGeom prst="rect">
+            <a:avLst/>
+          </a:prstGeom>
+        </p:spPr>
+      </p:pic>
+      <p:pic>
+        <p:nvPicPr>
+          <p:cNvPr id="11" name="그래픽 10" descr="배지 3 단색으로 채워진">
+            <a:extLst>
+              <a:ext uri="{FF2B5EF4-FFF2-40B4-BE49-F238E27FC236}">
+                <a16:creationId xmlns:a16="http://schemas.microsoft.com/office/drawing/2014/main" id="{84000749-85A6-DBC2-3CC4-EDC4139E5225}"/>
+              </a:ext>
+            </a:extLst>
+          </p:cNvPr>
+          <p:cNvPicPr>
+            <a:picLocks noChangeAspect="1"/>
+          </p:cNvPicPr>
+          <p:nvPr/>
+        </p:nvPicPr>
+        <p:blipFill>
+          <a:blip>
+            <a:extLst>
+              <a:ext uri="{96DAC541-7B7A-43D3-8B79-37D633B846F1}">
+                <asvg:svgBlip xmlns:asvg="http://schemas.microsoft.com/office/drawing/2016/SVG/main" r:embed="rId5"/>
+              </a:ext>
+            </a:extLst>
+          </a:blip>
+          <a:stretch>
+            <a:fillRect/>
+          </a:stretch>
+        </p:blipFill>
+        <p:spPr>
+          <a:xfrm>
+            <a:off x="6533601" y="3395039"/>
+            <a:ext cx="330978" cy="330978"/>
+          </a:xfrm>
+          <a:prstGeom prst="rect">
+            <a:avLst/>
+          </a:prstGeom>
+        </p:spPr>
+      </p:pic>
+      <p:pic>
+        <p:nvPicPr>
+          <p:cNvPr id="14" name="그래픽 13" descr="배지 4 단색으로 채워진">
+            <a:extLst>
+              <a:ext uri="{FF2B5EF4-FFF2-40B4-BE49-F238E27FC236}">
+                <a16:creationId xmlns:a16="http://schemas.microsoft.com/office/drawing/2014/main" id="{F0927B40-CD31-3AE5-612C-43478CE80C35}"/>
+              </a:ext>
+            </a:extLst>
+          </p:cNvPr>
+          <p:cNvPicPr>
+            <a:picLocks noChangeAspect="1"/>
+          </p:cNvPicPr>
+          <p:nvPr/>
+        </p:nvPicPr>
+        <p:blipFill>
+          <a:blip>
+            <a:extLst>
+              <a:ext uri="{96DAC541-7B7A-43D3-8B79-37D633B846F1}">
+                <asvg:svgBlip xmlns:asvg="http://schemas.microsoft.com/office/drawing/2016/SVG/main" r:embed="rId6"/>
+              </a:ext>
+            </a:extLst>
+          </a:blip>
+          <a:stretch>
+            <a:fillRect/>
+          </a:stretch>
+        </p:blipFill>
+        <p:spPr>
+          <a:xfrm>
+            <a:off x="6533601" y="4231433"/>
+            <a:ext cx="330978" cy="330978"/>
+          </a:xfrm>
+          <a:prstGeom prst="rect">
+            <a:avLst/>
+          </a:prstGeom>
+        </p:spPr>
+      </p:pic>
+      <p:pic>
+        <p:nvPicPr>
+          <p:cNvPr id="16" name="그래픽 15" descr="배지 5 단색으로 채워진">
+            <a:extLst>
+              <a:ext uri="{FF2B5EF4-FFF2-40B4-BE49-F238E27FC236}">
+                <a16:creationId xmlns:a16="http://schemas.microsoft.com/office/drawing/2014/main" id="{546E2057-A116-5FD2-E1ED-982B353C76D1}"/>
+              </a:ext>
+            </a:extLst>
+          </p:cNvPr>
+          <p:cNvPicPr>
+            <a:picLocks noChangeAspect="1"/>
+          </p:cNvPicPr>
+          <p:nvPr/>
+        </p:nvPicPr>
+        <p:blipFill>
+          <a:blip>
+            <a:extLst>
+              <a:ext uri="{96DAC541-7B7A-43D3-8B79-37D633B846F1}">
+                <asvg:svgBlip xmlns:asvg="http://schemas.microsoft.com/office/drawing/2016/SVG/main" r:embed="rId7"/>
+              </a:ext>
+            </a:extLst>
+          </a:blip>
+          <a:stretch>
+            <a:fillRect/>
+          </a:stretch>
+        </p:blipFill>
+        <p:spPr>
+          <a:xfrm>
+            <a:off x="6533601" y="4880883"/>
+            <a:ext cx="330978" cy="330978"/>
+          </a:xfrm>
+          <a:prstGeom prst="rect">
+            <a:avLst/>
+          </a:prstGeom>
+        </p:spPr>
+      </p:pic>
     </p:spTree>
     <p:extLst>
       <p:ext uri="{BB962C8B-B14F-4D97-AF65-F5344CB8AC3E}">
@@ -13590,41 +15476,6 @@
       </p:sp>
       <p:sp>
         <p:nvSpPr>
-          <p:cNvPr id="4" name="슬라이드 번호 개체 틀 3">
-            <a:extLst>
-              <a:ext uri="{FF2B5EF4-FFF2-40B4-BE49-F238E27FC236}">
-                <a16:creationId xmlns:a16="http://schemas.microsoft.com/office/drawing/2014/main" id="{A66ACDC4-8095-55D2-F009-9C85960D8460}"/>
-              </a:ext>
-            </a:extLst>
-          </p:cNvPr>
-          <p:cNvSpPr>
-            <a:spLocks noGrp="1"/>
-          </p:cNvSpPr>
-          <p:nvPr>
-            <p:ph type="sldNum" sz="quarter" idx="12"/>
-          </p:nvPr>
-        </p:nvSpPr>
-        <p:spPr>
-          <a:xfrm>
-            <a:off x="10514011" y="6036261"/>
-            <a:ext cx="753545" cy="365125"/>
-          </a:xfrm>
-        </p:spPr>
-        <p:txBody>
-          <a:bodyPr/>
-          <a:lstStyle/>
-          <a:p>
-            <a:fld id="{D57F1E4F-1CFF-5643-939E-217C01CDF565}" type="slidenum">
-              <a:rPr lang="en-US" smtClean="0"/>
-              <a:pPr/>
-              <a:t>8</a:t>
-            </a:fld>
-            <a:endParaRPr lang="en-US" dirty="0"/>
-          </a:p>
-        </p:txBody>
-      </p:sp>
-      <p:sp>
-        <p:nvSpPr>
           <p:cNvPr id="3" name="제목 1">
             <a:extLst>
               <a:ext uri="{FF2B5EF4-FFF2-40B4-BE49-F238E27FC236}">
@@ -13970,41 +15821,6 @@
       </p:grpSpPr>
       <p:sp>
         <p:nvSpPr>
-          <p:cNvPr id="4" name="슬라이드 번호 개체 틀 3">
-            <a:extLst>
-              <a:ext uri="{FF2B5EF4-FFF2-40B4-BE49-F238E27FC236}">
-                <a16:creationId xmlns:a16="http://schemas.microsoft.com/office/drawing/2014/main" id="{D052AD99-116A-1D7B-57C9-C622DBDBF430}"/>
-              </a:ext>
-            </a:extLst>
-          </p:cNvPr>
-          <p:cNvSpPr>
-            <a:spLocks noGrp="1"/>
-          </p:cNvSpPr>
-          <p:nvPr>
-            <p:ph type="sldNum" sz="quarter" idx="12"/>
-          </p:nvPr>
-        </p:nvSpPr>
-        <p:spPr>
-          <a:xfrm>
-            <a:off x="10514011" y="6036261"/>
-            <a:ext cx="753545" cy="365125"/>
-          </a:xfrm>
-        </p:spPr>
-        <p:txBody>
-          <a:bodyPr/>
-          <a:lstStyle/>
-          <a:p>
-            <a:fld id="{D57F1E4F-1CFF-5643-939E-217C01CDF565}" type="slidenum">
-              <a:rPr lang="en-US" smtClean="0"/>
-              <a:pPr/>
-              <a:t>9</a:t>
-            </a:fld>
-            <a:endParaRPr lang="en-US" dirty="0"/>
-          </a:p>
-        </p:txBody>
-      </p:sp>
-      <p:sp>
-        <p:nvSpPr>
           <p:cNvPr id="3" name="제목 1">
             <a:extLst>
               <a:ext uri="{FF2B5EF4-FFF2-40B4-BE49-F238E27FC236}">
@@ -14052,19 +15868,6 @@
           </a:lstStyle>
           <a:p>
             <a:pPr algn="l"/>
-            <a:r>
-              <a:rPr lang="en-US" altLang="ko-KR" sz="2800" cap="none" dirty="0">
-                <a:solidFill>
-                  <a:schemeClr val="bg2">
-                    <a:lumMod val="25000"/>
-                  </a:schemeClr>
-                </a:solidFill>
-                <a:latin typeface="D2Coding" panose="020B0609020101020101" pitchFamily="49" charset="-127"/>
-                <a:ea typeface="D2Coding" panose="020B0609020101020101" pitchFamily="49" charset="-127"/>
-                <a:cs typeface="Segoe UI Light" panose="020B0502040204020203" pitchFamily="34" charset="0"/>
-              </a:rPr>
-              <a:t>Goals</a:t>
-            </a:r>
             <a:endParaRPr lang="ko-KR" altLang="en-US" sz="2800" cap="none" dirty="0">
               <a:solidFill>
                 <a:schemeClr val="bg2">
@@ -14139,8 +15942,8 @@
         </p:nvSpPr>
         <p:spPr>
           <a:xfrm>
-            <a:off x="5791200" y="2333489"/>
-            <a:ext cx="5543550" cy="2617704"/>
+            <a:off x="5664675" y="2366012"/>
+            <a:ext cx="5874327" cy="2978379"/>
           </a:xfrm>
           <a:prstGeom prst="rect">
             <a:avLst/>
@@ -14153,34 +15956,36 @@
           </a:bodyPr>
           <a:lstStyle/>
           <a:p>
-            <a:pPr>
+            <a:pPr marL="285750" indent="-285750">
               <a:lnSpc>
                 <a:spcPct val="200000"/>
               </a:lnSpc>
-            </a:pPr>
-            <a:r>
-              <a:rPr lang="ko-KR" altLang="en-US" sz="1400" dirty="0">
+              <a:buFont typeface="Wingdings" panose="05000000000000000000" pitchFamily="2" charset="2"/>
+              <a:buChar char="v"/>
+            </a:pPr>
+            <a:r>
+              <a:rPr lang="ko-KR" altLang="en-US" sz="1600" dirty="0">
                 <a:latin typeface="D2Coding" panose="020B0609020101020101" pitchFamily="49" charset="-127"/>
                 <a:ea typeface="D2Coding" panose="020B0609020101020101" pitchFamily="49" charset="-127"/>
               </a:rPr>
               <a:t>질문을 바꾸면</a:t>
             </a:r>
             <a:r>
-              <a:rPr lang="en-US" altLang="ko-KR" sz="1400" dirty="0">
+              <a:rPr lang="en-US" altLang="ko-KR" sz="1600" dirty="0">
                 <a:latin typeface="D2Coding" panose="020B0609020101020101" pitchFamily="49" charset="-127"/>
                 <a:ea typeface="D2Coding" panose="020B0609020101020101" pitchFamily="49" charset="-127"/>
               </a:rPr>
               <a:t>, </a:t>
             </a:r>
             <a:r>
-              <a:rPr lang="ko-KR" altLang="en-US" sz="1400" dirty="0">
+              <a:rPr lang="ko-KR" altLang="en-US" sz="1600" dirty="0">
                 <a:latin typeface="D2Coding" panose="020B0609020101020101" pitchFamily="49" charset="-127"/>
                 <a:ea typeface="D2Coding" panose="020B0609020101020101" pitchFamily="49" charset="-127"/>
               </a:rPr>
               <a:t>보이지 않던 정답이 보인다</a:t>
             </a:r>
             <a:r>
-              <a:rPr lang="en-US" altLang="ko-KR" sz="1400" dirty="0">
+              <a:rPr lang="en-US" altLang="ko-KR" sz="1600" dirty="0">
                 <a:latin typeface="D2Coding" panose="020B0609020101020101" pitchFamily="49" charset="-127"/>
                 <a:ea typeface="D2Coding" panose="020B0609020101020101" pitchFamily="49" charset="-127"/>
               </a:rPr>
@@ -14188,45 +15993,49 @@
             </a:r>
           </a:p>
           <a:p>
-            <a:pPr>
+            <a:pPr marL="285750" indent="-285750">
               <a:lnSpc>
                 <a:spcPct val="200000"/>
               </a:lnSpc>
-            </a:pPr>
-            <a:endParaRPr lang="en-US" altLang="ko-KR" sz="1400" dirty="0">
+              <a:buFont typeface="Wingdings" panose="05000000000000000000" pitchFamily="2" charset="2"/>
+              <a:buChar char="v"/>
+            </a:pPr>
+            <a:endParaRPr lang="en-US" altLang="ko-KR" sz="1600" dirty="0">
               <a:latin typeface="D2Coding" panose="020B0609020101020101" pitchFamily="49" charset="-127"/>
               <a:ea typeface="D2Coding" panose="020B0609020101020101" pitchFamily="49" charset="-127"/>
             </a:endParaRPr>
           </a:p>
           <a:p>
-            <a:pPr>
+            <a:pPr marL="285750" indent="-285750">
               <a:lnSpc>
                 <a:spcPct val="200000"/>
               </a:lnSpc>
-            </a:pPr>
-            <a:r>
-              <a:rPr lang="ko-KR" altLang="en-US" sz="1400" dirty="0">
+              <a:buFont typeface="Wingdings" panose="05000000000000000000" pitchFamily="2" charset="2"/>
+              <a:buChar char="v"/>
+            </a:pPr>
+            <a:r>
+              <a:rPr lang="ko-KR" altLang="en-US" sz="1600" dirty="0">
                 <a:latin typeface="D2Coding" panose="020B0609020101020101" pitchFamily="49" charset="-127"/>
                 <a:ea typeface="D2Coding" panose="020B0609020101020101" pitchFamily="49" charset="-127"/>
               </a:rPr>
               <a:t>도서관에 모인 여러 사람이 저마다의 시선으로 책을 읽듯</a:t>
             </a:r>
             <a:r>
-              <a:rPr lang="en-US" altLang="ko-KR" sz="1400" dirty="0">
+              <a:rPr lang="en-US" altLang="ko-KR" sz="1600" dirty="0">
                 <a:latin typeface="D2Coding" panose="020B0609020101020101" pitchFamily="49" charset="-127"/>
                 <a:ea typeface="D2Coding" panose="020B0609020101020101" pitchFamily="49" charset="-127"/>
               </a:rPr>
               <a:t>, </a:t>
             </a:r>
             <a:r>
-              <a:rPr lang="ko-KR" altLang="en-US" sz="1400" dirty="0">
+              <a:rPr lang="ko-KR" altLang="en-US" sz="1600" dirty="0">
                 <a:latin typeface="D2Coding" panose="020B0609020101020101" pitchFamily="49" charset="-127"/>
                 <a:ea typeface="D2Coding" panose="020B0609020101020101" pitchFamily="49" charset="-127"/>
               </a:rPr>
               <a:t>하나의 질문을 다양한 관점에서 질문하라</a:t>
             </a:r>
             <a:r>
-              <a:rPr lang="en-US" altLang="ko-KR" sz="1400" dirty="0">
+              <a:rPr lang="en-US" altLang="ko-KR" sz="1600" dirty="0">
                 <a:latin typeface="D2Coding" panose="020B0609020101020101" pitchFamily="49" charset="-127"/>
                 <a:ea typeface="D2Coding" panose="020B0609020101020101" pitchFamily="49" charset="-127"/>
               </a:rPr>
@@ -14234,36 +16043,173 @@
             </a:r>
           </a:p>
           <a:p>
-            <a:pPr>
+            <a:pPr marL="285750" indent="-285750">
               <a:lnSpc>
                 <a:spcPct val="200000"/>
               </a:lnSpc>
-            </a:pPr>
-            <a:endParaRPr lang="en-US" altLang="ko-KR" sz="1400" dirty="0">
+              <a:buFont typeface="Wingdings" panose="05000000000000000000" pitchFamily="2" charset="2"/>
+              <a:buChar char="v"/>
+            </a:pPr>
+            <a:endParaRPr lang="en-US" altLang="ko-KR" sz="1600" dirty="0">
               <a:latin typeface="D2Coding" panose="020B0609020101020101" pitchFamily="49" charset="-127"/>
               <a:ea typeface="D2Coding" panose="020B0609020101020101" pitchFamily="49" charset="-127"/>
             </a:endParaRPr>
           </a:p>
           <a:p>
-            <a:pPr>
+            <a:pPr marL="285750" indent="-285750">
               <a:lnSpc>
                 <a:spcPct val="200000"/>
               </a:lnSpc>
-            </a:pPr>
-            <a:r>
-              <a:rPr lang="ko-KR" altLang="en-US" sz="1400" dirty="0">
+              <a:buFont typeface="Wingdings" panose="05000000000000000000" pitchFamily="2" charset="2"/>
+              <a:buChar char="v"/>
+            </a:pPr>
+            <a:r>
+              <a:rPr lang="ko-KR" altLang="en-US" sz="1600" dirty="0">
                 <a:latin typeface="D2Coding" panose="020B0609020101020101" pitchFamily="49" charset="-127"/>
                 <a:ea typeface="D2Coding" panose="020B0609020101020101" pitchFamily="49" charset="-127"/>
               </a:rPr>
               <a:t>아는 만큼 질문하니 배우자 </a:t>
             </a:r>
             <a:r>
-              <a:rPr lang="en-US" altLang="ko-KR" sz="1400" dirty="0">
+              <a:rPr lang="en-US" altLang="ko-KR" sz="1600" dirty="0">
                 <a:latin typeface="D2Coding" panose="020B0609020101020101" pitchFamily="49" charset="-127"/>
                 <a:ea typeface="D2Coding" panose="020B0609020101020101" pitchFamily="49" charset="-127"/>
               </a:rPr>
               <a:t>!</a:t>
             </a:r>
+          </a:p>
+        </p:txBody>
+      </p:sp>
+      <p:sp>
+        <p:nvSpPr>
+          <p:cNvPr id="2" name="슬라이드 번호 개체 틀 3">
+            <a:extLst>
+              <a:ext uri="{FF2B5EF4-FFF2-40B4-BE49-F238E27FC236}">
+                <a16:creationId xmlns:a16="http://schemas.microsoft.com/office/drawing/2014/main" id="{7D45A09E-F796-A1A3-C410-FCAFCC020F5D}"/>
+              </a:ext>
+            </a:extLst>
+          </p:cNvPr>
+          <p:cNvSpPr txBox="1">
+            <a:spLocks/>
+          </p:cNvSpPr>
+          <p:nvPr/>
+        </p:nvSpPr>
+        <p:spPr>
+          <a:xfrm>
+            <a:off x="11162230" y="299420"/>
+            <a:ext cx="753545" cy="365125"/>
+          </a:xfrm>
+          <a:prstGeom prst="rect">
+            <a:avLst/>
+          </a:prstGeom>
+        </p:spPr>
+        <p:txBody>
+          <a:bodyPr vert="horz" lIns="91440" tIns="45720" rIns="91440" bIns="45720" rtlCol="0" anchor="ctr"/>
+          <a:lstStyle>
+            <a:defPPr rtl="0">
+              <a:defRPr lang="ko-KR"/>
+            </a:defPPr>
+            <a:lvl1pPr marL="0" algn="r" defTabSz="914400" rtl="0" eaLnBrk="1" latinLnBrk="0" hangingPunct="1">
+              <a:defRPr sz="1200" kern="1200" baseline="0">
+                <a:solidFill>
+                  <a:schemeClr val="tx1">
+                    <a:lumMod val="65000"/>
+                    <a:lumOff val="35000"/>
+                  </a:schemeClr>
+                </a:solidFill>
+                <a:latin typeface="맑은 고딕" panose="020B0503020000020004" pitchFamily="50" charset="-127"/>
+                <a:ea typeface="맑은 고딕" panose="020B0503020000020004" pitchFamily="50" charset="-127"/>
+                <a:cs typeface="+mn-cs"/>
+              </a:defRPr>
+            </a:lvl1pPr>
+            <a:lvl2pPr marL="457200" algn="l" defTabSz="914400" rtl="0" eaLnBrk="1" latinLnBrk="0" hangingPunct="1">
+              <a:defRPr sz="1800" kern="1200">
+                <a:solidFill>
+                  <a:schemeClr val="tx1"/>
+                </a:solidFill>
+                <a:latin typeface="+mn-lt"/>
+                <a:ea typeface="+mn-ea"/>
+                <a:cs typeface="+mn-cs"/>
+              </a:defRPr>
+            </a:lvl2pPr>
+            <a:lvl3pPr marL="914400" algn="l" defTabSz="914400" rtl="0" eaLnBrk="1" latinLnBrk="0" hangingPunct="1">
+              <a:defRPr sz="1800" kern="1200">
+                <a:solidFill>
+                  <a:schemeClr val="tx1"/>
+                </a:solidFill>
+                <a:latin typeface="+mn-lt"/>
+                <a:ea typeface="+mn-ea"/>
+                <a:cs typeface="+mn-cs"/>
+              </a:defRPr>
+            </a:lvl3pPr>
+            <a:lvl4pPr marL="1371600" algn="l" defTabSz="914400" rtl="0" eaLnBrk="1" latinLnBrk="0" hangingPunct="1">
+              <a:defRPr sz="1800" kern="1200">
+                <a:solidFill>
+                  <a:schemeClr val="tx1"/>
+                </a:solidFill>
+                <a:latin typeface="+mn-lt"/>
+                <a:ea typeface="+mn-ea"/>
+                <a:cs typeface="+mn-cs"/>
+              </a:defRPr>
+            </a:lvl4pPr>
+            <a:lvl5pPr marL="1828800" algn="l" defTabSz="914400" rtl="0" eaLnBrk="1" latinLnBrk="0" hangingPunct="1">
+              <a:defRPr sz="1800" kern="1200">
+                <a:solidFill>
+                  <a:schemeClr val="tx1"/>
+                </a:solidFill>
+                <a:latin typeface="+mn-lt"/>
+                <a:ea typeface="+mn-ea"/>
+                <a:cs typeface="+mn-cs"/>
+              </a:defRPr>
+            </a:lvl5pPr>
+            <a:lvl6pPr marL="2286000" algn="l" defTabSz="914400" rtl="0" eaLnBrk="1" latinLnBrk="0" hangingPunct="1">
+              <a:defRPr sz="1800" kern="1200">
+                <a:solidFill>
+                  <a:schemeClr val="tx1"/>
+                </a:solidFill>
+                <a:latin typeface="+mn-lt"/>
+                <a:ea typeface="+mn-ea"/>
+                <a:cs typeface="+mn-cs"/>
+              </a:defRPr>
+            </a:lvl6pPr>
+            <a:lvl7pPr marL="2743200" algn="l" defTabSz="914400" rtl="0" eaLnBrk="1" latinLnBrk="0" hangingPunct="1">
+              <a:defRPr sz="1800" kern="1200">
+                <a:solidFill>
+                  <a:schemeClr val="tx1"/>
+                </a:solidFill>
+                <a:latin typeface="+mn-lt"/>
+                <a:ea typeface="+mn-ea"/>
+                <a:cs typeface="+mn-cs"/>
+              </a:defRPr>
+            </a:lvl7pPr>
+            <a:lvl8pPr marL="3200400" algn="l" defTabSz="914400" rtl="0" eaLnBrk="1" latinLnBrk="0" hangingPunct="1">
+              <a:defRPr sz="1800" kern="1200">
+                <a:solidFill>
+                  <a:schemeClr val="tx1"/>
+                </a:solidFill>
+                <a:latin typeface="+mn-lt"/>
+                <a:ea typeface="+mn-ea"/>
+                <a:cs typeface="+mn-cs"/>
+              </a:defRPr>
+            </a:lvl8pPr>
+            <a:lvl9pPr marL="3657600" algn="l" defTabSz="914400" rtl="0" eaLnBrk="1" latinLnBrk="0" hangingPunct="1">
+              <a:defRPr sz="1800" kern="1200">
+                <a:solidFill>
+                  <a:schemeClr val="tx1"/>
+                </a:solidFill>
+                <a:latin typeface="+mn-lt"/>
+                <a:ea typeface="+mn-ea"/>
+                <a:cs typeface="+mn-cs"/>
+              </a:defRPr>
+            </a:lvl9pPr>
+          </a:lstStyle>
+          <a:p>
+            <a:fld id="{D57F1E4F-1CFF-5643-939E-217C01CDF565}" type="slidenum">
+              <a:rPr lang="en-US" b="1" smtClean="0"/>
+              <a:pPr/>
+              <a:t>9</a:t>
+            </a:fld>
+            <a:endParaRPr lang="en-US" b="1" dirty="0"/>
           </a:p>
         </p:txBody>
       </p:sp>
